--- a/pertemuan_02_dasar_dart/slide/PERTEMUAN_02_Dasar_Dart.pptx
+++ b/pertemuan_02_dasar_dart/slide/PERTEMUAN_02_Dasar_Dart.pptx
@@ -134,7 +134,7 @@
   <p:extLst>
     <p:ext uri="{521415D9-36F7-43E2-AB2F-B90AF26B5E84}">
       <p14:sectionLst xmlns:p14="http://schemas.microsoft.com/office/powerpoint/2010/main">
-        <p14:section name="Pembuka" id="{d2d6c53c-9aff-0ece-1906-59c7c57004a7}">
+        <p14:section name="Pembuka" id="{fab29b7c-9312-de6d-5822-9fd4d4e00728}">
           <p14:sldIdLst>
             <p14:sldId id="256"/>
             <p14:sldId id="257"/>
@@ -143,7 +143,7 @@
             <p14:sldId id="260"/>
           </p14:sldIdLst>
         </p14:section>
-        <p14:section name="Menyimpan Data" id="{84c93fef-349f-6b2c-99fe-a7069ae067a7}">
+        <p14:section name="Menyimpan Data" id="{5ee5e190-54a1-f490-d354-c6b2d1162b6f}">
           <p14:sldIdLst>
             <p14:sldId id="261"/>
             <p14:sldId id="262"/>
@@ -152,14 +152,14 @@
             <p14:sldId id="265"/>
           </p14:sldIdLst>
         </p14:section>
-        <p14:section name="Null Safety: Aman dari Kotak Kosong" id="{10fd0b61-d0b1-078e-a1a3-e91e4418e2b8}">
+        <p14:section name="Null Safety: Aman dari Kotak Kosong" id="{0073e60b-b566-a65d-9687-d14272178653}">
           <p14:sldIdLst>
             <p14:sldId id="266"/>
             <p14:sldId id="267"/>
             <p14:sldId id="268"/>
           </p14:sldIdLst>
         </p14:section>
-        <p14:section name="Mengolah Data &amp; Mengatur Alur" id="{46200f72-b1e8-4883-6d4e-516c6b56b665}">
+        <p14:section name="Mengolah Data &amp; Mengatur Alur" id="{0fc1bb4f-304c-1414-906a-12d939f4011f}">
           <p14:sldIdLst>
             <p14:sldId id="269"/>
             <p14:sldId id="270"/>
@@ -167,14 +167,14 @@
             <p14:sldId id="272"/>
           </p14:sldIdLst>
         </p14:section>
-        <p14:section name="Fungsi: Membungkus Logika" id="{fbc0cf7f-832c-80c8-65c6-21d2221731b0}">
+        <p14:section name="Fungsi: Membungkus Logika" id="{0f00248e-1fcd-a385-ddfc-4352aab1eb5e}">
           <p14:sldIdLst>
             <p14:sldId id="273"/>
             <p14:sldId id="274"/>
             <p14:sldId id="275"/>
           </p14:sldIdLst>
         </p14:section>
-        <p14:section name="Koleksi: Mengelola Banyak Data" id="{515590eb-1a4a-49d0-6274-69ad88c459bd}">
+        <p14:section name="Koleksi: Mengelola Banyak Data" id="{c38b83a8-9654-5764-f0aa-daa70b61375e}">
           <p14:sldIdLst>
             <p14:sldId id="276"/>
             <p14:sldId id="277"/>
@@ -4821,7 +4821,7 @@
       <p:sp>
         <p:nvSpPr>
           <p:cNvPr id="5" name="tombol tautan">
-            <a:hlinkClick r:id="rId1" tooltip="https://github.com/antonprafanto/mobile2026/blob/main/pertemuan_02_dasar_dart/kode/04_final_dan_const.dart"/>
+            <a:hlinkClick r:id="rId1" tooltip="https://github.com/antonprafanto/mobile2026/blob/main/pertemuan_02_dasar_dart/kode/contoh_04_final_dan_const.dart"/>
           </p:cNvPr>
           <p:cNvSpPr txBox="1"/>
           <p:nvPr/>
@@ -4854,7 +4854,7 @@
                   <a:schemeClr val="bg1"/>
                 </a:solidFill>
               </a:rPr>
-              <a:t>Buka kode lengkap di GitHub  ·  04_final_dan_const.dart</a:t>
+              <a:t>Buka kode lengkap di GitHub  ·  contoh_04_final_dan_const.dart</a:t>
             </a:r>
             <a:endParaRPr lang="en-US" sz="1300" dirty="0"/>
           </a:p>
@@ -4863,7 +4863,7 @@
       <p:pic>
         <p:nvPicPr>
           <p:cNvPr id="6" name="Image 0" descr="ikon tautan">
-            <a:hlinkClick r:id="rId3" tooltip="https://github.com/antonprafanto/mobile2026/blob/main/pertemuan_02_dasar_dart/kode/04_final_dan_const.dart"/>
+            <a:hlinkClick r:id="rId3" tooltip="https://github.com/antonprafanto/mobile2026/blob/main/pertemuan_02_dasar_dart/kode/contoh_04_final_dan_const.dart"/>
           </p:cNvPr>
           <p:cNvPicPr>
             <a:picLocks noChangeAspect="1"/>
@@ -7946,7 +7946,7 @@
       <p:sp>
         <p:nvSpPr>
           <p:cNvPr id="5" name="tombol tautan">
-            <a:hlinkClick r:id="rId1" tooltip="https://github.com/antonprafanto/mobile2026/blob/main/pertemuan_02_dasar_dart/kode/05_null_safety.dart"/>
+            <a:hlinkClick r:id="rId1" tooltip="https://github.com/antonprafanto/mobile2026/blob/main/pertemuan_02_dasar_dart/kode/contoh_05_null_safety.dart"/>
           </p:cNvPr>
           <p:cNvSpPr txBox="1"/>
           <p:nvPr/>
@@ -7979,7 +7979,7 @@
                   <a:schemeClr val="bg1"/>
                 </a:solidFill>
               </a:rPr>
-              <a:t>Buka kode lengkap di GitHub  ·  05_null_safety.dart</a:t>
+              <a:t>Buka kode lengkap di GitHub  ·  contoh_05_null_safety.dart</a:t>
             </a:r>
             <a:endParaRPr lang="en-US" sz="1300" dirty="0"/>
           </a:p>
@@ -7988,7 +7988,7 @@
       <p:pic>
         <p:nvPicPr>
           <p:cNvPr id="6" name="Image 0" descr="ikon tautan">
-            <a:hlinkClick r:id="rId3" tooltip="https://github.com/antonprafanto/mobile2026/blob/main/pertemuan_02_dasar_dart/kode/05_null_safety.dart"/>
+            <a:hlinkClick r:id="rId3" tooltip="https://github.com/antonprafanto/mobile2026/blob/main/pertemuan_02_dasar_dart/kode/contoh_05_null_safety.dart"/>
           </p:cNvPr>
           <p:cNvPicPr>
             <a:picLocks noChangeAspect="1"/>
@@ -10356,7 +10356,7 @@
       <p:sp>
         <p:nvSpPr>
           <p:cNvPr id="5" name="tombol tautan">
-            <a:hlinkClick r:id="rId1" tooltip="https://github.com/antonprafanto/mobile2026/blob/main/pertemuan_02_dasar_dart/kode/06_operator.dart"/>
+            <a:hlinkClick r:id="rId1" tooltip="https://github.com/antonprafanto/mobile2026/blob/main/pertemuan_02_dasar_dart/kode/contoh_06_operator.dart"/>
           </p:cNvPr>
           <p:cNvSpPr txBox="1"/>
           <p:nvPr/>
@@ -10389,7 +10389,7 @@
                   <a:schemeClr val="bg1"/>
                 </a:solidFill>
               </a:rPr>
-              <a:t>Buka kode lengkap di GitHub  ·  06_operator.dart</a:t>
+              <a:t>Buka kode lengkap di GitHub  ·  contoh_06_operator.dart</a:t>
             </a:r>
             <a:endParaRPr lang="en-US" sz="1300" dirty="0"/>
           </a:p>
@@ -10398,7 +10398,7 @@
       <p:pic>
         <p:nvPicPr>
           <p:cNvPr id="6" name="Image 0" descr="ikon tautan">
-            <a:hlinkClick r:id="rId3" tooltip="https://github.com/antonprafanto/mobile2026/blob/main/pertemuan_02_dasar_dart/kode/06_operator.dart"/>
+            <a:hlinkClick r:id="rId3" tooltip="https://github.com/antonprafanto/mobile2026/blob/main/pertemuan_02_dasar_dart/kode/contoh_06_operator.dart"/>
           </p:cNvPr>
           <p:cNvPicPr>
             <a:picLocks noChangeAspect="1"/>
@@ -11385,7 +11385,7 @@
       <p:sp>
         <p:nvSpPr>
           <p:cNvPr id="5" name="tombol tautan">
-            <a:hlinkClick r:id="rId1" tooltip="https://github.com/antonprafanto/mobile2026/blob/main/pertemuan_02_dasar_dart/kode/07_percabangan.dart"/>
+            <a:hlinkClick r:id="rId1" tooltip="https://github.com/antonprafanto/mobile2026/blob/main/pertemuan_02_dasar_dart/kode/contoh_07_percabangan.dart"/>
           </p:cNvPr>
           <p:cNvSpPr txBox="1"/>
           <p:nvPr/>
@@ -11418,7 +11418,7 @@
                   <a:schemeClr val="bg1"/>
                 </a:solidFill>
               </a:rPr>
-              <a:t>Buka kode lengkap di GitHub  ·  07_percabangan.dart</a:t>
+              <a:t>Buka kode lengkap di GitHub  ·  contoh_07_percabangan.dart</a:t>
             </a:r>
             <a:endParaRPr lang="en-US" sz="1300" dirty="0"/>
           </a:p>
@@ -11427,7 +11427,7 @@
       <p:pic>
         <p:nvPicPr>
           <p:cNvPr id="6" name="Image 0" descr="ikon tautan">
-            <a:hlinkClick r:id="rId3" tooltip="https://github.com/antonprafanto/mobile2026/blob/main/pertemuan_02_dasar_dart/kode/07_percabangan.dart"/>
+            <a:hlinkClick r:id="rId3" tooltip="https://github.com/antonprafanto/mobile2026/blob/main/pertemuan_02_dasar_dart/kode/contoh_07_percabangan.dart"/>
           </p:cNvPr>
           <p:cNvPicPr>
             <a:picLocks noChangeAspect="1"/>
@@ -12951,7 +12951,7 @@
       <p:sp>
         <p:nvSpPr>
           <p:cNvPr id="28" name="tombol tautan">
-            <a:hlinkClick r:id="rId5" tooltip="https://github.com/antonprafanto/mobile2026/blob/main/pertemuan_02_dasar_dart/kode/08_perulangan.dart"/>
+            <a:hlinkClick r:id="rId5" tooltip="https://github.com/antonprafanto/mobile2026/blob/main/pertemuan_02_dasar_dart/kode/contoh_08_perulangan.dart"/>
           </p:cNvPr>
           <p:cNvSpPr txBox="1"/>
           <p:nvPr/>
@@ -12984,7 +12984,7 @@
                   <a:schemeClr val="bg1"/>
                 </a:solidFill>
               </a:rPr>
-              <a:t>Buka kode lengkap di GitHub  ·  08_perulangan.dart</a:t>
+              <a:t>Buka kode lengkap di GitHub  ·  contoh_08_perulangan.dart</a:t>
             </a:r>
             <a:endParaRPr lang="en-US" sz="1300" dirty="0"/>
           </a:p>
@@ -12993,7 +12993,7 @@
       <p:pic>
         <p:nvPicPr>
           <p:cNvPr id="29" name="Image 4" descr="ikon tautan">
-            <a:hlinkClick r:id="rId7" tooltip="https://github.com/antonprafanto/mobile2026/blob/main/pertemuan_02_dasar_dart/kode/08_perulangan.dart"/>
+            <a:hlinkClick r:id="rId7" tooltip="https://github.com/antonprafanto/mobile2026/blob/main/pertemuan_02_dasar_dart/kode/contoh_08_perulangan.dart"/>
           </p:cNvPr>
           <p:cNvPicPr>
             <a:picLocks noChangeAspect="1"/>
@@ -13889,7 +13889,7 @@
       <p:sp>
         <p:nvSpPr>
           <p:cNvPr id="5" name="tombol tautan">
-            <a:hlinkClick r:id="rId1" tooltip="https://github.com/antonprafanto/mobile2026/blob/main/pertemuan_02_dasar_dart/kode/09_fungsi_dasar.dart"/>
+            <a:hlinkClick r:id="rId1" tooltip="https://github.com/antonprafanto/mobile2026/blob/main/pertemuan_02_dasar_dart/kode/contoh_09_fungsi_dasar.dart"/>
           </p:cNvPr>
           <p:cNvSpPr txBox="1"/>
           <p:nvPr/>
@@ -13922,7 +13922,7 @@
                   <a:schemeClr val="bg1"/>
                 </a:solidFill>
               </a:rPr>
-              <a:t>Buka kode lengkap di GitHub  ·  09_fungsi_dasar.dart</a:t>
+              <a:t>Buka kode lengkap di GitHub  ·  contoh_09_fungsi_dasar.dart</a:t>
             </a:r>
             <a:endParaRPr lang="en-US" sz="1300" dirty="0"/>
           </a:p>
@@ -13931,7 +13931,7 @@
       <p:pic>
         <p:nvPicPr>
           <p:cNvPr id="6" name="Image 0" descr="ikon tautan">
-            <a:hlinkClick r:id="rId3" tooltip="https://github.com/antonprafanto/mobile2026/blob/main/pertemuan_02_dasar_dart/kode/09_fungsi_dasar.dart"/>
+            <a:hlinkClick r:id="rId3" tooltip="https://github.com/antonprafanto/mobile2026/blob/main/pertemuan_02_dasar_dart/kode/contoh_09_fungsi_dasar.dart"/>
           </p:cNvPr>
           <p:cNvPicPr>
             <a:picLocks noChangeAspect="1"/>
@@ -15729,7 +15729,7 @@
       <p:sp>
         <p:nvSpPr>
           <p:cNvPr id="8" name="tombol tautan">
-            <a:hlinkClick r:id="rId2" tooltip="https://github.com/antonprafanto/mobile2026/blob/main/pertemuan_02_dasar_dart/kode/10_parameter_fungsi.dart"/>
+            <a:hlinkClick r:id="rId2" tooltip="https://github.com/antonprafanto/mobile2026/blob/main/pertemuan_02_dasar_dart/kode/contoh_10_parameter_fungsi.dart"/>
           </p:cNvPr>
           <p:cNvSpPr txBox="1"/>
           <p:nvPr/>
@@ -15762,7 +15762,7 @@
                   <a:schemeClr val="bg1"/>
                 </a:solidFill>
               </a:rPr>
-              <a:t>Buka kode lengkap di GitHub  ·  10_parameter_fungsi.dart</a:t>
+              <a:t>Buka kode lengkap di GitHub  ·  contoh_10_parameter_fungsi.dart</a:t>
             </a:r>
             <a:endParaRPr lang="en-US" sz="1300" dirty="0"/>
           </a:p>
@@ -15771,7 +15771,7 @@
       <p:pic>
         <p:nvPicPr>
           <p:cNvPr id="9" name="Image 1" descr="ikon tautan">
-            <a:hlinkClick r:id="rId4" tooltip="https://github.com/antonprafanto/mobile2026/blob/main/pertemuan_02_dasar_dart/kode/10_parameter_fungsi.dart"/>
+            <a:hlinkClick r:id="rId4" tooltip="https://github.com/antonprafanto/mobile2026/blob/main/pertemuan_02_dasar_dart/kode/contoh_10_parameter_fungsi.dart"/>
           </p:cNvPr>
           <p:cNvPicPr>
             <a:picLocks noChangeAspect="1"/>
@@ -17113,7 +17113,7 @@
       <p:sp>
         <p:nvSpPr>
           <p:cNvPr id="25" name="tombol tautan">
-            <a:hlinkClick r:id="rId4" tooltip="https://github.com/antonprafanto/mobile2026/blob/main/pertemuan_02_dasar_dart/kode/11_list.dart"/>
+            <a:hlinkClick r:id="rId4" tooltip="https://github.com/antonprafanto/mobile2026/blob/main/pertemuan_02_dasar_dart/kode/contoh_11_list.dart"/>
           </p:cNvPr>
           <p:cNvSpPr txBox="1"/>
           <p:nvPr/>
@@ -17146,7 +17146,7 @@
                   <a:schemeClr val="bg1"/>
                 </a:solidFill>
               </a:rPr>
-              <a:t>Buka kode lengkap di GitHub  ·  11_list.dart</a:t>
+              <a:t>Buka kode lengkap di GitHub  ·  contoh_11_list.dart</a:t>
             </a:r>
             <a:endParaRPr lang="en-US" sz="1300" dirty="0"/>
           </a:p>
@@ -17155,7 +17155,7 @@
       <p:pic>
         <p:nvPicPr>
           <p:cNvPr id="26" name="Image 3" descr="ikon tautan">
-            <a:hlinkClick r:id="rId6" tooltip="https://github.com/antonprafanto/mobile2026/blob/main/pertemuan_02_dasar_dart/kode/11_list.dart"/>
+            <a:hlinkClick r:id="rId6" tooltip="https://github.com/antonprafanto/mobile2026/blob/main/pertemuan_02_dasar_dart/kode/contoh_11_list.dart"/>
           </p:cNvPr>
           <p:cNvPicPr>
             <a:picLocks noChangeAspect="1"/>
@@ -17181,7 +17181,7 @@
       <p:sp>
         <p:nvSpPr>
           <p:cNvPr id="27" name="tombol tautan">
-            <a:hlinkClick r:id="rId7" tooltip="https://github.com/antonprafanto/mobile2026/blob/main/pertemuan_02_dasar_dart/kode/12_map_dan_set.dart"/>
+            <a:hlinkClick r:id="rId7" tooltip="https://github.com/antonprafanto/mobile2026/blob/main/pertemuan_02_dasar_dart/kode/contoh_12_map_dan_set.dart"/>
           </p:cNvPr>
           <p:cNvSpPr txBox="1"/>
           <p:nvPr/>
@@ -17214,7 +17214,7 @@
                   <a:schemeClr val="bg1"/>
                 </a:solidFill>
               </a:rPr>
-              <a:t>Buka kode lengkap di GitHub  ·  12_map_dan_set.dart</a:t>
+              <a:t>Buka kode lengkap di GitHub  ·  contoh_12_map_dan_set.dart</a:t>
             </a:r>
             <a:endParaRPr lang="en-US" sz="1300" dirty="0"/>
           </a:p>
@@ -17223,7 +17223,7 @@
       <p:pic>
         <p:nvPicPr>
           <p:cNvPr id="28" name="Image 4" descr="ikon tautan">
-            <a:hlinkClick r:id="rId9" tooltip="https://github.com/antonprafanto/mobile2026/blob/main/pertemuan_02_dasar_dart/kode/12_map_dan_set.dart"/>
+            <a:hlinkClick r:id="rId9" tooltip="https://github.com/antonprafanto/mobile2026/blob/main/pertemuan_02_dasar_dart/kode/contoh_12_map_dan_set.dart"/>
           </p:cNvPr>
           <p:cNvPicPr>
             <a:picLocks noChangeAspect="1"/>
@@ -19763,7 +19763,7 @@
       <p:sp>
         <p:nvSpPr>
           <p:cNvPr id="5" name="tombol tautan">
-            <a:hlinkClick r:id="rId1" tooltip="https://github.com/antonprafanto/mobile2026/blob/main/pertemuan_02_dasar_dart/kode/13_studi_kasus_rekap_nilai.dart"/>
+            <a:hlinkClick r:id="rId1" tooltip="https://github.com/antonprafanto/mobile2026/blob/main/pertemuan_02_dasar_dart/kode/contoh_13_studi_kasus_rekap_nilai.dart"/>
           </p:cNvPr>
           <p:cNvSpPr txBox="1"/>
           <p:nvPr/>
@@ -19796,7 +19796,7 @@
                   <a:schemeClr val="bg1"/>
                 </a:solidFill>
               </a:rPr>
-              <a:t>Buka kode lengkap di GitHub  ·  13_studi_kasus_rekap_nilai.dart</a:t>
+              <a:t>Buka kode lengkap di GitHub  ·  contoh_13_studi_kasus_rekap_nilai.dart</a:t>
             </a:r>
             <a:endParaRPr lang="en-US" sz="1300" dirty="0"/>
           </a:p>
@@ -19805,7 +19805,7 @@
       <p:pic>
         <p:nvPicPr>
           <p:cNvPr id="6" name="Image 0" descr="ikon tautan">
-            <a:hlinkClick r:id="rId3" tooltip="https://github.com/antonprafanto/mobile2026/blob/main/pertemuan_02_dasar_dart/kode/13_studi_kasus_rekap_nilai.dart"/>
+            <a:hlinkClick r:id="rId3" tooltip="https://github.com/antonprafanto/mobile2026/blob/main/pertemuan_02_dasar_dart/kode/contoh_13_studi_kasus_rekap_nilai.dart"/>
           </p:cNvPr>
           <p:cNvPicPr>
             <a:picLocks noChangeAspect="1"/>
@@ -25355,7 +25355,7 @@
       <p:sp>
         <p:nvSpPr>
           <p:cNvPr id="5" name="tombol tautan">
-            <a:hlinkClick r:id="rId1" tooltip="https://github.com/antonprafanto/mobile2026/blob/main/pertemuan_02_dasar_dart/kode/01_halo_dart.dart"/>
+            <a:hlinkClick r:id="rId1" tooltip="https://github.com/antonprafanto/mobile2026/blob/main/pertemuan_02_dasar_dart/kode/contoh_01_halo_dart.dart"/>
           </p:cNvPr>
           <p:cNvSpPr txBox="1"/>
           <p:nvPr/>
@@ -25388,7 +25388,7 @@
                   <a:schemeClr val="bg1"/>
                 </a:solidFill>
               </a:rPr>
-              <a:t>Buka kode lengkap di GitHub  ·  01_halo_dart.dart</a:t>
+              <a:t>Buka kode lengkap di GitHub  ·  contoh_01_halo_dart.dart</a:t>
             </a:r>
             <a:endParaRPr lang="en-US" sz="1300" dirty="0"/>
           </a:p>
@@ -25397,7 +25397,7 @@
       <p:pic>
         <p:nvPicPr>
           <p:cNvPr id="6" name="Image 0" descr="ikon tautan">
-            <a:hlinkClick r:id="rId3" tooltip="https://github.com/antonprafanto/mobile2026/blob/main/pertemuan_02_dasar_dart/kode/01_halo_dart.dart"/>
+            <a:hlinkClick r:id="rId3" tooltip="https://github.com/antonprafanto/mobile2026/blob/main/pertemuan_02_dasar_dart/kode/contoh_01_halo_dart.dart"/>
           </p:cNvPr>
           <p:cNvPicPr>
             <a:picLocks noChangeAspect="1"/>
@@ -26605,7 +26605,7 @@
       <p:sp>
         <p:nvSpPr>
           <p:cNvPr id="5" name="tombol tautan">
-            <a:hlinkClick r:id="rId1" tooltip="https://github.com/antonprafanto/mobile2026/blob/main/pertemuan_02_dasar_dart/kode/02_variabel_dan_tipe_data.dart"/>
+            <a:hlinkClick r:id="rId1" tooltip="https://github.com/antonprafanto/mobile2026/blob/main/pertemuan_02_dasar_dart/kode/contoh_02_variabel_dan_tipe_data.dart"/>
           </p:cNvPr>
           <p:cNvSpPr txBox="1"/>
           <p:nvPr/>
@@ -26638,7 +26638,7 @@
                   <a:schemeClr val="bg1"/>
                 </a:solidFill>
               </a:rPr>
-              <a:t>Buka kode lengkap di GitHub  ·  02_variabel_dan_tipe_data.dart</a:t>
+              <a:t>Buka kode lengkap di GitHub  ·  contoh_02_variabel_dan_tipe_data.dart</a:t>
             </a:r>
             <a:endParaRPr lang="en-US" sz="1300" dirty="0"/>
           </a:p>
@@ -26647,7 +26647,7 @@
       <p:pic>
         <p:nvPicPr>
           <p:cNvPr id="6" name="Image 0" descr="ikon tautan">
-            <a:hlinkClick r:id="rId3" tooltip="https://github.com/antonprafanto/mobile2026/blob/main/pertemuan_02_dasar_dart/kode/02_variabel_dan_tipe_data.dart"/>
+            <a:hlinkClick r:id="rId3" tooltip="https://github.com/antonprafanto/mobile2026/blob/main/pertemuan_02_dasar_dart/kode/contoh_02_variabel_dan_tipe_data.dart"/>
           </p:cNvPr>
           <p:cNvPicPr>
             <a:picLocks noChangeAspect="1"/>
@@ -29210,7 +29210,7 @@
       <p:sp>
         <p:nvSpPr>
           <p:cNvPr id="5" name="tombol tautan">
-            <a:hlinkClick r:id="rId1" tooltip="https://github.com/antonprafanto/mobile2026/blob/main/pertemuan_02_dasar_dart/kode/03_string_dan_interpolasi.dart"/>
+            <a:hlinkClick r:id="rId1" tooltip="https://github.com/antonprafanto/mobile2026/blob/main/pertemuan_02_dasar_dart/kode/contoh_03_string_dan_interpolasi.dart"/>
           </p:cNvPr>
           <p:cNvSpPr txBox="1"/>
           <p:nvPr/>
@@ -29243,7 +29243,7 @@
                   <a:schemeClr val="bg1"/>
                 </a:solidFill>
               </a:rPr>
-              <a:t>Buka kode lengkap di GitHub  ·  03_string_dan_interpolasi.dart</a:t>
+              <a:t>Buka kode lengkap di GitHub  ·  contoh_03_string_dan_interpolasi.dart</a:t>
             </a:r>
             <a:endParaRPr lang="en-US" sz="1300" dirty="0"/>
           </a:p>
@@ -29252,7 +29252,7 @@
       <p:pic>
         <p:nvPicPr>
           <p:cNvPr id="6" name="Image 0" descr="ikon tautan">
-            <a:hlinkClick r:id="rId3" tooltip="https://github.com/antonprafanto/mobile2026/blob/main/pertemuan_02_dasar_dart/kode/03_string_dan_interpolasi.dart"/>
+            <a:hlinkClick r:id="rId3" tooltip="https://github.com/antonprafanto/mobile2026/blob/main/pertemuan_02_dasar_dart/kode/contoh_03_string_dan_interpolasi.dart"/>
           </p:cNvPr>
           <p:cNvPicPr>
             <a:picLocks noChangeAspect="1"/>

--- a/pertemuan_02_dasar_dart/slide/PERTEMUAN_02_Dasar_Dart.pptx
+++ b/pertemuan_02_dasar_dart/slide/PERTEMUAN_02_Dasar_Dart.pptx
@@ -134,7 +134,7 @@
   <p:extLst>
     <p:ext uri="{521415D9-36F7-43E2-AB2F-B90AF26B5E84}">
       <p14:sectionLst xmlns:p14="http://schemas.microsoft.com/office/powerpoint/2010/main">
-        <p14:section name="Pembuka" id="{fab29b7c-9312-de6d-5822-9fd4d4e00728}">
+        <p14:section name="Pembuka" id="{bd848616-9c45-eebf-6b5f-6e9e5f7b2a6b}">
           <p14:sldIdLst>
             <p14:sldId id="256"/>
             <p14:sldId id="257"/>
@@ -143,7 +143,7 @@
             <p14:sldId id="260"/>
           </p14:sldIdLst>
         </p14:section>
-        <p14:section name="Menyimpan Data" id="{5ee5e190-54a1-f490-d354-c6b2d1162b6f}">
+        <p14:section name="Menyimpan Data" id="{949aa4ca-63d2-9485-cea6-01251814c03d}">
           <p14:sldIdLst>
             <p14:sldId id="261"/>
             <p14:sldId id="262"/>
@@ -152,14 +152,14 @@
             <p14:sldId id="265"/>
           </p14:sldIdLst>
         </p14:section>
-        <p14:section name="Null Safety: Aman dari Kotak Kosong" id="{0073e60b-b566-a65d-9687-d14272178653}">
+        <p14:section name="Null Safety: Aman dari Kotak Kosong" id="{ea03234d-a673-28e7-b6bb-e43f651b3bd3}">
           <p14:sldIdLst>
             <p14:sldId id="266"/>
             <p14:sldId id="267"/>
             <p14:sldId id="268"/>
           </p14:sldIdLst>
         </p14:section>
-        <p14:section name="Mengolah Data &amp; Mengatur Alur" id="{0fc1bb4f-304c-1414-906a-12d939f4011f}">
+        <p14:section name="Mengolah Data &amp; Mengatur Alur" id="{fc26df3c-cc4c-693a-5052-470df59d37a7}">
           <p14:sldIdLst>
             <p14:sldId id="269"/>
             <p14:sldId id="270"/>
@@ -167,14 +167,14 @@
             <p14:sldId id="272"/>
           </p14:sldIdLst>
         </p14:section>
-        <p14:section name="Fungsi: Membungkus Logika" id="{0f00248e-1fcd-a385-ddfc-4352aab1eb5e}">
+        <p14:section name="Fungsi: Membungkus Logika" id="{a0ccfd5d-2d79-6ed0-00d6-21e505b6eaa4}">
           <p14:sldIdLst>
             <p14:sldId id="273"/>
             <p14:sldId id="274"/>
             <p14:sldId id="275"/>
           </p14:sldIdLst>
         </p14:section>
-        <p14:section name="Koleksi: Mengelola Banyak Data" id="{c38b83a8-9654-5764-f0aa-daa70b61375e}">
+        <p14:section name="Koleksi: Mengelola Banyak Data" id="{915148a0-cead-a4a3-e9bb-955154e0d65a}">
           <p14:sldIdLst>
             <p14:sldId id="276"/>
             <p14:sldId id="277"/>
@@ -4246,6 +4246,64 @@
               </a:rPr>
               <a:t>const</a:t>
             </a:r>
+            <a:r>
+              <a:rPr lang="en-US" sz="1500" dirty="0">
+                <a:solidFill>
+                  <a:srgbClr val="E6EDF3"/>
+                </a:solidFill>
+                <a:latin typeface="Consolas" pitchFamily="34" charset="0"/>
+                <a:ea typeface="Consolas" pitchFamily="34" charset="-122"/>
+                <a:cs typeface="Consolas" pitchFamily="34" charset="-120"/>
+              </a:rPr>
+              <a:t> </a:t>
+            </a:r>
+            <a:r>
+              <a:rPr lang="en-US" sz="1500" dirty="0">
+                <a:solidFill>
+                  <a:srgbClr val="FFCB6B"/>
+                </a:solidFill>
+                <a:latin typeface="Consolas" pitchFamily="34" charset="0"/>
+                <a:ea typeface="Consolas" pitchFamily="34" charset="-122"/>
+                <a:cs typeface="Consolas" pitchFamily="34" charset="-120"/>
+              </a:rPr>
+              <a:t>int</a:t>
+            </a:r>
+            <a:r>
+              <a:rPr lang="en-US" sz="1500" dirty="0">
+                <a:solidFill>
+                  <a:srgbClr val="E6EDF3"/>
+                </a:solidFill>
+                <a:latin typeface="Consolas" pitchFamily="34" charset="0"/>
+                <a:ea typeface="Consolas" pitchFamily="34" charset="-122"/>
+                <a:cs typeface="Consolas" pitchFamily="34" charset="-120"/>
+              </a:rPr>
+              <a:t> jumlahHariSeminggu = </a:t>
+            </a:r>
+            <a:r>
+              <a:rPr lang="en-US" sz="1500" dirty="0">
+                <a:solidFill>
+                  <a:srgbClr val="F78C6C"/>
+                </a:solidFill>
+                <a:latin typeface="Consolas" pitchFamily="34" charset="0"/>
+                <a:ea typeface="Consolas" pitchFamily="34" charset="-122"/>
+                <a:cs typeface="Consolas" pitchFamily="34" charset="-120"/>
+              </a:rPr>
+              <a:t>7</a:t>
+            </a:r>
+            <a:r>
+              <a:rPr lang="en-US" sz="1500" dirty="0">
+                <a:solidFill>
+                  <a:srgbClr val="E6EDF3"/>
+                </a:solidFill>
+                <a:latin typeface="Consolas" pitchFamily="34" charset="0"/>
+                <a:ea typeface="Consolas" pitchFamily="34" charset="-122"/>
+                <a:cs typeface="Consolas" pitchFamily="34" charset="-120"/>
+              </a:rPr>
+              <a:t>;</a:t>
+            </a:r>
+            <a:endParaRPr lang="en-US" sz="1500" dirty="0"/>
+          </a:p>
+          <a:p>
             <a:pPr indent="0" marL="0">
               <a:lnSpc>
                 <a:spcPct val="105000"/>
@@ -4255,6 +4313,17 @@
             <a:r>
               <a:rPr lang="en-US" sz="1500" dirty="0">
                 <a:solidFill>
+                  <a:srgbClr val="C792EA"/>
+                </a:solidFill>
+                <a:latin typeface="Consolas" pitchFamily="34" charset="0"/>
+                <a:ea typeface="Consolas" pitchFamily="34" charset="-122"/>
+                <a:cs typeface="Consolas" pitchFamily="34" charset="-120"/>
+              </a:rPr>
+              <a:t>const</a:t>
+            </a:r>
+            <a:r>
+              <a:rPr lang="en-US" sz="1500" dirty="0">
+                <a:solidFill>
                   <a:srgbClr val="E6EDF3"/>
                 </a:solidFill>
                 <a:latin typeface="Consolas" pitchFamily="34" charset="0"/>
@@ -4263,6 +4332,97 @@
               </a:rPr>
               <a:t> </a:t>
             </a:r>
+            <a:r>
+              <a:rPr lang="en-US" sz="1500" dirty="0">
+                <a:solidFill>
+                  <a:srgbClr val="FFCB6B"/>
+                </a:solidFill>
+                <a:latin typeface="Consolas" pitchFamily="34" charset="0"/>
+                <a:ea typeface="Consolas" pitchFamily="34" charset="-122"/>
+                <a:cs typeface="Consolas" pitchFamily="34" charset="-120"/>
+              </a:rPr>
+              <a:t>List</a:t>
+            </a:r>
+            <a:r>
+              <a:rPr lang="en-US" sz="1500" dirty="0">
+                <a:solidFill>
+                  <a:srgbClr val="E6EDF3"/>
+                </a:solidFill>
+                <a:latin typeface="Consolas" pitchFamily="34" charset="0"/>
+                <a:ea typeface="Consolas" pitchFamily="34" charset="-122"/>
+                <a:cs typeface="Consolas" pitchFamily="34" charset="-120"/>
+              </a:rPr>
+              <a:t>&lt;</a:t>
+            </a:r>
+            <a:r>
+              <a:rPr lang="en-US" sz="1500" dirty="0">
+                <a:solidFill>
+                  <a:srgbClr val="FFCB6B"/>
+                </a:solidFill>
+                <a:latin typeface="Consolas" pitchFamily="34" charset="0"/>
+                <a:ea typeface="Consolas" pitchFamily="34" charset="-122"/>
+                <a:cs typeface="Consolas" pitchFamily="34" charset="-120"/>
+              </a:rPr>
+              <a:t>String</a:t>
+            </a:r>
+            <a:r>
+              <a:rPr lang="en-US" sz="1500" dirty="0">
+                <a:solidFill>
+                  <a:srgbClr val="E6EDF3"/>
+                </a:solidFill>
+                <a:latin typeface="Consolas" pitchFamily="34" charset="0"/>
+                <a:ea typeface="Consolas" pitchFamily="34" charset="-122"/>
+                <a:cs typeface="Consolas" pitchFamily="34" charset="-120"/>
+              </a:rPr>
+              <a:t>&gt; hari = [</a:t>
+            </a:r>
+            <a:r>
+              <a:rPr lang="en-US" sz="1500" dirty="0">
+                <a:solidFill>
+                  <a:srgbClr val="C3E88D"/>
+                </a:solidFill>
+                <a:latin typeface="Consolas" pitchFamily="34" charset="0"/>
+                <a:ea typeface="Consolas" pitchFamily="34" charset="-122"/>
+                <a:cs typeface="Consolas" pitchFamily="34" charset="-120"/>
+              </a:rPr>
+              <a:t>'Senin'</a:t>
+            </a:r>
+            <a:r>
+              <a:rPr lang="en-US" sz="1500" dirty="0">
+                <a:solidFill>
+                  <a:srgbClr val="E6EDF3"/>
+                </a:solidFill>
+                <a:latin typeface="Consolas" pitchFamily="34" charset="0"/>
+                <a:ea typeface="Consolas" pitchFamily="34" charset="-122"/>
+                <a:cs typeface="Consolas" pitchFamily="34" charset="-120"/>
+              </a:rPr>
+              <a:t>, </a:t>
+            </a:r>
+            <a:r>
+              <a:rPr lang="en-US" sz="1500" dirty="0">
+                <a:solidFill>
+                  <a:srgbClr val="C3E88D"/>
+                </a:solidFill>
+                <a:latin typeface="Consolas" pitchFamily="34" charset="0"/>
+                <a:ea typeface="Consolas" pitchFamily="34" charset="-122"/>
+                <a:cs typeface="Consolas" pitchFamily="34" charset="-120"/>
+              </a:rPr>
+              <a:t>'Rabu'</a:t>
+            </a:r>
+            <a:r>
+              <a:rPr lang="en-US" sz="1500" dirty="0">
+                <a:solidFill>
+                  <a:srgbClr val="E6EDF3"/>
+                </a:solidFill>
+                <a:latin typeface="Consolas" pitchFamily="34" charset="0"/>
+                <a:ea typeface="Consolas" pitchFamily="34" charset="-122"/>
+                <a:cs typeface="Consolas" pitchFamily="34" charset="-120"/>
+              </a:rPr>
+              <a:t>];</a:t>
+            </a:r>
+            <a:endParaRPr lang="en-US" sz="1500" dirty="0"/>
+          </a:p>
+          <a:p>
             <a:pPr indent="0" marL="0">
               <a:lnSpc>
                 <a:spcPct val="105000"/>
@@ -4272,14 +4432,17 @@
             <a:r>
               <a:rPr lang="en-US" sz="1500" dirty="0">
                 <a:solidFill>
-                  <a:srgbClr val="FFCB6B"/>
-                </a:solidFill>
-                <a:latin typeface="Consolas" pitchFamily="34" charset="0"/>
-                <a:ea typeface="Consolas" pitchFamily="34" charset="-122"/>
-                <a:cs typeface="Consolas" pitchFamily="34" charset="-120"/>
-              </a:rPr>
-              <a:t>int</a:t>
-            </a:r>
+                  <a:srgbClr val="E6EDF3"/>
+                </a:solidFill>
+                <a:latin typeface="Consolas" pitchFamily="34" charset="0"/>
+                <a:ea typeface="Consolas" pitchFamily="34" charset="-122"/>
+                <a:cs typeface="Consolas" pitchFamily="34" charset="-120"/>
+              </a:rPr>
+              <a:t> </a:t>
+            </a:r>
+            <a:endParaRPr lang="en-US" sz="1500" dirty="0"/>
+          </a:p>
+          <a:p>
             <a:pPr indent="0" marL="0">
               <a:lnSpc>
                 <a:spcPct val="105000"/>
@@ -4287,16 +4450,19 @@
               <a:buNone/>
             </a:pPr>
             <a:r>
-              <a:rPr lang="en-US" sz="1500" dirty="0">
-                <a:solidFill>
-                  <a:srgbClr val="E6EDF3"/>
-                </a:solidFill>
-                <a:latin typeface="Consolas" pitchFamily="34" charset="0"/>
-                <a:ea typeface="Consolas" pitchFamily="34" charset="-122"/>
-                <a:cs typeface="Consolas" pitchFamily="34" charset="-120"/>
-              </a:rPr>
-              <a:t> jumlahHariSeminggu = </a:t>
-            </a:r>
+              <a:rPr lang="en-US" sz="1500" i="1" dirty="0">
+                <a:solidFill>
+                  <a:srgbClr val="8FA3BC"/>
+                </a:solidFill>
+                <a:latin typeface="Consolas" pitchFamily="34" charset="0"/>
+                <a:ea typeface="Consolas" pitchFamily="34" charset="-122"/>
+                <a:cs typeface="Consolas" pitchFamily="34" charset="-120"/>
+              </a:rPr>
+              <a:t>// final: diisi SEKALI saat program berjalan</a:t>
+            </a:r>
+            <a:endParaRPr lang="en-US" sz="1500" dirty="0"/>
+          </a:p>
+          <a:p>
             <a:pPr indent="0" marL="0">
               <a:lnSpc>
                 <a:spcPct val="105000"/>
@@ -4306,14 +4472,72 @@
             <a:r>
               <a:rPr lang="en-US" sz="1500" dirty="0">
                 <a:solidFill>
-                  <a:srgbClr val="F78C6C"/>
-                </a:solidFill>
-                <a:latin typeface="Consolas" pitchFamily="34" charset="0"/>
-                <a:ea typeface="Consolas" pitchFamily="34" charset="-122"/>
-                <a:cs typeface="Consolas" pitchFamily="34" charset="-120"/>
-              </a:rPr>
-              <a:t>7</a:t>
-            </a:r>
+                  <a:srgbClr val="C792EA"/>
+                </a:solidFill>
+                <a:latin typeface="Consolas" pitchFamily="34" charset="0"/>
+                <a:ea typeface="Consolas" pitchFamily="34" charset="-122"/>
+                <a:cs typeface="Consolas" pitchFamily="34" charset="-120"/>
+              </a:rPr>
+              <a:t>final</a:t>
+            </a:r>
+            <a:r>
+              <a:rPr lang="en-US" sz="1500" dirty="0">
+                <a:solidFill>
+                  <a:srgbClr val="E6EDF3"/>
+                </a:solidFill>
+                <a:latin typeface="Consolas" pitchFamily="34" charset="0"/>
+                <a:ea typeface="Consolas" pitchFamily="34" charset="-122"/>
+                <a:cs typeface="Consolas" pitchFamily="34" charset="-120"/>
+              </a:rPr>
+              <a:t> </a:t>
+            </a:r>
+            <a:r>
+              <a:rPr lang="en-US" sz="1500" dirty="0">
+                <a:solidFill>
+                  <a:srgbClr val="FFCB6B"/>
+                </a:solidFill>
+                <a:latin typeface="Consolas" pitchFamily="34" charset="0"/>
+                <a:ea typeface="Consolas" pitchFamily="34" charset="-122"/>
+                <a:cs typeface="Consolas" pitchFamily="34" charset="-120"/>
+              </a:rPr>
+              <a:t>DateTime</a:t>
+            </a:r>
+            <a:r>
+              <a:rPr lang="en-US" sz="1500" dirty="0">
+                <a:solidFill>
+                  <a:srgbClr val="E6EDF3"/>
+                </a:solidFill>
+                <a:latin typeface="Consolas" pitchFamily="34" charset="0"/>
+                <a:ea typeface="Consolas" pitchFamily="34" charset="-122"/>
+                <a:cs typeface="Consolas" pitchFamily="34" charset="-120"/>
+              </a:rPr>
+              <a:t> waktuMulai = </a:t>
+            </a:r>
+            <a:r>
+              <a:rPr lang="en-US" sz="1500" dirty="0">
+                <a:solidFill>
+                  <a:srgbClr val="FFCB6B"/>
+                </a:solidFill>
+                <a:latin typeface="Consolas" pitchFamily="34" charset="0"/>
+                <a:ea typeface="Consolas" pitchFamily="34" charset="-122"/>
+                <a:cs typeface="Consolas" pitchFamily="34" charset="-120"/>
+              </a:rPr>
+              <a:t>DateTime</a:t>
+            </a:r>
+            <a:r>
+              <a:rPr lang="en-US" sz="1500" dirty="0">
+                <a:solidFill>
+                  <a:srgbClr val="E6EDF3"/>
+                </a:solidFill>
+                <a:latin typeface="Consolas" pitchFamily="34" charset="0"/>
+                <a:ea typeface="Consolas" pitchFamily="34" charset="-122"/>
+                <a:cs typeface="Consolas" pitchFamily="34" charset="-120"/>
+              </a:rPr>
+              <a:t>.now();</a:t>
+            </a:r>
+            <a:endParaRPr lang="en-US" sz="1500" dirty="0"/>
+          </a:p>
+          <a:p>
             <a:pPr indent="0" marL="0">
               <a:lnSpc>
                 <a:spcPct val="105000"/>
@@ -4323,40 +4547,36 @@
             <a:r>
               <a:rPr lang="en-US" sz="1500" dirty="0">
                 <a:solidFill>
+                  <a:srgbClr val="C792EA"/>
+                </a:solidFill>
+                <a:latin typeface="Consolas" pitchFamily="34" charset="0"/>
+                <a:ea typeface="Consolas" pitchFamily="34" charset="-122"/>
+                <a:cs typeface="Consolas" pitchFamily="34" charset="-120"/>
+              </a:rPr>
+              <a:t>final</a:t>
+            </a:r>
+            <a:r>
+              <a:rPr lang="en-US" sz="1500" dirty="0">
+                <a:solidFill>
                   <a:srgbClr val="E6EDF3"/>
                 </a:solidFill>
                 <a:latin typeface="Consolas" pitchFamily="34" charset="0"/>
                 <a:ea typeface="Consolas" pitchFamily="34" charset="-122"/>
                 <a:cs typeface="Consolas" pitchFamily="34" charset="-120"/>
               </a:rPr>
-              <a:t>;</a:t>
-            </a:r>
-            <a:endParaRPr lang="en-US" sz="1500" dirty="0"/>
-          </a:p>
-          <a:p>
-            <a:pPr indent="0" marL="0">
-              <a:lnSpc>
-                <a:spcPct val="105000"/>
-              </a:lnSpc>
-              <a:buNone/>
-            </a:pPr>
+              <a:t> </a:t>
+            </a:r>
             <a:r>
               <a:rPr lang="en-US" sz="1500" dirty="0">
                 <a:solidFill>
-                  <a:srgbClr val="C792EA"/>
-                </a:solidFill>
-                <a:latin typeface="Consolas" pitchFamily="34" charset="0"/>
-                <a:ea typeface="Consolas" pitchFamily="34" charset="-122"/>
-                <a:cs typeface="Consolas" pitchFamily="34" charset="-120"/>
-              </a:rPr>
-              <a:t>const</a:t>
-            </a:r>
-            <a:pPr indent="0" marL="0">
-              <a:lnSpc>
-                <a:spcPct val="105000"/>
-              </a:lnSpc>
-              <a:buNone/>
-            </a:pPr>
+                  <a:srgbClr val="FFCB6B"/>
+                </a:solidFill>
+                <a:latin typeface="Consolas" pitchFamily="34" charset="0"/>
+                <a:ea typeface="Consolas" pitchFamily="34" charset="-122"/>
+                <a:cs typeface="Consolas" pitchFamily="34" charset="-120"/>
+              </a:rPr>
+              <a:t>String</a:t>
+            </a:r>
             <a:r>
               <a:rPr lang="en-US" sz="1500" dirty="0">
                 <a:solidFill>
@@ -4366,383 +4586,19 @@
                 <a:ea typeface="Consolas" pitchFamily="34" charset="-122"/>
                 <a:cs typeface="Consolas" pitchFamily="34" charset="-120"/>
               </a:rPr>
-              <a:t> </a:t>
-            </a:r>
-            <a:pPr indent="0" marL="0">
-              <a:lnSpc>
-                <a:spcPct val="105000"/>
-              </a:lnSpc>
-              <a:buNone/>
-            </a:pPr>
+              <a:t> namaPengguna = </a:t>
+            </a:r>
             <a:r>
               <a:rPr lang="en-US" sz="1500" dirty="0">
                 <a:solidFill>
-                  <a:srgbClr val="FFCB6B"/>
-                </a:solidFill>
-                <a:latin typeface="Consolas" pitchFamily="34" charset="0"/>
-                <a:ea typeface="Consolas" pitchFamily="34" charset="-122"/>
-                <a:cs typeface="Consolas" pitchFamily="34" charset="-120"/>
-              </a:rPr>
-              <a:t>List</a:t>
-            </a:r>
-            <a:pPr indent="0" marL="0">
-              <a:lnSpc>
-                <a:spcPct val="105000"/>
-              </a:lnSpc>
-              <a:buNone/>
-            </a:pPr>
-            <a:r>
-              <a:rPr lang="en-US" sz="1500" dirty="0">
-                <a:solidFill>
-                  <a:srgbClr val="E6EDF3"/>
-                </a:solidFill>
-                <a:latin typeface="Consolas" pitchFamily="34" charset="0"/>
-                <a:ea typeface="Consolas" pitchFamily="34" charset="-122"/>
-                <a:cs typeface="Consolas" pitchFamily="34" charset="-120"/>
-              </a:rPr>
-              <a:t>&lt;</a:t>
-            </a:r>
-            <a:pPr indent="0" marL="0">
-              <a:lnSpc>
-                <a:spcPct val="105000"/>
-              </a:lnSpc>
-              <a:buNone/>
-            </a:pPr>
-            <a:r>
-              <a:rPr lang="en-US" sz="1500" dirty="0">
-                <a:solidFill>
-                  <a:srgbClr val="FFCB6B"/>
-                </a:solidFill>
-                <a:latin typeface="Consolas" pitchFamily="34" charset="0"/>
-                <a:ea typeface="Consolas" pitchFamily="34" charset="-122"/>
-                <a:cs typeface="Consolas" pitchFamily="34" charset="-120"/>
-              </a:rPr>
-              <a:t>String</a:t>
-            </a:r>
-            <a:pPr indent="0" marL="0">
-              <a:lnSpc>
-                <a:spcPct val="105000"/>
-              </a:lnSpc>
-              <a:buNone/>
-            </a:pPr>
-            <a:r>
-              <a:rPr lang="en-US" sz="1500" dirty="0">
-                <a:solidFill>
-                  <a:srgbClr val="E6EDF3"/>
-                </a:solidFill>
-                <a:latin typeface="Consolas" pitchFamily="34" charset="0"/>
-                <a:ea typeface="Consolas" pitchFamily="34" charset="-122"/>
-                <a:cs typeface="Consolas" pitchFamily="34" charset="-120"/>
-              </a:rPr>
-              <a:t>&gt; hari = [</a:t>
-            </a:r>
-            <a:pPr indent="0" marL="0">
-              <a:lnSpc>
-                <a:spcPct val="105000"/>
-              </a:lnSpc>
-              <a:buNone/>
-            </a:pPr>
-            <a:r>
-              <a:rPr lang="en-US" sz="1500" dirty="0">
-                <a:solidFill>
                   <a:srgbClr val="C3E88D"/>
                 </a:solidFill>
                 <a:latin typeface="Consolas" pitchFamily="34" charset="0"/>
                 <a:ea typeface="Consolas" pitchFamily="34" charset="-122"/>
                 <a:cs typeface="Consolas" pitchFamily="34" charset="-120"/>
               </a:rPr>
-              <a:t>'Senin'</a:t>
-            </a:r>
-            <a:pPr indent="0" marL="0">
-              <a:lnSpc>
-                <a:spcPct val="105000"/>
-              </a:lnSpc>
-              <a:buNone/>
-            </a:pPr>
-            <a:r>
-              <a:rPr lang="en-US" sz="1500" dirty="0">
-                <a:solidFill>
-                  <a:srgbClr val="E6EDF3"/>
-                </a:solidFill>
-                <a:latin typeface="Consolas" pitchFamily="34" charset="0"/>
-                <a:ea typeface="Consolas" pitchFamily="34" charset="-122"/>
-                <a:cs typeface="Consolas" pitchFamily="34" charset="-120"/>
-              </a:rPr>
-              <a:t>, </a:t>
-            </a:r>
-            <a:pPr indent="0" marL="0">
-              <a:lnSpc>
-                <a:spcPct val="105000"/>
-              </a:lnSpc>
-              <a:buNone/>
-            </a:pPr>
-            <a:r>
-              <a:rPr lang="en-US" sz="1500" dirty="0">
-                <a:solidFill>
-                  <a:srgbClr val="C3E88D"/>
-                </a:solidFill>
-                <a:latin typeface="Consolas" pitchFamily="34" charset="0"/>
-                <a:ea typeface="Consolas" pitchFamily="34" charset="-122"/>
-                <a:cs typeface="Consolas" pitchFamily="34" charset="-120"/>
-              </a:rPr>
-              <a:t>'Rabu'</a:t>
-            </a:r>
-            <a:pPr indent="0" marL="0">
-              <a:lnSpc>
-                <a:spcPct val="105000"/>
-              </a:lnSpc>
-              <a:buNone/>
-            </a:pPr>
-            <a:r>
-              <a:rPr lang="en-US" sz="1500" dirty="0">
-                <a:solidFill>
-                  <a:srgbClr val="E6EDF3"/>
-                </a:solidFill>
-                <a:latin typeface="Consolas" pitchFamily="34" charset="0"/>
-                <a:ea typeface="Consolas" pitchFamily="34" charset="-122"/>
-                <a:cs typeface="Consolas" pitchFamily="34" charset="-120"/>
-              </a:rPr>
-              <a:t>];</a:t>
-            </a:r>
-            <a:endParaRPr lang="en-US" sz="1500" dirty="0"/>
-          </a:p>
-          <a:p>
-            <a:pPr indent="0" marL="0">
-              <a:lnSpc>
-                <a:spcPct val="105000"/>
-              </a:lnSpc>
-              <a:buNone/>
-            </a:pPr>
-            <a:r>
-              <a:rPr lang="en-US" sz="1500" dirty="0">
-                <a:solidFill>
-                  <a:srgbClr val="E6EDF3"/>
-                </a:solidFill>
-                <a:latin typeface="Consolas" pitchFamily="34" charset="0"/>
-                <a:ea typeface="Consolas" pitchFamily="34" charset="-122"/>
-                <a:cs typeface="Consolas" pitchFamily="34" charset="-120"/>
-              </a:rPr>
-              <a:t> </a:t>
-            </a:r>
-            <a:endParaRPr lang="en-US" sz="1500" dirty="0"/>
-          </a:p>
-          <a:p>
-            <a:pPr indent="0" marL="0">
-              <a:lnSpc>
-                <a:spcPct val="105000"/>
-              </a:lnSpc>
-              <a:buNone/>
-            </a:pPr>
-            <a:r>
-              <a:rPr lang="en-US" sz="1500" i="1" dirty="0">
-                <a:solidFill>
-                  <a:srgbClr val="8FA3BC"/>
-                </a:solidFill>
-                <a:latin typeface="Consolas" pitchFamily="34" charset="0"/>
-                <a:ea typeface="Consolas" pitchFamily="34" charset="-122"/>
-                <a:cs typeface="Consolas" pitchFamily="34" charset="-120"/>
-              </a:rPr>
-              <a:t>// final: diisi SEKALI saat program berjalan</a:t>
-            </a:r>
-            <a:endParaRPr lang="en-US" sz="1500" dirty="0"/>
-          </a:p>
-          <a:p>
-            <a:pPr indent="0" marL="0">
-              <a:lnSpc>
-                <a:spcPct val="105000"/>
-              </a:lnSpc>
-              <a:buNone/>
-            </a:pPr>
-            <a:r>
-              <a:rPr lang="en-US" sz="1500" dirty="0">
-                <a:solidFill>
-                  <a:srgbClr val="C792EA"/>
-                </a:solidFill>
-                <a:latin typeface="Consolas" pitchFamily="34" charset="0"/>
-                <a:ea typeface="Consolas" pitchFamily="34" charset="-122"/>
-                <a:cs typeface="Consolas" pitchFamily="34" charset="-120"/>
-              </a:rPr>
-              <a:t>final</a:t>
-            </a:r>
-            <a:pPr indent="0" marL="0">
-              <a:lnSpc>
-                <a:spcPct val="105000"/>
-              </a:lnSpc>
-              <a:buNone/>
-            </a:pPr>
-            <a:r>
-              <a:rPr lang="en-US" sz="1500" dirty="0">
-                <a:solidFill>
-                  <a:srgbClr val="E6EDF3"/>
-                </a:solidFill>
-                <a:latin typeface="Consolas" pitchFamily="34" charset="0"/>
-                <a:ea typeface="Consolas" pitchFamily="34" charset="-122"/>
-                <a:cs typeface="Consolas" pitchFamily="34" charset="-120"/>
-              </a:rPr>
-              <a:t> </a:t>
-            </a:r>
-            <a:pPr indent="0" marL="0">
-              <a:lnSpc>
-                <a:spcPct val="105000"/>
-              </a:lnSpc>
-              <a:buNone/>
-            </a:pPr>
-            <a:r>
-              <a:rPr lang="en-US" sz="1500" dirty="0">
-                <a:solidFill>
-                  <a:srgbClr val="FFCB6B"/>
-                </a:solidFill>
-                <a:latin typeface="Consolas" pitchFamily="34" charset="0"/>
-                <a:ea typeface="Consolas" pitchFamily="34" charset="-122"/>
-                <a:cs typeface="Consolas" pitchFamily="34" charset="-120"/>
-              </a:rPr>
-              <a:t>DateTime</a:t>
-            </a:r>
-            <a:pPr indent="0" marL="0">
-              <a:lnSpc>
-                <a:spcPct val="105000"/>
-              </a:lnSpc>
-              <a:buNone/>
-            </a:pPr>
-            <a:r>
-              <a:rPr lang="en-US" sz="1500" dirty="0">
-                <a:solidFill>
-                  <a:srgbClr val="E6EDF3"/>
-                </a:solidFill>
-                <a:latin typeface="Consolas" pitchFamily="34" charset="0"/>
-                <a:ea typeface="Consolas" pitchFamily="34" charset="-122"/>
-                <a:cs typeface="Consolas" pitchFamily="34" charset="-120"/>
-              </a:rPr>
-              <a:t> waktuMulai = </a:t>
-            </a:r>
-            <a:pPr indent="0" marL="0">
-              <a:lnSpc>
-                <a:spcPct val="105000"/>
-              </a:lnSpc>
-              <a:buNone/>
-            </a:pPr>
-            <a:r>
-              <a:rPr lang="en-US" sz="1500" dirty="0">
-                <a:solidFill>
-                  <a:srgbClr val="FFCB6B"/>
-                </a:solidFill>
-                <a:latin typeface="Consolas" pitchFamily="34" charset="0"/>
-                <a:ea typeface="Consolas" pitchFamily="34" charset="-122"/>
-                <a:cs typeface="Consolas" pitchFamily="34" charset="-120"/>
-              </a:rPr>
-              <a:t>DateTime</a:t>
-            </a:r>
-            <a:pPr indent="0" marL="0">
-              <a:lnSpc>
-                <a:spcPct val="105000"/>
-              </a:lnSpc>
-              <a:buNone/>
-            </a:pPr>
-            <a:r>
-              <a:rPr lang="en-US" sz="1500" dirty="0">
-                <a:solidFill>
-                  <a:srgbClr val="E6EDF3"/>
-                </a:solidFill>
-                <a:latin typeface="Consolas" pitchFamily="34" charset="0"/>
-                <a:ea typeface="Consolas" pitchFamily="34" charset="-122"/>
-                <a:cs typeface="Consolas" pitchFamily="34" charset="-120"/>
-              </a:rPr>
-              <a:t>.now();</a:t>
-            </a:r>
-            <a:endParaRPr lang="en-US" sz="1500" dirty="0"/>
-          </a:p>
-          <a:p>
-            <a:pPr indent="0" marL="0">
-              <a:lnSpc>
-                <a:spcPct val="105000"/>
-              </a:lnSpc>
-              <a:buNone/>
-            </a:pPr>
-            <a:r>
-              <a:rPr lang="en-US" sz="1500" dirty="0">
-                <a:solidFill>
-                  <a:srgbClr val="C792EA"/>
-                </a:solidFill>
-                <a:latin typeface="Consolas" pitchFamily="34" charset="0"/>
-                <a:ea typeface="Consolas" pitchFamily="34" charset="-122"/>
-                <a:cs typeface="Consolas" pitchFamily="34" charset="-120"/>
-              </a:rPr>
-              <a:t>final</a:t>
-            </a:r>
-            <a:pPr indent="0" marL="0">
-              <a:lnSpc>
-                <a:spcPct val="105000"/>
-              </a:lnSpc>
-              <a:buNone/>
-            </a:pPr>
-            <a:r>
-              <a:rPr lang="en-US" sz="1500" dirty="0">
-                <a:solidFill>
-                  <a:srgbClr val="E6EDF3"/>
-                </a:solidFill>
-                <a:latin typeface="Consolas" pitchFamily="34" charset="0"/>
-                <a:ea typeface="Consolas" pitchFamily="34" charset="-122"/>
-                <a:cs typeface="Consolas" pitchFamily="34" charset="-120"/>
-              </a:rPr>
-              <a:t> </a:t>
-            </a:r>
-            <a:pPr indent="0" marL="0">
-              <a:lnSpc>
-                <a:spcPct val="105000"/>
-              </a:lnSpc>
-              <a:buNone/>
-            </a:pPr>
-            <a:r>
-              <a:rPr lang="en-US" sz="1500" dirty="0">
-                <a:solidFill>
-                  <a:srgbClr val="FFCB6B"/>
-                </a:solidFill>
-                <a:latin typeface="Consolas" pitchFamily="34" charset="0"/>
-                <a:ea typeface="Consolas" pitchFamily="34" charset="-122"/>
-                <a:cs typeface="Consolas" pitchFamily="34" charset="-120"/>
-              </a:rPr>
-              <a:t>String</a:t>
-            </a:r>
-            <a:pPr indent="0" marL="0">
-              <a:lnSpc>
-                <a:spcPct val="105000"/>
-              </a:lnSpc>
-              <a:buNone/>
-            </a:pPr>
-            <a:r>
-              <a:rPr lang="en-US" sz="1500" dirty="0">
-                <a:solidFill>
-                  <a:srgbClr val="E6EDF3"/>
-                </a:solidFill>
-                <a:latin typeface="Consolas" pitchFamily="34" charset="0"/>
-                <a:ea typeface="Consolas" pitchFamily="34" charset="-122"/>
-                <a:cs typeface="Consolas" pitchFamily="34" charset="-120"/>
-              </a:rPr>
-              <a:t> namaPengguna = </a:t>
-            </a:r>
-            <a:pPr indent="0" marL="0">
-              <a:lnSpc>
-                <a:spcPct val="105000"/>
-              </a:lnSpc>
-              <a:buNone/>
-            </a:pPr>
-            <a:r>
-              <a:rPr lang="en-US" sz="1500" dirty="0">
-                <a:solidFill>
-                  <a:srgbClr val="C3E88D"/>
-                </a:solidFill>
-                <a:latin typeface="Consolas" pitchFamily="34" charset="0"/>
-                <a:ea typeface="Consolas" pitchFamily="34" charset="-122"/>
-                <a:cs typeface="Consolas" pitchFamily="34" charset="-120"/>
-              </a:rPr>
               <a:t>'Rina'</a:t>
             </a:r>
-            <a:pPr indent="0" marL="0">
-              <a:lnSpc>
-                <a:spcPct val="105000"/>
-              </a:lnSpc>
-              <a:buNone/>
-            </a:pPr>
             <a:r>
               <a:rPr lang="en-US" sz="1500" dirty="0">
                 <a:solidFill>
@@ -7220,6 +7076,53 @@
               </a:rPr>
               <a:t>String</a:t>
             </a:r>
+            <a:r>
+              <a:rPr lang="en-US" sz="1400" dirty="0">
+                <a:solidFill>
+                  <a:srgbClr val="E6EDF3"/>
+                </a:solidFill>
+                <a:latin typeface="Consolas" pitchFamily="34" charset="0"/>
+                <a:ea typeface="Consolas" pitchFamily="34" charset="-122"/>
+                <a:cs typeface="Consolas" pitchFamily="34" charset="-120"/>
+              </a:rPr>
+              <a:t> nama = </a:t>
+            </a:r>
+            <a:r>
+              <a:rPr lang="en-US" sz="1400" dirty="0">
+                <a:solidFill>
+                  <a:srgbClr val="C3E88D"/>
+                </a:solidFill>
+                <a:latin typeface="Consolas" pitchFamily="34" charset="0"/>
+                <a:ea typeface="Consolas" pitchFamily="34" charset="-122"/>
+                <a:cs typeface="Consolas" pitchFamily="34" charset="-120"/>
+              </a:rPr>
+              <a:t>'Dewi'</a:t>
+            </a:r>
+            <a:r>
+              <a:rPr lang="en-US" sz="1400" dirty="0">
+                <a:solidFill>
+                  <a:srgbClr val="E6EDF3"/>
+                </a:solidFill>
+                <a:latin typeface="Consolas" pitchFamily="34" charset="0"/>
+                <a:ea typeface="Consolas" pitchFamily="34" charset="-122"/>
+                <a:cs typeface="Consolas" pitchFamily="34" charset="-120"/>
+              </a:rPr>
+              <a:t>;                  </a:t>
+            </a:r>
+            <a:r>
+              <a:rPr lang="en-US" sz="1400" i="1" dirty="0">
+                <a:solidFill>
+                  <a:srgbClr val="8FA3BC"/>
+                </a:solidFill>
+                <a:latin typeface="Consolas" pitchFamily="34" charset="0"/>
+                <a:ea typeface="Consolas" pitchFamily="34" charset="-122"/>
+                <a:cs typeface="Consolas" pitchFamily="34" charset="-120"/>
+              </a:rPr>
+              <a:t>// tak boleh null</a:t>
+            </a:r>
+            <a:endParaRPr lang="en-US" sz="1400" dirty="0"/>
+          </a:p>
+          <a:p>
             <a:pPr indent="0" marL="0">
               <a:lnSpc>
                 <a:spcPct val="105000"/>
@@ -7229,14 +7132,39 @@
             <a:r>
               <a:rPr lang="en-US" sz="1400" dirty="0">
                 <a:solidFill>
+                  <a:srgbClr val="FFCB6B"/>
+                </a:solidFill>
+                <a:latin typeface="Consolas" pitchFamily="34" charset="0"/>
+                <a:ea typeface="Consolas" pitchFamily="34" charset="-122"/>
+                <a:cs typeface="Consolas" pitchFamily="34" charset="-120"/>
+              </a:rPr>
+              <a:t>String</a:t>
+            </a:r>
+            <a:r>
+              <a:rPr lang="en-US" sz="1400" dirty="0">
+                <a:solidFill>
                   <a:srgbClr val="E6EDF3"/>
                 </a:solidFill>
                 <a:latin typeface="Consolas" pitchFamily="34" charset="0"/>
                 <a:ea typeface="Consolas" pitchFamily="34" charset="-122"/>
                 <a:cs typeface="Consolas" pitchFamily="34" charset="-120"/>
               </a:rPr>
-              <a:t> nama = </a:t>
-            </a:r>
+              <a:t>? panggilan = cariPanggilan(nama); </a:t>
+            </a:r>
+            <a:r>
+              <a:rPr lang="en-US" sz="1400" i="1" dirty="0">
+                <a:solidFill>
+                  <a:srgbClr val="8FA3BC"/>
+                </a:solidFill>
+                <a:latin typeface="Consolas" pitchFamily="34" charset="0"/>
+                <a:ea typeface="Consolas" pitchFamily="34" charset="-122"/>
+                <a:cs typeface="Consolas" pitchFamily="34" charset="-120"/>
+              </a:rPr>
+              <a:t>// boleh null</a:t>
+            </a:r>
+            <a:endParaRPr lang="en-US" sz="1400" dirty="0"/>
+          </a:p>
+          <a:p>
             <a:pPr indent="0" marL="0">
               <a:lnSpc>
                 <a:spcPct val="105000"/>
@@ -7246,14 +7174,17 @@
             <a:r>
               <a:rPr lang="en-US" sz="1400" dirty="0">
                 <a:solidFill>
-                  <a:srgbClr val="C3E88D"/>
-                </a:solidFill>
-                <a:latin typeface="Consolas" pitchFamily="34" charset="0"/>
-                <a:ea typeface="Consolas" pitchFamily="34" charset="-122"/>
-                <a:cs typeface="Consolas" pitchFamily="34" charset="-120"/>
-              </a:rPr>
-              <a:t>'Dewi'</a:t>
-            </a:r>
+                  <a:srgbClr val="E6EDF3"/>
+                </a:solidFill>
+                <a:latin typeface="Consolas" pitchFamily="34" charset="0"/>
+                <a:ea typeface="Consolas" pitchFamily="34" charset="-122"/>
+                <a:cs typeface="Consolas" pitchFamily="34" charset="-120"/>
+              </a:rPr>
+              <a:t> </a:t>
+            </a:r>
+            <a:endParaRPr lang="en-US" sz="1400" dirty="0"/>
+          </a:p>
+          <a:p>
             <a:pPr indent="0" marL="0">
               <a:lnSpc>
                 <a:spcPct val="105000"/>
@@ -7269,8 +7200,22 @@
                 <a:ea typeface="Consolas" pitchFamily="34" charset="-122"/>
                 <a:cs typeface="Consolas" pitchFamily="34" charset="-120"/>
               </a:rPr>
-              <a:t>;                  </a:t>
-            </a:r>
+              <a:t>print(panggilan ?? nama);   </a:t>
+            </a:r>
+            <a:r>
+              <a:rPr lang="en-US" sz="1400" i="1" dirty="0">
+                <a:solidFill>
+                  <a:srgbClr val="8FA3BC"/>
+                </a:solidFill>
+                <a:latin typeface="Consolas" pitchFamily="34" charset="0"/>
+                <a:ea typeface="Consolas" pitchFamily="34" charset="-122"/>
+                <a:cs typeface="Consolas" pitchFamily="34" charset="-120"/>
+              </a:rPr>
+              <a:t>// Dewi</a:t>
+            </a:r>
+            <a:endParaRPr lang="en-US" sz="1400" dirty="0"/>
+          </a:p>
+          <a:p>
             <a:pPr indent="0" marL="0">
               <a:lnSpc>
                 <a:spcPct val="105000"/>
@@ -7278,6 +7223,17 @@
               <a:buNone/>
             </a:pPr>
             <a:r>
+              <a:rPr lang="en-US" sz="1400" dirty="0">
+                <a:solidFill>
+                  <a:srgbClr val="E6EDF3"/>
+                </a:solidFill>
+                <a:latin typeface="Consolas" pitchFamily="34" charset="0"/>
+                <a:ea typeface="Consolas" pitchFamily="34" charset="-122"/>
+                <a:cs typeface="Consolas" pitchFamily="34" charset="-120"/>
+              </a:rPr>
+              <a:t>print(panggilan?.length);   </a:t>
+            </a:r>
+            <a:r>
               <a:rPr lang="en-US" sz="1400" i="1" dirty="0">
                 <a:solidFill>
                   <a:srgbClr val="8FA3BC"/>
@@ -7286,7 +7242,7 @@
                 <a:ea typeface="Consolas" pitchFamily="34" charset="-122"/>
                 <a:cs typeface="Consolas" pitchFamily="34" charset="-120"/>
               </a:rPr>
-              <a:t>// tak boleh null</a:t>
+              <a:t>// null, tidak crash</a:t>
             </a:r>
             <a:endParaRPr lang="en-US" sz="1400" dirty="0"/>
           </a:p>
@@ -7300,14 +7256,50 @@
             <a:r>
               <a:rPr lang="en-US" sz="1400" dirty="0">
                 <a:solidFill>
-                  <a:srgbClr val="FFCB6B"/>
-                </a:solidFill>
-                <a:latin typeface="Consolas" pitchFamily="34" charset="0"/>
-                <a:ea typeface="Consolas" pitchFamily="34" charset="-122"/>
-                <a:cs typeface="Consolas" pitchFamily="34" charset="-120"/>
-              </a:rPr>
-              <a:t>String</a:t>
-            </a:r>
+                  <a:srgbClr val="E6EDF3"/>
+                </a:solidFill>
+                <a:latin typeface="Consolas" pitchFamily="34" charset="0"/>
+                <a:ea typeface="Consolas" pitchFamily="34" charset="-122"/>
+                <a:cs typeface="Consolas" pitchFamily="34" charset="-120"/>
+              </a:rPr>
+              <a:t>panggilan ??= </a:t>
+            </a:r>
+            <a:r>
+              <a:rPr lang="en-US" sz="1400" dirty="0">
+                <a:solidFill>
+                  <a:srgbClr val="C3E88D"/>
+                </a:solidFill>
+                <a:latin typeface="Consolas" pitchFamily="34" charset="0"/>
+                <a:ea typeface="Consolas" pitchFamily="34" charset="-122"/>
+                <a:cs typeface="Consolas" pitchFamily="34" charset="-120"/>
+              </a:rPr>
+              <a:t>'Dede'</a:t>
+            </a:r>
+            <a:r>
+              <a:rPr lang="en-US" sz="1400" dirty="0">
+                <a:solidFill>
+                  <a:srgbClr val="E6EDF3"/>
+                </a:solidFill>
+                <a:latin typeface="Consolas" pitchFamily="34" charset="0"/>
+                <a:ea typeface="Consolas" pitchFamily="34" charset="-122"/>
+                <a:cs typeface="Consolas" pitchFamily="34" charset="-120"/>
+              </a:rPr>
+              <a:t>;       </a:t>
+            </a:r>
+            <a:r>
+              <a:rPr lang="en-US" sz="1400" i="1" dirty="0">
+                <a:solidFill>
+                  <a:srgbClr val="8FA3BC"/>
+                </a:solidFill>
+                <a:latin typeface="Consolas" pitchFamily="34" charset="0"/>
+                <a:ea typeface="Consolas" pitchFamily="34" charset="-122"/>
+                <a:cs typeface="Consolas" pitchFamily="34" charset="-120"/>
+              </a:rPr>
+              <a:t>// isi jika masih null</a:t>
+            </a:r>
+            <a:endParaRPr lang="en-US" sz="1400" dirty="0"/>
+          </a:p>
+          <a:p>
             <a:pPr indent="0" marL="0">
               <a:lnSpc>
                 <a:spcPct val="105000"/>
@@ -7323,8 +7315,11 @@
                 <a:ea typeface="Consolas" pitchFamily="34" charset="-122"/>
                 <a:cs typeface="Consolas" pitchFamily="34" charset="-120"/>
               </a:rPr>
-              <a:t>? panggilan = cariPanggilan(nama); </a:t>
-            </a:r>
+              <a:t> </a:t>
+            </a:r>
+            <a:endParaRPr lang="en-US" sz="1400" dirty="0"/>
+          </a:p>
+          <a:p>
             <a:pPr indent="0" marL="0">
               <a:lnSpc>
                 <a:spcPct val="105000"/>
@@ -7332,6 +7327,72 @@
               <a:buNone/>
             </a:pPr>
             <a:r>
+              <a:rPr lang="en-US" sz="1400" dirty="0">
+                <a:solidFill>
+                  <a:srgbClr val="FFCB6B"/>
+                </a:solidFill>
+                <a:latin typeface="Consolas" pitchFamily="34" charset="0"/>
+                <a:ea typeface="Consolas" pitchFamily="34" charset="-122"/>
+                <a:cs typeface="Consolas" pitchFamily="34" charset="-120"/>
+              </a:rPr>
+              <a:t>int</a:t>
+            </a:r>
+            <a:r>
+              <a:rPr lang="en-US" sz="1400" dirty="0">
+                <a:solidFill>
+                  <a:srgbClr val="E6EDF3"/>
+                </a:solidFill>
+                <a:latin typeface="Consolas" pitchFamily="34" charset="0"/>
+                <a:ea typeface="Consolas" pitchFamily="34" charset="-122"/>
+                <a:cs typeface="Consolas" pitchFamily="34" charset="-120"/>
+              </a:rPr>
+              <a:t>? umur = </a:t>
+            </a:r>
+            <a:r>
+              <a:rPr lang="en-US" sz="1400" dirty="0">
+                <a:solidFill>
+                  <a:srgbClr val="FFCB6B"/>
+                </a:solidFill>
+                <a:latin typeface="Consolas" pitchFamily="34" charset="0"/>
+                <a:ea typeface="Consolas" pitchFamily="34" charset="-122"/>
+                <a:cs typeface="Consolas" pitchFamily="34" charset="-120"/>
+              </a:rPr>
+              <a:t>int</a:t>
+            </a:r>
+            <a:r>
+              <a:rPr lang="en-US" sz="1400" dirty="0">
+                <a:solidFill>
+                  <a:srgbClr val="E6EDF3"/>
+                </a:solidFill>
+                <a:latin typeface="Consolas" pitchFamily="34" charset="0"/>
+                <a:ea typeface="Consolas" pitchFamily="34" charset="-122"/>
+                <a:cs typeface="Consolas" pitchFamily="34" charset="-120"/>
+              </a:rPr>
+              <a:t>.tryParse(</a:t>
+            </a:r>
+            <a:r>
+              <a:rPr lang="en-US" sz="1400" dirty="0">
+                <a:solidFill>
+                  <a:srgbClr val="C3E88D"/>
+                </a:solidFill>
+                <a:latin typeface="Consolas" pitchFamily="34" charset="0"/>
+                <a:ea typeface="Consolas" pitchFamily="34" charset="-122"/>
+                <a:cs typeface="Consolas" pitchFamily="34" charset="-120"/>
+              </a:rPr>
+              <a:t>'dua puluh'</a:t>
+            </a:r>
+            <a:r>
+              <a:rPr lang="en-US" sz="1400" dirty="0">
+                <a:solidFill>
+                  <a:srgbClr val="E6EDF3"/>
+                </a:solidFill>
+                <a:latin typeface="Consolas" pitchFamily="34" charset="0"/>
+                <a:ea typeface="Consolas" pitchFamily="34" charset="-122"/>
+                <a:cs typeface="Consolas" pitchFamily="34" charset="-120"/>
+              </a:rPr>
+              <a:t>); </a:t>
+            </a:r>
+            <a:r>
               <a:rPr lang="en-US" sz="1400" i="1" dirty="0">
                 <a:solidFill>
                   <a:srgbClr val="8FA3BC"/>
@@ -7340,7 +7401,7 @@
                 <a:ea typeface="Consolas" pitchFamily="34" charset="-122"/>
                 <a:cs typeface="Consolas" pitchFamily="34" charset="-120"/>
               </a:rPr>
-              <a:t>// boleh null</a:t>
+              <a:t>// null</a:t>
             </a:r>
             <a:endParaRPr lang="en-US" sz="1400" dirty="0"/>
           </a:p>
@@ -7360,7 +7421,40 @@
                 <a:ea typeface="Consolas" pitchFamily="34" charset="-122"/>
                 <a:cs typeface="Consolas" pitchFamily="34" charset="-120"/>
               </a:rPr>
-              <a:t> </a:t>
+              <a:t>print(umur ?? </a:t>
+            </a:r>
+            <a:r>
+              <a:rPr lang="en-US" sz="1400" dirty="0">
+                <a:solidFill>
+                  <a:srgbClr val="F78C6C"/>
+                </a:solidFill>
+                <a:latin typeface="Consolas" pitchFamily="34" charset="0"/>
+                <a:ea typeface="Consolas" pitchFamily="34" charset="-122"/>
+                <a:cs typeface="Consolas" pitchFamily="34" charset="-120"/>
+              </a:rPr>
+              <a:t>0</a:t>
+            </a:r>
+            <a:r>
+              <a:rPr lang="en-US" sz="1400" dirty="0">
+                <a:solidFill>
+                  <a:srgbClr val="E6EDF3"/>
+                </a:solidFill>
+                <a:latin typeface="Consolas" pitchFamily="34" charset="0"/>
+                <a:ea typeface="Consolas" pitchFamily="34" charset="-122"/>
+                <a:cs typeface="Consolas" pitchFamily="34" charset="-120"/>
+              </a:rPr>
+              <a:t>);           </a:t>
+            </a:r>
+            <a:r>
+              <a:rPr lang="en-US" sz="1400" i="1" dirty="0">
+                <a:solidFill>
+                  <a:srgbClr val="8FA3BC"/>
+                </a:solidFill>
+                <a:latin typeface="Consolas" pitchFamily="34" charset="0"/>
+                <a:ea typeface="Consolas" pitchFamily="34" charset="-122"/>
+                <a:cs typeface="Consolas" pitchFamily="34" charset="-120"/>
+              </a:rPr>
+              <a:t>// 0</a:t>
             </a:r>
             <a:endParaRPr lang="en-US" sz="1400" dirty="0"/>
           </a:p>
@@ -7380,8 +7474,11 @@
                 <a:ea typeface="Consolas" pitchFamily="34" charset="-122"/>
                 <a:cs typeface="Consolas" pitchFamily="34" charset="-120"/>
               </a:rPr>
-              <a:t>print(panggilan ?? nama);   </a:t>
-            </a:r>
+              <a:t> </a:t>
+            </a:r>
+            <a:endParaRPr lang="en-US" sz="1400" dirty="0"/>
+          </a:p>
+          <a:p>
             <a:pPr indent="0" marL="0">
               <a:lnSpc>
                 <a:spcPct val="105000"/>
@@ -7389,15 +7486,48 @@
               <a:buNone/>
             </a:pPr>
             <a:r>
-              <a:rPr lang="en-US" sz="1400" i="1" dirty="0">
-                <a:solidFill>
-                  <a:srgbClr val="8FA3BC"/>
-                </a:solidFill>
-                <a:latin typeface="Consolas" pitchFamily="34" charset="0"/>
-                <a:ea typeface="Consolas" pitchFamily="34" charset="-122"/>
-                <a:cs typeface="Consolas" pitchFamily="34" charset="-120"/>
-              </a:rPr>
-              <a:t>// Dewi</a:t>
+              <a:rPr lang="en-US" sz="1400" dirty="0">
+                <a:solidFill>
+                  <a:srgbClr val="FFCB6B"/>
+                </a:solidFill>
+                <a:latin typeface="Consolas" pitchFamily="34" charset="0"/>
+                <a:ea typeface="Consolas" pitchFamily="34" charset="-122"/>
+                <a:cs typeface="Consolas" pitchFamily="34" charset="-120"/>
+              </a:rPr>
+              <a:t>String</a:t>
+            </a:r>
+            <a:r>
+              <a:rPr lang="en-US" sz="1400" dirty="0">
+                <a:solidFill>
+                  <a:srgbClr val="E6EDF3"/>
+                </a:solidFill>
+                <a:latin typeface="Consolas" pitchFamily="34" charset="0"/>
+                <a:ea typeface="Consolas" pitchFamily="34" charset="-122"/>
+                <a:cs typeface="Consolas" pitchFamily="34" charset="-120"/>
+              </a:rPr>
+              <a:t>? email = cariEmail(</a:t>
+            </a:r>
+            <a:r>
+              <a:rPr lang="en-US" sz="1400" dirty="0">
+                <a:solidFill>
+                  <a:srgbClr val="C3E88D"/>
+                </a:solidFill>
+                <a:latin typeface="Consolas" pitchFamily="34" charset="0"/>
+                <a:ea typeface="Consolas" pitchFamily="34" charset="-122"/>
+                <a:cs typeface="Consolas" pitchFamily="34" charset="-120"/>
+              </a:rPr>
+              <a:t>'Andi'</a:t>
+            </a:r>
+            <a:r>
+              <a:rPr lang="en-US" sz="1400" dirty="0">
+                <a:solidFill>
+                  <a:srgbClr val="E6EDF3"/>
+                </a:solidFill>
+                <a:latin typeface="Consolas" pitchFamily="34" charset="0"/>
+                <a:ea typeface="Consolas" pitchFamily="34" charset="-122"/>
+                <a:cs typeface="Consolas" pitchFamily="34" charset="-120"/>
+              </a:rPr>
+              <a:t>);</a:t>
             </a:r>
             <a:endParaRPr lang="en-US" sz="1400" dirty="0"/>
           </a:p>
@@ -7411,14 +7541,50 @@
             <a:r>
               <a:rPr lang="en-US" sz="1400" dirty="0">
                 <a:solidFill>
+                  <a:srgbClr val="C792EA"/>
+                </a:solidFill>
+                <a:latin typeface="Consolas" pitchFamily="34" charset="0"/>
+                <a:ea typeface="Consolas" pitchFamily="34" charset="-122"/>
+                <a:cs typeface="Consolas" pitchFamily="34" charset="-120"/>
+              </a:rPr>
+              <a:t>if</a:t>
+            </a:r>
+            <a:r>
+              <a:rPr lang="en-US" sz="1400" dirty="0">
+                <a:solidFill>
                   <a:srgbClr val="E6EDF3"/>
                 </a:solidFill>
                 <a:latin typeface="Consolas" pitchFamily="34" charset="0"/>
                 <a:ea typeface="Consolas" pitchFamily="34" charset="-122"/>
                 <a:cs typeface="Consolas" pitchFamily="34" charset="-120"/>
               </a:rPr>
-              <a:t>print(panggilan?.length);   </a:t>
-            </a:r>
+              <a:t> (email != </a:t>
+            </a:r>
+            <a:r>
+              <a:rPr lang="en-US" sz="1400" dirty="0">
+                <a:solidFill>
+                  <a:srgbClr val="C792EA"/>
+                </a:solidFill>
+                <a:latin typeface="Consolas" pitchFamily="34" charset="0"/>
+                <a:ea typeface="Consolas" pitchFamily="34" charset="-122"/>
+                <a:cs typeface="Consolas" pitchFamily="34" charset="-120"/>
+              </a:rPr>
+              <a:t>null</a:t>
+            </a:r>
+            <a:r>
+              <a:rPr lang="en-US" sz="1400" dirty="0">
+                <a:solidFill>
+                  <a:srgbClr val="E6EDF3"/>
+                </a:solidFill>
+                <a:latin typeface="Consolas" pitchFamily="34" charset="0"/>
+                <a:ea typeface="Consolas" pitchFamily="34" charset="-122"/>
+                <a:cs typeface="Consolas" pitchFamily="34" charset="-120"/>
+              </a:rPr>
+              <a:t>) {</a:t>
+            </a:r>
+            <a:endParaRPr lang="en-US" sz="1400" dirty="0"/>
+          </a:p>
+          <a:p>
             <a:pPr indent="0" marL="0">
               <a:lnSpc>
                 <a:spcPct val="105000"/>
@@ -7426,26 +7592,6 @@
               <a:buNone/>
             </a:pPr>
             <a:r>
-              <a:rPr lang="en-US" sz="1400" i="1" dirty="0">
-                <a:solidFill>
-                  <a:srgbClr val="8FA3BC"/>
-                </a:solidFill>
-                <a:latin typeface="Consolas" pitchFamily="34" charset="0"/>
-                <a:ea typeface="Consolas" pitchFamily="34" charset="-122"/>
-                <a:cs typeface="Consolas" pitchFamily="34" charset="-120"/>
-              </a:rPr>
-              <a:t>// null, tidak crash</a:t>
-            </a:r>
-            <a:endParaRPr lang="en-US" sz="1400" dirty="0"/>
-          </a:p>
-          <a:p>
-            <a:pPr indent="0" marL="0">
-              <a:lnSpc>
-                <a:spcPct val="105000"/>
-              </a:lnSpc>
-              <a:buNone/>
-            </a:pPr>
-            <a:r>
               <a:rPr lang="en-US" sz="1400" dirty="0">
                 <a:solidFill>
                   <a:srgbClr val="E6EDF3"/>
@@ -7454,460 +7600,8 @@
                 <a:ea typeface="Consolas" pitchFamily="34" charset="-122"/>
                 <a:cs typeface="Consolas" pitchFamily="34" charset="-120"/>
               </a:rPr>
-              <a:t>panggilan ??= </a:t>
-            </a:r>
-            <a:pPr indent="0" marL="0">
-              <a:lnSpc>
-                <a:spcPct val="105000"/>
-              </a:lnSpc>
-              <a:buNone/>
-            </a:pPr>
-            <a:r>
-              <a:rPr lang="en-US" sz="1400" dirty="0">
-                <a:solidFill>
-                  <a:srgbClr val="C3E88D"/>
-                </a:solidFill>
-                <a:latin typeface="Consolas" pitchFamily="34" charset="0"/>
-                <a:ea typeface="Consolas" pitchFamily="34" charset="-122"/>
-                <a:cs typeface="Consolas" pitchFamily="34" charset="-120"/>
-              </a:rPr>
-              <a:t>'Dede'</a:t>
-            </a:r>
-            <a:pPr indent="0" marL="0">
-              <a:lnSpc>
-                <a:spcPct val="105000"/>
-              </a:lnSpc>
-              <a:buNone/>
-            </a:pPr>
-            <a:r>
-              <a:rPr lang="en-US" sz="1400" dirty="0">
-                <a:solidFill>
-                  <a:srgbClr val="E6EDF3"/>
-                </a:solidFill>
-                <a:latin typeface="Consolas" pitchFamily="34" charset="0"/>
-                <a:ea typeface="Consolas" pitchFamily="34" charset="-122"/>
-                <a:cs typeface="Consolas" pitchFamily="34" charset="-120"/>
-              </a:rPr>
-              <a:t>;       </a:t>
-            </a:r>
-            <a:pPr indent="0" marL="0">
-              <a:lnSpc>
-                <a:spcPct val="105000"/>
-              </a:lnSpc>
-              <a:buNone/>
-            </a:pPr>
-            <a:r>
-              <a:rPr lang="en-US" sz="1400" i="1" dirty="0">
-                <a:solidFill>
-                  <a:srgbClr val="8FA3BC"/>
-                </a:solidFill>
-                <a:latin typeface="Consolas" pitchFamily="34" charset="0"/>
-                <a:ea typeface="Consolas" pitchFamily="34" charset="-122"/>
-                <a:cs typeface="Consolas" pitchFamily="34" charset="-120"/>
-              </a:rPr>
-              <a:t>// isi jika masih null</a:t>
-            </a:r>
-            <a:endParaRPr lang="en-US" sz="1400" dirty="0"/>
-          </a:p>
-          <a:p>
-            <a:pPr indent="0" marL="0">
-              <a:lnSpc>
-                <a:spcPct val="105000"/>
-              </a:lnSpc>
-              <a:buNone/>
-            </a:pPr>
-            <a:r>
-              <a:rPr lang="en-US" sz="1400" dirty="0">
-                <a:solidFill>
-                  <a:srgbClr val="E6EDF3"/>
-                </a:solidFill>
-                <a:latin typeface="Consolas" pitchFamily="34" charset="0"/>
-                <a:ea typeface="Consolas" pitchFamily="34" charset="-122"/>
-                <a:cs typeface="Consolas" pitchFamily="34" charset="-120"/>
-              </a:rPr>
-              <a:t> </a:t>
-            </a:r>
-            <a:endParaRPr lang="en-US" sz="1400" dirty="0"/>
-          </a:p>
-          <a:p>
-            <a:pPr indent="0" marL="0">
-              <a:lnSpc>
-                <a:spcPct val="105000"/>
-              </a:lnSpc>
-              <a:buNone/>
-            </a:pPr>
-            <a:r>
-              <a:rPr lang="en-US" sz="1400" dirty="0">
-                <a:solidFill>
-                  <a:srgbClr val="FFCB6B"/>
-                </a:solidFill>
-                <a:latin typeface="Consolas" pitchFamily="34" charset="0"/>
-                <a:ea typeface="Consolas" pitchFamily="34" charset="-122"/>
-                <a:cs typeface="Consolas" pitchFamily="34" charset="-120"/>
-              </a:rPr>
-              <a:t>int</a:t>
-            </a:r>
-            <a:pPr indent="0" marL="0">
-              <a:lnSpc>
-                <a:spcPct val="105000"/>
-              </a:lnSpc>
-              <a:buNone/>
-            </a:pPr>
-            <a:r>
-              <a:rPr lang="en-US" sz="1400" dirty="0">
-                <a:solidFill>
-                  <a:srgbClr val="E6EDF3"/>
-                </a:solidFill>
-                <a:latin typeface="Consolas" pitchFamily="34" charset="0"/>
-                <a:ea typeface="Consolas" pitchFamily="34" charset="-122"/>
-                <a:cs typeface="Consolas" pitchFamily="34" charset="-120"/>
-              </a:rPr>
-              <a:t>? umur = </a:t>
-            </a:r>
-            <a:pPr indent="0" marL="0">
-              <a:lnSpc>
-                <a:spcPct val="105000"/>
-              </a:lnSpc>
-              <a:buNone/>
-            </a:pPr>
-            <a:r>
-              <a:rPr lang="en-US" sz="1400" dirty="0">
-                <a:solidFill>
-                  <a:srgbClr val="FFCB6B"/>
-                </a:solidFill>
-                <a:latin typeface="Consolas" pitchFamily="34" charset="0"/>
-                <a:ea typeface="Consolas" pitchFamily="34" charset="-122"/>
-                <a:cs typeface="Consolas" pitchFamily="34" charset="-120"/>
-              </a:rPr>
-              <a:t>int</a:t>
-            </a:r>
-            <a:pPr indent="0" marL="0">
-              <a:lnSpc>
-                <a:spcPct val="105000"/>
-              </a:lnSpc>
-              <a:buNone/>
-            </a:pPr>
-            <a:r>
-              <a:rPr lang="en-US" sz="1400" dirty="0">
-                <a:solidFill>
-                  <a:srgbClr val="E6EDF3"/>
-                </a:solidFill>
-                <a:latin typeface="Consolas" pitchFamily="34" charset="0"/>
-                <a:ea typeface="Consolas" pitchFamily="34" charset="-122"/>
-                <a:cs typeface="Consolas" pitchFamily="34" charset="-120"/>
-              </a:rPr>
-              <a:t>.tryParse(</a:t>
-            </a:r>
-            <a:pPr indent="0" marL="0">
-              <a:lnSpc>
-                <a:spcPct val="105000"/>
-              </a:lnSpc>
-              <a:buNone/>
-            </a:pPr>
-            <a:r>
-              <a:rPr lang="en-US" sz="1400" dirty="0">
-                <a:solidFill>
-                  <a:srgbClr val="C3E88D"/>
-                </a:solidFill>
-                <a:latin typeface="Consolas" pitchFamily="34" charset="0"/>
-                <a:ea typeface="Consolas" pitchFamily="34" charset="-122"/>
-                <a:cs typeface="Consolas" pitchFamily="34" charset="-120"/>
-              </a:rPr>
-              <a:t>'dua puluh'</a:t>
-            </a:r>
-            <a:pPr indent="0" marL="0">
-              <a:lnSpc>
-                <a:spcPct val="105000"/>
-              </a:lnSpc>
-              <a:buNone/>
-            </a:pPr>
-            <a:r>
-              <a:rPr lang="en-US" sz="1400" dirty="0">
-                <a:solidFill>
-                  <a:srgbClr val="E6EDF3"/>
-                </a:solidFill>
-                <a:latin typeface="Consolas" pitchFamily="34" charset="0"/>
-                <a:ea typeface="Consolas" pitchFamily="34" charset="-122"/>
-                <a:cs typeface="Consolas" pitchFamily="34" charset="-120"/>
-              </a:rPr>
-              <a:t>); </a:t>
-            </a:r>
-            <a:pPr indent="0" marL="0">
-              <a:lnSpc>
-                <a:spcPct val="105000"/>
-              </a:lnSpc>
-              <a:buNone/>
-            </a:pPr>
-            <a:r>
-              <a:rPr lang="en-US" sz="1400" i="1" dirty="0">
-                <a:solidFill>
-                  <a:srgbClr val="8FA3BC"/>
-                </a:solidFill>
-                <a:latin typeface="Consolas" pitchFamily="34" charset="0"/>
-                <a:ea typeface="Consolas" pitchFamily="34" charset="-122"/>
-                <a:cs typeface="Consolas" pitchFamily="34" charset="-120"/>
-              </a:rPr>
-              <a:t>// null</a:t>
-            </a:r>
-            <a:endParaRPr lang="en-US" sz="1400" dirty="0"/>
-          </a:p>
-          <a:p>
-            <a:pPr indent="0" marL="0">
-              <a:lnSpc>
-                <a:spcPct val="105000"/>
-              </a:lnSpc>
-              <a:buNone/>
-            </a:pPr>
-            <a:r>
-              <a:rPr lang="en-US" sz="1400" dirty="0">
-                <a:solidFill>
-                  <a:srgbClr val="E6EDF3"/>
-                </a:solidFill>
-                <a:latin typeface="Consolas" pitchFamily="34" charset="0"/>
-                <a:ea typeface="Consolas" pitchFamily="34" charset="-122"/>
-                <a:cs typeface="Consolas" pitchFamily="34" charset="-120"/>
-              </a:rPr>
-              <a:t>print(umur ?? </a:t>
-            </a:r>
-            <a:pPr indent="0" marL="0">
-              <a:lnSpc>
-                <a:spcPct val="105000"/>
-              </a:lnSpc>
-              <a:buNone/>
-            </a:pPr>
-            <a:r>
-              <a:rPr lang="en-US" sz="1400" dirty="0">
-                <a:solidFill>
-                  <a:srgbClr val="F78C6C"/>
-                </a:solidFill>
-                <a:latin typeface="Consolas" pitchFamily="34" charset="0"/>
-                <a:ea typeface="Consolas" pitchFamily="34" charset="-122"/>
-                <a:cs typeface="Consolas" pitchFamily="34" charset="-120"/>
-              </a:rPr>
-              <a:t>0</a:t>
-            </a:r>
-            <a:pPr indent="0" marL="0">
-              <a:lnSpc>
-                <a:spcPct val="105000"/>
-              </a:lnSpc>
-              <a:buNone/>
-            </a:pPr>
-            <a:r>
-              <a:rPr lang="en-US" sz="1400" dirty="0">
-                <a:solidFill>
-                  <a:srgbClr val="E6EDF3"/>
-                </a:solidFill>
-                <a:latin typeface="Consolas" pitchFamily="34" charset="0"/>
-                <a:ea typeface="Consolas" pitchFamily="34" charset="-122"/>
-                <a:cs typeface="Consolas" pitchFamily="34" charset="-120"/>
-              </a:rPr>
-              <a:t>);           </a:t>
-            </a:r>
-            <a:pPr indent="0" marL="0">
-              <a:lnSpc>
-                <a:spcPct val="105000"/>
-              </a:lnSpc>
-              <a:buNone/>
-            </a:pPr>
-            <a:r>
-              <a:rPr lang="en-US" sz="1400" i="1" dirty="0">
-                <a:solidFill>
-                  <a:srgbClr val="8FA3BC"/>
-                </a:solidFill>
-                <a:latin typeface="Consolas" pitchFamily="34" charset="0"/>
-                <a:ea typeface="Consolas" pitchFamily="34" charset="-122"/>
-                <a:cs typeface="Consolas" pitchFamily="34" charset="-120"/>
-              </a:rPr>
-              <a:t>// 0</a:t>
-            </a:r>
-            <a:endParaRPr lang="en-US" sz="1400" dirty="0"/>
-          </a:p>
-          <a:p>
-            <a:pPr indent="0" marL="0">
-              <a:lnSpc>
-                <a:spcPct val="105000"/>
-              </a:lnSpc>
-              <a:buNone/>
-            </a:pPr>
-            <a:r>
-              <a:rPr lang="en-US" sz="1400" dirty="0">
-                <a:solidFill>
-                  <a:srgbClr val="E6EDF3"/>
-                </a:solidFill>
-                <a:latin typeface="Consolas" pitchFamily="34" charset="0"/>
-                <a:ea typeface="Consolas" pitchFamily="34" charset="-122"/>
-                <a:cs typeface="Consolas" pitchFamily="34" charset="-120"/>
-              </a:rPr>
-              <a:t> </a:t>
-            </a:r>
-            <a:endParaRPr lang="en-US" sz="1400" dirty="0"/>
-          </a:p>
-          <a:p>
-            <a:pPr indent="0" marL="0">
-              <a:lnSpc>
-                <a:spcPct val="105000"/>
-              </a:lnSpc>
-              <a:buNone/>
-            </a:pPr>
-            <a:r>
-              <a:rPr lang="en-US" sz="1400" dirty="0">
-                <a:solidFill>
-                  <a:srgbClr val="FFCB6B"/>
-                </a:solidFill>
-                <a:latin typeface="Consolas" pitchFamily="34" charset="0"/>
-                <a:ea typeface="Consolas" pitchFamily="34" charset="-122"/>
-                <a:cs typeface="Consolas" pitchFamily="34" charset="-120"/>
-              </a:rPr>
-              <a:t>String</a:t>
-            </a:r>
-            <a:pPr indent="0" marL="0">
-              <a:lnSpc>
-                <a:spcPct val="105000"/>
-              </a:lnSpc>
-              <a:buNone/>
-            </a:pPr>
-            <a:r>
-              <a:rPr lang="en-US" sz="1400" dirty="0">
-                <a:solidFill>
-                  <a:srgbClr val="E6EDF3"/>
-                </a:solidFill>
-                <a:latin typeface="Consolas" pitchFamily="34" charset="0"/>
-                <a:ea typeface="Consolas" pitchFamily="34" charset="-122"/>
-                <a:cs typeface="Consolas" pitchFamily="34" charset="-120"/>
-              </a:rPr>
-              <a:t>? email = cariEmail(</a:t>
-            </a:r>
-            <a:pPr indent="0" marL="0">
-              <a:lnSpc>
-                <a:spcPct val="105000"/>
-              </a:lnSpc>
-              <a:buNone/>
-            </a:pPr>
-            <a:r>
-              <a:rPr lang="en-US" sz="1400" dirty="0">
-                <a:solidFill>
-                  <a:srgbClr val="C3E88D"/>
-                </a:solidFill>
-                <a:latin typeface="Consolas" pitchFamily="34" charset="0"/>
-                <a:ea typeface="Consolas" pitchFamily="34" charset="-122"/>
-                <a:cs typeface="Consolas" pitchFamily="34" charset="-120"/>
-              </a:rPr>
-              <a:t>'Andi'</a:t>
-            </a:r>
-            <a:pPr indent="0" marL="0">
-              <a:lnSpc>
-                <a:spcPct val="105000"/>
-              </a:lnSpc>
-              <a:buNone/>
-            </a:pPr>
-            <a:r>
-              <a:rPr lang="en-US" sz="1400" dirty="0">
-                <a:solidFill>
-                  <a:srgbClr val="E6EDF3"/>
-                </a:solidFill>
-                <a:latin typeface="Consolas" pitchFamily="34" charset="0"/>
-                <a:ea typeface="Consolas" pitchFamily="34" charset="-122"/>
-                <a:cs typeface="Consolas" pitchFamily="34" charset="-120"/>
-              </a:rPr>
-              <a:t>);</a:t>
-            </a:r>
-            <a:endParaRPr lang="en-US" sz="1400" dirty="0"/>
-          </a:p>
-          <a:p>
-            <a:pPr indent="0" marL="0">
-              <a:lnSpc>
-                <a:spcPct val="105000"/>
-              </a:lnSpc>
-              <a:buNone/>
-            </a:pPr>
-            <a:r>
-              <a:rPr lang="en-US" sz="1400" dirty="0">
-                <a:solidFill>
-                  <a:srgbClr val="C792EA"/>
-                </a:solidFill>
-                <a:latin typeface="Consolas" pitchFamily="34" charset="0"/>
-                <a:ea typeface="Consolas" pitchFamily="34" charset="-122"/>
-                <a:cs typeface="Consolas" pitchFamily="34" charset="-120"/>
-              </a:rPr>
-              <a:t>if</a:t>
-            </a:r>
-            <a:pPr indent="0" marL="0">
-              <a:lnSpc>
-                <a:spcPct val="105000"/>
-              </a:lnSpc>
-              <a:buNone/>
-            </a:pPr>
-            <a:r>
-              <a:rPr lang="en-US" sz="1400" dirty="0">
-                <a:solidFill>
-                  <a:srgbClr val="E6EDF3"/>
-                </a:solidFill>
-                <a:latin typeface="Consolas" pitchFamily="34" charset="0"/>
-                <a:ea typeface="Consolas" pitchFamily="34" charset="-122"/>
-                <a:cs typeface="Consolas" pitchFamily="34" charset="-120"/>
-              </a:rPr>
-              <a:t> (email != </a:t>
-            </a:r>
-            <a:pPr indent="0" marL="0">
-              <a:lnSpc>
-                <a:spcPct val="105000"/>
-              </a:lnSpc>
-              <a:buNone/>
-            </a:pPr>
-            <a:r>
-              <a:rPr lang="en-US" sz="1400" dirty="0">
-                <a:solidFill>
-                  <a:srgbClr val="C792EA"/>
-                </a:solidFill>
-                <a:latin typeface="Consolas" pitchFamily="34" charset="0"/>
-                <a:ea typeface="Consolas" pitchFamily="34" charset="-122"/>
-                <a:cs typeface="Consolas" pitchFamily="34" charset="-120"/>
-              </a:rPr>
-              <a:t>null</a:t>
-            </a:r>
-            <a:pPr indent="0" marL="0">
-              <a:lnSpc>
-                <a:spcPct val="105000"/>
-              </a:lnSpc>
-              <a:buNone/>
-            </a:pPr>
-            <a:r>
-              <a:rPr lang="en-US" sz="1400" dirty="0">
-                <a:solidFill>
-                  <a:srgbClr val="E6EDF3"/>
-                </a:solidFill>
-                <a:latin typeface="Consolas" pitchFamily="34" charset="0"/>
-                <a:ea typeface="Consolas" pitchFamily="34" charset="-122"/>
-                <a:cs typeface="Consolas" pitchFamily="34" charset="-120"/>
-              </a:rPr>
-              <a:t>) {</a:t>
-            </a:r>
-            <a:endParaRPr lang="en-US" sz="1400" dirty="0"/>
-          </a:p>
-          <a:p>
-            <a:pPr indent="0" marL="0">
-              <a:lnSpc>
-                <a:spcPct val="105000"/>
-              </a:lnSpc>
-              <a:buNone/>
-            </a:pPr>
-            <a:r>
-              <a:rPr lang="en-US" sz="1400" dirty="0">
-                <a:solidFill>
-                  <a:srgbClr val="E6EDF3"/>
-                </a:solidFill>
-                <a:latin typeface="Consolas" pitchFamily="34" charset="0"/>
-                <a:ea typeface="Consolas" pitchFamily="34" charset="-122"/>
-                <a:cs typeface="Consolas" pitchFamily="34" charset="-120"/>
-              </a:rPr>
               <a:t>  print(email.length);      </a:t>
             </a:r>
-            <a:pPr indent="0" marL="0">
-              <a:lnSpc>
-                <a:spcPct val="105000"/>
-              </a:lnSpc>
-              <a:buNone/>
-            </a:pPr>
             <a:r>
               <a:rPr lang="en-US" sz="1400" i="1" dirty="0">
                 <a:solidFill>
@@ -10571,6 +10265,20 @@
               </a:rPr>
               <a:t>String</a:t>
             </a:r>
+            <a:r>
+              <a:rPr lang="en-US" sz="1400" dirty="0">
+                <a:solidFill>
+                  <a:srgbClr val="E6EDF3"/>
+                </a:solidFill>
+                <a:latin typeface="Consolas" pitchFamily="34" charset="0"/>
+                <a:ea typeface="Consolas" pitchFamily="34" charset="-122"/>
+                <a:cs typeface="Consolas" pitchFamily="34" charset="-120"/>
+              </a:rPr>
+              <a:t> huruf;</a:t>
+            </a:r>
+            <a:endParaRPr lang="en-US" sz="1400" dirty="0"/>
+          </a:p>
+          <a:p>
             <a:pPr indent="0" marL="0">
               <a:lnSpc>
                 <a:spcPct val="105000"/>
@@ -10580,13 +10288,46 @@
             <a:r>
               <a:rPr lang="en-US" sz="1400" dirty="0">
                 <a:solidFill>
+                  <a:srgbClr val="C792EA"/>
+                </a:solidFill>
+                <a:latin typeface="Consolas" pitchFamily="34" charset="0"/>
+                <a:ea typeface="Consolas" pitchFamily="34" charset="-122"/>
+                <a:cs typeface="Consolas" pitchFamily="34" charset="-120"/>
+              </a:rPr>
+              <a:t>if</a:t>
+            </a:r>
+            <a:r>
+              <a:rPr lang="en-US" sz="1400" dirty="0">
+                <a:solidFill>
                   <a:srgbClr val="E6EDF3"/>
                 </a:solidFill>
                 <a:latin typeface="Consolas" pitchFamily="34" charset="0"/>
                 <a:ea typeface="Consolas" pitchFamily="34" charset="-122"/>
                 <a:cs typeface="Consolas" pitchFamily="34" charset="-120"/>
               </a:rPr>
-              <a:t> huruf;</a:t>
+              <a:t> (nilai &gt;= </a:t>
+            </a:r>
+            <a:r>
+              <a:rPr lang="en-US" sz="1400" dirty="0">
+                <a:solidFill>
+                  <a:srgbClr val="F78C6C"/>
+                </a:solidFill>
+                <a:latin typeface="Consolas" pitchFamily="34" charset="0"/>
+                <a:ea typeface="Consolas" pitchFamily="34" charset="-122"/>
+                <a:cs typeface="Consolas" pitchFamily="34" charset="-120"/>
+              </a:rPr>
+              <a:t>85</a:t>
+            </a:r>
+            <a:r>
+              <a:rPr lang="en-US" sz="1400" dirty="0">
+                <a:solidFill>
+                  <a:srgbClr val="E6EDF3"/>
+                </a:solidFill>
+                <a:latin typeface="Consolas" pitchFamily="34" charset="0"/>
+                <a:ea typeface="Consolas" pitchFamily="34" charset="-122"/>
+                <a:cs typeface="Consolas" pitchFamily="34" charset="-120"/>
+              </a:rPr>
+              <a:t>) {</a:t>
             </a:r>
             <a:endParaRPr lang="en-US" sz="1400" dirty="0"/>
           </a:p>
@@ -10600,14 +10341,39 @@
             <a:r>
               <a:rPr lang="en-US" sz="1400" dirty="0">
                 <a:solidFill>
-                  <a:srgbClr val="C792EA"/>
-                </a:solidFill>
-                <a:latin typeface="Consolas" pitchFamily="34" charset="0"/>
-                <a:ea typeface="Consolas" pitchFamily="34" charset="-122"/>
-                <a:cs typeface="Consolas" pitchFamily="34" charset="-120"/>
-              </a:rPr>
-              <a:t>if</a:t>
-            </a:r>
+                  <a:srgbClr val="E6EDF3"/>
+                </a:solidFill>
+                <a:latin typeface="Consolas" pitchFamily="34" charset="0"/>
+                <a:ea typeface="Consolas" pitchFamily="34" charset="-122"/>
+                <a:cs typeface="Consolas" pitchFamily="34" charset="-120"/>
+              </a:rPr>
+              <a:t>  huruf = </a:t>
+            </a:r>
+            <a:r>
+              <a:rPr lang="en-US" sz="1400" dirty="0">
+                <a:solidFill>
+                  <a:srgbClr val="C3E88D"/>
+                </a:solidFill>
+                <a:latin typeface="Consolas" pitchFamily="34" charset="0"/>
+                <a:ea typeface="Consolas" pitchFamily="34" charset="-122"/>
+                <a:cs typeface="Consolas" pitchFamily="34" charset="-120"/>
+              </a:rPr>
+              <a:t>'A'</a:t>
+            </a:r>
+            <a:r>
+              <a:rPr lang="en-US" sz="1400" dirty="0">
+                <a:solidFill>
+                  <a:srgbClr val="E6EDF3"/>
+                </a:solidFill>
+                <a:latin typeface="Consolas" pitchFamily="34" charset="0"/>
+                <a:ea typeface="Consolas" pitchFamily="34" charset="-122"/>
+                <a:cs typeface="Consolas" pitchFamily="34" charset="-120"/>
+              </a:rPr>
+              <a:t>;</a:t>
+            </a:r>
+            <a:endParaRPr lang="en-US" sz="1400" dirty="0"/>
+          </a:p>
+          <a:p>
             <a:pPr indent="0" marL="0">
               <a:lnSpc>
                 <a:spcPct val="105000"/>
@@ -10623,8 +10389,77 @@
                 <a:ea typeface="Consolas" pitchFamily="34" charset="-122"/>
                 <a:cs typeface="Consolas" pitchFamily="34" charset="-120"/>
               </a:rPr>
+              <a:t>} </a:t>
+            </a:r>
+            <a:r>
+              <a:rPr lang="en-US" sz="1400" dirty="0">
+                <a:solidFill>
+                  <a:srgbClr val="C792EA"/>
+                </a:solidFill>
+                <a:latin typeface="Consolas" pitchFamily="34" charset="0"/>
+                <a:ea typeface="Consolas" pitchFamily="34" charset="-122"/>
+                <a:cs typeface="Consolas" pitchFamily="34" charset="-120"/>
+              </a:rPr>
+              <a:t>else</a:t>
+            </a:r>
+            <a:r>
+              <a:rPr lang="en-US" sz="1400" dirty="0">
+                <a:solidFill>
+                  <a:srgbClr val="E6EDF3"/>
+                </a:solidFill>
+                <a:latin typeface="Consolas" pitchFamily="34" charset="0"/>
+                <a:ea typeface="Consolas" pitchFamily="34" charset="-122"/>
+                <a:cs typeface="Consolas" pitchFamily="34" charset="-120"/>
+              </a:rPr>
+              <a:t> </a:t>
+            </a:r>
+            <a:r>
+              <a:rPr lang="en-US" sz="1400" dirty="0">
+                <a:solidFill>
+                  <a:srgbClr val="C792EA"/>
+                </a:solidFill>
+                <a:latin typeface="Consolas" pitchFamily="34" charset="0"/>
+                <a:ea typeface="Consolas" pitchFamily="34" charset="-122"/>
+                <a:cs typeface="Consolas" pitchFamily="34" charset="-120"/>
+              </a:rPr>
+              <a:t>if</a:t>
+            </a:r>
+            <a:r>
+              <a:rPr lang="en-US" sz="1400" dirty="0">
+                <a:solidFill>
+                  <a:srgbClr val="E6EDF3"/>
+                </a:solidFill>
+                <a:latin typeface="Consolas" pitchFamily="34" charset="0"/>
+                <a:ea typeface="Consolas" pitchFamily="34" charset="-122"/>
+                <a:cs typeface="Consolas" pitchFamily="34" charset="-120"/>
+              </a:rPr>
               <a:t> (nilai &gt;= </a:t>
             </a:r>
+            <a:r>
+              <a:rPr lang="en-US" sz="1400" dirty="0">
+                <a:solidFill>
+                  <a:srgbClr val="F78C6C"/>
+                </a:solidFill>
+                <a:latin typeface="Consolas" pitchFamily="34" charset="0"/>
+                <a:ea typeface="Consolas" pitchFamily="34" charset="-122"/>
+                <a:cs typeface="Consolas" pitchFamily="34" charset="-120"/>
+              </a:rPr>
+              <a:t>70</a:t>
+            </a:r>
+            <a:r>
+              <a:rPr lang="en-US" sz="1400" dirty="0">
+                <a:solidFill>
+                  <a:srgbClr val="E6EDF3"/>
+                </a:solidFill>
+                <a:latin typeface="Consolas" pitchFamily="34" charset="0"/>
+                <a:ea typeface="Consolas" pitchFamily="34" charset="-122"/>
+                <a:cs typeface="Consolas" pitchFamily="34" charset="-120"/>
+              </a:rPr>
+              <a:t>) {</a:t>
+            </a:r>
+            <a:endParaRPr lang="en-US" sz="1400" dirty="0"/>
+          </a:p>
+          <a:p>
             <a:pPr indent="0" marL="0">
               <a:lnSpc>
                 <a:spcPct val="105000"/>
@@ -10634,14 +10469,39 @@
             <a:r>
               <a:rPr lang="en-US" sz="1400" dirty="0">
                 <a:solidFill>
-                  <a:srgbClr val="F78C6C"/>
-                </a:solidFill>
-                <a:latin typeface="Consolas" pitchFamily="34" charset="0"/>
-                <a:ea typeface="Consolas" pitchFamily="34" charset="-122"/>
-                <a:cs typeface="Consolas" pitchFamily="34" charset="-120"/>
-              </a:rPr>
-              <a:t>85</a:t>
-            </a:r>
+                  <a:srgbClr val="E6EDF3"/>
+                </a:solidFill>
+                <a:latin typeface="Consolas" pitchFamily="34" charset="0"/>
+                <a:ea typeface="Consolas" pitchFamily="34" charset="-122"/>
+                <a:cs typeface="Consolas" pitchFamily="34" charset="-120"/>
+              </a:rPr>
+              <a:t>  huruf = </a:t>
+            </a:r>
+            <a:r>
+              <a:rPr lang="en-US" sz="1400" dirty="0">
+                <a:solidFill>
+                  <a:srgbClr val="C3E88D"/>
+                </a:solidFill>
+                <a:latin typeface="Consolas" pitchFamily="34" charset="0"/>
+                <a:ea typeface="Consolas" pitchFamily="34" charset="-122"/>
+                <a:cs typeface="Consolas" pitchFamily="34" charset="-120"/>
+              </a:rPr>
+              <a:t>'B'</a:t>
+            </a:r>
+            <a:r>
+              <a:rPr lang="en-US" sz="1400" dirty="0">
+                <a:solidFill>
+                  <a:srgbClr val="E6EDF3"/>
+                </a:solidFill>
+                <a:latin typeface="Consolas" pitchFamily="34" charset="0"/>
+                <a:ea typeface="Consolas" pitchFamily="34" charset="-122"/>
+                <a:cs typeface="Consolas" pitchFamily="34" charset="-120"/>
+              </a:rPr>
+              <a:t>;</a:t>
+            </a:r>
+            <a:endParaRPr lang="en-US" sz="1400" dirty="0"/>
+          </a:p>
+          <a:p>
             <a:pPr indent="0" marL="0">
               <a:lnSpc>
                 <a:spcPct val="105000"/>
@@ -10657,7 +10517,29 @@
                 <a:ea typeface="Consolas" pitchFamily="34" charset="-122"/>
                 <a:cs typeface="Consolas" pitchFamily="34" charset="-120"/>
               </a:rPr>
-              <a:t>) {</a:t>
+              <a:t>} </a:t>
+            </a:r>
+            <a:r>
+              <a:rPr lang="en-US" sz="1400" dirty="0">
+                <a:solidFill>
+                  <a:srgbClr val="C792EA"/>
+                </a:solidFill>
+                <a:latin typeface="Consolas" pitchFamily="34" charset="0"/>
+                <a:ea typeface="Consolas" pitchFamily="34" charset="-122"/>
+                <a:cs typeface="Consolas" pitchFamily="34" charset="-120"/>
+              </a:rPr>
+              <a:t>else</a:t>
+            </a:r>
+            <a:r>
+              <a:rPr lang="en-US" sz="1400" dirty="0">
+                <a:solidFill>
+                  <a:srgbClr val="E6EDF3"/>
+                </a:solidFill>
+                <a:latin typeface="Consolas" pitchFamily="34" charset="0"/>
+                <a:ea typeface="Consolas" pitchFamily="34" charset="-122"/>
+                <a:cs typeface="Consolas" pitchFamily="34" charset="-120"/>
+              </a:rPr>
+              <a:t> {</a:t>
             </a:r>
             <a:endParaRPr lang="en-US" sz="1400" dirty="0"/>
           </a:p>
@@ -10679,6 +10561,31 @@
               </a:rPr>
               <a:t>  huruf = </a:t>
             </a:r>
+            <a:r>
+              <a:rPr lang="en-US" sz="1400" dirty="0">
+                <a:solidFill>
+                  <a:srgbClr val="C3E88D"/>
+                </a:solidFill>
+                <a:latin typeface="Consolas" pitchFamily="34" charset="0"/>
+                <a:ea typeface="Consolas" pitchFamily="34" charset="-122"/>
+                <a:cs typeface="Consolas" pitchFamily="34" charset="-120"/>
+              </a:rPr>
+              <a:t>'C'</a:t>
+            </a:r>
+            <a:r>
+              <a:rPr lang="en-US" sz="1400" dirty="0">
+                <a:solidFill>
+                  <a:srgbClr val="E6EDF3"/>
+                </a:solidFill>
+                <a:latin typeface="Consolas" pitchFamily="34" charset="0"/>
+                <a:ea typeface="Consolas" pitchFamily="34" charset="-122"/>
+                <a:cs typeface="Consolas" pitchFamily="34" charset="-120"/>
+              </a:rPr>
+              <a:t>;</a:t>
+            </a:r>
+            <a:endParaRPr lang="en-US" sz="1400" dirty="0"/>
+          </a:p>
+          <a:p>
             <a:pPr indent="0" marL="0">
               <a:lnSpc>
                 <a:spcPct val="105000"/>
@@ -10688,14 +10595,17 @@
             <a:r>
               <a:rPr lang="en-US" sz="1400" dirty="0">
                 <a:solidFill>
-                  <a:srgbClr val="C3E88D"/>
-                </a:solidFill>
-                <a:latin typeface="Consolas" pitchFamily="34" charset="0"/>
-                <a:ea typeface="Consolas" pitchFamily="34" charset="-122"/>
-                <a:cs typeface="Consolas" pitchFamily="34" charset="-120"/>
-              </a:rPr>
-              <a:t>'A'</a:t>
-            </a:r>
+                  <a:srgbClr val="E6EDF3"/>
+                </a:solidFill>
+                <a:latin typeface="Consolas" pitchFamily="34" charset="0"/>
+                <a:ea typeface="Consolas" pitchFamily="34" charset="-122"/>
+                <a:cs typeface="Consolas" pitchFamily="34" charset="-120"/>
+              </a:rPr>
+              <a:t>}</a:t>
+            </a:r>
+            <a:endParaRPr lang="en-US" sz="1400" dirty="0"/>
+          </a:p>
+          <a:p>
             <a:pPr indent="0" marL="0">
               <a:lnSpc>
                 <a:spcPct val="105000"/>
@@ -10711,7 +10621,7 @@
                 <a:ea typeface="Consolas" pitchFamily="34" charset="-122"/>
                 <a:cs typeface="Consolas" pitchFamily="34" charset="-120"/>
               </a:rPr>
-              <a:t>;</a:t>
+              <a:t> </a:t>
             </a:r>
             <a:endParaRPr lang="en-US" sz="1400" dirty="0"/>
           </a:p>
@@ -10723,16 +10633,19 @@
               <a:buNone/>
             </a:pPr>
             <a:r>
-              <a:rPr lang="en-US" sz="1400" dirty="0">
-                <a:solidFill>
-                  <a:srgbClr val="E6EDF3"/>
-                </a:solidFill>
-                <a:latin typeface="Consolas" pitchFamily="34" charset="0"/>
-                <a:ea typeface="Consolas" pitchFamily="34" charset="-122"/>
-                <a:cs typeface="Consolas" pitchFamily="34" charset="-120"/>
-              </a:rPr>
-              <a:t>} </a:t>
-            </a:r>
+              <a:rPr lang="en-US" sz="1400" i="1" dirty="0">
+                <a:solidFill>
+                  <a:srgbClr val="8FA3BC"/>
+                </a:solidFill>
+                <a:latin typeface="Consolas" pitchFamily="34" charset="0"/>
+                <a:ea typeface="Consolas" pitchFamily="34" charset="-122"/>
+                <a:cs typeface="Consolas" pitchFamily="34" charset="-120"/>
+              </a:rPr>
+              <a:t>// switch ekspresi (gaya Dart 3)</a:t>
+            </a:r>
+            <a:endParaRPr lang="en-US" sz="1400" dirty="0"/>
+          </a:p>
+          <a:p>
             <a:pPr indent="0" marL="0">
               <a:lnSpc>
                 <a:spcPct val="105000"/>
@@ -10742,14 +10655,50 @@
             <a:r>
               <a:rPr lang="en-US" sz="1400" dirty="0">
                 <a:solidFill>
+                  <a:srgbClr val="FFCB6B"/>
+                </a:solidFill>
+                <a:latin typeface="Consolas" pitchFamily="34" charset="0"/>
+                <a:ea typeface="Consolas" pitchFamily="34" charset="-122"/>
+                <a:cs typeface="Consolas" pitchFamily="34" charset="-120"/>
+              </a:rPr>
+              <a:t>String</a:t>
+            </a:r>
+            <a:r>
+              <a:rPr lang="en-US" sz="1400" dirty="0">
+                <a:solidFill>
+                  <a:srgbClr val="E6EDF3"/>
+                </a:solidFill>
+                <a:latin typeface="Consolas" pitchFamily="34" charset="0"/>
+                <a:ea typeface="Consolas" pitchFamily="34" charset="-122"/>
+                <a:cs typeface="Consolas" pitchFamily="34" charset="-120"/>
+              </a:rPr>
+              <a:t> keterangan = </a:t>
+            </a:r>
+            <a:r>
+              <a:rPr lang="en-US" sz="1400" dirty="0">
+                <a:solidFill>
                   <a:srgbClr val="C792EA"/>
                 </a:solidFill>
                 <a:latin typeface="Consolas" pitchFamily="34" charset="0"/>
                 <a:ea typeface="Consolas" pitchFamily="34" charset="-122"/>
                 <a:cs typeface="Consolas" pitchFamily="34" charset="-120"/>
               </a:rPr>
-              <a:t>else</a:t>
-            </a:r>
+              <a:t>switch</a:t>
+            </a:r>
+            <a:r>
+              <a:rPr lang="en-US" sz="1400" dirty="0">
+                <a:solidFill>
+                  <a:srgbClr val="E6EDF3"/>
+                </a:solidFill>
+                <a:latin typeface="Consolas" pitchFamily="34" charset="0"/>
+                <a:ea typeface="Consolas" pitchFamily="34" charset="-122"/>
+                <a:cs typeface="Consolas" pitchFamily="34" charset="-120"/>
+              </a:rPr>
+              <a:t> (huruf) {</a:t>
+            </a:r>
+            <a:endParaRPr lang="en-US" sz="1400" dirty="0"/>
+          </a:p>
+          <a:p>
             <a:pPr indent="0" marL="0">
               <a:lnSpc>
                 <a:spcPct val="105000"/>
@@ -10765,8 +10714,55 @@
                 <a:ea typeface="Consolas" pitchFamily="34" charset="-122"/>
                 <a:cs typeface="Consolas" pitchFamily="34" charset="-120"/>
               </a:rPr>
-              <a:t> </a:t>
-            </a:r>
+              <a:t>  </a:t>
+            </a:r>
+            <a:r>
+              <a:rPr lang="en-US" sz="1400" dirty="0">
+                <a:solidFill>
+                  <a:srgbClr val="C3E88D"/>
+                </a:solidFill>
+                <a:latin typeface="Consolas" pitchFamily="34" charset="0"/>
+                <a:ea typeface="Consolas" pitchFamily="34" charset="-122"/>
+                <a:cs typeface="Consolas" pitchFamily="34" charset="-120"/>
+              </a:rPr>
+              <a:t>'A'</a:t>
+            </a:r>
+            <a:r>
+              <a:rPr lang="en-US" sz="1400" dirty="0">
+                <a:solidFill>
+                  <a:srgbClr val="E6EDF3"/>
+                </a:solidFill>
+                <a:latin typeface="Consolas" pitchFamily="34" charset="0"/>
+                <a:ea typeface="Consolas" pitchFamily="34" charset="-122"/>
+                <a:cs typeface="Consolas" pitchFamily="34" charset="-120"/>
+              </a:rPr>
+              <a:t> =&gt; </a:t>
+            </a:r>
+            <a:r>
+              <a:rPr lang="en-US" sz="1400" dirty="0">
+                <a:solidFill>
+                  <a:srgbClr val="C3E88D"/>
+                </a:solidFill>
+                <a:latin typeface="Consolas" pitchFamily="34" charset="0"/>
+                <a:ea typeface="Consolas" pitchFamily="34" charset="-122"/>
+                <a:cs typeface="Consolas" pitchFamily="34" charset="-120"/>
+              </a:rPr>
+              <a:t>'Sangat baik'</a:t>
+            </a:r>
+            <a:r>
+              <a:rPr lang="en-US" sz="1400" dirty="0">
+                <a:solidFill>
+                  <a:srgbClr val="E6EDF3"/>
+                </a:solidFill>
+                <a:latin typeface="Consolas" pitchFamily="34" charset="0"/>
+                <a:ea typeface="Consolas" pitchFamily="34" charset="-122"/>
+                <a:cs typeface="Consolas" pitchFamily="34" charset="-120"/>
+              </a:rPr>
+              <a:t>,</a:t>
+            </a:r>
+            <a:endParaRPr lang="en-US" sz="1400" dirty="0"/>
+          </a:p>
+          <a:p>
             <a:pPr indent="0" marL="0">
               <a:lnSpc>
                 <a:spcPct val="105000"/>
@@ -10776,14 +10772,61 @@
             <a:r>
               <a:rPr lang="en-US" sz="1400" dirty="0">
                 <a:solidFill>
-                  <a:srgbClr val="C792EA"/>
-                </a:solidFill>
-                <a:latin typeface="Consolas" pitchFamily="34" charset="0"/>
-                <a:ea typeface="Consolas" pitchFamily="34" charset="-122"/>
-                <a:cs typeface="Consolas" pitchFamily="34" charset="-120"/>
-              </a:rPr>
-              <a:t>if</a:t>
-            </a:r>
+                  <a:srgbClr val="E6EDF3"/>
+                </a:solidFill>
+                <a:latin typeface="Consolas" pitchFamily="34" charset="0"/>
+                <a:ea typeface="Consolas" pitchFamily="34" charset="-122"/>
+                <a:cs typeface="Consolas" pitchFamily="34" charset="-120"/>
+              </a:rPr>
+              <a:t>  </a:t>
+            </a:r>
+            <a:r>
+              <a:rPr lang="en-US" sz="1400" dirty="0">
+                <a:solidFill>
+                  <a:srgbClr val="C3E88D"/>
+                </a:solidFill>
+                <a:latin typeface="Consolas" pitchFamily="34" charset="0"/>
+                <a:ea typeface="Consolas" pitchFamily="34" charset="-122"/>
+                <a:cs typeface="Consolas" pitchFamily="34" charset="-120"/>
+              </a:rPr>
+              <a:t>'B'</a:t>
+            </a:r>
+            <a:r>
+              <a:rPr lang="en-US" sz="1400" dirty="0">
+                <a:solidFill>
+                  <a:srgbClr val="E6EDF3"/>
+                </a:solidFill>
+                <a:latin typeface="Consolas" pitchFamily="34" charset="0"/>
+                <a:ea typeface="Consolas" pitchFamily="34" charset="-122"/>
+                <a:cs typeface="Consolas" pitchFamily="34" charset="-120"/>
+              </a:rPr>
+              <a:t> =&gt; </a:t>
+            </a:r>
+            <a:r>
+              <a:rPr lang="en-US" sz="1400" dirty="0">
+                <a:solidFill>
+                  <a:srgbClr val="C3E88D"/>
+                </a:solidFill>
+                <a:latin typeface="Consolas" pitchFamily="34" charset="0"/>
+                <a:ea typeface="Consolas" pitchFamily="34" charset="-122"/>
+                <a:cs typeface="Consolas" pitchFamily="34" charset="-120"/>
+              </a:rPr>
+              <a:t>'Baik'</a:t>
+            </a:r>
+            <a:r>
+              <a:rPr lang="en-US" sz="1400" dirty="0">
+                <a:solidFill>
+                  <a:srgbClr val="E6EDF3"/>
+                </a:solidFill>
+                <a:latin typeface="Consolas" pitchFamily="34" charset="0"/>
+                <a:ea typeface="Consolas" pitchFamily="34" charset="-122"/>
+                <a:cs typeface="Consolas" pitchFamily="34" charset="-120"/>
+              </a:rPr>
+              <a:t>,</a:t>
+            </a:r>
+            <a:endParaRPr lang="en-US" sz="1400" dirty="0"/>
+          </a:p>
+          <a:p>
             <a:pPr indent="0" marL="0">
               <a:lnSpc>
                 <a:spcPct val="105000"/>
@@ -10799,554 +10842,19 @@
                 <a:ea typeface="Consolas" pitchFamily="34" charset="-122"/>
                 <a:cs typeface="Consolas" pitchFamily="34" charset="-120"/>
               </a:rPr>
-              <a:t> (nilai &gt;= </a:t>
-            </a:r>
-            <a:pPr indent="0" marL="0">
-              <a:lnSpc>
-                <a:spcPct val="105000"/>
-              </a:lnSpc>
-              <a:buNone/>
-            </a:pPr>
+              <a:t>  _ =&gt; </a:t>
+            </a:r>
             <a:r>
               <a:rPr lang="en-US" sz="1400" dirty="0">
                 <a:solidFill>
-                  <a:srgbClr val="F78C6C"/>
-                </a:solidFill>
-                <a:latin typeface="Consolas" pitchFamily="34" charset="0"/>
-                <a:ea typeface="Consolas" pitchFamily="34" charset="-122"/>
-                <a:cs typeface="Consolas" pitchFamily="34" charset="-120"/>
-              </a:rPr>
-              <a:t>70</a:t>
-            </a:r>
-            <a:pPr indent="0" marL="0">
-              <a:lnSpc>
-                <a:spcPct val="105000"/>
-              </a:lnSpc>
-              <a:buNone/>
-            </a:pPr>
-            <a:r>
-              <a:rPr lang="en-US" sz="1400" dirty="0">
-                <a:solidFill>
-                  <a:srgbClr val="E6EDF3"/>
-                </a:solidFill>
-                <a:latin typeface="Consolas" pitchFamily="34" charset="0"/>
-                <a:ea typeface="Consolas" pitchFamily="34" charset="-122"/>
-                <a:cs typeface="Consolas" pitchFamily="34" charset="-120"/>
-              </a:rPr>
-              <a:t>) {</a:t>
-            </a:r>
-            <a:endParaRPr lang="en-US" sz="1400" dirty="0"/>
-          </a:p>
-          <a:p>
-            <a:pPr indent="0" marL="0">
-              <a:lnSpc>
-                <a:spcPct val="105000"/>
-              </a:lnSpc>
-              <a:buNone/>
-            </a:pPr>
-            <a:r>
-              <a:rPr lang="en-US" sz="1400" dirty="0">
-                <a:solidFill>
-                  <a:srgbClr val="E6EDF3"/>
-                </a:solidFill>
-                <a:latin typeface="Consolas" pitchFamily="34" charset="0"/>
-                <a:ea typeface="Consolas" pitchFamily="34" charset="-122"/>
-                <a:cs typeface="Consolas" pitchFamily="34" charset="-120"/>
-              </a:rPr>
-              <a:t>  huruf = </a:t>
-            </a:r>
-            <a:pPr indent="0" marL="0">
-              <a:lnSpc>
-                <a:spcPct val="105000"/>
-              </a:lnSpc>
-              <a:buNone/>
-            </a:pPr>
-            <a:r>
-              <a:rPr lang="en-US" sz="1400" dirty="0">
-                <a:solidFill>
                   <a:srgbClr val="C3E88D"/>
                 </a:solidFill>
                 <a:latin typeface="Consolas" pitchFamily="34" charset="0"/>
                 <a:ea typeface="Consolas" pitchFamily="34" charset="-122"/>
                 <a:cs typeface="Consolas" pitchFamily="34" charset="-120"/>
               </a:rPr>
-              <a:t>'B'</a:t>
-            </a:r>
-            <a:pPr indent="0" marL="0">
-              <a:lnSpc>
-                <a:spcPct val="105000"/>
-              </a:lnSpc>
-              <a:buNone/>
-            </a:pPr>
-            <a:r>
-              <a:rPr lang="en-US" sz="1400" dirty="0">
-                <a:solidFill>
-                  <a:srgbClr val="E6EDF3"/>
-                </a:solidFill>
-                <a:latin typeface="Consolas" pitchFamily="34" charset="0"/>
-                <a:ea typeface="Consolas" pitchFamily="34" charset="-122"/>
-                <a:cs typeface="Consolas" pitchFamily="34" charset="-120"/>
-              </a:rPr>
-              <a:t>;</a:t>
-            </a:r>
-            <a:endParaRPr lang="en-US" sz="1400" dirty="0"/>
-          </a:p>
-          <a:p>
-            <a:pPr indent="0" marL="0">
-              <a:lnSpc>
-                <a:spcPct val="105000"/>
-              </a:lnSpc>
-              <a:buNone/>
-            </a:pPr>
-            <a:r>
-              <a:rPr lang="en-US" sz="1400" dirty="0">
-                <a:solidFill>
-                  <a:srgbClr val="E6EDF3"/>
-                </a:solidFill>
-                <a:latin typeface="Consolas" pitchFamily="34" charset="0"/>
-                <a:ea typeface="Consolas" pitchFamily="34" charset="-122"/>
-                <a:cs typeface="Consolas" pitchFamily="34" charset="-120"/>
-              </a:rPr>
-              <a:t>} </a:t>
-            </a:r>
-            <a:pPr indent="0" marL="0">
-              <a:lnSpc>
-                <a:spcPct val="105000"/>
-              </a:lnSpc>
-              <a:buNone/>
-            </a:pPr>
-            <a:r>
-              <a:rPr lang="en-US" sz="1400" dirty="0">
-                <a:solidFill>
-                  <a:srgbClr val="C792EA"/>
-                </a:solidFill>
-                <a:latin typeface="Consolas" pitchFamily="34" charset="0"/>
-                <a:ea typeface="Consolas" pitchFamily="34" charset="-122"/>
-                <a:cs typeface="Consolas" pitchFamily="34" charset="-120"/>
-              </a:rPr>
-              <a:t>else</a:t>
-            </a:r>
-            <a:pPr indent="0" marL="0">
-              <a:lnSpc>
-                <a:spcPct val="105000"/>
-              </a:lnSpc>
-              <a:buNone/>
-            </a:pPr>
-            <a:r>
-              <a:rPr lang="en-US" sz="1400" dirty="0">
-                <a:solidFill>
-                  <a:srgbClr val="E6EDF3"/>
-                </a:solidFill>
-                <a:latin typeface="Consolas" pitchFamily="34" charset="0"/>
-                <a:ea typeface="Consolas" pitchFamily="34" charset="-122"/>
-                <a:cs typeface="Consolas" pitchFamily="34" charset="-120"/>
-              </a:rPr>
-              <a:t> {</a:t>
-            </a:r>
-            <a:endParaRPr lang="en-US" sz="1400" dirty="0"/>
-          </a:p>
-          <a:p>
-            <a:pPr indent="0" marL="0">
-              <a:lnSpc>
-                <a:spcPct val="105000"/>
-              </a:lnSpc>
-              <a:buNone/>
-            </a:pPr>
-            <a:r>
-              <a:rPr lang="en-US" sz="1400" dirty="0">
-                <a:solidFill>
-                  <a:srgbClr val="E6EDF3"/>
-                </a:solidFill>
-                <a:latin typeface="Consolas" pitchFamily="34" charset="0"/>
-                <a:ea typeface="Consolas" pitchFamily="34" charset="-122"/>
-                <a:cs typeface="Consolas" pitchFamily="34" charset="-120"/>
-              </a:rPr>
-              <a:t>  huruf = </a:t>
-            </a:r>
-            <a:pPr indent="0" marL="0">
-              <a:lnSpc>
-                <a:spcPct val="105000"/>
-              </a:lnSpc>
-              <a:buNone/>
-            </a:pPr>
-            <a:r>
-              <a:rPr lang="en-US" sz="1400" dirty="0">
-                <a:solidFill>
-                  <a:srgbClr val="C3E88D"/>
-                </a:solidFill>
-                <a:latin typeface="Consolas" pitchFamily="34" charset="0"/>
-                <a:ea typeface="Consolas" pitchFamily="34" charset="-122"/>
-                <a:cs typeface="Consolas" pitchFamily="34" charset="-120"/>
-              </a:rPr>
-              <a:t>'C'</a:t>
-            </a:r>
-            <a:pPr indent="0" marL="0">
-              <a:lnSpc>
-                <a:spcPct val="105000"/>
-              </a:lnSpc>
-              <a:buNone/>
-            </a:pPr>
-            <a:r>
-              <a:rPr lang="en-US" sz="1400" dirty="0">
-                <a:solidFill>
-                  <a:srgbClr val="E6EDF3"/>
-                </a:solidFill>
-                <a:latin typeface="Consolas" pitchFamily="34" charset="0"/>
-                <a:ea typeface="Consolas" pitchFamily="34" charset="-122"/>
-                <a:cs typeface="Consolas" pitchFamily="34" charset="-120"/>
-              </a:rPr>
-              <a:t>;</a:t>
-            </a:r>
-            <a:endParaRPr lang="en-US" sz="1400" dirty="0"/>
-          </a:p>
-          <a:p>
-            <a:pPr indent="0" marL="0">
-              <a:lnSpc>
-                <a:spcPct val="105000"/>
-              </a:lnSpc>
-              <a:buNone/>
-            </a:pPr>
-            <a:r>
-              <a:rPr lang="en-US" sz="1400" dirty="0">
-                <a:solidFill>
-                  <a:srgbClr val="E6EDF3"/>
-                </a:solidFill>
-                <a:latin typeface="Consolas" pitchFamily="34" charset="0"/>
-                <a:ea typeface="Consolas" pitchFamily="34" charset="-122"/>
-                <a:cs typeface="Consolas" pitchFamily="34" charset="-120"/>
-              </a:rPr>
-              <a:t>}</a:t>
-            </a:r>
-            <a:endParaRPr lang="en-US" sz="1400" dirty="0"/>
-          </a:p>
-          <a:p>
-            <a:pPr indent="0" marL="0">
-              <a:lnSpc>
-                <a:spcPct val="105000"/>
-              </a:lnSpc>
-              <a:buNone/>
-            </a:pPr>
-            <a:r>
-              <a:rPr lang="en-US" sz="1400" dirty="0">
-                <a:solidFill>
-                  <a:srgbClr val="E6EDF3"/>
-                </a:solidFill>
-                <a:latin typeface="Consolas" pitchFamily="34" charset="0"/>
-                <a:ea typeface="Consolas" pitchFamily="34" charset="-122"/>
-                <a:cs typeface="Consolas" pitchFamily="34" charset="-120"/>
-              </a:rPr>
-              <a:t> </a:t>
-            </a:r>
-            <a:endParaRPr lang="en-US" sz="1400" dirty="0"/>
-          </a:p>
-          <a:p>
-            <a:pPr indent="0" marL="0">
-              <a:lnSpc>
-                <a:spcPct val="105000"/>
-              </a:lnSpc>
-              <a:buNone/>
-            </a:pPr>
-            <a:r>
-              <a:rPr lang="en-US" sz="1400" i="1" dirty="0">
-                <a:solidFill>
-                  <a:srgbClr val="8FA3BC"/>
-                </a:solidFill>
-                <a:latin typeface="Consolas" pitchFamily="34" charset="0"/>
-                <a:ea typeface="Consolas" pitchFamily="34" charset="-122"/>
-                <a:cs typeface="Consolas" pitchFamily="34" charset="-120"/>
-              </a:rPr>
-              <a:t>// switch ekspresi (gaya Dart 3)</a:t>
-            </a:r>
-            <a:endParaRPr lang="en-US" sz="1400" dirty="0"/>
-          </a:p>
-          <a:p>
-            <a:pPr indent="0" marL="0">
-              <a:lnSpc>
-                <a:spcPct val="105000"/>
-              </a:lnSpc>
-              <a:buNone/>
-            </a:pPr>
-            <a:r>
-              <a:rPr lang="en-US" sz="1400" dirty="0">
-                <a:solidFill>
-                  <a:srgbClr val="FFCB6B"/>
-                </a:solidFill>
-                <a:latin typeface="Consolas" pitchFamily="34" charset="0"/>
-                <a:ea typeface="Consolas" pitchFamily="34" charset="-122"/>
-                <a:cs typeface="Consolas" pitchFamily="34" charset="-120"/>
-              </a:rPr>
-              <a:t>String</a:t>
-            </a:r>
-            <a:pPr indent="0" marL="0">
-              <a:lnSpc>
-                <a:spcPct val="105000"/>
-              </a:lnSpc>
-              <a:buNone/>
-            </a:pPr>
-            <a:r>
-              <a:rPr lang="en-US" sz="1400" dirty="0">
-                <a:solidFill>
-                  <a:srgbClr val="E6EDF3"/>
-                </a:solidFill>
-                <a:latin typeface="Consolas" pitchFamily="34" charset="0"/>
-                <a:ea typeface="Consolas" pitchFamily="34" charset="-122"/>
-                <a:cs typeface="Consolas" pitchFamily="34" charset="-120"/>
-              </a:rPr>
-              <a:t> keterangan = </a:t>
-            </a:r>
-            <a:pPr indent="0" marL="0">
-              <a:lnSpc>
-                <a:spcPct val="105000"/>
-              </a:lnSpc>
-              <a:buNone/>
-            </a:pPr>
-            <a:r>
-              <a:rPr lang="en-US" sz="1400" dirty="0">
-                <a:solidFill>
-                  <a:srgbClr val="C792EA"/>
-                </a:solidFill>
-                <a:latin typeface="Consolas" pitchFamily="34" charset="0"/>
-                <a:ea typeface="Consolas" pitchFamily="34" charset="-122"/>
-                <a:cs typeface="Consolas" pitchFamily="34" charset="-120"/>
-              </a:rPr>
-              <a:t>switch</a:t>
-            </a:r>
-            <a:pPr indent="0" marL="0">
-              <a:lnSpc>
-                <a:spcPct val="105000"/>
-              </a:lnSpc>
-              <a:buNone/>
-            </a:pPr>
-            <a:r>
-              <a:rPr lang="en-US" sz="1400" dirty="0">
-                <a:solidFill>
-                  <a:srgbClr val="E6EDF3"/>
-                </a:solidFill>
-                <a:latin typeface="Consolas" pitchFamily="34" charset="0"/>
-                <a:ea typeface="Consolas" pitchFamily="34" charset="-122"/>
-                <a:cs typeface="Consolas" pitchFamily="34" charset="-120"/>
-              </a:rPr>
-              <a:t> (huruf) {</a:t>
-            </a:r>
-            <a:endParaRPr lang="en-US" sz="1400" dirty="0"/>
-          </a:p>
-          <a:p>
-            <a:pPr indent="0" marL="0">
-              <a:lnSpc>
-                <a:spcPct val="105000"/>
-              </a:lnSpc>
-              <a:buNone/>
-            </a:pPr>
-            <a:r>
-              <a:rPr lang="en-US" sz="1400" dirty="0">
-                <a:solidFill>
-                  <a:srgbClr val="E6EDF3"/>
-                </a:solidFill>
-                <a:latin typeface="Consolas" pitchFamily="34" charset="0"/>
-                <a:ea typeface="Consolas" pitchFamily="34" charset="-122"/>
-                <a:cs typeface="Consolas" pitchFamily="34" charset="-120"/>
-              </a:rPr>
-              <a:t>  </a:t>
-            </a:r>
-            <a:pPr indent="0" marL="0">
-              <a:lnSpc>
-                <a:spcPct val="105000"/>
-              </a:lnSpc>
-              <a:buNone/>
-            </a:pPr>
-            <a:r>
-              <a:rPr lang="en-US" sz="1400" dirty="0">
-                <a:solidFill>
-                  <a:srgbClr val="C3E88D"/>
-                </a:solidFill>
-                <a:latin typeface="Consolas" pitchFamily="34" charset="0"/>
-                <a:ea typeface="Consolas" pitchFamily="34" charset="-122"/>
-                <a:cs typeface="Consolas" pitchFamily="34" charset="-120"/>
-              </a:rPr>
-              <a:t>'A'</a:t>
-            </a:r>
-            <a:pPr indent="0" marL="0">
-              <a:lnSpc>
-                <a:spcPct val="105000"/>
-              </a:lnSpc>
-              <a:buNone/>
-            </a:pPr>
-            <a:r>
-              <a:rPr lang="en-US" sz="1400" dirty="0">
-                <a:solidFill>
-                  <a:srgbClr val="E6EDF3"/>
-                </a:solidFill>
-                <a:latin typeface="Consolas" pitchFamily="34" charset="0"/>
-                <a:ea typeface="Consolas" pitchFamily="34" charset="-122"/>
-                <a:cs typeface="Consolas" pitchFamily="34" charset="-120"/>
-              </a:rPr>
-              <a:t> =&gt; </a:t>
-            </a:r>
-            <a:pPr indent="0" marL="0">
-              <a:lnSpc>
-                <a:spcPct val="105000"/>
-              </a:lnSpc>
-              <a:buNone/>
-            </a:pPr>
-            <a:r>
-              <a:rPr lang="en-US" sz="1400" dirty="0">
-                <a:solidFill>
-                  <a:srgbClr val="C3E88D"/>
-                </a:solidFill>
-                <a:latin typeface="Consolas" pitchFamily="34" charset="0"/>
-                <a:ea typeface="Consolas" pitchFamily="34" charset="-122"/>
-                <a:cs typeface="Consolas" pitchFamily="34" charset="-120"/>
-              </a:rPr>
-              <a:t>'Sangat baik'</a:t>
-            </a:r>
-            <a:pPr indent="0" marL="0">
-              <a:lnSpc>
-                <a:spcPct val="105000"/>
-              </a:lnSpc>
-              <a:buNone/>
-            </a:pPr>
-            <a:r>
-              <a:rPr lang="en-US" sz="1400" dirty="0">
-                <a:solidFill>
-                  <a:srgbClr val="E6EDF3"/>
-                </a:solidFill>
-                <a:latin typeface="Consolas" pitchFamily="34" charset="0"/>
-                <a:ea typeface="Consolas" pitchFamily="34" charset="-122"/>
-                <a:cs typeface="Consolas" pitchFamily="34" charset="-120"/>
-              </a:rPr>
-              <a:t>,</a:t>
-            </a:r>
-            <a:endParaRPr lang="en-US" sz="1400" dirty="0"/>
-          </a:p>
-          <a:p>
-            <a:pPr indent="0" marL="0">
-              <a:lnSpc>
-                <a:spcPct val="105000"/>
-              </a:lnSpc>
-              <a:buNone/>
-            </a:pPr>
-            <a:r>
-              <a:rPr lang="en-US" sz="1400" dirty="0">
-                <a:solidFill>
-                  <a:srgbClr val="E6EDF3"/>
-                </a:solidFill>
-                <a:latin typeface="Consolas" pitchFamily="34" charset="0"/>
-                <a:ea typeface="Consolas" pitchFamily="34" charset="-122"/>
-                <a:cs typeface="Consolas" pitchFamily="34" charset="-120"/>
-              </a:rPr>
-              <a:t>  </a:t>
-            </a:r>
-            <a:pPr indent="0" marL="0">
-              <a:lnSpc>
-                <a:spcPct val="105000"/>
-              </a:lnSpc>
-              <a:buNone/>
-            </a:pPr>
-            <a:r>
-              <a:rPr lang="en-US" sz="1400" dirty="0">
-                <a:solidFill>
-                  <a:srgbClr val="C3E88D"/>
-                </a:solidFill>
-                <a:latin typeface="Consolas" pitchFamily="34" charset="0"/>
-                <a:ea typeface="Consolas" pitchFamily="34" charset="-122"/>
-                <a:cs typeface="Consolas" pitchFamily="34" charset="-120"/>
-              </a:rPr>
-              <a:t>'B'</a:t>
-            </a:r>
-            <a:pPr indent="0" marL="0">
-              <a:lnSpc>
-                <a:spcPct val="105000"/>
-              </a:lnSpc>
-              <a:buNone/>
-            </a:pPr>
-            <a:r>
-              <a:rPr lang="en-US" sz="1400" dirty="0">
-                <a:solidFill>
-                  <a:srgbClr val="E6EDF3"/>
-                </a:solidFill>
-                <a:latin typeface="Consolas" pitchFamily="34" charset="0"/>
-                <a:ea typeface="Consolas" pitchFamily="34" charset="-122"/>
-                <a:cs typeface="Consolas" pitchFamily="34" charset="-120"/>
-              </a:rPr>
-              <a:t> =&gt; </a:t>
-            </a:r>
-            <a:pPr indent="0" marL="0">
-              <a:lnSpc>
-                <a:spcPct val="105000"/>
-              </a:lnSpc>
-              <a:buNone/>
-            </a:pPr>
-            <a:r>
-              <a:rPr lang="en-US" sz="1400" dirty="0">
-                <a:solidFill>
-                  <a:srgbClr val="C3E88D"/>
-                </a:solidFill>
-                <a:latin typeface="Consolas" pitchFamily="34" charset="0"/>
-                <a:ea typeface="Consolas" pitchFamily="34" charset="-122"/>
-                <a:cs typeface="Consolas" pitchFamily="34" charset="-120"/>
-              </a:rPr>
-              <a:t>'Baik'</a:t>
-            </a:r>
-            <a:pPr indent="0" marL="0">
-              <a:lnSpc>
-                <a:spcPct val="105000"/>
-              </a:lnSpc>
-              <a:buNone/>
-            </a:pPr>
-            <a:r>
-              <a:rPr lang="en-US" sz="1400" dirty="0">
-                <a:solidFill>
-                  <a:srgbClr val="E6EDF3"/>
-                </a:solidFill>
-                <a:latin typeface="Consolas" pitchFamily="34" charset="0"/>
-                <a:ea typeface="Consolas" pitchFamily="34" charset="-122"/>
-                <a:cs typeface="Consolas" pitchFamily="34" charset="-120"/>
-              </a:rPr>
-              <a:t>,</a:t>
-            </a:r>
-            <a:endParaRPr lang="en-US" sz="1400" dirty="0"/>
-          </a:p>
-          <a:p>
-            <a:pPr indent="0" marL="0">
-              <a:lnSpc>
-                <a:spcPct val="105000"/>
-              </a:lnSpc>
-              <a:buNone/>
-            </a:pPr>
-            <a:r>
-              <a:rPr lang="en-US" sz="1400" dirty="0">
-                <a:solidFill>
-                  <a:srgbClr val="E6EDF3"/>
-                </a:solidFill>
-                <a:latin typeface="Consolas" pitchFamily="34" charset="0"/>
-                <a:ea typeface="Consolas" pitchFamily="34" charset="-122"/>
-                <a:cs typeface="Consolas" pitchFamily="34" charset="-120"/>
-              </a:rPr>
-              <a:t>  _ =&gt; </a:t>
-            </a:r>
-            <a:pPr indent="0" marL="0">
-              <a:lnSpc>
-                <a:spcPct val="105000"/>
-              </a:lnSpc>
-              <a:buNone/>
-            </a:pPr>
-            <a:r>
-              <a:rPr lang="en-US" sz="1400" dirty="0">
-                <a:solidFill>
-                  <a:srgbClr val="C3E88D"/>
-                </a:solidFill>
-                <a:latin typeface="Consolas" pitchFamily="34" charset="0"/>
-                <a:ea typeface="Consolas" pitchFamily="34" charset="-122"/>
-                <a:cs typeface="Consolas" pitchFamily="34" charset="-120"/>
-              </a:rPr>
               <a:t>'Perlu perbaikan'</a:t>
             </a:r>
-            <a:pPr indent="0" marL="0">
-              <a:lnSpc>
-                <a:spcPct val="105000"/>
-              </a:lnSpc>
-              <a:buNone/>
-            </a:pPr>
             <a:r>
               <a:rPr lang="en-US" sz="1400" dirty="0">
                 <a:solidFill>
@@ -11832,6 +11340,64 @@
               </a:rPr>
               <a:t>for</a:t>
             </a:r>
+            <a:r>
+              <a:rPr lang="en-US" sz="1300" dirty="0">
+                <a:solidFill>
+                  <a:srgbClr val="E6EDF3"/>
+                </a:solidFill>
+                <a:latin typeface="Consolas" pitchFamily="34" charset="0"/>
+                <a:ea typeface="Consolas" pitchFamily="34" charset="-122"/>
+                <a:cs typeface="Consolas" pitchFamily="34" charset="-120"/>
+              </a:rPr>
+              <a:t> (</a:t>
+            </a:r>
+            <a:r>
+              <a:rPr lang="en-US" sz="1300" dirty="0">
+                <a:solidFill>
+                  <a:srgbClr val="FFCB6B"/>
+                </a:solidFill>
+                <a:latin typeface="Consolas" pitchFamily="34" charset="0"/>
+                <a:ea typeface="Consolas" pitchFamily="34" charset="-122"/>
+                <a:cs typeface="Consolas" pitchFamily="34" charset="-120"/>
+              </a:rPr>
+              <a:t>int</a:t>
+            </a:r>
+            <a:r>
+              <a:rPr lang="en-US" sz="1300" dirty="0">
+                <a:solidFill>
+                  <a:srgbClr val="E6EDF3"/>
+                </a:solidFill>
+                <a:latin typeface="Consolas" pitchFamily="34" charset="0"/>
+                <a:ea typeface="Consolas" pitchFamily="34" charset="-122"/>
+                <a:cs typeface="Consolas" pitchFamily="34" charset="-120"/>
+              </a:rPr>
+              <a:t> i = </a:t>
+            </a:r>
+            <a:r>
+              <a:rPr lang="en-US" sz="1300" dirty="0">
+                <a:solidFill>
+                  <a:srgbClr val="F78C6C"/>
+                </a:solidFill>
+                <a:latin typeface="Consolas" pitchFamily="34" charset="0"/>
+                <a:ea typeface="Consolas" pitchFamily="34" charset="-122"/>
+                <a:cs typeface="Consolas" pitchFamily="34" charset="-120"/>
+              </a:rPr>
+              <a:t>1</a:t>
+            </a:r>
+            <a:r>
+              <a:rPr lang="en-US" sz="1300" dirty="0">
+                <a:solidFill>
+                  <a:srgbClr val="E6EDF3"/>
+                </a:solidFill>
+                <a:latin typeface="Consolas" pitchFamily="34" charset="0"/>
+                <a:ea typeface="Consolas" pitchFamily="34" charset="-122"/>
+                <a:cs typeface="Consolas" pitchFamily="34" charset="-120"/>
+              </a:rPr>
+              <a:t>;</a:t>
+            </a:r>
+            <a:endParaRPr lang="en-US" sz="1300" dirty="0"/>
+          </a:p>
+          <a:p>
             <a:pPr indent="0" marL="0">
               <a:lnSpc>
                 <a:spcPct val="105000"/>
@@ -11847,119 +11413,19 @@
                 <a:ea typeface="Consolas" pitchFamily="34" charset="-122"/>
                 <a:cs typeface="Consolas" pitchFamily="34" charset="-120"/>
               </a:rPr>
-              <a:t> (</a:t>
-            </a:r>
-            <a:pPr indent="0" marL="0">
-              <a:lnSpc>
-                <a:spcPct val="105000"/>
-              </a:lnSpc>
-              <a:buNone/>
-            </a:pPr>
+              <a:t>    i &lt;= </a:t>
+            </a:r>
             <a:r>
               <a:rPr lang="en-US" sz="1300" dirty="0">
                 <a:solidFill>
-                  <a:srgbClr val="FFCB6B"/>
-                </a:solidFill>
-                <a:latin typeface="Consolas" pitchFamily="34" charset="0"/>
-                <a:ea typeface="Consolas" pitchFamily="34" charset="-122"/>
-                <a:cs typeface="Consolas" pitchFamily="34" charset="-120"/>
-              </a:rPr>
-              <a:t>int</a:t>
-            </a:r>
-            <a:pPr indent="0" marL="0">
-              <a:lnSpc>
-                <a:spcPct val="105000"/>
-              </a:lnSpc>
-              <a:buNone/>
-            </a:pPr>
-            <a:r>
-              <a:rPr lang="en-US" sz="1300" dirty="0">
-                <a:solidFill>
-                  <a:srgbClr val="E6EDF3"/>
-                </a:solidFill>
-                <a:latin typeface="Consolas" pitchFamily="34" charset="0"/>
-                <a:ea typeface="Consolas" pitchFamily="34" charset="-122"/>
-                <a:cs typeface="Consolas" pitchFamily="34" charset="-120"/>
-              </a:rPr>
-              <a:t> i = </a:t>
-            </a:r>
-            <a:pPr indent="0" marL="0">
-              <a:lnSpc>
-                <a:spcPct val="105000"/>
-              </a:lnSpc>
-              <a:buNone/>
-            </a:pPr>
-            <a:r>
-              <a:rPr lang="en-US" sz="1300" dirty="0">
-                <a:solidFill>
                   <a:srgbClr val="F78C6C"/>
                 </a:solidFill>
                 <a:latin typeface="Consolas" pitchFamily="34" charset="0"/>
                 <a:ea typeface="Consolas" pitchFamily="34" charset="-122"/>
                 <a:cs typeface="Consolas" pitchFamily="34" charset="-120"/>
               </a:rPr>
-              <a:t>1</a:t>
-            </a:r>
-            <a:pPr indent="0" marL="0">
-              <a:lnSpc>
-                <a:spcPct val="105000"/>
-              </a:lnSpc>
-              <a:buNone/>
-            </a:pPr>
-            <a:r>
-              <a:rPr lang="en-US" sz="1300" dirty="0">
-                <a:solidFill>
-                  <a:srgbClr val="E6EDF3"/>
-                </a:solidFill>
-                <a:latin typeface="Consolas" pitchFamily="34" charset="0"/>
-                <a:ea typeface="Consolas" pitchFamily="34" charset="-122"/>
-                <a:cs typeface="Consolas" pitchFamily="34" charset="-120"/>
-              </a:rPr>
-              <a:t>;</a:t>
-            </a:r>
-            <a:endParaRPr lang="en-US" sz="1300" dirty="0"/>
-          </a:p>
-          <a:p>
-            <a:pPr indent="0" marL="0">
-              <a:lnSpc>
-                <a:spcPct val="105000"/>
-              </a:lnSpc>
-              <a:buNone/>
-            </a:pPr>
-            <a:r>
-              <a:rPr lang="en-US" sz="1300" dirty="0">
-                <a:solidFill>
-                  <a:srgbClr val="E6EDF3"/>
-                </a:solidFill>
-                <a:latin typeface="Consolas" pitchFamily="34" charset="0"/>
-                <a:ea typeface="Consolas" pitchFamily="34" charset="-122"/>
-                <a:cs typeface="Consolas" pitchFamily="34" charset="-120"/>
-              </a:rPr>
-              <a:t>    i &lt;= </a:t>
-            </a:r>
-            <a:pPr indent="0" marL="0">
-              <a:lnSpc>
-                <a:spcPct val="105000"/>
-              </a:lnSpc>
-              <a:buNone/>
-            </a:pPr>
-            <a:r>
-              <a:rPr lang="en-US" sz="1300" dirty="0">
-                <a:solidFill>
-                  <a:srgbClr val="F78C6C"/>
-                </a:solidFill>
-                <a:latin typeface="Consolas" pitchFamily="34" charset="0"/>
-                <a:ea typeface="Consolas" pitchFamily="34" charset="-122"/>
-                <a:cs typeface="Consolas" pitchFamily="34" charset="-120"/>
-              </a:rPr>
               <a:t>3</a:t>
             </a:r>
-            <a:pPr indent="0" marL="0">
-              <a:lnSpc>
-                <a:spcPct val="105000"/>
-              </a:lnSpc>
-              <a:buNone/>
-            </a:pPr>
             <a:r>
               <a:rPr lang="en-US" sz="1300" dirty="0">
                 <a:solidFill>
@@ -12195,6 +11661,42 @@
               </a:rPr>
               <a:t>for</a:t>
             </a:r>
+            <a:r>
+              <a:rPr lang="en-US" sz="1300" dirty="0">
+                <a:solidFill>
+                  <a:srgbClr val="E6EDF3"/>
+                </a:solidFill>
+                <a:latin typeface="Consolas" pitchFamily="34" charset="0"/>
+                <a:ea typeface="Consolas" pitchFamily="34" charset="-122"/>
+                <a:cs typeface="Consolas" pitchFamily="34" charset="-120"/>
+              </a:rPr>
+              <a:t> (</a:t>
+            </a:r>
+            <a:r>
+              <a:rPr lang="en-US" sz="1300" dirty="0">
+                <a:solidFill>
+                  <a:srgbClr val="FFCB6B"/>
+                </a:solidFill>
+                <a:latin typeface="Consolas" pitchFamily="34" charset="0"/>
+                <a:ea typeface="Consolas" pitchFamily="34" charset="-122"/>
+                <a:cs typeface="Consolas" pitchFamily="34" charset="-120"/>
+              </a:rPr>
+              <a:t>String</a:t>
+            </a:r>
+            <a:r>
+              <a:rPr lang="en-US" sz="1300" dirty="0">
+                <a:solidFill>
+                  <a:srgbClr val="E6EDF3"/>
+                </a:solidFill>
+                <a:latin typeface="Consolas" pitchFamily="34" charset="0"/>
+                <a:ea typeface="Consolas" pitchFamily="34" charset="-122"/>
+                <a:cs typeface="Consolas" pitchFamily="34" charset="-120"/>
+              </a:rPr>
+              <a:t> b</a:t>
+            </a:r>
+            <a:endParaRPr lang="en-US" sz="1300" dirty="0"/>
+          </a:p>
+          <a:p>
             <a:pPr indent="0" marL="0">
               <a:lnSpc>
                 <a:spcPct val="105000"/>
@@ -12210,71 +11712,11 @@
                 <a:ea typeface="Consolas" pitchFamily="34" charset="-122"/>
                 <a:cs typeface="Consolas" pitchFamily="34" charset="-120"/>
               </a:rPr>
-              <a:t> (</a:t>
-            </a:r>
-            <a:pPr indent="0" marL="0">
-              <a:lnSpc>
-                <a:spcPct val="105000"/>
-              </a:lnSpc>
-              <a:buNone/>
-            </a:pPr>
+              <a:t>    </a:t>
+            </a:r>
             <a:r>
               <a:rPr lang="en-US" sz="1300" dirty="0">
                 <a:solidFill>
-                  <a:srgbClr val="FFCB6B"/>
-                </a:solidFill>
-                <a:latin typeface="Consolas" pitchFamily="34" charset="0"/>
-                <a:ea typeface="Consolas" pitchFamily="34" charset="-122"/>
-                <a:cs typeface="Consolas" pitchFamily="34" charset="-120"/>
-              </a:rPr>
-              <a:t>String</a:t>
-            </a:r>
-            <a:pPr indent="0" marL="0">
-              <a:lnSpc>
-                <a:spcPct val="105000"/>
-              </a:lnSpc>
-              <a:buNone/>
-            </a:pPr>
-            <a:r>
-              <a:rPr lang="en-US" sz="1300" dirty="0">
-                <a:solidFill>
-                  <a:srgbClr val="E6EDF3"/>
-                </a:solidFill>
-                <a:latin typeface="Consolas" pitchFamily="34" charset="0"/>
-                <a:ea typeface="Consolas" pitchFamily="34" charset="-122"/>
-                <a:cs typeface="Consolas" pitchFamily="34" charset="-120"/>
-              </a:rPr>
-              <a:t> b</a:t>
-            </a:r>
-            <a:endParaRPr lang="en-US" sz="1300" dirty="0"/>
-          </a:p>
-          <a:p>
-            <a:pPr indent="0" marL="0">
-              <a:lnSpc>
-                <a:spcPct val="105000"/>
-              </a:lnSpc>
-              <a:buNone/>
-            </a:pPr>
-            <a:r>
-              <a:rPr lang="en-US" sz="1300" dirty="0">
-                <a:solidFill>
-                  <a:srgbClr val="E6EDF3"/>
-                </a:solidFill>
-                <a:latin typeface="Consolas" pitchFamily="34" charset="0"/>
-                <a:ea typeface="Consolas" pitchFamily="34" charset="-122"/>
-                <a:cs typeface="Consolas" pitchFamily="34" charset="-120"/>
-              </a:rPr>
-              <a:t>    </a:t>
-            </a:r>
-            <a:pPr indent="0" marL="0">
-              <a:lnSpc>
-                <a:spcPct val="105000"/>
-              </a:lnSpc>
-              <a:buNone/>
-            </a:pPr>
-            <a:r>
-              <a:rPr lang="en-US" sz="1300" dirty="0">
-                <a:solidFill>
                   <a:srgbClr val="C792EA"/>
                 </a:solidFill>
                 <a:latin typeface="Consolas" pitchFamily="34" charset="0"/>
@@ -12283,12 +11725,6 @@
               </a:rPr>
               <a:t>in</a:t>
             </a:r>
-            <a:pPr indent="0" marL="0">
-              <a:lnSpc>
-                <a:spcPct val="105000"/>
-              </a:lnSpc>
-              <a:buNone/>
-            </a:pPr>
             <a:r>
               <a:rPr lang="en-US" sz="1300" dirty="0">
                 <a:solidFill>
@@ -12524,6 +11960,20 @@
               </a:rPr>
               <a:t>while</a:t>
             </a:r>
+            <a:r>
+              <a:rPr lang="en-US" sz="1300" dirty="0">
+                <a:solidFill>
+                  <a:srgbClr val="E6EDF3"/>
+                </a:solidFill>
+                <a:latin typeface="Consolas" pitchFamily="34" charset="0"/>
+                <a:ea typeface="Consolas" pitchFamily="34" charset="-122"/>
+                <a:cs typeface="Consolas" pitchFamily="34" charset="-120"/>
+              </a:rPr>
+              <a:t> (uang</a:t>
+            </a:r>
+            <a:endParaRPr lang="en-US" sz="1300" dirty="0"/>
+          </a:p>
+          <a:p>
             <a:pPr indent="0" marL="0">
               <a:lnSpc>
                 <a:spcPct val="105000"/>
@@ -12539,37 +11989,11 @@
                 <a:ea typeface="Consolas" pitchFamily="34" charset="-122"/>
                 <a:cs typeface="Consolas" pitchFamily="34" charset="-120"/>
               </a:rPr>
-              <a:t> (uang</a:t>
-            </a:r>
-            <a:endParaRPr lang="en-US" sz="1300" dirty="0"/>
-          </a:p>
-          <a:p>
-            <a:pPr indent="0" marL="0">
-              <a:lnSpc>
-                <a:spcPct val="105000"/>
-              </a:lnSpc>
-              <a:buNone/>
-            </a:pPr>
+              <a:t>    &gt;= </a:t>
+            </a:r>
             <a:r>
               <a:rPr lang="en-US" sz="1300" dirty="0">
                 <a:solidFill>
-                  <a:srgbClr val="E6EDF3"/>
-                </a:solidFill>
-                <a:latin typeface="Consolas" pitchFamily="34" charset="0"/>
-                <a:ea typeface="Consolas" pitchFamily="34" charset="-122"/>
-                <a:cs typeface="Consolas" pitchFamily="34" charset="-120"/>
-              </a:rPr>
-              <a:t>    &gt;= </a:t>
-            </a:r>
-            <a:pPr indent="0" marL="0">
-              <a:lnSpc>
-                <a:spcPct val="105000"/>
-              </a:lnSpc>
-              <a:buNone/>
-            </a:pPr>
-            <a:r>
-              <a:rPr lang="en-US" sz="1300" dirty="0">
-                <a:solidFill>
                   <a:srgbClr val="F78C6C"/>
                 </a:solidFill>
                 <a:latin typeface="Consolas" pitchFamily="34" charset="0"/>
@@ -12578,12 +12002,6 @@
               </a:rPr>
               <a:t>15000</a:t>
             </a:r>
-            <a:pPr indent="0" marL="0">
-              <a:lnSpc>
-                <a:spcPct val="105000"/>
-              </a:lnSpc>
-              <a:buNone/>
-            </a:pPr>
             <a:r>
               <a:rPr lang="en-US" sz="1300" dirty="0">
                 <a:solidFill>
@@ -12819,6 +12237,20 @@
               </a:rPr>
               <a:t>do</a:t>
             </a:r>
+            <a:r>
+              <a:rPr lang="en-US" sz="1300" dirty="0">
+                <a:solidFill>
+                  <a:srgbClr val="E6EDF3"/>
+                </a:solidFill>
+                <a:latin typeface="Consolas" pitchFamily="34" charset="0"/>
+                <a:ea typeface="Consolas" pitchFamily="34" charset="-122"/>
+                <a:cs typeface="Consolas" pitchFamily="34" charset="-120"/>
+              </a:rPr>
+              <a:t> {</a:t>
+            </a:r>
+            <a:endParaRPr lang="en-US" sz="1300" dirty="0"/>
+          </a:p>
+          <a:p>
             <a:pPr indent="0" marL="0">
               <a:lnSpc>
                 <a:spcPct val="105000"/>
@@ -12834,7 +12266,7 @@
                 <a:ea typeface="Consolas" pitchFamily="34" charset="-122"/>
                 <a:cs typeface="Consolas" pitchFamily="34" charset="-120"/>
               </a:rPr>
-              <a:t> {</a:t>
+              <a:t>  ...</a:t>
             </a:r>
             <a:endParaRPr lang="en-US" sz="1300" dirty="0"/>
           </a:p>
@@ -12854,71 +12286,33 @@
                 <a:ea typeface="Consolas" pitchFamily="34" charset="-122"/>
                 <a:cs typeface="Consolas" pitchFamily="34" charset="-120"/>
               </a:rPr>
-              <a:t>  ...</a:t>
-            </a:r>
-            <a:endParaRPr lang="en-US" sz="1300" dirty="0"/>
-          </a:p>
-          <a:p>
-            <a:pPr indent="0" marL="0">
-              <a:lnSpc>
-                <a:spcPct val="105000"/>
-              </a:lnSpc>
-              <a:buNone/>
-            </a:pPr>
+              <a:t>} </a:t>
+            </a:r>
             <a:r>
               <a:rPr lang="en-US" sz="1300" dirty="0">
                 <a:solidFill>
+                  <a:srgbClr val="C792EA"/>
+                </a:solidFill>
+                <a:latin typeface="Consolas" pitchFamily="34" charset="0"/>
+                <a:ea typeface="Consolas" pitchFamily="34" charset="-122"/>
+                <a:cs typeface="Consolas" pitchFamily="34" charset="-120"/>
+              </a:rPr>
+              <a:t>while</a:t>
+            </a:r>
+            <a:r>
+              <a:rPr lang="en-US" sz="1300" dirty="0">
+                <a:solidFill>
                   <a:srgbClr val="E6EDF3"/>
                 </a:solidFill>
                 <a:latin typeface="Consolas" pitchFamily="34" charset="0"/>
                 <a:ea typeface="Consolas" pitchFamily="34" charset="-122"/>
                 <a:cs typeface="Consolas" pitchFamily="34" charset="-120"/>
               </a:rPr>
-              <a:t>} </a:t>
-            </a:r>
-            <a:pPr indent="0" marL="0">
-              <a:lnSpc>
-                <a:spcPct val="105000"/>
-              </a:lnSpc>
-              <a:buNone/>
-            </a:pPr>
+              <a:t> (x &lt; </a:t>
+            </a:r>
             <a:r>
               <a:rPr lang="en-US" sz="1300" dirty="0">
                 <a:solidFill>
-                  <a:srgbClr val="C792EA"/>
-                </a:solidFill>
-                <a:latin typeface="Consolas" pitchFamily="34" charset="0"/>
-                <a:ea typeface="Consolas" pitchFamily="34" charset="-122"/>
-                <a:cs typeface="Consolas" pitchFamily="34" charset="-120"/>
-              </a:rPr>
-              <a:t>while</a:t>
-            </a:r>
-            <a:pPr indent="0" marL="0">
-              <a:lnSpc>
-                <a:spcPct val="105000"/>
-              </a:lnSpc>
-              <a:buNone/>
-            </a:pPr>
-            <a:r>
-              <a:rPr lang="en-US" sz="1300" dirty="0">
-                <a:solidFill>
-                  <a:srgbClr val="E6EDF3"/>
-                </a:solidFill>
-                <a:latin typeface="Consolas" pitchFamily="34" charset="0"/>
-                <a:ea typeface="Consolas" pitchFamily="34" charset="-122"/>
-                <a:cs typeface="Consolas" pitchFamily="34" charset="-120"/>
-              </a:rPr>
-              <a:t> (x &lt; </a:t>
-            </a:r>
-            <a:pPr indent="0" marL="0">
-              <a:lnSpc>
-                <a:spcPct val="105000"/>
-              </a:lnSpc>
-              <a:buNone/>
-            </a:pPr>
-            <a:r>
-              <a:rPr lang="en-US" sz="1300" dirty="0">
-                <a:solidFill>
                   <a:srgbClr val="F78C6C"/>
                 </a:solidFill>
                 <a:latin typeface="Consolas" pitchFamily="34" charset="0"/>
@@ -12927,12 +12321,6 @@
               </a:rPr>
               <a:t>3</a:t>
             </a:r>
-            <a:pPr indent="0" marL="0">
-              <a:lnSpc>
-                <a:spcPct val="105000"/>
-              </a:lnSpc>
-              <a:buNone/>
-            </a:pPr>
             <a:r>
               <a:rPr lang="en-US" sz="1300" dirty="0">
                 <a:solidFill>
@@ -13376,6 +12764,64 @@
               </a:rPr>
               <a:t>int</a:t>
             </a:r>
+            <a:r>
+              <a:rPr lang="en-US" sz="1500" dirty="0">
+                <a:solidFill>
+                  <a:srgbClr val="E6EDF3"/>
+                </a:solidFill>
+                <a:latin typeface="Consolas" pitchFamily="34" charset="0"/>
+                <a:ea typeface="Consolas" pitchFamily="34" charset="-122"/>
+                <a:cs typeface="Consolas" pitchFamily="34" charset="-120"/>
+              </a:rPr>
+              <a:t> tambah(</a:t>
+            </a:r>
+            <a:r>
+              <a:rPr lang="en-US" sz="1500" dirty="0">
+                <a:solidFill>
+                  <a:srgbClr val="FFCB6B"/>
+                </a:solidFill>
+                <a:latin typeface="Consolas" pitchFamily="34" charset="0"/>
+                <a:ea typeface="Consolas" pitchFamily="34" charset="-122"/>
+                <a:cs typeface="Consolas" pitchFamily="34" charset="-120"/>
+              </a:rPr>
+              <a:t>int</a:t>
+            </a:r>
+            <a:r>
+              <a:rPr lang="en-US" sz="1500" dirty="0">
+                <a:solidFill>
+                  <a:srgbClr val="E6EDF3"/>
+                </a:solidFill>
+                <a:latin typeface="Consolas" pitchFamily="34" charset="0"/>
+                <a:ea typeface="Consolas" pitchFamily="34" charset="-122"/>
+                <a:cs typeface="Consolas" pitchFamily="34" charset="-120"/>
+              </a:rPr>
+              <a:t> a, </a:t>
+            </a:r>
+            <a:r>
+              <a:rPr lang="en-US" sz="1500" dirty="0">
+                <a:solidFill>
+                  <a:srgbClr val="FFCB6B"/>
+                </a:solidFill>
+                <a:latin typeface="Consolas" pitchFamily="34" charset="0"/>
+                <a:ea typeface="Consolas" pitchFamily="34" charset="-122"/>
+                <a:cs typeface="Consolas" pitchFamily="34" charset="-120"/>
+              </a:rPr>
+              <a:t>int</a:t>
+            </a:r>
+            <a:r>
+              <a:rPr lang="en-US" sz="1500" dirty="0">
+                <a:solidFill>
+                  <a:srgbClr val="E6EDF3"/>
+                </a:solidFill>
+                <a:latin typeface="Consolas" pitchFamily="34" charset="0"/>
+                <a:ea typeface="Consolas" pitchFamily="34" charset="-122"/>
+                <a:cs typeface="Consolas" pitchFamily="34" charset="-120"/>
+              </a:rPr>
+              <a:t> b) {</a:t>
+            </a:r>
+            <a:endParaRPr lang="en-US" sz="1500" dirty="0"/>
+          </a:p>
+          <a:p>
             <a:pPr indent="0" marL="0">
               <a:lnSpc>
                 <a:spcPct val="105000"/>
@@ -13391,8 +12837,44 @@
                 <a:ea typeface="Consolas" pitchFamily="34" charset="-122"/>
                 <a:cs typeface="Consolas" pitchFamily="34" charset="-120"/>
               </a:rPr>
-              <a:t> tambah(</a:t>
-            </a:r>
+              <a:t>  </a:t>
+            </a:r>
+            <a:r>
+              <a:rPr lang="en-US" sz="1500" dirty="0">
+                <a:solidFill>
+                  <a:srgbClr val="C792EA"/>
+                </a:solidFill>
+                <a:latin typeface="Consolas" pitchFamily="34" charset="0"/>
+                <a:ea typeface="Consolas" pitchFamily="34" charset="-122"/>
+                <a:cs typeface="Consolas" pitchFamily="34" charset="-120"/>
+              </a:rPr>
+              <a:t>return</a:t>
+            </a:r>
+            <a:r>
+              <a:rPr lang="en-US" sz="1500" dirty="0">
+                <a:solidFill>
+                  <a:srgbClr val="E6EDF3"/>
+                </a:solidFill>
+                <a:latin typeface="Consolas" pitchFamily="34" charset="0"/>
+                <a:ea typeface="Consolas" pitchFamily="34" charset="-122"/>
+                <a:cs typeface="Consolas" pitchFamily="34" charset="-120"/>
+              </a:rPr>
+              <a:t> a + b; </a:t>
+            </a:r>
+            <a:r>
+              <a:rPr lang="en-US" sz="1500" i="1" dirty="0">
+                <a:solidFill>
+                  <a:srgbClr val="8FA3BC"/>
+                </a:solidFill>
+                <a:latin typeface="Consolas" pitchFamily="34" charset="0"/>
+                <a:ea typeface="Consolas" pitchFamily="34" charset="-122"/>
+                <a:cs typeface="Consolas" pitchFamily="34" charset="-120"/>
+              </a:rPr>
+              <a:t>// serahkan hasilnya</a:t>
+            </a:r>
+            <a:endParaRPr lang="en-US" sz="1500" dirty="0"/>
+          </a:p>
+          <a:p>
             <a:pPr indent="0" marL="0">
               <a:lnSpc>
                 <a:spcPct val="105000"/>
@@ -13402,14 +12884,17 @@
             <a:r>
               <a:rPr lang="en-US" sz="1500" dirty="0">
                 <a:solidFill>
-                  <a:srgbClr val="FFCB6B"/>
-                </a:solidFill>
-                <a:latin typeface="Consolas" pitchFamily="34" charset="0"/>
-                <a:ea typeface="Consolas" pitchFamily="34" charset="-122"/>
-                <a:cs typeface="Consolas" pitchFamily="34" charset="-120"/>
-              </a:rPr>
-              <a:t>int</a:t>
-            </a:r>
+                  <a:srgbClr val="E6EDF3"/>
+                </a:solidFill>
+                <a:latin typeface="Consolas" pitchFamily="34" charset="0"/>
+                <a:ea typeface="Consolas" pitchFamily="34" charset="-122"/>
+                <a:cs typeface="Consolas" pitchFamily="34" charset="-120"/>
+              </a:rPr>
+              <a:t>}</a:t>
+            </a:r>
+            <a:endParaRPr lang="en-US" sz="1500" dirty="0"/>
+          </a:p>
+          <a:p>
             <a:pPr indent="0" marL="0">
               <a:lnSpc>
                 <a:spcPct val="105000"/>
@@ -13425,8 +12910,11 @@
                 <a:ea typeface="Consolas" pitchFamily="34" charset="-122"/>
                 <a:cs typeface="Consolas" pitchFamily="34" charset="-120"/>
               </a:rPr>
-              <a:t> a, </a:t>
-            </a:r>
+              <a:t> </a:t>
+            </a:r>
+            <a:endParaRPr lang="en-US" sz="1500" dirty="0"/>
+          </a:p>
+          <a:p>
             <a:pPr indent="0" marL="0">
               <a:lnSpc>
                 <a:spcPct val="105000"/>
@@ -13434,16 +12922,19 @@
               <a:buNone/>
             </a:pPr>
             <a:r>
-              <a:rPr lang="en-US" sz="1500" dirty="0">
-                <a:solidFill>
-                  <a:srgbClr val="FFCB6B"/>
-                </a:solidFill>
-                <a:latin typeface="Consolas" pitchFamily="34" charset="0"/>
-                <a:ea typeface="Consolas" pitchFamily="34" charset="-122"/>
-                <a:cs typeface="Consolas" pitchFamily="34" charset="-120"/>
-              </a:rPr>
-              <a:t>int</a:t>
-            </a:r>
+              <a:rPr lang="en-US" sz="1500" i="1" dirty="0">
+                <a:solidFill>
+                  <a:srgbClr val="8FA3BC"/>
+                </a:solidFill>
+                <a:latin typeface="Consolas" pitchFamily="34" charset="0"/>
+                <a:ea typeface="Consolas" pitchFamily="34" charset="-122"/>
+                <a:cs typeface="Consolas" pitchFamily="34" charset="-120"/>
+              </a:rPr>
+              <a:t>// tidak mengembalikan nilai</a:t>
+            </a:r>
+            <a:endParaRPr lang="en-US" sz="1500" dirty="0"/>
+          </a:p>
+          <a:p>
             <a:pPr indent="0" marL="0">
               <a:lnSpc>
                 <a:spcPct val="105000"/>
@@ -13453,13 +12944,46 @@
             <a:r>
               <a:rPr lang="en-US" sz="1500" dirty="0">
                 <a:solidFill>
+                  <a:srgbClr val="C792EA"/>
+                </a:solidFill>
+                <a:latin typeface="Consolas" pitchFamily="34" charset="0"/>
+                <a:ea typeface="Consolas" pitchFamily="34" charset="-122"/>
+                <a:cs typeface="Consolas" pitchFamily="34" charset="-120"/>
+              </a:rPr>
+              <a:t>void</a:t>
+            </a:r>
+            <a:r>
+              <a:rPr lang="en-US" sz="1500" dirty="0">
+                <a:solidFill>
                   <a:srgbClr val="E6EDF3"/>
                 </a:solidFill>
                 <a:latin typeface="Consolas" pitchFamily="34" charset="0"/>
                 <a:ea typeface="Consolas" pitchFamily="34" charset="-122"/>
                 <a:cs typeface="Consolas" pitchFamily="34" charset="-120"/>
               </a:rPr>
-              <a:t> b) {</a:t>
+              <a:t> sapa(</a:t>
+            </a:r>
+            <a:r>
+              <a:rPr lang="en-US" sz="1500" dirty="0">
+                <a:solidFill>
+                  <a:srgbClr val="FFCB6B"/>
+                </a:solidFill>
+                <a:latin typeface="Consolas" pitchFamily="34" charset="0"/>
+                <a:ea typeface="Consolas" pitchFamily="34" charset="-122"/>
+                <a:cs typeface="Consolas" pitchFamily="34" charset="-120"/>
+              </a:rPr>
+              <a:t>String</a:t>
+            </a:r>
+            <a:r>
+              <a:rPr lang="en-US" sz="1500" dirty="0">
+                <a:solidFill>
+                  <a:srgbClr val="E6EDF3"/>
+                </a:solidFill>
+                <a:latin typeface="Consolas" pitchFamily="34" charset="0"/>
+                <a:ea typeface="Consolas" pitchFamily="34" charset="-122"/>
+                <a:cs typeface="Consolas" pitchFamily="34" charset="-120"/>
+              </a:rPr>
+              <a:t> nama) {</a:t>
             </a:r>
             <a:endParaRPr lang="en-US" sz="1500" dirty="0"/>
           </a:p>
@@ -13479,8 +13003,33 @@
                 <a:ea typeface="Consolas" pitchFamily="34" charset="-122"/>
                 <a:cs typeface="Consolas" pitchFamily="34" charset="-120"/>
               </a:rPr>
-              <a:t>  </a:t>
-            </a:r>
+              <a:t>  print(</a:t>
+            </a:r>
+            <a:r>
+              <a:rPr lang="en-US" sz="1500" dirty="0">
+                <a:solidFill>
+                  <a:srgbClr val="C3E88D"/>
+                </a:solidFill>
+                <a:latin typeface="Consolas" pitchFamily="34" charset="0"/>
+                <a:ea typeface="Consolas" pitchFamily="34" charset="-122"/>
+                <a:cs typeface="Consolas" pitchFamily="34" charset="-120"/>
+              </a:rPr>
+              <a:t>'Halo, $nama!'</a:t>
+            </a:r>
+            <a:r>
+              <a:rPr lang="en-US" sz="1500" dirty="0">
+                <a:solidFill>
+                  <a:srgbClr val="E6EDF3"/>
+                </a:solidFill>
+                <a:latin typeface="Consolas" pitchFamily="34" charset="0"/>
+                <a:ea typeface="Consolas" pitchFamily="34" charset="-122"/>
+                <a:cs typeface="Consolas" pitchFamily="34" charset="-120"/>
+              </a:rPr>
+              <a:t>);</a:t>
+            </a:r>
+            <a:endParaRPr lang="en-US" sz="1500" dirty="0"/>
+          </a:p>
+          <a:p>
             <a:pPr indent="0" marL="0">
               <a:lnSpc>
                 <a:spcPct val="105000"/>
@@ -13490,14 +13039,17 @@
             <a:r>
               <a:rPr lang="en-US" sz="1500" dirty="0">
                 <a:solidFill>
-                  <a:srgbClr val="C792EA"/>
-                </a:solidFill>
-                <a:latin typeface="Consolas" pitchFamily="34" charset="0"/>
-                <a:ea typeface="Consolas" pitchFamily="34" charset="-122"/>
-                <a:cs typeface="Consolas" pitchFamily="34" charset="-120"/>
-              </a:rPr>
-              <a:t>return</a:t>
-            </a:r>
+                  <a:srgbClr val="E6EDF3"/>
+                </a:solidFill>
+                <a:latin typeface="Consolas" pitchFamily="34" charset="0"/>
+                <a:ea typeface="Consolas" pitchFamily="34" charset="-122"/>
+                <a:cs typeface="Consolas" pitchFamily="34" charset="-120"/>
+              </a:rPr>
+              <a:t>}</a:t>
+            </a:r>
+            <a:endParaRPr lang="en-US" sz="1500" dirty="0"/>
+          </a:p>
+          <a:p>
             <a:pPr indent="0" marL="0">
               <a:lnSpc>
                 <a:spcPct val="105000"/>
@@ -13513,8 +13065,11 @@
                 <a:ea typeface="Consolas" pitchFamily="34" charset="-122"/>
                 <a:cs typeface="Consolas" pitchFamily="34" charset="-120"/>
               </a:rPr>
-              <a:t> a + b; </a:t>
-            </a:r>
+              <a:t> </a:t>
+            </a:r>
+            <a:endParaRPr lang="en-US" sz="1500" dirty="0"/>
+          </a:p>
+          <a:p>
             <a:pPr indent="0" marL="0">
               <a:lnSpc>
                 <a:spcPct val="105000"/>
@@ -13530,7 +13085,7 @@
                 <a:ea typeface="Consolas" pitchFamily="34" charset="-122"/>
                 <a:cs typeface="Consolas" pitchFamily="34" charset="-120"/>
               </a:rPr>
-              <a:t>// serahkan hasilnya</a:t>
+              <a:t>// fungsi panah: isinya SATU ekspresi</a:t>
             </a:r>
             <a:endParaRPr lang="en-US" sz="1500" dirty="0"/>
           </a:p>
@@ -13544,319 +13099,50 @@
             <a:r>
               <a:rPr lang="en-US" sz="1500" dirty="0">
                 <a:solidFill>
+                  <a:srgbClr val="FFCB6B"/>
+                </a:solidFill>
+                <a:latin typeface="Consolas" pitchFamily="34" charset="0"/>
+                <a:ea typeface="Consolas" pitchFamily="34" charset="-122"/>
+                <a:cs typeface="Consolas" pitchFamily="34" charset="-120"/>
+              </a:rPr>
+              <a:t>bool</a:t>
+            </a:r>
+            <a:r>
+              <a:rPr lang="en-US" sz="1500" dirty="0">
+                <a:solidFill>
                   <a:srgbClr val="E6EDF3"/>
                 </a:solidFill>
                 <a:latin typeface="Consolas" pitchFamily="34" charset="0"/>
                 <a:ea typeface="Consolas" pitchFamily="34" charset="-122"/>
                 <a:cs typeface="Consolas" pitchFamily="34" charset="-120"/>
               </a:rPr>
-              <a:t>}</a:t>
-            </a:r>
-            <a:endParaRPr lang="en-US" sz="1500" dirty="0"/>
-          </a:p>
-          <a:p>
-            <a:pPr indent="0" marL="0">
-              <a:lnSpc>
-                <a:spcPct val="105000"/>
-              </a:lnSpc>
-              <a:buNone/>
-            </a:pPr>
+              <a:t> apakahLulus(</a:t>
+            </a:r>
             <a:r>
               <a:rPr lang="en-US" sz="1500" dirty="0">
                 <a:solidFill>
+                  <a:srgbClr val="FFCB6B"/>
+                </a:solidFill>
+                <a:latin typeface="Consolas" pitchFamily="34" charset="0"/>
+                <a:ea typeface="Consolas" pitchFamily="34" charset="-122"/>
+                <a:cs typeface="Consolas" pitchFamily="34" charset="-120"/>
+              </a:rPr>
+              <a:t>int</a:t>
+            </a:r>
+            <a:r>
+              <a:rPr lang="en-US" sz="1500" dirty="0">
+                <a:solidFill>
                   <a:srgbClr val="E6EDF3"/>
                 </a:solidFill>
                 <a:latin typeface="Consolas" pitchFamily="34" charset="0"/>
                 <a:ea typeface="Consolas" pitchFamily="34" charset="-122"/>
                 <a:cs typeface="Consolas" pitchFamily="34" charset="-120"/>
               </a:rPr>
-              <a:t> </a:t>
-            </a:r>
-            <a:endParaRPr lang="en-US" sz="1500" dirty="0"/>
-          </a:p>
-          <a:p>
-            <a:pPr indent="0" marL="0">
-              <a:lnSpc>
-                <a:spcPct val="105000"/>
-              </a:lnSpc>
-              <a:buNone/>
-            </a:pPr>
-            <a:r>
-              <a:rPr lang="en-US" sz="1500" i="1" dirty="0">
-                <a:solidFill>
-                  <a:srgbClr val="8FA3BC"/>
-                </a:solidFill>
-                <a:latin typeface="Consolas" pitchFamily="34" charset="0"/>
-                <a:ea typeface="Consolas" pitchFamily="34" charset="-122"/>
-                <a:cs typeface="Consolas" pitchFamily="34" charset="-120"/>
-              </a:rPr>
-              <a:t>// tidak mengembalikan nilai</a:t>
-            </a:r>
-            <a:endParaRPr lang="en-US" sz="1500" dirty="0"/>
-          </a:p>
-          <a:p>
-            <a:pPr indent="0" marL="0">
-              <a:lnSpc>
-                <a:spcPct val="105000"/>
-              </a:lnSpc>
-              <a:buNone/>
-            </a:pPr>
+              <a:t> nilai) =&gt; nilai &gt;= </a:t>
+            </a:r>
             <a:r>
               <a:rPr lang="en-US" sz="1500" dirty="0">
                 <a:solidFill>
-                  <a:srgbClr val="C792EA"/>
-                </a:solidFill>
-                <a:latin typeface="Consolas" pitchFamily="34" charset="0"/>
-                <a:ea typeface="Consolas" pitchFamily="34" charset="-122"/>
-                <a:cs typeface="Consolas" pitchFamily="34" charset="-120"/>
-              </a:rPr>
-              <a:t>void</a:t>
-            </a:r>
-            <a:pPr indent="0" marL="0">
-              <a:lnSpc>
-                <a:spcPct val="105000"/>
-              </a:lnSpc>
-              <a:buNone/>
-            </a:pPr>
-            <a:r>
-              <a:rPr lang="en-US" sz="1500" dirty="0">
-                <a:solidFill>
-                  <a:srgbClr val="E6EDF3"/>
-                </a:solidFill>
-                <a:latin typeface="Consolas" pitchFamily="34" charset="0"/>
-                <a:ea typeface="Consolas" pitchFamily="34" charset="-122"/>
-                <a:cs typeface="Consolas" pitchFamily="34" charset="-120"/>
-              </a:rPr>
-              <a:t> sapa(</a:t>
-            </a:r>
-            <a:pPr indent="0" marL="0">
-              <a:lnSpc>
-                <a:spcPct val="105000"/>
-              </a:lnSpc>
-              <a:buNone/>
-            </a:pPr>
-            <a:r>
-              <a:rPr lang="en-US" sz="1500" dirty="0">
-                <a:solidFill>
-                  <a:srgbClr val="FFCB6B"/>
-                </a:solidFill>
-                <a:latin typeface="Consolas" pitchFamily="34" charset="0"/>
-                <a:ea typeface="Consolas" pitchFamily="34" charset="-122"/>
-                <a:cs typeface="Consolas" pitchFamily="34" charset="-120"/>
-              </a:rPr>
-              <a:t>String</a:t>
-            </a:r>
-            <a:pPr indent="0" marL="0">
-              <a:lnSpc>
-                <a:spcPct val="105000"/>
-              </a:lnSpc>
-              <a:buNone/>
-            </a:pPr>
-            <a:r>
-              <a:rPr lang="en-US" sz="1500" dirty="0">
-                <a:solidFill>
-                  <a:srgbClr val="E6EDF3"/>
-                </a:solidFill>
-                <a:latin typeface="Consolas" pitchFamily="34" charset="0"/>
-                <a:ea typeface="Consolas" pitchFamily="34" charset="-122"/>
-                <a:cs typeface="Consolas" pitchFamily="34" charset="-120"/>
-              </a:rPr>
-              <a:t> nama) {</a:t>
-            </a:r>
-            <a:endParaRPr lang="en-US" sz="1500" dirty="0"/>
-          </a:p>
-          <a:p>
-            <a:pPr indent="0" marL="0">
-              <a:lnSpc>
-                <a:spcPct val="105000"/>
-              </a:lnSpc>
-              <a:buNone/>
-            </a:pPr>
-            <a:r>
-              <a:rPr lang="en-US" sz="1500" dirty="0">
-                <a:solidFill>
-                  <a:srgbClr val="E6EDF3"/>
-                </a:solidFill>
-                <a:latin typeface="Consolas" pitchFamily="34" charset="0"/>
-                <a:ea typeface="Consolas" pitchFamily="34" charset="-122"/>
-                <a:cs typeface="Consolas" pitchFamily="34" charset="-120"/>
-              </a:rPr>
-              <a:t>  print(</a:t>
-            </a:r>
-            <a:pPr indent="0" marL="0">
-              <a:lnSpc>
-                <a:spcPct val="105000"/>
-              </a:lnSpc>
-              <a:buNone/>
-            </a:pPr>
-            <a:r>
-              <a:rPr lang="en-US" sz="1500" dirty="0">
-                <a:solidFill>
-                  <a:srgbClr val="C3E88D"/>
-                </a:solidFill>
-                <a:latin typeface="Consolas" pitchFamily="34" charset="0"/>
-                <a:ea typeface="Consolas" pitchFamily="34" charset="-122"/>
-                <a:cs typeface="Consolas" pitchFamily="34" charset="-120"/>
-              </a:rPr>
-              <a:t>'Halo, $nama!'</a:t>
-            </a:r>
-            <a:pPr indent="0" marL="0">
-              <a:lnSpc>
-                <a:spcPct val="105000"/>
-              </a:lnSpc>
-              <a:buNone/>
-            </a:pPr>
-            <a:r>
-              <a:rPr lang="en-US" sz="1500" dirty="0">
-                <a:solidFill>
-                  <a:srgbClr val="E6EDF3"/>
-                </a:solidFill>
-                <a:latin typeface="Consolas" pitchFamily="34" charset="0"/>
-                <a:ea typeface="Consolas" pitchFamily="34" charset="-122"/>
-                <a:cs typeface="Consolas" pitchFamily="34" charset="-120"/>
-              </a:rPr>
-              <a:t>);</a:t>
-            </a:r>
-            <a:endParaRPr lang="en-US" sz="1500" dirty="0"/>
-          </a:p>
-          <a:p>
-            <a:pPr indent="0" marL="0">
-              <a:lnSpc>
-                <a:spcPct val="105000"/>
-              </a:lnSpc>
-              <a:buNone/>
-            </a:pPr>
-            <a:r>
-              <a:rPr lang="en-US" sz="1500" dirty="0">
-                <a:solidFill>
-                  <a:srgbClr val="E6EDF3"/>
-                </a:solidFill>
-                <a:latin typeface="Consolas" pitchFamily="34" charset="0"/>
-                <a:ea typeface="Consolas" pitchFamily="34" charset="-122"/>
-                <a:cs typeface="Consolas" pitchFamily="34" charset="-120"/>
-              </a:rPr>
-              <a:t>}</a:t>
-            </a:r>
-            <a:endParaRPr lang="en-US" sz="1500" dirty="0"/>
-          </a:p>
-          <a:p>
-            <a:pPr indent="0" marL="0">
-              <a:lnSpc>
-                <a:spcPct val="105000"/>
-              </a:lnSpc>
-              <a:buNone/>
-            </a:pPr>
-            <a:r>
-              <a:rPr lang="en-US" sz="1500" dirty="0">
-                <a:solidFill>
-                  <a:srgbClr val="E6EDF3"/>
-                </a:solidFill>
-                <a:latin typeface="Consolas" pitchFamily="34" charset="0"/>
-                <a:ea typeface="Consolas" pitchFamily="34" charset="-122"/>
-                <a:cs typeface="Consolas" pitchFamily="34" charset="-120"/>
-              </a:rPr>
-              <a:t> </a:t>
-            </a:r>
-            <a:endParaRPr lang="en-US" sz="1500" dirty="0"/>
-          </a:p>
-          <a:p>
-            <a:pPr indent="0" marL="0">
-              <a:lnSpc>
-                <a:spcPct val="105000"/>
-              </a:lnSpc>
-              <a:buNone/>
-            </a:pPr>
-            <a:r>
-              <a:rPr lang="en-US" sz="1500" i="1" dirty="0">
-                <a:solidFill>
-                  <a:srgbClr val="8FA3BC"/>
-                </a:solidFill>
-                <a:latin typeface="Consolas" pitchFamily="34" charset="0"/>
-                <a:ea typeface="Consolas" pitchFamily="34" charset="-122"/>
-                <a:cs typeface="Consolas" pitchFamily="34" charset="-120"/>
-              </a:rPr>
-              <a:t>// fungsi panah: isinya SATU ekspresi</a:t>
-            </a:r>
-            <a:endParaRPr lang="en-US" sz="1500" dirty="0"/>
-          </a:p>
-          <a:p>
-            <a:pPr indent="0" marL="0">
-              <a:lnSpc>
-                <a:spcPct val="105000"/>
-              </a:lnSpc>
-              <a:buNone/>
-            </a:pPr>
-            <a:r>
-              <a:rPr lang="en-US" sz="1500" dirty="0">
-                <a:solidFill>
-                  <a:srgbClr val="FFCB6B"/>
-                </a:solidFill>
-                <a:latin typeface="Consolas" pitchFamily="34" charset="0"/>
-                <a:ea typeface="Consolas" pitchFamily="34" charset="-122"/>
-                <a:cs typeface="Consolas" pitchFamily="34" charset="-120"/>
-              </a:rPr>
-              <a:t>bool</a:t>
-            </a:r>
-            <a:pPr indent="0" marL="0">
-              <a:lnSpc>
-                <a:spcPct val="105000"/>
-              </a:lnSpc>
-              <a:buNone/>
-            </a:pPr>
-            <a:r>
-              <a:rPr lang="en-US" sz="1500" dirty="0">
-                <a:solidFill>
-                  <a:srgbClr val="E6EDF3"/>
-                </a:solidFill>
-                <a:latin typeface="Consolas" pitchFamily="34" charset="0"/>
-                <a:ea typeface="Consolas" pitchFamily="34" charset="-122"/>
-                <a:cs typeface="Consolas" pitchFamily="34" charset="-120"/>
-              </a:rPr>
-              <a:t> apakahLulus(</a:t>
-            </a:r>
-            <a:pPr indent="0" marL="0">
-              <a:lnSpc>
-                <a:spcPct val="105000"/>
-              </a:lnSpc>
-              <a:buNone/>
-            </a:pPr>
-            <a:r>
-              <a:rPr lang="en-US" sz="1500" dirty="0">
-                <a:solidFill>
-                  <a:srgbClr val="FFCB6B"/>
-                </a:solidFill>
-                <a:latin typeface="Consolas" pitchFamily="34" charset="0"/>
-                <a:ea typeface="Consolas" pitchFamily="34" charset="-122"/>
-                <a:cs typeface="Consolas" pitchFamily="34" charset="-120"/>
-              </a:rPr>
-              <a:t>int</a:t>
-            </a:r>
-            <a:pPr indent="0" marL="0">
-              <a:lnSpc>
-                <a:spcPct val="105000"/>
-              </a:lnSpc>
-              <a:buNone/>
-            </a:pPr>
-            <a:r>
-              <a:rPr lang="en-US" sz="1500" dirty="0">
-                <a:solidFill>
-                  <a:srgbClr val="E6EDF3"/>
-                </a:solidFill>
-                <a:latin typeface="Consolas" pitchFamily="34" charset="0"/>
-                <a:ea typeface="Consolas" pitchFamily="34" charset="-122"/>
-                <a:cs typeface="Consolas" pitchFamily="34" charset="-120"/>
-              </a:rPr>
-              <a:t> nilai) =&gt; nilai &gt;= </a:t>
-            </a:r>
-            <a:pPr indent="0" marL="0">
-              <a:lnSpc>
-                <a:spcPct val="105000"/>
-              </a:lnSpc>
-              <a:buNone/>
-            </a:pPr>
-            <a:r>
-              <a:rPr lang="en-US" sz="1500" dirty="0">
-                <a:solidFill>
                   <a:srgbClr val="F78C6C"/>
                 </a:solidFill>
                 <a:latin typeface="Consolas" pitchFamily="34" charset="0"/>
@@ -13865,12 +13151,6 @@
               </a:rPr>
               <a:t>60</a:t>
             </a:r>
-            <a:pPr indent="0" marL="0">
-              <a:lnSpc>
-                <a:spcPct val="105000"/>
-              </a:lnSpc>
-              <a:buNone/>
-            </a:pPr>
             <a:r>
               <a:rPr lang="en-US" sz="1500" dirty="0">
                 <a:solidFill>
@@ -15711,9 +14991,6 @@
               </a:rPr>
               <a:t>Inilah kunci membaca kode Flutter! </a:t>
             </a:r>
-            <a:pPr indent="0" marL="0">
-              <a:buNone/>
-            </a:pPr>
             <a:r>
               <a:rPr lang="en-US" sz="1700" dirty="0">
                 <a:solidFill>
@@ -16330,12 +15607,6 @@
               </a:rPr>
               <a:t>[</a:t>
             </a:r>
-            <a:pPr indent="0" marL="0">
-              <a:lnSpc>
-                <a:spcPct val="105000"/>
-              </a:lnSpc>
-              <a:buNone/>
-            </a:pPr>
             <a:r>
               <a:rPr lang="en-US" sz="1400" dirty="0">
                 <a:solidFill>
@@ -16347,12 +15618,6 @@
               </a:rPr>
               <a:t>'Apel'</a:t>
             </a:r>
-            <a:pPr indent="0" marL="0">
-              <a:lnSpc>
-                <a:spcPct val="105000"/>
-              </a:lnSpc>
-              <a:buNone/>
-            </a:pPr>
             <a:r>
               <a:rPr lang="en-US" sz="1400" dirty="0">
                 <a:solidFill>
@@ -16364,12 +15629,6 @@
               </a:rPr>
               <a:t>, </a:t>
             </a:r>
-            <a:pPr indent="0" marL="0">
-              <a:lnSpc>
-                <a:spcPct val="105000"/>
-              </a:lnSpc>
-              <a:buNone/>
-            </a:pPr>
             <a:r>
               <a:rPr lang="en-US" sz="1400" dirty="0">
                 <a:solidFill>
@@ -16381,12 +15640,6 @@
               </a:rPr>
               <a:t>'Mangga'</a:t>
             </a:r>
-            <a:pPr indent="0" marL="0">
-              <a:lnSpc>
-                <a:spcPct val="105000"/>
-              </a:lnSpc>
-              <a:buNone/>
-            </a:pPr>
             <a:r>
               <a:rPr lang="en-US" sz="1400" dirty="0">
                 <a:solidFill>
@@ -16640,12 +15893,6 @@
               </a:rPr>
               <a:t>{</a:t>
             </a:r>
-            <a:pPr indent="0" marL="0">
-              <a:lnSpc>
-                <a:spcPct val="105000"/>
-              </a:lnSpc>
-              <a:buNone/>
-            </a:pPr>
             <a:r>
               <a:rPr lang="en-US" sz="1400" dirty="0">
                 <a:solidFill>
@@ -16657,12 +15904,6 @@
               </a:rPr>
               <a:t>'Andi'</a:t>
             </a:r>
-            <a:pPr indent="0" marL="0">
-              <a:lnSpc>
-                <a:spcPct val="105000"/>
-              </a:lnSpc>
-              <a:buNone/>
-            </a:pPr>
             <a:r>
               <a:rPr lang="en-US" sz="1400" dirty="0">
                 <a:solidFill>
@@ -16674,12 +15915,6 @@
               </a:rPr>
               <a:t>, </a:t>
             </a:r>
-            <a:pPr indent="0" marL="0">
-              <a:lnSpc>
-                <a:spcPct val="105000"/>
-              </a:lnSpc>
-              <a:buNone/>
-            </a:pPr>
             <a:r>
               <a:rPr lang="en-US" sz="1400" dirty="0">
                 <a:solidFill>
@@ -16691,12 +15926,6 @@
               </a:rPr>
               <a:t>'Budi'</a:t>
             </a:r>
-            <a:pPr indent="0" marL="0">
-              <a:lnSpc>
-                <a:spcPct val="105000"/>
-              </a:lnSpc>
-              <a:buNone/>
-            </a:pPr>
             <a:r>
               <a:rPr lang="en-US" sz="1400" dirty="0">
                 <a:solidFill>
@@ -16950,6 +16179,53 @@
               </a:rPr>
               <a:t>{</a:t>
             </a:r>
+            <a:r>
+              <a:rPr lang="en-US" sz="1400" dirty="0">
+                <a:solidFill>
+                  <a:srgbClr val="C3E88D"/>
+                </a:solidFill>
+                <a:latin typeface="Consolas" pitchFamily="34" charset="0"/>
+                <a:ea typeface="Consolas" pitchFamily="34" charset="-122"/>
+                <a:cs typeface="Consolas" pitchFamily="34" charset="-120"/>
+              </a:rPr>
+              <a:t>'Apel'</a:t>
+            </a:r>
+            <a:r>
+              <a:rPr lang="en-US" sz="1400" dirty="0">
+                <a:solidFill>
+                  <a:srgbClr val="E6EDF3"/>
+                </a:solidFill>
+                <a:latin typeface="Consolas" pitchFamily="34" charset="0"/>
+                <a:ea typeface="Consolas" pitchFamily="34" charset="-122"/>
+                <a:cs typeface="Consolas" pitchFamily="34" charset="-120"/>
+              </a:rPr>
+              <a:t>: </a:t>
+            </a:r>
+            <a:r>
+              <a:rPr lang="en-US" sz="1400" dirty="0">
+                <a:solidFill>
+                  <a:srgbClr val="F78C6C"/>
+                </a:solidFill>
+                <a:latin typeface="Consolas" pitchFamily="34" charset="0"/>
+                <a:ea typeface="Consolas" pitchFamily="34" charset="-122"/>
+                <a:cs typeface="Consolas" pitchFamily="34" charset="-120"/>
+              </a:rPr>
+              <a:t>12</a:t>
+            </a:r>
+            <a:r>
+              <a:rPr lang="en-US" sz="1400" dirty="0">
+                <a:solidFill>
+                  <a:srgbClr val="E6EDF3"/>
+                </a:solidFill>
+                <a:latin typeface="Consolas" pitchFamily="34" charset="0"/>
+                <a:ea typeface="Consolas" pitchFamily="34" charset="-122"/>
+                <a:cs typeface="Consolas" pitchFamily="34" charset="-120"/>
+              </a:rPr>
+              <a:t>,</a:t>
+            </a:r>
+            <a:endParaRPr lang="en-US" sz="1400" dirty="0"/>
+          </a:p>
+          <a:p>
             <a:pPr indent="0" marL="0">
               <a:lnSpc>
                 <a:spcPct val="105000"/>
@@ -16959,20 +16235,25 @@
             <a:r>
               <a:rPr lang="en-US" sz="1400" dirty="0">
                 <a:solidFill>
+                  <a:srgbClr val="E6EDF3"/>
+                </a:solidFill>
+                <a:latin typeface="Consolas" pitchFamily="34" charset="0"/>
+                <a:ea typeface="Consolas" pitchFamily="34" charset="-122"/>
+                <a:cs typeface="Consolas" pitchFamily="34" charset="-120"/>
+              </a:rPr>
+              <a:t> </a:t>
+            </a:r>
+            <a:r>
+              <a:rPr lang="en-US" sz="1400" dirty="0">
+                <a:solidFill>
                   <a:srgbClr val="C3E88D"/>
                 </a:solidFill>
                 <a:latin typeface="Consolas" pitchFamily="34" charset="0"/>
                 <a:ea typeface="Consolas" pitchFamily="34" charset="-122"/>
                 <a:cs typeface="Consolas" pitchFamily="34" charset="-120"/>
               </a:rPr>
-              <a:t>'Apel'</a:t>
-            </a:r>
-            <a:pPr indent="0" marL="0">
-              <a:lnSpc>
-                <a:spcPct val="105000"/>
-              </a:lnSpc>
-              <a:buNone/>
-            </a:pPr>
+              <a:t>'Mangga'</a:t>
+            </a:r>
             <a:r>
               <a:rPr lang="en-US" sz="1400" dirty="0">
                 <a:solidFill>
@@ -16984,12 +16265,6 @@
               </a:rPr>
               <a:t>: </a:t>
             </a:r>
-            <a:pPr indent="0" marL="0">
-              <a:lnSpc>
-                <a:spcPct val="105000"/>
-              </a:lnSpc>
-              <a:buNone/>
-            </a:pPr>
             <a:r>
               <a:rPr lang="en-US" sz="1400" dirty="0">
                 <a:solidFill>
@@ -16999,102 +16274,8 @@
                 <a:ea typeface="Consolas" pitchFamily="34" charset="-122"/>
                 <a:cs typeface="Consolas" pitchFamily="34" charset="-120"/>
               </a:rPr>
-              <a:t>12</a:t>
-            </a:r>
-            <a:pPr indent="0" marL="0">
-              <a:lnSpc>
-                <a:spcPct val="105000"/>
-              </a:lnSpc>
-              <a:buNone/>
-            </a:pPr>
-            <a:r>
-              <a:rPr lang="en-US" sz="1400" dirty="0">
-                <a:solidFill>
-                  <a:srgbClr val="E6EDF3"/>
-                </a:solidFill>
-                <a:latin typeface="Consolas" pitchFamily="34" charset="0"/>
-                <a:ea typeface="Consolas" pitchFamily="34" charset="-122"/>
-                <a:cs typeface="Consolas" pitchFamily="34" charset="-120"/>
-              </a:rPr>
-              <a:t>,</a:t>
-            </a:r>
-            <a:endParaRPr lang="en-US" sz="1400" dirty="0"/>
-          </a:p>
-          <a:p>
-            <a:pPr indent="0" marL="0">
-              <a:lnSpc>
-                <a:spcPct val="105000"/>
-              </a:lnSpc>
-              <a:buNone/>
-            </a:pPr>
-            <a:r>
-              <a:rPr lang="en-US" sz="1400" dirty="0">
-                <a:solidFill>
-                  <a:srgbClr val="E6EDF3"/>
-                </a:solidFill>
-                <a:latin typeface="Consolas" pitchFamily="34" charset="0"/>
-                <a:ea typeface="Consolas" pitchFamily="34" charset="-122"/>
-                <a:cs typeface="Consolas" pitchFamily="34" charset="-120"/>
-              </a:rPr>
-              <a:t> </a:t>
-            </a:r>
-            <a:pPr indent="0" marL="0">
-              <a:lnSpc>
-                <a:spcPct val="105000"/>
-              </a:lnSpc>
-              <a:buNone/>
-            </a:pPr>
-            <a:r>
-              <a:rPr lang="en-US" sz="1400" dirty="0">
-                <a:solidFill>
-                  <a:srgbClr val="C3E88D"/>
-                </a:solidFill>
-                <a:latin typeface="Consolas" pitchFamily="34" charset="0"/>
-                <a:ea typeface="Consolas" pitchFamily="34" charset="-122"/>
-                <a:cs typeface="Consolas" pitchFamily="34" charset="-120"/>
-              </a:rPr>
-              <a:t>'Mangga'</a:t>
-            </a:r>
-            <a:pPr indent="0" marL="0">
-              <a:lnSpc>
-                <a:spcPct val="105000"/>
-              </a:lnSpc>
-              <a:buNone/>
-            </a:pPr>
-            <a:r>
-              <a:rPr lang="en-US" sz="1400" dirty="0">
-                <a:solidFill>
-                  <a:srgbClr val="E6EDF3"/>
-                </a:solidFill>
-                <a:latin typeface="Consolas" pitchFamily="34" charset="0"/>
-                <a:ea typeface="Consolas" pitchFamily="34" charset="-122"/>
-                <a:cs typeface="Consolas" pitchFamily="34" charset="-120"/>
-              </a:rPr>
-              <a:t>: </a:t>
-            </a:r>
-            <a:pPr indent="0" marL="0">
-              <a:lnSpc>
-                <a:spcPct val="105000"/>
-              </a:lnSpc>
-              <a:buNone/>
-            </a:pPr>
-            <a:r>
-              <a:rPr lang="en-US" sz="1400" dirty="0">
-                <a:solidFill>
-                  <a:srgbClr val="F78C6C"/>
-                </a:solidFill>
-                <a:latin typeface="Consolas" pitchFamily="34" charset="0"/>
-                <a:ea typeface="Consolas" pitchFamily="34" charset="-122"/>
-                <a:cs typeface="Consolas" pitchFamily="34" charset="-120"/>
-              </a:rPr>
               <a:t>5</a:t>
             </a:r>
-            <a:pPr indent="0" marL="0">
-              <a:lnSpc>
-                <a:spcPct val="105000"/>
-              </a:lnSpc>
-              <a:buNone/>
-            </a:pPr>
             <a:r>
               <a:rPr lang="en-US" sz="1400" dirty="0">
                 <a:solidFill>
@@ -17396,6 +16577,152 @@
               </a:rPr>
               <a:t>List</a:t>
             </a:r>
+            <a:r>
+              <a:rPr lang="en-US" sz="1400" dirty="0">
+                <a:solidFill>
+                  <a:srgbClr val="E6EDF3"/>
+                </a:solidFill>
+                <a:latin typeface="Consolas" pitchFamily="34" charset="0"/>
+                <a:ea typeface="Consolas" pitchFamily="34" charset="-122"/>
+                <a:cs typeface="Consolas" pitchFamily="34" charset="-120"/>
+              </a:rPr>
+              <a:t>&lt;</a:t>
+            </a:r>
+            <a:r>
+              <a:rPr lang="en-US" sz="1400" dirty="0">
+                <a:solidFill>
+                  <a:srgbClr val="FFCB6B"/>
+                </a:solidFill>
+                <a:latin typeface="Consolas" pitchFamily="34" charset="0"/>
+                <a:ea typeface="Consolas" pitchFamily="34" charset="-122"/>
+                <a:cs typeface="Consolas" pitchFamily="34" charset="-120"/>
+              </a:rPr>
+              <a:t>int</a:t>
+            </a:r>
+            <a:r>
+              <a:rPr lang="en-US" sz="1400" dirty="0">
+                <a:solidFill>
+                  <a:srgbClr val="E6EDF3"/>
+                </a:solidFill>
+                <a:latin typeface="Consolas" pitchFamily="34" charset="0"/>
+                <a:ea typeface="Consolas" pitchFamily="34" charset="-122"/>
+                <a:cs typeface="Consolas" pitchFamily="34" charset="-120"/>
+              </a:rPr>
+              <a:t>&gt; nilai = [</a:t>
+            </a:r>
+            <a:r>
+              <a:rPr lang="en-US" sz="1400" dirty="0">
+                <a:solidFill>
+                  <a:srgbClr val="F78C6C"/>
+                </a:solidFill>
+                <a:latin typeface="Consolas" pitchFamily="34" charset="0"/>
+                <a:ea typeface="Consolas" pitchFamily="34" charset="-122"/>
+                <a:cs typeface="Consolas" pitchFamily="34" charset="-120"/>
+              </a:rPr>
+              <a:t>80</a:t>
+            </a:r>
+            <a:r>
+              <a:rPr lang="en-US" sz="1400" dirty="0">
+                <a:solidFill>
+                  <a:srgbClr val="E6EDF3"/>
+                </a:solidFill>
+                <a:latin typeface="Consolas" pitchFamily="34" charset="0"/>
+                <a:ea typeface="Consolas" pitchFamily="34" charset="-122"/>
+                <a:cs typeface="Consolas" pitchFamily="34" charset="-120"/>
+              </a:rPr>
+              <a:t>, </a:t>
+            </a:r>
+            <a:r>
+              <a:rPr lang="en-US" sz="1400" dirty="0">
+                <a:solidFill>
+                  <a:srgbClr val="F78C6C"/>
+                </a:solidFill>
+                <a:latin typeface="Consolas" pitchFamily="34" charset="0"/>
+                <a:ea typeface="Consolas" pitchFamily="34" charset="-122"/>
+                <a:cs typeface="Consolas" pitchFamily="34" charset="-120"/>
+              </a:rPr>
+              <a:t>65</a:t>
+            </a:r>
+            <a:r>
+              <a:rPr lang="en-US" sz="1400" dirty="0">
+                <a:solidFill>
+                  <a:srgbClr val="E6EDF3"/>
+                </a:solidFill>
+                <a:latin typeface="Consolas" pitchFamily="34" charset="0"/>
+                <a:ea typeface="Consolas" pitchFamily="34" charset="-122"/>
+                <a:cs typeface="Consolas" pitchFamily="34" charset="-120"/>
+              </a:rPr>
+              <a:t>, </a:t>
+            </a:r>
+            <a:r>
+              <a:rPr lang="en-US" sz="1400" dirty="0">
+                <a:solidFill>
+                  <a:srgbClr val="F78C6C"/>
+                </a:solidFill>
+                <a:latin typeface="Consolas" pitchFamily="34" charset="0"/>
+                <a:ea typeface="Consolas" pitchFamily="34" charset="-122"/>
+                <a:cs typeface="Consolas" pitchFamily="34" charset="-120"/>
+              </a:rPr>
+              <a:t>92</a:t>
+            </a:r>
+            <a:r>
+              <a:rPr lang="en-US" sz="1400" dirty="0">
+                <a:solidFill>
+                  <a:srgbClr val="E6EDF3"/>
+                </a:solidFill>
+                <a:latin typeface="Consolas" pitchFamily="34" charset="0"/>
+                <a:ea typeface="Consolas" pitchFamily="34" charset="-122"/>
+                <a:cs typeface="Consolas" pitchFamily="34" charset="-120"/>
+              </a:rPr>
+              <a:t>, </a:t>
+            </a:r>
+            <a:r>
+              <a:rPr lang="en-US" sz="1400" dirty="0">
+                <a:solidFill>
+                  <a:srgbClr val="F78C6C"/>
+                </a:solidFill>
+                <a:latin typeface="Consolas" pitchFamily="34" charset="0"/>
+                <a:ea typeface="Consolas" pitchFamily="34" charset="-122"/>
+                <a:cs typeface="Consolas" pitchFamily="34" charset="-120"/>
+              </a:rPr>
+              <a:t>47</a:t>
+            </a:r>
+            <a:r>
+              <a:rPr lang="en-US" sz="1400" dirty="0">
+                <a:solidFill>
+                  <a:srgbClr val="E6EDF3"/>
+                </a:solidFill>
+                <a:latin typeface="Consolas" pitchFamily="34" charset="0"/>
+                <a:ea typeface="Consolas" pitchFamily="34" charset="-122"/>
+                <a:cs typeface="Consolas" pitchFamily="34" charset="-120"/>
+              </a:rPr>
+              <a:t>, </a:t>
+            </a:r>
+            <a:r>
+              <a:rPr lang="en-US" sz="1400" dirty="0">
+                <a:solidFill>
+                  <a:srgbClr val="F78C6C"/>
+                </a:solidFill>
+                <a:latin typeface="Consolas" pitchFamily="34" charset="0"/>
+                <a:ea typeface="Consolas" pitchFamily="34" charset="-122"/>
+                <a:cs typeface="Consolas" pitchFamily="34" charset="-120"/>
+              </a:rPr>
+              <a:t>75</a:t>
+            </a:r>
+            <a:r>
+              <a:rPr lang="en-US" sz="1400" dirty="0">
+                <a:solidFill>
+                  <a:srgbClr val="E6EDF3"/>
+                </a:solidFill>
+                <a:latin typeface="Consolas" pitchFamily="34" charset="0"/>
+                <a:ea typeface="Consolas" pitchFamily="34" charset="-122"/>
+                <a:cs typeface="Consolas" pitchFamily="34" charset="-120"/>
+              </a:rPr>
+              <a:t>];</a:t>
+            </a:r>
+            <a:endParaRPr lang="en-US" sz="1400" dirty="0"/>
+          </a:p>
+          <a:p>
             <a:pPr indent="0" marL="0">
               <a:lnSpc>
                 <a:spcPct val="105000"/>
@@ -17411,8 +16738,44 @@
                 <a:ea typeface="Consolas" pitchFamily="34" charset="-122"/>
                 <a:cs typeface="Consolas" pitchFamily="34" charset="-120"/>
               </a:rPr>
-              <a:t>&lt;</a:t>
-            </a:r>
+              <a:t>print(nilai[</a:t>
+            </a:r>
+            <a:r>
+              <a:rPr lang="en-US" sz="1400" dirty="0">
+                <a:solidFill>
+                  <a:srgbClr val="F78C6C"/>
+                </a:solidFill>
+                <a:latin typeface="Consolas" pitchFamily="34" charset="0"/>
+                <a:ea typeface="Consolas" pitchFamily="34" charset="-122"/>
+                <a:cs typeface="Consolas" pitchFamily="34" charset="-120"/>
+              </a:rPr>
+              <a:t>0</a:t>
+            </a:r>
+            <a:r>
+              <a:rPr lang="en-US" sz="1400" dirty="0">
+                <a:solidFill>
+                  <a:srgbClr val="E6EDF3"/>
+                </a:solidFill>
+                <a:latin typeface="Consolas" pitchFamily="34" charset="0"/>
+                <a:ea typeface="Consolas" pitchFamily="34" charset="-122"/>
+                <a:cs typeface="Consolas" pitchFamily="34" charset="-120"/>
+              </a:rPr>
+              <a:t>]);    </a:t>
+            </a:r>
+            <a:r>
+              <a:rPr lang="en-US" sz="1400" i="1" dirty="0">
+                <a:solidFill>
+                  <a:srgbClr val="8FA3BC"/>
+                </a:solidFill>
+                <a:latin typeface="Consolas" pitchFamily="34" charset="0"/>
+                <a:ea typeface="Consolas" pitchFamily="34" charset="-122"/>
+                <a:cs typeface="Consolas" pitchFamily="34" charset="-120"/>
+              </a:rPr>
+              <a:t>// 80 (indeks mulai 0!)</a:t>
+            </a:r>
+            <a:endParaRPr lang="en-US" sz="1400" dirty="0"/>
+          </a:p>
+          <a:p>
             <a:pPr indent="0" marL="0">
               <a:lnSpc>
                 <a:spcPct val="105000"/>
@@ -17422,14 +16785,50 @@
             <a:r>
               <a:rPr lang="en-US" sz="1400" dirty="0">
                 <a:solidFill>
-                  <a:srgbClr val="FFCB6B"/>
-                </a:solidFill>
-                <a:latin typeface="Consolas" pitchFamily="34" charset="0"/>
-                <a:ea typeface="Consolas" pitchFamily="34" charset="-122"/>
-                <a:cs typeface="Consolas" pitchFamily="34" charset="-120"/>
-              </a:rPr>
-              <a:t>int</a:t>
-            </a:r>
+                  <a:srgbClr val="E6EDF3"/>
+                </a:solidFill>
+                <a:latin typeface="Consolas" pitchFamily="34" charset="0"/>
+                <a:ea typeface="Consolas" pitchFamily="34" charset="-122"/>
+                <a:cs typeface="Consolas" pitchFamily="34" charset="-120"/>
+              </a:rPr>
+              <a:t>nilai.add(</a:t>
+            </a:r>
+            <a:r>
+              <a:rPr lang="en-US" sz="1400" dirty="0">
+                <a:solidFill>
+                  <a:srgbClr val="F78C6C"/>
+                </a:solidFill>
+                <a:latin typeface="Consolas" pitchFamily="34" charset="0"/>
+                <a:ea typeface="Consolas" pitchFamily="34" charset="-122"/>
+                <a:cs typeface="Consolas" pitchFamily="34" charset="-120"/>
+              </a:rPr>
+              <a:t>88</a:t>
+            </a:r>
+            <a:r>
+              <a:rPr lang="en-US" sz="1400" dirty="0">
+                <a:solidFill>
+                  <a:srgbClr val="E6EDF3"/>
+                </a:solidFill>
+                <a:latin typeface="Consolas" pitchFamily="34" charset="0"/>
+                <a:ea typeface="Consolas" pitchFamily="34" charset="-122"/>
+                <a:cs typeface="Consolas" pitchFamily="34" charset="-120"/>
+              </a:rPr>
+              <a:t>);      </a:t>
+            </a:r>
+            <a:r>
+              <a:rPr lang="en-US" sz="1400" i="1" dirty="0">
+                <a:solidFill>
+                  <a:srgbClr val="8FA3BC"/>
+                </a:solidFill>
+                <a:latin typeface="Consolas" pitchFamily="34" charset="0"/>
+                <a:ea typeface="Consolas" pitchFamily="34" charset="-122"/>
+                <a:cs typeface="Consolas" pitchFamily="34" charset="-120"/>
+              </a:rPr>
+              <a:t>// tambah di akhir</a:t>
+            </a:r>
+            <a:endParaRPr lang="en-US" sz="1400" dirty="0"/>
+          </a:p>
+          <a:p>
             <a:pPr indent="0" marL="0">
               <a:lnSpc>
                 <a:spcPct val="105000"/>
@@ -17445,8 +16844,11 @@
                 <a:ea typeface="Consolas" pitchFamily="34" charset="-122"/>
                 <a:cs typeface="Consolas" pitchFamily="34" charset="-120"/>
               </a:rPr>
-              <a:t>&gt; nilai = [</a:t>
-            </a:r>
+              <a:t> </a:t>
+            </a:r>
+            <a:endParaRPr lang="en-US" sz="1400" dirty="0"/>
+          </a:p>
+          <a:p>
             <a:pPr indent="0" marL="0">
               <a:lnSpc>
                 <a:spcPct val="105000"/>
@@ -17454,16 +16856,19 @@
               <a:buNone/>
             </a:pPr>
             <a:r>
-              <a:rPr lang="en-US" sz="1400" dirty="0">
-                <a:solidFill>
-                  <a:srgbClr val="F78C6C"/>
-                </a:solidFill>
-                <a:latin typeface="Consolas" pitchFamily="34" charset="0"/>
-                <a:ea typeface="Consolas" pitchFamily="34" charset="-122"/>
-                <a:cs typeface="Consolas" pitchFamily="34" charset="-120"/>
-              </a:rPr>
-              <a:t>80</a:t>
-            </a:r>
+              <a:rPr lang="en-US" sz="1400" i="1" dirty="0">
+                <a:solidFill>
+                  <a:srgbClr val="8FA3BC"/>
+                </a:solidFill>
+                <a:latin typeface="Consolas" pitchFamily="34" charset="0"/>
+                <a:ea typeface="Consolas" pitchFamily="34" charset="-122"/>
+                <a:cs typeface="Consolas" pitchFamily="34" charset="-120"/>
+              </a:rPr>
+              <a:t>// where = SARING</a:t>
+            </a:r>
+            <a:endParaRPr lang="en-US" sz="1400" dirty="0"/>
+          </a:p>
+          <a:p>
             <a:pPr indent="0" marL="0">
               <a:lnSpc>
                 <a:spcPct val="105000"/>
@@ -17473,14 +16878,50 @@
             <a:r>
               <a:rPr lang="en-US" sz="1400" dirty="0">
                 <a:solidFill>
+                  <a:srgbClr val="FFCB6B"/>
+                </a:solidFill>
+                <a:latin typeface="Consolas" pitchFamily="34" charset="0"/>
+                <a:ea typeface="Consolas" pitchFamily="34" charset="-122"/>
+                <a:cs typeface="Consolas" pitchFamily="34" charset="-120"/>
+              </a:rPr>
+              <a:t>List</a:t>
+            </a:r>
+            <a:r>
+              <a:rPr lang="en-US" sz="1400" dirty="0">
+                <a:solidFill>
                   <a:srgbClr val="E6EDF3"/>
                 </a:solidFill>
                 <a:latin typeface="Consolas" pitchFamily="34" charset="0"/>
                 <a:ea typeface="Consolas" pitchFamily="34" charset="-122"/>
                 <a:cs typeface="Consolas" pitchFamily="34" charset="-120"/>
               </a:rPr>
-              <a:t>, </a:t>
-            </a:r>
+              <a:t>&lt;</a:t>
+            </a:r>
+            <a:r>
+              <a:rPr lang="en-US" sz="1400" dirty="0">
+                <a:solidFill>
+                  <a:srgbClr val="FFCB6B"/>
+                </a:solidFill>
+                <a:latin typeface="Consolas" pitchFamily="34" charset="0"/>
+                <a:ea typeface="Consolas" pitchFamily="34" charset="-122"/>
+                <a:cs typeface="Consolas" pitchFamily="34" charset="-120"/>
+              </a:rPr>
+              <a:t>int</a:t>
+            </a:r>
+            <a:r>
+              <a:rPr lang="en-US" sz="1400" dirty="0">
+                <a:solidFill>
+                  <a:srgbClr val="E6EDF3"/>
+                </a:solidFill>
+                <a:latin typeface="Consolas" pitchFamily="34" charset="0"/>
+                <a:ea typeface="Consolas" pitchFamily="34" charset="-122"/>
+                <a:cs typeface="Consolas" pitchFamily="34" charset="-120"/>
+              </a:rPr>
+              <a:t>&gt; lulus =</a:t>
+            </a:r>
+            <a:endParaRPr lang="en-US" sz="1400" dirty="0"/>
+          </a:p>
+          <a:p>
             <a:pPr indent="0" marL="0">
               <a:lnSpc>
                 <a:spcPct val="105000"/>
@@ -17490,14 +16931,61 @@
             <a:r>
               <a:rPr lang="en-US" sz="1400" dirty="0">
                 <a:solidFill>
+                  <a:srgbClr val="E6EDF3"/>
+                </a:solidFill>
+                <a:latin typeface="Consolas" pitchFamily="34" charset="0"/>
+                <a:ea typeface="Consolas" pitchFamily="34" charset="-122"/>
+                <a:cs typeface="Consolas" pitchFamily="34" charset="-120"/>
+              </a:rPr>
+              <a:t>    nilai.where((</a:t>
+            </a:r>
+            <a:r>
+              <a:rPr lang="en-US" sz="1400" dirty="0">
+                <a:solidFill>
+                  <a:srgbClr val="FFCB6B"/>
+                </a:solidFill>
+                <a:latin typeface="Consolas" pitchFamily="34" charset="0"/>
+                <a:ea typeface="Consolas" pitchFamily="34" charset="-122"/>
+                <a:cs typeface="Consolas" pitchFamily="34" charset="-120"/>
+              </a:rPr>
+              <a:t>int</a:t>
+            </a:r>
+            <a:r>
+              <a:rPr lang="en-US" sz="1400" dirty="0">
+                <a:solidFill>
+                  <a:srgbClr val="E6EDF3"/>
+                </a:solidFill>
+                <a:latin typeface="Consolas" pitchFamily="34" charset="0"/>
+                <a:ea typeface="Consolas" pitchFamily="34" charset="-122"/>
+                <a:cs typeface="Consolas" pitchFamily="34" charset="-120"/>
+              </a:rPr>
+              <a:t> n) =&gt; n &gt;= </a:t>
+            </a:r>
+            <a:r>
+              <a:rPr lang="en-US" sz="1400" dirty="0">
+                <a:solidFill>
                   <a:srgbClr val="F78C6C"/>
                 </a:solidFill>
                 <a:latin typeface="Consolas" pitchFamily="34" charset="0"/>
                 <a:ea typeface="Consolas" pitchFamily="34" charset="-122"/>
                 <a:cs typeface="Consolas" pitchFamily="34" charset="-120"/>
               </a:rPr>
-              <a:t>65</a:t>
-            </a:r>
+              <a:t>60</a:t>
+            </a:r>
+            <a:r>
+              <a:rPr lang="en-US" sz="1400" dirty="0">
+                <a:solidFill>
+                  <a:srgbClr val="E6EDF3"/>
+                </a:solidFill>
+                <a:latin typeface="Consolas" pitchFamily="34" charset="0"/>
+                <a:ea typeface="Consolas" pitchFamily="34" charset="-122"/>
+                <a:cs typeface="Consolas" pitchFamily="34" charset="-120"/>
+              </a:rPr>
+              <a:t>).toList();</a:t>
+            </a:r>
+            <a:endParaRPr lang="en-US" sz="1400" dirty="0"/>
+          </a:p>
+          <a:p>
             <a:pPr indent="0" marL="0">
               <a:lnSpc>
                 <a:spcPct val="105000"/>
@@ -17513,8 +17001,11 @@
                 <a:ea typeface="Consolas" pitchFamily="34" charset="-122"/>
                 <a:cs typeface="Consolas" pitchFamily="34" charset="-120"/>
               </a:rPr>
-              <a:t>, </a:t>
-            </a:r>
+              <a:t> </a:t>
+            </a:r>
+            <a:endParaRPr lang="en-US" sz="1400" dirty="0"/>
+          </a:p>
+          <a:p>
             <a:pPr indent="0" marL="0">
               <a:lnSpc>
                 <a:spcPct val="105000"/>
@@ -17522,16 +17013,19 @@
               <a:buNone/>
             </a:pPr>
             <a:r>
-              <a:rPr lang="en-US" sz="1400" dirty="0">
-                <a:solidFill>
-                  <a:srgbClr val="F78C6C"/>
-                </a:solidFill>
-                <a:latin typeface="Consolas" pitchFamily="34" charset="0"/>
-                <a:ea typeface="Consolas" pitchFamily="34" charset="-122"/>
-                <a:cs typeface="Consolas" pitchFamily="34" charset="-120"/>
-              </a:rPr>
-              <a:t>92</a:t>
-            </a:r>
+              <a:rPr lang="en-US" sz="1400" i="1" dirty="0">
+                <a:solidFill>
+                  <a:srgbClr val="8FA3BC"/>
+                </a:solidFill>
+                <a:latin typeface="Consolas" pitchFamily="34" charset="0"/>
+                <a:ea typeface="Consolas" pitchFamily="34" charset="-122"/>
+                <a:cs typeface="Consolas" pitchFamily="34" charset="-120"/>
+              </a:rPr>
+              <a:t>// map = UBAH setiap isi</a:t>
+            </a:r>
+            <a:endParaRPr lang="en-US" sz="1400" dirty="0"/>
+          </a:p>
+          <a:p>
             <a:pPr indent="0" marL="0">
               <a:lnSpc>
                 <a:spcPct val="105000"/>
@@ -17541,14 +17035,50 @@
             <a:r>
               <a:rPr lang="en-US" sz="1400" dirty="0">
                 <a:solidFill>
+                  <a:srgbClr val="FFCB6B"/>
+                </a:solidFill>
+                <a:latin typeface="Consolas" pitchFamily="34" charset="0"/>
+                <a:ea typeface="Consolas" pitchFamily="34" charset="-122"/>
+                <a:cs typeface="Consolas" pitchFamily="34" charset="-120"/>
+              </a:rPr>
+              <a:t>List</a:t>
+            </a:r>
+            <a:r>
+              <a:rPr lang="en-US" sz="1400" dirty="0">
+                <a:solidFill>
                   <a:srgbClr val="E6EDF3"/>
                 </a:solidFill>
                 <a:latin typeface="Consolas" pitchFamily="34" charset="0"/>
                 <a:ea typeface="Consolas" pitchFamily="34" charset="-122"/>
                 <a:cs typeface="Consolas" pitchFamily="34" charset="-120"/>
               </a:rPr>
-              <a:t>, </a:t>
-            </a:r>
+              <a:t>&lt;</a:t>
+            </a:r>
+            <a:r>
+              <a:rPr lang="en-US" sz="1400" dirty="0">
+                <a:solidFill>
+                  <a:srgbClr val="FFCB6B"/>
+                </a:solidFill>
+                <a:latin typeface="Consolas" pitchFamily="34" charset="0"/>
+                <a:ea typeface="Consolas" pitchFamily="34" charset="-122"/>
+                <a:cs typeface="Consolas" pitchFamily="34" charset="-120"/>
+              </a:rPr>
+              <a:t>String</a:t>
+            </a:r>
+            <a:r>
+              <a:rPr lang="en-US" sz="1400" dirty="0">
+                <a:solidFill>
+                  <a:srgbClr val="E6EDF3"/>
+                </a:solidFill>
+                <a:latin typeface="Consolas" pitchFamily="34" charset="0"/>
+                <a:ea typeface="Consolas" pitchFamily="34" charset="-122"/>
+                <a:cs typeface="Consolas" pitchFamily="34" charset="-120"/>
+              </a:rPr>
+              <a:t>&gt; label =</a:t>
+            </a:r>
+            <a:endParaRPr lang="en-US" sz="1400" dirty="0"/>
+          </a:p>
+          <a:p>
             <a:pPr indent="0" marL="0">
               <a:lnSpc>
                 <a:spcPct val="105000"/>
@@ -17558,14 +17088,61 @@
             <a:r>
               <a:rPr lang="en-US" sz="1400" dirty="0">
                 <a:solidFill>
-                  <a:srgbClr val="F78C6C"/>
-                </a:solidFill>
-                <a:latin typeface="Consolas" pitchFamily="34" charset="0"/>
-                <a:ea typeface="Consolas" pitchFamily="34" charset="-122"/>
-                <a:cs typeface="Consolas" pitchFamily="34" charset="-120"/>
-              </a:rPr>
-              <a:t>47</a:t>
-            </a:r>
+                  <a:srgbClr val="E6EDF3"/>
+                </a:solidFill>
+                <a:latin typeface="Consolas" pitchFamily="34" charset="0"/>
+                <a:ea typeface="Consolas" pitchFamily="34" charset="-122"/>
+                <a:cs typeface="Consolas" pitchFamily="34" charset="-120"/>
+              </a:rPr>
+              <a:t>    nilai.map((</a:t>
+            </a:r>
+            <a:r>
+              <a:rPr lang="en-US" sz="1400" dirty="0">
+                <a:solidFill>
+                  <a:srgbClr val="FFCB6B"/>
+                </a:solidFill>
+                <a:latin typeface="Consolas" pitchFamily="34" charset="0"/>
+                <a:ea typeface="Consolas" pitchFamily="34" charset="-122"/>
+                <a:cs typeface="Consolas" pitchFamily="34" charset="-120"/>
+              </a:rPr>
+              <a:t>int</a:t>
+            </a:r>
+            <a:r>
+              <a:rPr lang="en-US" sz="1400" dirty="0">
+                <a:solidFill>
+                  <a:srgbClr val="E6EDF3"/>
+                </a:solidFill>
+                <a:latin typeface="Consolas" pitchFamily="34" charset="0"/>
+                <a:ea typeface="Consolas" pitchFamily="34" charset="-122"/>
+                <a:cs typeface="Consolas" pitchFamily="34" charset="-120"/>
+              </a:rPr>
+              <a:t> n) =&gt; </a:t>
+            </a:r>
+            <a:r>
+              <a:rPr lang="en-US" sz="1400" dirty="0">
+                <a:solidFill>
+                  <a:srgbClr val="C3E88D"/>
+                </a:solidFill>
+                <a:latin typeface="Consolas" pitchFamily="34" charset="0"/>
+                <a:ea typeface="Consolas" pitchFamily="34" charset="-122"/>
+                <a:cs typeface="Consolas" pitchFamily="34" charset="-120"/>
+              </a:rPr>
+              <a:t>'Nilai $n'</a:t>
+            </a:r>
+            <a:r>
+              <a:rPr lang="en-US" sz="1400" dirty="0">
+                <a:solidFill>
+                  <a:srgbClr val="E6EDF3"/>
+                </a:solidFill>
+                <a:latin typeface="Consolas" pitchFamily="34" charset="0"/>
+                <a:ea typeface="Consolas" pitchFamily="34" charset="-122"/>
+                <a:cs typeface="Consolas" pitchFamily="34" charset="-120"/>
+              </a:rPr>
+              <a:t>).toList();</a:t>
+            </a:r>
+            <a:endParaRPr lang="en-US" sz="1400" dirty="0"/>
+          </a:p>
+          <a:p>
             <a:pPr indent="0" marL="0">
               <a:lnSpc>
                 <a:spcPct val="105000"/>
@@ -17581,8 +17158,11 @@
                 <a:ea typeface="Consolas" pitchFamily="34" charset="-122"/>
                 <a:cs typeface="Consolas" pitchFamily="34" charset="-120"/>
               </a:rPr>
-              <a:t>, </a:t>
-            </a:r>
+              <a:t> </a:t>
+            </a:r>
+            <a:endParaRPr lang="en-US" sz="1400" dirty="0"/>
+          </a:p>
+          <a:p>
             <a:pPr indent="0" marL="0">
               <a:lnSpc>
                 <a:spcPct val="105000"/>
@@ -17592,14 +17172,116 @@
             <a:r>
               <a:rPr lang="en-US" sz="1400" dirty="0">
                 <a:solidFill>
+                  <a:srgbClr val="FFCB6B"/>
+                </a:solidFill>
+                <a:latin typeface="Consolas" pitchFamily="34" charset="0"/>
+                <a:ea typeface="Consolas" pitchFamily="34" charset="-122"/>
+                <a:cs typeface="Consolas" pitchFamily="34" charset="-120"/>
+              </a:rPr>
+              <a:t>Map</a:t>
+            </a:r>
+            <a:r>
+              <a:rPr lang="en-US" sz="1400" dirty="0">
+                <a:solidFill>
+                  <a:srgbClr val="E6EDF3"/>
+                </a:solidFill>
+                <a:latin typeface="Consolas" pitchFamily="34" charset="0"/>
+                <a:ea typeface="Consolas" pitchFamily="34" charset="-122"/>
+                <a:cs typeface="Consolas" pitchFamily="34" charset="-120"/>
+              </a:rPr>
+              <a:t>&lt;</a:t>
+            </a:r>
+            <a:r>
+              <a:rPr lang="en-US" sz="1400" dirty="0">
+                <a:solidFill>
+                  <a:srgbClr val="FFCB6B"/>
+                </a:solidFill>
+                <a:latin typeface="Consolas" pitchFamily="34" charset="0"/>
+                <a:ea typeface="Consolas" pitchFamily="34" charset="-122"/>
+                <a:cs typeface="Consolas" pitchFamily="34" charset="-120"/>
+              </a:rPr>
+              <a:t>String</a:t>
+            </a:r>
+            <a:r>
+              <a:rPr lang="en-US" sz="1400" dirty="0">
+                <a:solidFill>
+                  <a:srgbClr val="E6EDF3"/>
+                </a:solidFill>
+                <a:latin typeface="Consolas" pitchFamily="34" charset="0"/>
+                <a:ea typeface="Consolas" pitchFamily="34" charset="-122"/>
+                <a:cs typeface="Consolas" pitchFamily="34" charset="-120"/>
+              </a:rPr>
+              <a:t>, </a:t>
+            </a:r>
+            <a:r>
+              <a:rPr lang="en-US" sz="1400" dirty="0">
+                <a:solidFill>
+                  <a:srgbClr val="FFCB6B"/>
+                </a:solidFill>
+                <a:latin typeface="Consolas" pitchFamily="34" charset="0"/>
+                <a:ea typeface="Consolas" pitchFamily="34" charset="-122"/>
+                <a:cs typeface="Consolas" pitchFamily="34" charset="-120"/>
+              </a:rPr>
+              <a:t>int</a:t>
+            </a:r>
+            <a:r>
+              <a:rPr lang="en-US" sz="1400" dirty="0">
+                <a:solidFill>
+                  <a:srgbClr val="E6EDF3"/>
+                </a:solidFill>
+                <a:latin typeface="Consolas" pitchFamily="34" charset="0"/>
+                <a:ea typeface="Consolas" pitchFamily="34" charset="-122"/>
+                <a:cs typeface="Consolas" pitchFamily="34" charset="-120"/>
+              </a:rPr>
+              <a:t>&gt; stok = {</a:t>
+            </a:r>
+            <a:r>
+              <a:rPr lang="en-US" sz="1400" dirty="0">
+                <a:solidFill>
+                  <a:srgbClr val="C3E88D"/>
+                </a:solidFill>
+                <a:latin typeface="Consolas" pitchFamily="34" charset="0"/>
+                <a:ea typeface="Consolas" pitchFamily="34" charset="-122"/>
+                <a:cs typeface="Consolas" pitchFamily="34" charset="-120"/>
+              </a:rPr>
+              <a:t>'Apel'</a:t>
+            </a:r>
+            <a:r>
+              <a:rPr lang="en-US" sz="1400" dirty="0">
+                <a:solidFill>
+                  <a:srgbClr val="E6EDF3"/>
+                </a:solidFill>
+                <a:latin typeface="Consolas" pitchFamily="34" charset="0"/>
+                <a:ea typeface="Consolas" pitchFamily="34" charset="-122"/>
+                <a:cs typeface="Consolas" pitchFamily="34" charset="-120"/>
+              </a:rPr>
+              <a:t>: </a:t>
+            </a:r>
+            <a:r>
+              <a:rPr lang="en-US" sz="1400" dirty="0">
+                <a:solidFill>
                   <a:srgbClr val="F78C6C"/>
                 </a:solidFill>
                 <a:latin typeface="Consolas" pitchFamily="34" charset="0"/>
                 <a:ea typeface="Consolas" pitchFamily="34" charset="-122"/>
                 <a:cs typeface="Consolas" pitchFamily="34" charset="-120"/>
               </a:rPr>
-              <a:t>75</a:t>
-            </a:r>
+              <a:t>12</a:t>
+            </a:r>
+            <a:r>
+              <a:rPr lang="en-US" sz="1400" dirty="0">
+                <a:solidFill>
+                  <a:srgbClr val="E6EDF3"/>
+                </a:solidFill>
+                <a:latin typeface="Consolas" pitchFamily="34" charset="0"/>
+                <a:ea typeface="Consolas" pitchFamily="34" charset="-122"/>
+                <a:cs typeface="Consolas" pitchFamily="34" charset="-120"/>
+              </a:rPr>
+              <a:t>};</a:t>
+            </a:r>
+            <a:endParaRPr lang="en-US" sz="1400" dirty="0"/>
+          </a:p>
+          <a:p>
             <a:pPr indent="0" marL="0">
               <a:lnSpc>
                 <a:spcPct val="105000"/>
@@ -17615,34 +17297,30 @@
                 <a:ea typeface="Consolas" pitchFamily="34" charset="-122"/>
                 <a:cs typeface="Consolas" pitchFamily="34" charset="-120"/>
               </a:rPr>
-              <a:t>];</a:t>
-            </a:r>
-            <a:endParaRPr lang="en-US" sz="1400" dirty="0"/>
-          </a:p>
-          <a:p>
-            <a:pPr indent="0" marL="0">
-              <a:lnSpc>
-                <a:spcPct val="105000"/>
-              </a:lnSpc>
-              <a:buNone/>
-            </a:pPr>
+              <a:t>print(stok[</a:t>
+            </a:r>
             <a:r>
               <a:rPr lang="en-US" sz="1400" dirty="0">
                 <a:solidFill>
+                  <a:srgbClr val="C3E88D"/>
+                </a:solidFill>
+                <a:latin typeface="Consolas" pitchFamily="34" charset="0"/>
+                <a:ea typeface="Consolas" pitchFamily="34" charset="-122"/>
+                <a:cs typeface="Consolas" pitchFamily="34" charset="-120"/>
+              </a:rPr>
+              <a:t>'Salak'</a:t>
+            </a:r>
+            <a:r>
+              <a:rPr lang="en-US" sz="1400" dirty="0">
+                <a:solidFill>
                   <a:srgbClr val="E6EDF3"/>
                 </a:solidFill>
                 <a:latin typeface="Consolas" pitchFamily="34" charset="0"/>
                 <a:ea typeface="Consolas" pitchFamily="34" charset="-122"/>
                 <a:cs typeface="Consolas" pitchFamily="34" charset="-120"/>
               </a:rPr>
-              <a:t>print(nilai[</a:t>
-            </a:r>
-            <a:pPr indent="0" marL="0">
-              <a:lnSpc>
-                <a:spcPct val="105000"/>
-              </a:lnSpc>
-              <a:buNone/>
-            </a:pPr>
+              <a:t>] ?? </a:t>
+            </a:r>
             <a:r>
               <a:rPr lang="en-US" sz="1400" dirty="0">
                 <a:solidFill>
@@ -17654,12 +17332,6 @@
               </a:rPr>
               <a:t>0</a:t>
             </a:r>
-            <a:pPr indent="0" marL="0">
-              <a:lnSpc>
-                <a:spcPct val="105000"/>
-              </a:lnSpc>
-              <a:buNone/>
-            </a:pPr>
             <a:r>
               <a:rPr lang="en-US" sz="1400" dirty="0">
                 <a:solidFill>
@@ -17669,781 +17341,8 @@
                 <a:ea typeface="Consolas" pitchFamily="34" charset="-122"/>
                 <a:cs typeface="Consolas" pitchFamily="34" charset="-120"/>
               </a:rPr>
-              <a:t>]);    </a:t>
-            </a:r>
-            <a:pPr indent="0" marL="0">
-              <a:lnSpc>
-                <a:spcPct val="105000"/>
-              </a:lnSpc>
-              <a:buNone/>
-            </a:pPr>
-            <a:r>
-              <a:rPr lang="en-US" sz="1400" i="1" dirty="0">
-                <a:solidFill>
-                  <a:srgbClr val="8FA3BC"/>
-                </a:solidFill>
-                <a:latin typeface="Consolas" pitchFamily="34" charset="0"/>
-                <a:ea typeface="Consolas" pitchFamily="34" charset="-122"/>
-                <a:cs typeface="Consolas" pitchFamily="34" charset="-120"/>
-              </a:rPr>
-              <a:t>// 80 (indeks mulai 0!)</a:t>
-            </a:r>
-            <a:endParaRPr lang="en-US" sz="1400" dirty="0"/>
-          </a:p>
-          <a:p>
-            <a:pPr indent="0" marL="0">
-              <a:lnSpc>
-                <a:spcPct val="105000"/>
-              </a:lnSpc>
-              <a:buNone/>
-            </a:pPr>
-            <a:r>
-              <a:rPr lang="en-US" sz="1400" dirty="0">
-                <a:solidFill>
-                  <a:srgbClr val="E6EDF3"/>
-                </a:solidFill>
-                <a:latin typeface="Consolas" pitchFamily="34" charset="0"/>
-                <a:ea typeface="Consolas" pitchFamily="34" charset="-122"/>
-                <a:cs typeface="Consolas" pitchFamily="34" charset="-120"/>
-              </a:rPr>
-              <a:t>nilai.add(</a:t>
-            </a:r>
-            <a:pPr indent="0" marL="0">
-              <a:lnSpc>
-                <a:spcPct val="105000"/>
-              </a:lnSpc>
-              <a:buNone/>
-            </a:pPr>
-            <a:r>
-              <a:rPr lang="en-US" sz="1400" dirty="0">
-                <a:solidFill>
-                  <a:srgbClr val="F78C6C"/>
-                </a:solidFill>
-                <a:latin typeface="Consolas" pitchFamily="34" charset="0"/>
-                <a:ea typeface="Consolas" pitchFamily="34" charset="-122"/>
-                <a:cs typeface="Consolas" pitchFamily="34" charset="-120"/>
-              </a:rPr>
-              <a:t>88</a:t>
-            </a:r>
-            <a:pPr indent="0" marL="0">
-              <a:lnSpc>
-                <a:spcPct val="105000"/>
-              </a:lnSpc>
-              <a:buNone/>
-            </a:pPr>
-            <a:r>
-              <a:rPr lang="en-US" sz="1400" dirty="0">
-                <a:solidFill>
-                  <a:srgbClr val="E6EDF3"/>
-                </a:solidFill>
-                <a:latin typeface="Consolas" pitchFamily="34" charset="0"/>
-                <a:ea typeface="Consolas" pitchFamily="34" charset="-122"/>
-                <a:cs typeface="Consolas" pitchFamily="34" charset="-120"/>
-              </a:rPr>
-              <a:t>);      </a:t>
-            </a:r>
-            <a:pPr indent="0" marL="0">
-              <a:lnSpc>
-                <a:spcPct val="105000"/>
-              </a:lnSpc>
-              <a:buNone/>
-            </a:pPr>
-            <a:r>
-              <a:rPr lang="en-US" sz="1400" i="1" dirty="0">
-                <a:solidFill>
-                  <a:srgbClr val="8FA3BC"/>
-                </a:solidFill>
-                <a:latin typeface="Consolas" pitchFamily="34" charset="0"/>
-                <a:ea typeface="Consolas" pitchFamily="34" charset="-122"/>
-                <a:cs typeface="Consolas" pitchFamily="34" charset="-120"/>
-              </a:rPr>
-              <a:t>// tambah di akhir</a:t>
-            </a:r>
-            <a:endParaRPr lang="en-US" sz="1400" dirty="0"/>
-          </a:p>
-          <a:p>
-            <a:pPr indent="0" marL="0">
-              <a:lnSpc>
-                <a:spcPct val="105000"/>
-              </a:lnSpc>
-              <a:buNone/>
-            </a:pPr>
-            <a:r>
-              <a:rPr lang="en-US" sz="1400" dirty="0">
-                <a:solidFill>
-                  <a:srgbClr val="E6EDF3"/>
-                </a:solidFill>
-                <a:latin typeface="Consolas" pitchFamily="34" charset="0"/>
-                <a:ea typeface="Consolas" pitchFamily="34" charset="-122"/>
-                <a:cs typeface="Consolas" pitchFamily="34" charset="-120"/>
-              </a:rPr>
-              <a:t> </a:t>
-            </a:r>
-            <a:endParaRPr lang="en-US" sz="1400" dirty="0"/>
-          </a:p>
-          <a:p>
-            <a:pPr indent="0" marL="0">
-              <a:lnSpc>
-                <a:spcPct val="105000"/>
-              </a:lnSpc>
-              <a:buNone/>
-            </a:pPr>
-            <a:r>
-              <a:rPr lang="en-US" sz="1400" i="1" dirty="0">
-                <a:solidFill>
-                  <a:srgbClr val="8FA3BC"/>
-                </a:solidFill>
-                <a:latin typeface="Consolas" pitchFamily="34" charset="0"/>
-                <a:ea typeface="Consolas" pitchFamily="34" charset="-122"/>
-                <a:cs typeface="Consolas" pitchFamily="34" charset="-120"/>
-              </a:rPr>
-              <a:t>// where = SARING</a:t>
-            </a:r>
-            <a:endParaRPr lang="en-US" sz="1400" dirty="0"/>
-          </a:p>
-          <a:p>
-            <a:pPr indent="0" marL="0">
-              <a:lnSpc>
-                <a:spcPct val="105000"/>
-              </a:lnSpc>
-              <a:buNone/>
-            </a:pPr>
-            <a:r>
-              <a:rPr lang="en-US" sz="1400" dirty="0">
-                <a:solidFill>
-                  <a:srgbClr val="FFCB6B"/>
-                </a:solidFill>
-                <a:latin typeface="Consolas" pitchFamily="34" charset="0"/>
-                <a:ea typeface="Consolas" pitchFamily="34" charset="-122"/>
-                <a:cs typeface="Consolas" pitchFamily="34" charset="-120"/>
-              </a:rPr>
-              <a:t>List</a:t>
-            </a:r>
-            <a:pPr indent="0" marL="0">
-              <a:lnSpc>
-                <a:spcPct val="105000"/>
-              </a:lnSpc>
-              <a:buNone/>
-            </a:pPr>
-            <a:r>
-              <a:rPr lang="en-US" sz="1400" dirty="0">
-                <a:solidFill>
-                  <a:srgbClr val="E6EDF3"/>
-                </a:solidFill>
-                <a:latin typeface="Consolas" pitchFamily="34" charset="0"/>
-                <a:ea typeface="Consolas" pitchFamily="34" charset="-122"/>
-                <a:cs typeface="Consolas" pitchFamily="34" charset="-120"/>
-              </a:rPr>
-              <a:t>&lt;</a:t>
-            </a:r>
-            <a:pPr indent="0" marL="0">
-              <a:lnSpc>
-                <a:spcPct val="105000"/>
-              </a:lnSpc>
-              <a:buNone/>
-            </a:pPr>
-            <a:r>
-              <a:rPr lang="en-US" sz="1400" dirty="0">
-                <a:solidFill>
-                  <a:srgbClr val="FFCB6B"/>
-                </a:solidFill>
-                <a:latin typeface="Consolas" pitchFamily="34" charset="0"/>
-                <a:ea typeface="Consolas" pitchFamily="34" charset="-122"/>
-                <a:cs typeface="Consolas" pitchFamily="34" charset="-120"/>
-              </a:rPr>
-              <a:t>int</a:t>
-            </a:r>
-            <a:pPr indent="0" marL="0">
-              <a:lnSpc>
-                <a:spcPct val="105000"/>
-              </a:lnSpc>
-              <a:buNone/>
-            </a:pPr>
-            <a:r>
-              <a:rPr lang="en-US" sz="1400" dirty="0">
-                <a:solidFill>
-                  <a:srgbClr val="E6EDF3"/>
-                </a:solidFill>
-                <a:latin typeface="Consolas" pitchFamily="34" charset="0"/>
-                <a:ea typeface="Consolas" pitchFamily="34" charset="-122"/>
-                <a:cs typeface="Consolas" pitchFamily="34" charset="-120"/>
-              </a:rPr>
-              <a:t>&gt; lulus =</a:t>
-            </a:r>
-            <a:endParaRPr lang="en-US" sz="1400" dirty="0"/>
-          </a:p>
-          <a:p>
-            <a:pPr indent="0" marL="0">
-              <a:lnSpc>
-                <a:spcPct val="105000"/>
-              </a:lnSpc>
-              <a:buNone/>
-            </a:pPr>
-            <a:r>
-              <a:rPr lang="en-US" sz="1400" dirty="0">
-                <a:solidFill>
-                  <a:srgbClr val="E6EDF3"/>
-                </a:solidFill>
-                <a:latin typeface="Consolas" pitchFamily="34" charset="0"/>
-                <a:ea typeface="Consolas" pitchFamily="34" charset="-122"/>
-                <a:cs typeface="Consolas" pitchFamily="34" charset="-120"/>
-              </a:rPr>
-              <a:t>    nilai.where((</a:t>
-            </a:r>
-            <a:pPr indent="0" marL="0">
-              <a:lnSpc>
-                <a:spcPct val="105000"/>
-              </a:lnSpc>
-              <a:buNone/>
-            </a:pPr>
-            <a:r>
-              <a:rPr lang="en-US" sz="1400" dirty="0">
-                <a:solidFill>
-                  <a:srgbClr val="FFCB6B"/>
-                </a:solidFill>
-                <a:latin typeface="Consolas" pitchFamily="34" charset="0"/>
-                <a:ea typeface="Consolas" pitchFamily="34" charset="-122"/>
-                <a:cs typeface="Consolas" pitchFamily="34" charset="-120"/>
-              </a:rPr>
-              <a:t>int</a:t>
-            </a:r>
-            <a:pPr indent="0" marL="0">
-              <a:lnSpc>
-                <a:spcPct val="105000"/>
-              </a:lnSpc>
-              <a:buNone/>
-            </a:pPr>
-            <a:r>
-              <a:rPr lang="en-US" sz="1400" dirty="0">
-                <a:solidFill>
-                  <a:srgbClr val="E6EDF3"/>
-                </a:solidFill>
-                <a:latin typeface="Consolas" pitchFamily="34" charset="0"/>
-                <a:ea typeface="Consolas" pitchFamily="34" charset="-122"/>
-                <a:cs typeface="Consolas" pitchFamily="34" charset="-120"/>
-              </a:rPr>
-              <a:t> n) =&gt; n &gt;= </a:t>
-            </a:r>
-            <a:pPr indent="0" marL="0">
-              <a:lnSpc>
-                <a:spcPct val="105000"/>
-              </a:lnSpc>
-              <a:buNone/>
-            </a:pPr>
-            <a:r>
-              <a:rPr lang="en-US" sz="1400" dirty="0">
-                <a:solidFill>
-                  <a:srgbClr val="F78C6C"/>
-                </a:solidFill>
-                <a:latin typeface="Consolas" pitchFamily="34" charset="0"/>
-                <a:ea typeface="Consolas" pitchFamily="34" charset="-122"/>
-                <a:cs typeface="Consolas" pitchFamily="34" charset="-120"/>
-              </a:rPr>
-              <a:t>60</a:t>
-            </a:r>
-            <a:pPr indent="0" marL="0">
-              <a:lnSpc>
-                <a:spcPct val="105000"/>
-              </a:lnSpc>
-              <a:buNone/>
-            </a:pPr>
-            <a:r>
-              <a:rPr lang="en-US" sz="1400" dirty="0">
-                <a:solidFill>
-                  <a:srgbClr val="E6EDF3"/>
-                </a:solidFill>
-                <a:latin typeface="Consolas" pitchFamily="34" charset="0"/>
-                <a:ea typeface="Consolas" pitchFamily="34" charset="-122"/>
-                <a:cs typeface="Consolas" pitchFamily="34" charset="-120"/>
-              </a:rPr>
-              <a:t>).toList();</a:t>
-            </a:r>
-            <a:endParaRPr lang="en-US" sz="1400" dirty="0"/>
-          </a:p>
-          <a:p>
-            <a:pPr indent="0" marL="0">
-              <a:lnSpc>
-                <a:spcPct val="105000"/>
-              </a:lnSpc>
-              <a:buNone/>
-            </a:pPr>
-            <a:r>
-              <a:rPr lang="en-US" sz="1400" dirty="0">
-                <a:solidFill>
-                  <a:srgbClr val="E6EDF3"/>
-                </a:solidFill>
-                <a:latin typeface="Consolas" pitchFamily="34" charset="0"/>
-                <a:ea typeface="Consolas" pitchFamily="34" charset="-122"/>
-                <a:cs typeface="Consolas" pitchFamily="34" charset="-120"/>
-              </a:rPr>
-              <a:t> </a:t>
-            </a:r>
-            <a:endParaRPr lang="en-US" sz="1400" dirty="0"/>
-          </a:p>
-          <a:p>
-            <a:pPr indent="0" marL="0">
-              <a:lnSpc>
-                <a:spcPct val="105000"/>
-              </a:lnSpc>
-              <a:buNone/>
-            </a:pPr>
-            <a:r>
-              <a:rPr lang="en-US" sz="1400" i="1" dirty="0">
-                <a:solidFill>
-                  <a:srgbClr val="8FA3BC"/>
-                </a:solidFill>
-                <a:latin typeface="Consolas" pitchFamily="34" charset="0"/>
-                <a:ea typeface="Consolas" pitchFamily="34" charset="-122"/>
-                <a:cs typeface="Consolas" pitchFamily="34" charset="-120"/>
-              </a:rPr>
-              <a:t>// map = UBAH setiap isi</a:t>
-            </a:r>
-            <a:endParaRPr lang="en-US" sz="1400" dirty="0"/>
-          </a:p>
-          <a:p>
-            <a:pPr indent="0" marL="0">
-              <a:lnSpc>
-                <a:spcPct val="105000"/>
-              </a:lnSpc>
-              <a:buNone/>
-            </a:pPr>
-            <a:r>
-              <a:rPr lang="en-US" sz="1400" dirty="0">
-                <a:solidFill>
-                  <a:srgbClr val="FFCB6B"/>
-                </a:solidFill>
-                <a:latin typeface="Consolas" pitchFamily="34" charset="0"/>
-                <a:ea typeface="Consolas" pitchFamily="34" charset="-122"/>
-                <a:cs typeface="Consolas" pitchFamily="34" charset="-120"/>
-              </a:rPr>
-              <a:t>List</a:t>
-            </a:r>
-            <a:pPr indent="0" marL="0">
-              <a:lnSpc>
-                <a:spcPct val="105000"/>
-              </a:lnSpc>
-              <a:buNone/>
-            </a:pPr>
-            <a:r>
-              <a:rPr lang="en-US" sz="1400" dirty="0">
-                <a:solidFill>
-                  <a:srgbClr val="E6EDF3"/>
-                </a:solidFill>
-                <a:latin typeface="Consolas" pitchFamily="34" charset="0"/>
-                <a:ea typeface="Consolas" pitchFamily="34" charset="-122"/>
-                <a:cs typeface="Consolas" pitchFamily="34" charset="-120"/>
-              </a:rPr>
-              <a:t>&lt;</a:t>
-            </a:r>
-            <a:pPr indent="0" marL="0">
-              <a:lnSpc>
-                <a:spcPct val="105000"/>
-              </a:lnSpc>
-              <a:buNone/>
-            </a:pPr>
-            <a:r>
-              <a:rPr lang="en-US" sz="1400" dirty="0">
-                <a:solidFill>
-                  <a:srgbClr val="FFCB6B"/>
-                </a:solidFill>
-                <a:latin typeface="Consolas" pitchFamily="34" charset="0"/>
-                <a:ea typeface="Consolas" pitchFamily="34" charset="-122"/>
-                <a:cs typeface="Consolas" pitchFamily="34" charset="-120"/>
-              </a:rPr>
-              <a:t>String</a:t>
-            </a:r>
-            <a:pPr indent="0" marL="0">
-              <a:lnSpc>
-                <a:spcPct val="105000"/>
-              </a:lnSpc>
-              <a:buNone/>
-            </a:pPr>
-            <a:r>
-              <a:rPr lang="en-US" sz="1400" dirty="0">
-                <a:solidFill>
-                  <a:srgbClr val="E6EDF3"/>
-                </a:solidFill>
-                <a:latin typeface="Consolas" pitchFamily="34" charset="0"/>
-                <a:ea typeface="Consolas" pitchFamily="34" charset="-122"/>
-                <a:cs typeface="Consolas" pitchFamily="34" charset="-120"/>
-              </a:rPr>
-              <a:t>&gt; label =</a:t>
-            </a:r>
-            <a:endParaRPr lang="en-US" sz="1400" dirty="0"/>
-          </a:p>
-          <a:p>
-            <a:pPr indent="0" marL="0">
-              <a:lnSpc>
-                <a:spcPct val="105000"/>
-              </a:lnSpc>
-              <a:buNone/>
-            </a:pPr>
-            <a:r>
-              <a:rPr lang="en-US" sz="1400" dirty="0">
-                <a:solidFill>
-                  <a:srgbClr val="E6EDF3"/>
-                </a:solidFill>
-                <a:latin typeface="Consolas" pitchFamily="34" charset="0"/>
-                <a:ea typeface="Consolas" pitchFamily="34" charset="-122"/>
-                <a:cs typeface="Consolas" pitchFamily="34" charset="-120"/>
-              </a:rPr>
-              <a:t>    nilai.map((</a:t>
-            </a:r>
-            <a:pPr indent="0" marL="0">
-              <a:lnSpc>
-                <a:spcPct val="105000"/>
-              </a:lnSpc>
-              <a:buNone/>
-            </a:pPr>
-            <a:r>
-              <a:rPr lang="en-US" sz="1400" dirty="0">
-                <a:solidFill>
-                  <a:srgbClr val="FFCB6B"/>
-                </a:solidFill>
-                <a:latin typeface="Consolas" pitchFamily="34" charset="0"/>
-                <a:ea typeface="Consolas" pitchFamily="34" charset="-122"/>
-                <a:cs typeface="Consolas" pitchFamily="34" charset="-120"/>
-              </a:rPr>
-              <a:t>int</a:t>
-            </a:r>
-            <a:pPr indent="0" marL="0">
-              <a:lnSpc>
-                <a:spcPct val="105000"/>
-              </a:lnSpc>
-              <a:buNone/>
-            </a:pPr>
-            <a:r>
-              <a:rPr lang="en-US" sz="1400" dirty="0">
-                <a:solidFill>
-                  <a:srgbClr val="E6EDF3"/>
-                </a:solidFill>
-                <a:latin typeface="Consolas" pitchFamily="34" charset="0"/>
-                <a:ea typeface="Consolas" pitchFamily="34" charset="-122"/>
-                <a:cs typeface="Consolas" pitchFamily="34" charset="-120"/>
-              </a:rPr>
-              <a:t> n) =&gt; </a:t>
-            </a:r>
-            <a:pPr indent="0" marL="0">
-              <a:lnSpc>
-                <a:spcPct val="105000"/>
-              </a:lnSpc>
-              <a:buNone/>
-            </a:pPr>
-            <a:r>
-              <a:rPr lang="en-US" sz="1400" dirty="0">
-                <a:solidFill>
-                  <a:srgbClr val="C3E88D"/>
-                </a:solidFill>
-                <a:latin typeface="Consolas" pitchFamily="34" charset="0"/>
-                <a:ea typeface="Consolas" pitchFamily="34" charset="-122"/>
-                <a:cs typeface="Consolas" pitchFamily="34" charset="-120"/>
-              </a:rPr>
-              <a:t>'Nilai $n'</a:t>
-            </a:r>
-            <a:pPr indent="0" marL="0">
-              <a:lnSpc>
-                <a:spcPct val="105000"/>
-              </a:lnSpc>
-              <a:buNone/>
-            </a:pPr>
-            <a:r>
-              <a:rPr lang="en-US" sz="1400" dirty="0">
-                <a:solidFill>
-                  <a:srgbClr val="E6EDF3"/>
-                </a:solidFill>
-                <a:latin typeface="Consolas" pitchFamily="34" charset="0"/>
-                <a:ea typeface="Consolas" pitchFamily="34" charset="-122"/>
-                <a:cs typeface="Consolas" pitchFamily="34" charset="-120"/>
-              </a:rPr>
-              <a:t>).toList();</a:t>
-            </a:r>
-            <a:endParaRPr lang="en-US" sz="1400" dirty="0"/>
-          </a:p>
-          <a:p>
-            <a:pPr indent="0" marL="0">
-              <a:lnSpc>
-                <a:spcPct val="105000"/>
-              </a:lnSpc>
-              <a:buNone/>
-            </a:pPr>
-            <a:r>
-              <a:rPr lang="en-US" sz="1400" dirty="0">
-                <a:solidFill>
-                  <a:srgbClr val="E6EDF3"/>
-                </a:solidFill>
-                <a:latin typeface="Consolas" pitchFamily="34" charset="0"/>
-                <a:ea typeface="Consolas" pitchFamily="34" charset="-122"/>
-                <a:cs typeface="Consolas" pitchFamily="34" charset="-120"/>
-              </a:rPr>
-              <a:t> </a:t>
-            </a:r>
-            <a:endParaRPr lang="en-US" sz="1400" dirty="0"/>
-          </a:p>
-          <a:p>
-            <a:pPr indent="0" marL="0">
-              <a:lnSpc>
-                <a:spcPct val="105000"/>
-              </a:lnSpc>
-              <a:buNone/>
-            </a:pPr>
-            <a:r>
-              <a:rPr lang="en-US" sz="1400" dirty="0">
-                <a:solidFill>
-                  <a:srgbClr val="FFCB6B"/>
-                </a:solidFill>
-                <a:latin typeface="Consolas" pitchFamily="34" charset="0"/>
-                <a:ea typeface="Consolas" pitchFamily="34" charset="-122"/>
-                <a:cs typeface="Consolas" pitchFamily="34" charset="-120"/>
-              </a:rPr>
-              <a:t>Map</a:t>
-            </a:r>
-            <a:pPr indent="0" marL="0">
-              <a:lnSpc>
-                <a:spcPct val="105000"/>
-              </a:lnSpc>
-              <a:buNone/>
-            </a:pPr>
-            <a:r>
-              <a:rPr lang="en-US" sz="1400" dirty="0">
-                <a:solidFill>
-                  <a:srgbClr val="E6EDF3"/>
-                </a:solidFill>
-                <a:latin typeface="Consolas" pitchFamily="34" charset="0"/>
-                <a:ea typeface="Consolas" pitchFamily="34" charset="-122"/>
-                <a:cs typeface="Consolas" pitchFamily="34" charset="-120"/>
-              </a:rPr>
-              <a:t>&lt;</a:t>
-            </a:r>
-            <a:pPr indent="0" marL="0">
-              <a:lnSpc>
-                <a:spcPct val="105000"/>
-              </a:lnSpc>
-              <a:buNone/>
-            </a:pPr>
-            <a:r>
-              <a:rPr lang="en-US" sz="1400" dirty="0">
-                <a:solidFill>
-                  <a:srgbClr val="FFCB6B"/>
-                </a:solidFill>
-                <a:latin typeface="Consolas" pitchFamily="34" charset="0"/>
-                <a:ea typeface="Consolas" pitchFamily="34" charset="-122"/>
-                <a:cs typeface="Consolas" pitchFamily="34" charset="-120"/>
-              </a:rPr>
-              <a:t>String</a:t>
-            </a:r>
-            <a:pPr indent="0" marL="0">
-              <a:lnSpc>
-                <a:spcPct val="105000"/>
-              </a:lnSpc>
-              <a:buNone/>
-            </a:pPr>
-            <a:r>
-              <a:rPr lang="en-US" sz="1400" dirty="0">
-                <a:solidFill>
-                  <a:srgbClr val="E6EDF3"/>
-                </a:solidFill>
-                <a:latin typeface="Consolas" pitchFamily="34" charset="0"/>
-                <a:ea typeface="Consolas" pitchFamily="34" charset="-122"/>
-                <a:cs typeface="Consolas" pitchFamily="34" charset="-120"/>
-              </a:rPr>
-              <a:t>, </a:t>
-            </a:r>
-            <a:pPr indent="0" marL="0">
-              <a:lnSpc>
-                <a:spcPct val="105000"/>
-              </a:lnSpc>
-              <a:buNone/>
-            </a:pPr>
-            <a:r>
-              <a:rPr lang="en-US" sz="1400" dirty="0">
-                <a:solidFill>
-                  <a:srgbClr val="FFCB6B"/>
-                </a:solidFill>
-                <a:latin typeface="Consolas" pitchFamily="34" charset="0"/>
-                <a:ea typeface="Consolas" pitchFamily="34" charset="-122"/>
-                <a:cs typeface="Consolas" pitchFamily="34" charset="-120"/>
-              </a:rPr>
-              <a:t>int</a:t>
-            </a:r>
-            <a:pPr indent="0" marL="0">
-              <a:lnSpc>
-                <a:spcPct val="105000"/>
-              </a:lnSpc>
-              <a:buNone/>
-            </a:pPr>
-            <a:r>
-              <a:rPr lang="en-US" sz="1400" dirty="0">
-                <a:solidFill>
-                  <a:srgbClr val="E6EDF3"/>
-                </a:solidFill>
-                <a:latin typeface="Consolas" pitchFamily="34" charset="0"/>
-                <a:ea typeface="Consolas" pitchFamily="34" charset="-122"/>
-                <a:cs typeface="Consolas" pitchFamily="34" charset="-120"/>
-              </a:rPr>
-              <a:t>&gt; stok = {</a:t>
-            </a:r>
-            <a:pPr indent="0" marL="0">
-              <a:lnSpc>
-                <a:spcPct val="105000"/>
-              </a:lnSpc>
-              <a:buNone/>
-            </a:pPr>
-            <a:r>
-              <a:rPr lang="en-US" sz="1400" dirty="0">
-                <a:solidFill>
-                  <a:srgbClr val="C3E88D"/>
-                </a:solidFill>
-                <a:latin typeface="Consolas" pitchFamily="34" charset="0"/>
-                <a:ea typeface="Consolas" pitchFamily="34" charset="-122"/>
-                <a:cs typeface="Consolas" pitchFamily="34" charset="-120"/>
-              </a:rPr>
-              <a:t>'Apel'</a:t>
-            </a:r>
-            <a:pPr indent="0" marL="0">
-              <a:lnSpc>
-                <a:spcPct val="105000"/>
-              </a:lnSpc>
-              <a:buNone/>
-            </a:pPr>
-            <a:r>
-              <a:rPr lang="en-US" sz="1400" dirty="0">
-                <a:solidFill>
-                  <a:srgbClr val="E6EDF3"/>
-                </a:solidFill>
-                <a:latin typeface="Consolas" pitchFamily="34" charset="0"/>
-                <a:ea typeface="Consolas" pitchFamily="34" charset="-122"/>
-                <a:cs typeface="Consolas" pitchFamily="34" charset="-120"/>
-              </a:rPr>
-              <a:t>: </a:t>
-            </a:r>
-            <a:pPr indent="0" marL="0">
-              <a:lnSpc>
-                <a:spcPct val="105000"/>
-              </a:lnSpc>
-              <a:buNone/>
-            </a:pPr>
-            <a:r>
-              <a:rPr lang="en-US" sz="1400" dirty="0">
-                <a:solidFill>
-                  <a:srgbClr val="F78C6C"/>
-                </a:solidFill>
-                <a:latin typeface="Consolas" pitchFamily="34" charset="0"/>
-                <a:ea typeface="Consolas" pitchFamily="34" charset="-122"/>
-                <a:cs typeface="Consolas" pitchFamily="34" charset="-120"/>
-              </a:rPr>
-              <a:t>12</a:t>
-            </a:r>
-            <a:pPr indent="0" marL="0">
-              <a:lnSpc>
-                <a:spcPct val="105000"/>
-              </a:lnSpc>
-              <a:buNone/>
-            </a:pPr>
-            <a:r>
-              <a:rPr lang="en-US" sz="1400" dirty="0">
-                <a:solidFill>
-                  <a:srgbClr val="E6EDF3"/>
-                </a:solidFill>
-                <a:latin typeface="Consolas" pitchFamily="34" charset="0"/>
-                <a:ea typeface="Consolas" pitchFamily="34" charset="-122"/>
-                <a:cs typeface="Consolas" pitchFamily="34" charset="-120"/>
-              </a:rPr>
-              <a:t>};</a:t>
-            </a:r>
-            <a:endParaRPr lang="en-US" sz="1400" dirty="0"/>
-          </a:p>
-          <a:p>
-            <a:pPr indent="0" marL="0">
-              <a:lnSpc>
-                <a:spcPct val="105000"/>
-              </a:lnSpc>
-              <a:buNone/>
-            </a:pPr>
-            <a:r>
-              <a:rPr lang="en-US" sz="1400" dirty="0">
-                <a:solidFill>
-                  <a:srgbClr val="E6EDF3"/>
-                </a:solidFill>
-                <a:latin typeface="Consolas" pitchFamily="34" charset="0"/>
-                <a:ea typeface="Consolas" pitchFamily="34" charset="-122"/>
-                <a:cs typeface="Consolas" pitchFamily="34" charset="-120"/>
-              </a:rPr>
-              <a:t>print(stok[</a:t>
-            </a:r>
-            <a:pPr indent="0" marL="0">
-              <a:lnSpc>
-                <a:spcPct val="105000"/>
-              </a:lnSpc>
-              <a:buNone/>
-            </a:pPr>
-            <a:r>
-              <a:rPr lang="en-US" sz="1400" dirty="0">
-                <a:solidFill>
-                  <a:srgbClr val="C3E88D"/>
-                </a:solidFill>
-                <a:latin typeface="Consolas" pitchFamily="34" charset="0"/>
-                <a:ea typeface="Consolas" pitchFamily="34" charset="-122"/>
-                <a:cs typeface="Consolas" pitchFamily="34" charset="-120"/>
-              </a:rPr>
-              <a:t>'Salak'</a:t>
-            </a:r>
-            <a:pPr indent="0" marL="0">
-              <a:lnSpc>
-                <a:spcPct val="105000"/>
-              </a:lnSpc>
-              <a:buNone/>
-            </a:pPr>
-            <a:r>
-              <a:rPr lang="en-US" sz="1400" dirty="0">
-                <a:solidFill>
-                  <a:srgbClr val="E6EDF3"/>
-                </a:solidFill>
-                <a:latin typeface="Consolas" pitchFamily="34" charset="0"/>
-                <a:ea typeface="Consolas" pitchFamily="34" charset="-122"/>
-                <a:cs typeface="Consolas" pitchFamily="34" charset="-120"/>
-              </a:rPr>
-              <a:t>] ?? </a:t>
-            </a:r>
-            <a:pPr indent="0" marL="0">
-              <a:lnSpc>
-                <a:spcPct val="105000"/>
-              </a:lnSpc>
-              <a:buNone/>
-            </a:pPr>
-            <a:r>
-              <a:rPr lang="en-US" sz="1400" dirty="0">
-                <a:solidFill>
-                  <a:srgbClr val="F78C6C"/>
-                </a:solidFill>
-                <a:latin typeface="Consolas" pitchFamily="34" charset="0"/>
-                <a:ea typeface="Consolas" pitchFamily="34" charset="-122"/>
-                <a:cs typeface="Consolas" pitchFamily="34" charset="-120"/>
-              </a:rPr>
-              <a:t>0</a:t>
-            </a:r>
-            <a:pPr indent="0" marL="0">
-              <a:lnSpc>
-                <a:spcPct val="105000"/>
-              </a:lnSpc>
-              <a:buNone/>
-            </a:pPr>
-            <a:r>
-              <a:rPr lang="en-US" sz="1400" dirty="0">
-                <a:solidFill>
-                  <a:srgbClr val="E6EDF3"/>
-                </a:solidFill>
-                <a:latin typeface="Consolas" pitchFamily="34" charset="0"/>
-                <a:ea typeface="Consolas" pitchFamily="34" charset="-122"/>
-                <a:cs typeface="Consolas" pitchFamily="34" charset="-120"/>
-              </a:rPr>
               <a:t>);  </a:t>
             </a:r>
-            <a:pPr indent="0" marL="0">
-              <a:lnSpc>
-                <a:spcPct val="105000"/>
-              </a:lnSpc>
-              <a:buNone/>
-            </a:pPr>
             <a:r>
               <a:rPr lang="en-US" sz="1400" i="1" dirty="0">
                 <a:solidFill>
@@ -18703,6 +17602,86 @@
               </a:rPr>
               <a:t>Map</a:t>
             </a:r>
+            <a:r>
+              <a:rPr lang="en-US" sz="1400" dirty="0">
+                <a:solidFill>
+                  <a:srgbClr val="E6EDF3"/>
+                </a:solidFill>
+                <a:latin typeface="Consolas" pitchFamily="34" charset="0"/>
+                <a:ea typeface="Consolas" pitchFamily="34" charset="-122"/>
+                <a:cs typeface="Consolas" pitchFamily="34" charset="-120"/>
+              </a:rPr>
+              <a:t>&lt;</a:t>
+            </a:r>
+            <a:r>
+              <a:rPr lang="en-US" sz="1400" dirty="0">
+                <a:solidFill>
+                  <a:srgbClr val="FFCB6B"/>
+                </a:solidFill>
+                <a:latin typeface="Consolas" pitchFamily="34" charset="0"/>
+                <a:ea typeface="Consolas" pitchFamily="34" charset="-122"/>
+                <a:cs typeface="Consolas" pitchFamily="34" charset="-120"/>
+              </a:rPr>
+              <a:t>String</a:t>
+            </a:r>
+            <a:r>
+              <a:rPr lang="en-US" sz="1400" dirty="0">
+                <a:solidFill>
+                  <a:srgbClr val="E6EDF3"/>
+                </a:solidFill>
+                <a:latin typeface="Consolas" pitchFamily="34" charset="0"/>
+                <a:ea typeface="Consolas" pitchFamily="34" charset="-122"/>
+                <a:cs typeface="Consolas" pitchFamily="34" charset="-120"/>
+              </a:rPr>
+              <a:t>, </a:t>
+            </a:r>
+            <a:r>
+              <a:rPr lang="en-US" sz="1400" dirty="0">
+                <a:solidFill>
+                  <a:srgbClr val="FFCB6B"/>
+                </a:solidFill>
+                <a:latin typeface="Consolas" pitchFamily="34" charset="0"/>
+                <a:ea typeface="Consolas" pitchFamily="34" charset="-122"/>
+                <a:cs typeface="Consolas" pitchFamily="34" charset="-120"/>
+              </a:rPr>
+              <a:t>List</a:t>
+            </a:r>
+            <a:r>
+              <a:rPr lang="en-US" sz="1400" dirty="0">
+                <a:solidFill>
+                  <a:srgbClr val="E6EDF3"/>
+                </a:solidFill>
+                <a:latin typeface="Consolas" pitchFamily="34" charset="0"/>
+                <a:ea typeface="Consolas" pitchFamily="34" charset="-122"/>
+                <a:cs typeface="Consolas" pitchFamily="34" charset="-120"/>
+              </a:rPr>
+              <a:t>&lt;</a:t>
+            </a:r>
+            <a:r>
+              <a:rPr lang="en-US" sz="1400" dirty="0">
+                <a:solidFill>
+                  <a:srgbClr val="FFCB6B"/>
+                </a:solidFill>
+                <a:latin typeface="Consolas" pitchFamily="34" charset="0"/>
+                <a:ea typeface="Consolas" pitchFamily="34" charset="-122"/>
+                <a:cs typeface="Consolas" pitchFamily="34" charset="-120"/>
+              </a:rPr>
+              <a:t>int</a:t>
+            </a:r>
+            <a:r>
+              <a:rPr lang="en-US" sz="1400" dirty="0">
+                <a:solidFill>
+                  <a:srgbClr val="E6EDF3"/>
+                </a:solidFill>
+                <a:latin typeface="Consolas" pitchFamily="34" charset="0"/>
+                <a:ea typeface="Consolas" pitchFamily="34" charset="-122"/>
+                <a:cs typeface="Consolas" pitchFamily="34" charset="-120"/>
+              </a:rPr>
+              <a:t>&gt;&gt; kelas = {</a:t>
+            </a:r>
+            <a:endParaRPr lang="en-US" sz="1400" dirty="0"/>
+          </a:p>
+          <a:p>
             <a:pPr indent="0" marL="0">
               <a:lnSpc>
                 <a:spcPct val="105000"/>
@@ -18718,8 +17697,99 @@
                 <a:ea typeface="Consolas" pitchFamily="34" charset="-122"/>
                 <a:cs typeface="Consolas" pitchFamily="34" charset="-120"/>
               </a:rPr>
-              <a:t>&lt;</a:t>
-            </a:r>
+              <a:t>  </a:t>
+            </a:r>
+            <a:r>
+              <a:rPr lang="en-US" sz="1400" dirty="0">
+                <a:solidFill>
+                  <a:srgbClr val="C3E88D"/>
+                </a:solidFill>
+                <a:latin typeface="Consolas" pitchFamily="34" charset="0"/>
+                <a:ea typeface="Consolas" pitchFamily="34" charset="-122"/>
+                <a:cs typeface="Consolas" pitchFamily="34" charset="-120"/>
+              </a:rPr>
+              <a:t>'Andi'</a:t>
+            </a:r>
+            <a:r>
+              <a:rPr lang="en-US" sz="1400" dirty="0">
+                <a:solidFill>
+                  <a:srgbClr val="E6EDF3"/>
+                </a:solidFill>
+                <a:latin typeface="Consolas" pitchFamily="34" charset="0"/>
+                <a:ea typeface="Consolas" pitchFamily="34" charset="-122"/>
+                <a:cs typeface="Consolas" pitchFamily="34" charset="-120"/>
+              </a:rPr>
+              <a:t>: [</a:t>
+            </a:r>
+            <a:r>
+              <a:rPr lang="en-US" sz="1400" dirty="0">
+                <a:solidFill>
+                  <a:srgbClr val="F78C6C"/>
+                </a:solidFill>
+                <a:latin typeface="Consolas" pitchFamily="34" charset="0"/>
+                <a:ea typeface="Consolas" pitchFamily="34" charset="-122"/>
+                <a:cs typeface="Consolas" pitchFamily="34" charset="-120"/>
+              </a:rPr>
+              <a:t>85</a:t>
+            </a:r>
+            <a:r>
+              <a:rPr lang="en-US" sz="1400" dirty="0">
+                <a:solidFill>
+                  <a:srgbClr val="E6EDF3"/>
+                </a:solidFill>
+                <a:latin typeface="Consolas" pitchFamily="34" charset="0"/>
+                <a:ea typeface="Consolas" pitchFamily="34" charset="-122"/>
+                <a:cs typeface="Consolas" pitchFamily="34" charset="-120"/>
+              </a:rPr>
+              <a:t>, </a:t>
+            </a:r>
+            <a:r>
+              <a:rPr lang="en-US" sz="1400" dirty="0">
+                <a:solidFill>
+                  <a:srgbClr val="F78C6C"/>
+                </a:solidFill>
+                <a:latin typeface="Consolas" pitchFamily="34" charset="0"/>
+                <a:ea typeface="Consolas" pitchFamily="34" charset="-122"/>
+                <a:cs typeface="Consolas" pitchFamily="34" charset="-120"/>
+              </a:rPr>
+              <a:t>78</a:t>
+            </a:r>
+            <a:r>
+              <a:rPr lang="en-US" sz="1400" dirty="0">
+                <a:solidFill>
+                  <a:srgbClr val="E6EDF3"/>
+                </a:solidFill>
+                <a:latin typeface="Consolas" pitchFamily="34" charset="0"/>
+                <a:ea typeface="Consolas" pitchFamily="34" charset="-122"/>
+                <a:cs typeface="Consolas" pitchFamily="34" charset="-120"/>
+              </a:rPr>
+              <a:t>, </a:t>
+            </a:r>
+            <a:r>
+              <a:rPr lang="en-US" sz="1400" dirty="0">
+                <a:solidFill>
+                  <a:srgbClr val="F78C6C"/>
+                </a:solidFill>
+                <a:latin typeface="Consolas" pitchFamily="34" charset="0"/>
+                <a:ea typeface="Consolas" pitchFamily="34" charset="-122"/>
+                <a:cs typeface="Consolas" pitchFamily="34" charset="-120"/>
+              </a:rPr>
+              <a:t>90</a:t>
+            </a:r>
+            <a:r>
+              <a:rPr lang="en-US" sz="1400" dirty="0">
+                <a:solidFill>
+                  <a:srgbClr val="E6EDF3"/>
+                </a:solidFill>
+                <a:latin typeface="Consolas" pitchFamily="34" charset="0"/>
+                <a:ea typeface="Consolas" pitchFamily="34" charset="-122"/>
+                <a:cs typeface="Consolas" pitchFamily="34" charset="-120"/>
+              </a:rPr>
+              <a:t>],</a:t>
+            </a:r>
+            <a:endParaRPr lang="en-US" sz="1400" dirty="0"/>
+          </a:p>
+          <a:p>
             <a:pPr indent="0" marL="0">
               <a:lnSpc>
                 <a:spcPct val="105000"/>
@@ -18729,14 +17799,105 @@
             <a:r>
               <a:rPr lang="en-US" sz="1400" dirty="0">
                 <a:solidFill>
-                  <a:srgbClr val="FFCB6B"/>
-                </a:solidFill>
-                <a:latin typeface="Consolas" pitchFamily="34" charset="0"/>
-                <a:ea typeface="Consolas" pitchFamily="34" charset="-122"/>
-                <a:cs typeface="Consolas" pitchFamily="34" charset="-120"/>
-              </a:rPr>
-              <a:t>String</a:t>
-            </a:r>
+                  <a:srgbClr val="E6EDF3"/>
+                </a:solidFill>
+                <a:latin typeface="Consolas" pitchFamily="34" charset="0"/>
+                <a:ea typeface="Consolas" pitchFamily="34" charset="-122"/>
+                <a:cs typeface="Consolas" pitchFamily="34" charset="-120"/>
+              </a:rPr>
+              <a:t>  </a:t>
+            </a:r>
+            <a:r>
+              <a:rPr lang="en-US" sz="1400" dirty="0">
+                <a:solidFill>
+                  <a:srgbClr val="C3E88D"/>
+                </a:solidFill>
+                <a:latin typeface="Consolas" pitchFamily="34" charset="0"/>
+                <a:ea typeface="Consolas" pitchFamily="34" charset="-122"/>
+                <a:cs typeface="Consolas" pitchFamily="34" charset="-120"/>
+              </a:rPr>
+              <a:t>'Budi'</a:t>
+            </a:r>
+            <a:r>
+              <a:rPr lang="en-US" sz="1400" dirty="0">
+                <a:solidFill>
+                  <a:srgbClr val="E6EDF3"/>
+                </a:solidFill>
+                <a:latin typeface="Consolas" pitchFamily="34" charset="0"/>
+                <a:ea typeface="Consolas" pitchFamily="34" charset="-122"/>
+                <a:cs typeface="Consolas" pitchFamily="34" charset="-120"/>
+              </a:rPr>
+              <a:t>: [</a:t>
+            </a:r>
+            <a:r>
+              <a:rPr lang="en-US" sz="1400" dirty="0">
+                <a:solidFill>
+                  <a:srgbClr val="F78C6C"/>
+                </a:solidFill>
+                <a:latin typeface="Consolas" pitchFamily="34" charset="0"/>
+                <a:ea typeface="Consolas" pitchFamily="34" charset="-122"/>
+                <a:cs typeface="Consolas" pitchFamily="34" charset="-120"/>
+              </a:rPr>
+              <a:t>60</a:t>
+            </a:r>
+            <a:r>
+              <a:rPr lang="en-US" sz="1400" dirty="0">
+                <a:solidFill>
+                  <a:srgbClr val="E6EDF3"/>
+                </a:solidFill>
+                <a:latin typeface="Consolas" pitchFamily="34" charset="0"/>
+                <a:ea typeface="Consolas" pitchFamily="34" charset="-122"/>
+                <a:cs typeface="Consolas" pitchFamily="34" charset="-120"/>
+              </a:rPr>
+              <a:t>, </a:t>
+            </a:r>
+            <a:r>
+              <a:rPr lang="en-US" sz="1400" dirty="0">
+                <a:solidFill>
+                  <a:srgbClr val="F78C6C"/>
+                </a:solidFill>
+                <a:latin typeface="Consolas" pitchFamily="34" charset="0"/>
+                <a:ea typeface="Consolas" pitchFamily="34" charset="-122"/>
+                <a:cs typeface="Consolas" pitchFamily="34" charset="-120"/>
+              </a:rPr>
+              <a:t>55</a:t>
+            </a:r>
+            <a:r>
+              <a:rPr lang="en-US" sz="1400" dirty="0">
+                <a:solidFill>
+                  <a:srgbClr val="E6EDF3"/>
+                </a:solidFill>
+                <a:latin typeface="Consolas" pitchFamily="34" charset="0"/>
+                <a:ea typeface="Consolas" pitchFamily="34" charset="-122"/>
+                <a:cs typeface="Consolas" pitchFamily="34" charset="-120"/>
+              </a:rPr>
+              <a:t>, </a:t>
+            </a:r>
+            <a:r>
+              <a:rPr lang="en-US" sz="1400" dirty="0">
+                <a:solidFill>
+                  <a:srgbClr val="F78C6C"/>
+                </a:solidFill>
+                <a:latin typeface="Consolas" pitchFamily="34" charset="0"/>
+                <a:ea typeface="Consolas" pitchFamily="34" charset="-122"/>
+                <a:cs typeface="Consolas" pitchFamily="34" charset="-120"/>
+              </a:rPr>
+              <a:t>48</a:t>
+            </a:r>
+            <a:r>
+              <a:rPr lang="en-US" sz="1400" dirty="0">
+                <a:solidFill>
+                  <a:srgbClr val="E6EDF3"/>
+                </a:solidFill>
+                <a:latin typeface="Consolas" pitchFamily="34" charset="0"/>
+                <a:ea typeface="Consolas" pitchFamily="34" charset="-122"/>
+                <a:cs typeface="Consolas" pitchFamily="34" charset="-120"/>
+              </a:rPr>
+              <a:t>],</a:t>
+            </a:r>
+            <a:endParaRPr lang="en-US" sz="1400" dirty="0"/>
+          </a:p>
+          <a:p>
             <a:pPr indent="0" marL="0">
               <a:lnSpc>
                 <a:spcPct val="105000"/>
@@ -18752,8 +17913,11 @@
                 <a:ea typeface="Consolas" pitchFamily="34" charset="-122"/>
                 <a:cs typeface="Consolas" pitchFamily="34" charset="-120"/>
               </a:rPr>
-              <a:t>, </a:t>
-            </a:r>
+              <a:t>};</a:t>
+            </a:r>
+            <a:endParaRPr lang="en-US" sz="1400" dirty="0"/>
+          </a:p>
+          <a:p>
             <a:pPr indent="0" marL="0">
               <a:lnSpc>
                 <a:spcPct val="105000"/>
@@ -18763,14 +17927,17 @@
             <a:r>
               <a:rPr lang="en-US" sz="1400" dirty="0">
                 <a:solidFill>
-                  <a:srgbClr val="FFCB6B"/>
-                </a:solidFill>
-                <a:latin typeface="Consolas" pitchFamily="34" charset="0"/>
-                <a:ea typeface="Consolas" pitchFamily="34" charset="-122"/>
-                <a:cs typeface="Consolas" pitchFamily="34" charset="-120"/>
-              </a:rPr>
-              <a:t>List</a:t>
-            </a:r>
+                  <a:srgbClr val="E6EDF3"/>
+                </a:solidFill>
+                <a:latin typeface="Consolas" pitchFamily="34" charset="0"/>
+                <a:ea typeface="Consolas" pitchFamily="34" charset="-122"/>
+                <a:cs typeface="Consolas" pitchFamily="34" charset="-120"/>
+              </a:rPr>
+              <a:t> </a:t>
+            </a:r>
+            <a:endParaRPr lang="en-US" sz="1400" dirty="0"/>
+          </a:p>
+          <a:p>
             <a:pPr indent="0" marL="0">
               <a:lnSpc>
                 <a:spcPct val="105000"/>
@@ -18780,14 +17947,138 @@
             <a:r>
               <a:rPr lang="en-US" sz="1400" dirty="0">
                 <a:solidFill>
+                  <a:srgbClr val="C792EA"/>
+                </a:solidFill>
+                <a:latin typeface="Consolas" pitchFamily="34" charset="0"/>
+                <a:ea typeface="Consolas" pitchFamily="34" charset="-122"/>
+                <a:cs typeface="Consolas" pitchFamily="34" charset="-120"/>
+              </a:rPr>
+              <a:t>for</a:t>
+            </a:r>
+            <a:r>
+              <a:rPr lang="en-US" sz="1400" dirty="0">
+                <a:solidFill>
                   <a:srgbClr val="E6EDF3"/>
                 </a:solidFill>
                 <a:latin typeface="Consolas" pitchFamily="34" charset="0"/>
                 <a:ea typeface="Consolas" pitchFamily="34" charset="-122"/>
                 <a:cs typeface="Consolas" pitchFamily="34" charset="-120"/>
               </a:rPr>
+              <a:t> (</a:t>
+            </a:r>
+            <a:r>
+              <a:rPr lang="en-US" sz="1400" dirty="0">
+                <a:solidFill>
+                  <a:srgbClr val="FFCB6B"/>
+                </a:solidFill>
+                <a:latin typeface="Consolas" pitchFamily="34" charset="0"/>
+                <a:ea typeface="Consolas" pitchFamily="34" charset="-122"/>
+                <a:cs typeface="Consolas" pitchFamily="34" charset="-120"/>
+              </a:rPr>
+              <a:t>MapEntry</a:t>
+            </a:r>
+            <a:r>
+              <a:rPr lang="en-US" sz="1400" dirty="0">
+                <a:solidFill>
+                  <a:srgbClr val="E6EDF3"/>
+                </a:solidFill>
+                <a:latin typeface="Consolas" pitchFamily="34" charset="0"/>
+                <a:ea typeface="Consolas" pitchFamily="34" charset="-122"/>
+                <a:cs typeface="Consolas" pitchFamily="34" charset="-120"/>
+              </a:rPr>
               <a:t>&lt;</a:t>
             </a:r>
+            <a:r>
+              <a:rPr lang="en-US" sz="1400" dirty="0">
+                <a:solidFill>
+                  <a:srgbClr val="FFCB6B"/>
+                </a:solidFill>
+                <a:latin typeface="Consolas" pitchFamily="34" charset="0"/>
+                <a:ea typeface="Consolas" pitchFamily="34" charset="-122"/>
+                <a:cs typeface="Consolas" pitchFamily="34" charset="-120"/>
+              </a:rPr>
+              <a:t>String</a:t>
+            </a:r>
+            <a:r>
+              <a:rPr lang="en-US" sz="1400" dirty="0">
+                <a:solidFill>
+                  <a:srgbClr val="E6EDF3"/>
+                </a:solidFill>
+                <a:latin typeface="Consolas" pitchFamily="34" charset="0"/>
+                <a:ea typeface="Consolas" pitchFamily="34" charset="-122"/>
+                <a:cs typeface="Consolas" pitchFamily="34" charset="-120"/>
+              </a:rPr>
+              <a:t>, </a:t>
+            </a:r>
+            <a:r>
+              <a:rPr lang="en-US" sz="1400" dirty="0">
+                <a:solidFill>
+                  <a:srgbClr val="FFCB6B"/>
+                </a:solidFill>
+                <a:latin typeface="Consolas" pitchFamily="34" charset="0"/>
+                <a:ea typeface="Consolas" pitchFamily="34" charset="-122"/>
+                <a:cs typeface="Consolas" pitchFamily="34" charset="-120"/>
+              </a:rPr>
+              <a:t>List</a:t>
+            </a:r>
+            <a:r>
+              <a:rPr lang="en-US" sz="1400" dirty="0">
+                <a:solidFill>
+                  <a:srgbClr val="E6EDF3"/>
+                </a:solidFill>
+                <a:latin typeface="Consolas" pitchFamily="34" charset="0"/>
+                <a:ea typeface="Consolas" pitchFamily="34" charset="-122"/>
+                <a:cs typeface="Consolas" pitchFamily="34" charset="-120"/>
+              </a:rPr>
+              <a:t>&lt;</a:t>
+            </a:r>
+            <a:r>
+              <a:rPr lang="en-US" sz="1400" dirty="0">
+                <a:solidFill>
+                  <a:srgbClr val="FFCB6B"/>
+                </a:solidFill>
+                <a:latin typeface="Consolas" pitchFamily="34" charset="0"/>
+                <a:ea typeface="Consolas" pitchFamily="34" charset="-122"/>
+                <a:cs typeface="Consolas" pitchFamily="34" charset="-120"/>
+              </a:rPr>
+              <a:t>int</a:t>
+            </a:r>
+            <a:r>
+              <a:rPr lang="en-US" sz="1400" dirty="0">
+                <a:solidFill>
+                  <a:srgbClr val="E6EDF3"/>
+                </a:solidFill>
+                <a:latin typeface="Consolas" pitchFamily="34" charset="0"/>
+                <a:ea typeface="Consolas" pitchFamily="34" charset="-122"/>
+                <a:cs typeface="Consolas" pitchFamily="34" charset="-120"/>
+              </a:rPr>
+              <a:t>&gt;&gt; data </a:t>
+            </a:r>
+            <a:r>
+              <a:rPr lang="en-US" sz="1400" dirty="0">
+                <a:solidFill>
+                  <a:srgbClr val="C792EA"/>
+                </a:solidFill>
+                <a:latin typeface="Consolas" pitchFamily="34" charset="0"/>
+                <a:ea typeface="Consolas" pitchFamily="34" charset="-122"/>
+                <a:cs typeface="Consolas" pitchFamily="34" charset="-120"/>
+              </a:rPr>
+              <a:t>in</a:t>
+            </a:r>
+            <a:r>
+              <a:rPr lang="en-US" sz="1400" dirty="0">
+                <a:solidFill>
+                  <a:srgbClr val="E6EDF3"/>
+                </a:solidFill>
+                <a:latin typeface="Consolas" pitchFamily="34" charset="0"/>
+                <a:ea typeface="Consolas" pitchFamily="34" charset="-122"/>
+                <a:cs typeface="Consolas" pitchFamily="34" charset="-120"/>
+              </a:rPr>
+              <a:t> kelas.entries) {</a:t>
+            </a:r>
+            <a:endParaRPr lang="en-US" sz="1400" dirty="0"/>
+          </a:p>
+          <a:p>
             <a:pPr indent="0" marL="0">
               <a:lnSpc>
                 <a:spcPct val="105000"/>
@@ -18797,14 +18088,61 @@
             <a:r>
               <a:rPr lang="en-US" sz="1400" dirty="0">
                 <a:solidFill>
+                  <a:srgbClr val="E6EDF3"/>
+                </a:solidFill>
+                <a:latin typeface="Consolas" pitchFamily="34" charset="0"/>
+                <a:ea typeface="Consolas" pitchFamily="34" charset="-122"/>
+                <a:cs typeface="Consolas" pitchFamily="34" charset="-120"/>
+              </a:rPr>
+              <a:t>  </a:t>
+            </a:r>
+            <a:r>
+              <a:rPr lang="en-US" sz="1400" dirty="0">
+                <a:solidFill>
                   <a:srgbClr val="FFCB6B"/>
                 </a:solidFill>
                 <a:latin typeface="Consolas" pitchFamily="34" charset="0"/>
                 <a:ea typeface="Consolas" pitchFamily="34" charset="-122"/>
                 <a:cs typeface="Consolas" pitchFamily="34" charset="-120"/>
               </a:rPr>
+              <a:t>List</a:t>
+            </a:r>
+            <a:r>
+              <a:rPr lang="en-US" sz="1400" dirty="0">
+                <a:solidFill>
+                  <a:srgbClr val="E6EDF3"/>
+                </a:solidFill>
+                <a:latin typeface="Consolas" pitchFamily="34" charset="0"/>
+                <a:ea typeface="Consolas" pitchFamily="34" charset="-122"/>
+                <a:cs typeface="Consolas" pitchFamily="34" charset="-120"/>
+              </a:rPr>
+              <a:t>&lt;</a:t>
+            </a:r>
+            <a:r>
+              <a:rPr lang="en-US" sz="1400" dirty="0">
+                <a:solidFill>
+                  <a:srgbClr val="FFCB6B"/>
+                </a:solidFill>
+                <a:latin typeface="Consolas" pitchFamily="34" charset="0"/>
+                <a:ea typeface="Consolas" pitchFamily="34" charset="-122"/>
+                <a:cs typeface="Consolas" pitchFamily="34" charset="-120"/>
+              </a:rPr>
               <a:t>int</a:t>
             </a:r>
+            <a:r>
+              <a:rPr lang="en-US" sz="1400" dirty="0">
+                <a:solidFill>
+                  <a:srgbClr val="E6EDF3"/>
+                </a:solidFill>
+                <a:latin typeface="Consolas" pitchFamily="34" charset="0"/>
+                <a:ea typeface="Consolas" pitchFamily="34" charset="-122"/>
+                <a:cs typeface="Consolas" pitchFamily="34" charset="-120"/>
+              </a:rPr>
+              <a:t>&gt; n = data.value;</a:t>
+            </a:r>
+            <a:endParaRPr lang="en-US" sz="1400" dirty="0"/>
+          </a:p>
+          <a:p>
             <a:pPr indent="0" marL="0">
               <a:lnSpc>
                 <a:spcPct val="105000"/>
@@ -18820,7 +18158,29 @@
                 <a:ea typeface="Consolas" pitchFamily="34" charset="-122"/>
                 <a:cs typeface="Consolas" pitchFamily="34" charset="-120"/>
               </a:rPr>
-              <a:t>&gt;&gt; kelas = {</a:t>
+              <a:t>  </a:t>
+            </a:r>
+            <a:r>
+              <a:rPr lang="en-US" sz="1400" dirty="0">
+                <a:solidFill>
+                  <a:srgbClr val="FFCB6B"/>
+                </a:solidFill>
+                <a:latin typeface="Consolas" pitchFamily="34" charset="0"/>
+                <a:ea typeface="Consolas" pitchFamily="34" charset="-122"/>
+                <a:cs typeface="Consolas" pitchFamily="34" charset="-120"/>
+              </a:rPr>
+              <a:t>double</a:t>
+            </a:r>
+            <a:r>
+              <a:rPr lang="en-US" sz="1400" dirty="0">
+                <a:solidFill>
+                  <a:srgbClr val="E6EDF3"/>
+                </a:solidFill>
+                <a:latin typeface="Consolas" pitchFamily="34" charset="0"/>
+                <a:ea typeface="Consolas" pitchFamily="34" charset="-122"/>
+                <a:cs typeface="Consolas" pitchFamily="34" charset="-120"/>
+              </a:rPr>
+              <a:t> akhir = hitungNilaiAkhir(</a:t>
             </a:r>
             <a:endParaRPr lang="en-US" sz="1400" dirty="0"/>
           </a:p>
@@ -18840,8 +18200,77 @@
                 <a:ea typeface="Consolas" pitchFamily="34" charset="-122"/>
                 <a:cs typeface="Consolas" pitchFamily="34" charset="-120"/>
               </a:rPr>
-              <a:t>  </a:t>
-            </a:r>
+              <a:t>      tugas: n[</a:t>
+            </a:r>
+            <a:r>
+              <a:rPr lang="en-US" sz="1400" dirty="0">
+                <a:solidFill>
+                  <a:srgbClr val="F78C6C"/>
+                </a:solidFill>
+                <a:latin typeface="Consolas" pitchFamily="34" charset="0"/>
+                <a:ea typeface="Consolas" pitchFamily="34" charset="-122"/>
+                <a:cs typeface="Consolas" pitchFamily="34" charset="-120"/>
+              </a:rPr>
+              <a:t>0</a:t>
+            </a:r>
+            <a:r>
+              <a:rPr lang="en-US" sz="1400" dirty="0">
+                <a:solidFill>
+                  <a:srgbClr val="E6EDF3"/>
+                </a:solidFill>
+                <a:latin typeface="Consolas" pitchFamily="34" charset="0"/>
+                <a:ea typeface="Consolas" pitchFamily="34" charset="-122"/>
+                <a:cs typeface="Consolas" pitchFamily="34" charset="-120"/>
+              </a:rPr>
+              <a:t>], uts: n[</a:t>
+            </a:r>
+            <a:r>
+              <a:rPr lang="en-US" sz="1400" dirty="0">
+                <a:solidFill>
+                  <a:srgbClr val="F78C6C"/>
+                </a:solidFill>
+                <a:latin typeface="Consolas" pitchFamily="34" charset="0"/>
+                <a:ea typeface="Consolas" pitchFamily="34" charset="-122"/>
+                <a:cs typeface="Consolas" pitchFamily="34" charset="-120"/>
+              </a:rPr>
+              <a:t>1</a:t>
+            </a:r>
+            <a:r>
+              <a:rPr lang="en-US" sz="1400" dirty="0">
+                <a:solidFill>
+                  <a:srgbClr val="E6EDF3"/>
+                </a:solidFill>
+                <a:latin typeface="Consolas" pitchFamily="34" charset="0"/>
+                <a:ea typeface="Consolas" pitchFamily="34" charset="-122"/>
+                <a:cs typeface="Consolas" pitchFamily="34" charset="-120"/>
+              </a:rPr>
+              <a:t>], uas: n[</a:t>
+            </a:r>
+            <a:r>
+              <a:rPr lang="en-US" sz="1400" dirty="0">
+                <a:solidFill>
+                  <a:srgbClr val="F78C6C"/>
+                </a:solidFill>
+                <a:latin typeface="Consolas" pitchFamily="34" charset="0"/>
+                <a:ea typeface="Consolas" pitchFamily="34" charset="-122"/>
+                <a:cs typeface="Consolas" pitchFamily="34" charset="-120"/>
+              </a:rPr>
+              <a:t>2</a:t>
+            </a:r>
+            <a:r>
+              <a:rPr lang="en-US" sz="1400" dirty="0">
+                <a:solidFill>
+                  <a:srgbClr val="E6EDF3"/>
+                </a:solidFill>
+                <a:latin typeface="Consolas" pitchFamily="34" charset="0"/>
+                <a:ea typeface="Consolas" pitchFamily="34" charset="-122"/>
+                <a:cs typeface="Consolas" pitchFamily="34" charset="-120"/>
+              </a:rPr>
+              <a:t>]);</a:t>
+            </a:r>
+            <a:endParaRPr lang="en-US" sz="1400" dirty="0"/>
+          </a:p>
+          <a:p>
             <a:pPr indent="0" marL="0">
               <a:lnSpc>
                 <a:spcPct val="105000"/>
@@ -18851,14 +18280,39 @@
             <a:r>
               <a:rPr lang="en-US" sz="1400" dirty="0">
                 <a:solidFill>
-                  <a:srgbClr val="C3E88D"/>
-                </a:solidFill>
-                <a:latin typeface="Consolas" pitchFamily="34" charset="0"/>
-                <a:ea typeface="Consolas" pitchFamily="34" charset="-122"/>
-                <a:cs typeface="Consolas" pitchFamily="34" charset="-120"/>
-              </a:rPr>
-              <a:t>'Andi'</a:t>
-            </a:r>
+                  <a:srgbClr val="E6EDF3"/>
+                </a:solidFill>
+                <a:latin typeface="Consolas" pitchFamily="34" charset="0"/>
+                <a:ea typeface="Consolas" pitchFamily="34" charset="-122"/>
+                <a:cs typeface="Consolas" pitchFamily="34" charset="-120"/>
+              </a:rPr>
+              <a:t>  </a:t>
+            </a:r>
+            <a:r>
+              <a:rPr lang="en-US" sz="1400" dirty="0">
+                <a:solidFill>
+                  <a:srgbClr val="FFCB6B"/>
+                </a:solidFill>
+                <a:latin typeface="Consolas" pitchFamily="34" charset="0"/>
+                <a:ea typeface="Consolas" pitchFamily="34" charset="-122"/>
+                <a:cs typeface="Consolas" pitchFamily="34" charset="-120"/>
+              </a:rPr>
+              <a:t>String</a:t>
+            </a:r>
+            <a:r>
+              <a:rPr lang="en-US" sz="1400" dirty="0">
+                <a:solidFill>
+                  <a:srgbClr val="E6EDF3"/>
+                </a:solidFill>
+                <a:latin typeface="Consolas" pitchFamily="34" charset="0"/>
+                <a:ea typeface="Consolas" pitchFamily="34" charset="-122"/>
+                <a:cs typeface="Consolas" pitchFamily="34" charset="-120"/>
+              </a:rPr>
+              <a:t> huruf = nilaiHuruf(akhir);</a:t>
+            </a:r>
+            <a:endParaRPr lang="en-US" sz="1400" dirty="0"/>
+          </a:p>
+          <a:p>
             <a:pPr indent="0" marL="0">
               <a:lnSpc>
                 <a:spcPct val="105000"/>
@@ -18874,857 +18328,8 @@
                 <a:ea typeface="Consolas" pitchFamily="34" charset="-122"/>
                 <a:cs typeface="Consolas" pitchFamily="34" charset="-120"/>
               </a:rPr>
-              <a:t>: [</a:t>
-            </a:r>
-            <a:pPr indent="0" marL="0">
-              <a:lnSpc>
-                <a:spcPct val="105000"/>
-              </a:lnSpc>
-              <a:buNone/>
-            </a:pPr>
-            <a:r>
-              <a:rPr lang="en-US" sz="1400" dirty="0">
-                <a:solidFill>
-                  <a:srgbClr val="F78C6C"/>
-                </a:solidFill>
-                <a:latin typeface="Consolas" pitchFamily="34" charset="0"/>
-                <a:ea typeface="Consolas" pitchFamily="34" charset="-122"/>
-                <a:cs typeface="Consolas" pitchFamily="34" charset="-120"/>
-              </a:rPr>
-              <a:t>85</a:t>
-            </a:r>
-            <a:pPr indent="0" marL="0">
-              <a:lnSpc>
-                <a:spcPct val="105000"/>
-              </a:lnSpc>
-              <a:buNone/>
-            </a:pPr>
-            <a:r>
-              <a:rPr lang="en-US" sz="1400" dirty="0">
-                <a:solidFill>
-                  <a:srgbClr val="E6EDF3"/>
-                </a:solidFill>
-                <a:latin typeface="Consolas" pitchFamily="34" charset="0"/>
-                <a:ea typeface="Consolas" pitchFamily="34" charset="-122"/>
-                <a:cs typeface="Consolas" pitchFamily="34" charset="-120"/>
-              </a:rPr>
-              <a:t>, </a:t>
-            </a:r>
-            <a:pPr indent="0" marL="0">
-              <a:lnSpc>
-                <a:spcPct val="105000"/>
-              </a:lnSpc>
-              <a:buNone/>
-            </a:pPr>
-            <a:r>
-              <a:rPr lang="en-US" sz="1400" dirty="0">
-                <a:solidFill>
-                  <a:srgbClr val="F78C6C"/>
-                </a:solidFill>
-                <a:latin typeface="Consolas" pitchFamily="34" charset="0"/>
-                <a:ea typeface="Consolas" pitchFamily="34" charset="-122"/>
-                <a:cs typeface="Consolas" pitchFamily="34" charset="-120"/>
-              </a:rPr>
-              <a:t>78</a:t>
-            </a:r>
-            <a:pPr indent="0" marL="0">
-              <a:lnSpc>
-                <a:spcPct val="105000"/>
-              </a:lnSpc>
-              <a:buNone/>
-            </a:pPr>
-            <a:r>
-              <a:rPr lang="en-US" sz="1400" dirty="0">
-                <a:solidFill>
-                  <a:srgbClr val="E6EDF3"/>
-                </a:solidFill>
-                <a:latin typeface="Consolas" pitchFamily="34" charset="0"/>
-                <a:ea typeface="Consolas" pitchFamily="34" charset="-122"/>
-                <a:cs typeface="Consolas" pitchFamily="34" charset="-120"/>
-              </a:rPr>
-              <a:t>, </a:t>
-            </a:r>
-            <a:pPr indent="0" marL="0">
-              <a:lnSpc>
-                <a:spcPct val="105000"/>
-              </a:lnSpc>
-              <a:buNone/>
-            </a:pPr>
-            <a:r>
-              <a:rPr lang="en-US" sz="1400" dirty="0">
-                <a:solidFill>
-                  <a:srgbClr val="F78C6C"/>
-                </a:solidFill>
-                <a:latin typeface="Consolas" pitchFamily="34" charset="0"/>
-                <a:ea typeface="Consolas" pitchFamily="34" charset="-122"/>
-                <a:cs typeface="Consolas" pitchFamily="34" charset="-120"/>
-              </a:rPr>
-              <a:t>90</a:t>
-            </a:r>
-            <a:pPr indent="0" marL="0">
-              <a:lnSpc>
-                <a:spcPct val="105000"/>
-              </a:lnSpc>
-              <a:buNone/>
-            </a:pPr>
-            <a:r>
-              <a:rPr lang="en-US" sz="1400" dirty="0">
-                <a:solidFill>
-                  <a:srgbClr val="E6EDF3"/>
-                </a:solidFill>
-                <a:latin typeface="Consolas" pitchFamily="34" charset="0"/>
-                <a:ea typeface="Consolas" pitchFamily="34" charset="-122"/>
-                <a:cs typeface="Consolas" pitchFamily="34" charset="-120"/>
-              </a:rPr>
-              <a:t>],</a:t>
-            </a:r>
-            <a:endParaRPr lang="en-US" sz="1400" dirty="0"/>
-          </a:p>
-          <a:p>
-            <a:pPr indent="0" marL="0">
-              <a:lnSpc>
-                <a:spcPct val="105000"/>
-              </a:lnSpc>
-              <a:buNone/>
-            </a:pPr>
-            <a:r>
-              <a:rPr lang="en-US" sz="1400" dirty="0">
-                <a:solidFill>
-                  <a:srgbClr val="E6EDF3"/>
-                </a:solidFill>
-                <a:latin typeface="Consolas" pitchFamily="34" charset="0"/>
-                <a:ea typeface="Consolas" pitchFamily="34" charset="-122"/>
-                <a:cs typeface="Consolas" pitchFamily="34" charset="-120"/>
-              </a:rPr>
               <a:t>  </a:t>
             </a:r>
-            <a:pPr indent="0" marL="0">
-              <a:lnSpc>
-                <a:spcPct val="105000"/>
-              </a:lnSpc>
-              <a:buNone/>
-            </a:pPr>
-            <a:r>
-              <a:rPr lang="en-US" sz="1400" dirty="0">
-                <a:solidFill>
-                  <a:srgbClr val="C3E88D"/>
-                </a:solidFill>
-                <a:latin typeface="Consolas" pitchFamily="34" charset="0"/>
-                <a:ea typeface="Consolas" pitchFamily="34" charset="-122"/>
-                <a:cs typeface="Consolas" pitchFamily="34" charset="-120"/>
-              </a:rPr>
-              <a:t>'Budi'</a:t>
-            </a:r>
-            <a:pPr indent="0" marL="0">
-              <a:lnSpc>
-                <a:spcPct val="105000"/>
-              </a:lnSpc>
-              <a:buNone/>
-            </a:pPr>
-            <a:r>
-              <a:rPr lang="en-US" sz="1400" dirty="0">
-                <a:solidFill>
-                  <a:srgbClr val="E6EDF3"/>
-                </a:solidFill>
-                <a:latin typeface="Consolas" pitchFamily="34" charset="0"/>
-                <a:ea typeface="Consolas" pitchFamily="34" charset="-122"/>
-                <a:cs typeface="Consolas" pitchFamily="34" charset="-120"/>
-              </a:rPr>
-              <a:t>: [</a:t>
-            </a:r>
-            <a:pPr indent="0" marL="0">
-              <a:lnSpc>
-                <a:spcPct val="105000"/>
-              </a:lnSpc>
-              <a:buNone/>
-            </a:pPr>
-            <a:r>
-              <a:rPr lang="en-US" sz="1400" dirty="0">
-                <a:solidFill>
-                  <a:srgbClr val="F78C6C"/>
-                </a:solidFill>
-                <a:latin typeface="Consolas" pitchFamily="34" charset="0"/>
-                <a:ea typeface="Consolas" pitchFamily="34" charset="-122"/>
-                <a:cs typeface="Consolas" pitchFamily="34" charset="-120"/>
-              </a:rPr>
-              <a:t>60</a:t>
-            </a:r>
-            <a:pPr indent="0" marL="0">
-              <a:lnSpc>
-                <a:spcPct val="105000"/>
-              </a:lnSpc>
-              <a:buNone/>
-            </a:pPr>
-            <a:r>
-              <a:rPr lang="en-US" sz="1400" dirty="0">
-                <a:solidFill>
-                  <a:srgbClr val="E6EDF3"/>
-                </a:solidFill>
-                <a:latin typeface="Consolas" pitchFamily="34" charset="0"/>
-                <a:ea typeface="Consolas" pitchFamily="34" charset="-122"/>
-                <a:cs typeface="Consolas" pitchFamily="34" charset="-120"/>
-              </a:rPr>
-              <a:t>, </a:t>
-            </a:r>
-            <a:pPr indent="0" marL="0">
-              <a:lnSpc>
-                <a:spcPct val="105000"/>
-              </a:lnSpc>
-              <a:buNone/>
-            </a:pPr>
-            <a:r>
-              <a:rPr lang="en-US" sz="1400" dirty="0">
-                <a:solidFill>
-                  <a:srgbClr val="F78C6C"/>
-                </a:solidFill>
-                <a:latin typeface="Consolas" pitchFamily="34" charset="0"/>
-                <a:ea typeface="Consolas" pitchFamily="34" charset="-122"/>
-                <a:cs typeface="Consolas" pitchFamily="34" charset="-120"/>
-              </a:rPr>
-              <a:t>55</a:t>
-            </a:r>
-            <a:pPr indent="0" marL="0">
-              <a:lnSpc>
-                <a:spcPct val="105000"/>
-              </a:lnSpc>
-              <a:buNone/>
-            </a:pPr>
-            <a:r>
-              <a:rPr lang="en-US" sz="1400" dirty="0">
-                <a:solidFill>
-                  <a:srgbClr val="E6EDF3"/>
-                </a:solidFill>
-                <a:latin typeface="Consolas" pitchFamily="34" charset="0"/>
-                <a:ea typeface="Consolas" pitchFamily="34" charset="-122"/>
-                <a:cs typeface="Consolas" pitchFamily="34" charset="-120"/>
-              </a:rPr>
-              <a:t>, </a:t>
-            </a:r>
-            <a:pPr indent="0" marL="0">
-              <a:lnSpc>
-                <a:spcPct val="105000"/>
-              </a:lnSpc>
-              <a:buNone/>
-            </a:pPr>
-            <a:r>
-              <a:rPr lang="en-US" sz="1400" dirty="0">
-                <a:solidFill>
-                  <a:srgbClr val="F78C6C"/>
-                </a:solidFill>
-                <a:latin typeface="Consolas" pitchFamily="34" charset="0"/>
-                <a:ea typeface="Consolas" pitchFamily="34" charset="-122"/>
-                <a:cs typeface="Consolas" pitchFamily="34" charset="-120"/>
-              </a:rPr>
-              <a:t>48</a:t>
-            </a:r>
-            <a:pPr indent="0" marL="0">
-              <a:lnSpc>
-                <a:spcPct val="105000"/>
-              </a:lnSpc>
-              <a:buNone/>
-            </a:pPr>
-            <a:r>
-              <a:rPr lang="en-US" sz="1400" dirty="0">
-                <a:solidFill>
-                  <a:srgbClr val="E6EDF3"/>
-                </a:solidFill>
-                <a:latin typeface="Consolas" pitchFamily="34" charset="0"/>
-                <a:ea typeface="Consolas" pitchFamily="34" charset="-122"/>
-                <a:cs typeface="Consolas" pitchFamily="34" charset="-120"/>
-              </a:rPr>
-              <a:t>],</a:t>
-            </a:r>
-            <a:endParaRPr lang="en-US" sz="1400" dirty="0"/>
-          </a:p>
-          <a:p>
-            <a:pPr indent="0" marL="0">
-              <a:lnSpc>
-                <a:spcPct val="105000"/>
-              </a:lnSpc>
-              <a:buNone/>
-            </a:pPr>
-            <a:r>
-              <a:rPr lang="en-US" sz="1400" dirty="0">
-                <a:solidFill>
-                  <a:srgbClr val="E6EDF3"/>
-                </a:solidFill>
-                <a:latin typeface="Consolas" pitchFamily="34" charset="0"/>
-                <a:ea typeface="Consolas" pitchFamily="34" charset="-122"/>
-                <a:cs typeface="Consolas" pitchFamily="34" charset="-120"/>
-              </a:rPr>
-              <a:t>};</a:t>
-            </a:r>
-            <a:endParaRPr lang="en-US" sz="1400" dirty="0"/>
-          </a:p>
-          <a:p>
-            <a:pPr indent="0" marL="0">
-              <a:lnSpc>
-                <a:spcPct val="105000"/>
-              </a:lnSpc>
-              <a:buNone/>
-            </a:pPr>
-            <a:r>
-              <a:rPr lang="en-US" sz="1400" dirty="0">
-                <a:solidFill>
-                  <a:srgbClr val="E6EDF3"/>
-                </a:solidFill>
-                <a:latin typeface="Consolas" pitchFamily="34" charset="0"/>
-                <a:ea typeface="Consolas" pitchFamily="34" charset="-122"/>
-                <a:cs typeface="Consolas" pitchFamily="34" charset="-120"/>
-              </a:rPr>
-              <a:t> </a:t>
-            </a:r>
-            <a:endParaRPr lang="en-US" sz="1400" dirty="0"/>
-          </a:p>
-          <a:p>
-            <a:pPr indent="0" marL="0">
-              <a:lnSpc>
-                <a:spcPct val="105000"/>
-              </a:lnSpc>
-              <a:buNone/>
-            </a:pPr>
-            <a:r>
-              <a:rPr lang="en-US" sz="1400" dirty="0">
-                <a:solidFill>
-                  <a:srgbClr val="C792EA"/>
-                </a:solidFill>
-                <a:latin typeface="Consolas" pitchFamily="34" charset="0"/>
-                <a:ea typeface="Consolas" pitchFamily="34" charset="-122"/>
-                <a:cs typeface="Consolas" pitchFamily="34" charset="-120"/>
-              </a:rPr>
-              <a:t>for</a:t>
-            </a:r>
-            <a:pPr indent="0" marL="0">
-              <a:lnSpc>
-                <a:spcPct val="105000"/>
-              </a:lnSpc>
-              <a:buNone/>
-            </a:pPr>
-            <a:r>
-              <a:rPr lang="en-US" sz="1400" dirty="0">
-                <a:solidFill>
-                  <a:srgbClr val="E6EDF3"/>
-                </a:solidFill>
-                <a:latin typeface="Consolas" pitchFamily="34" charset="0"/>
-                <a:ea typeface="Consolas" pitchFamily="34" charset="-122"/>
-                <a:cs typeface="Consolas" pitchFamily="34" charset="-120"/>
-              </a:rPr>
-              <a:t> (</a:t>
-            </a:r>
-            <a:pPr indent="0" marL="0">
-              <a:lnSpc>
-                <a:spcPct val="105000"/>
-              </a:lnSpc>
-              <a:buNone/>
-            </a:pPr>
-            <a:r>
-              <a:rPr lang="en-US" sz="1400" dirty="0">
-                <a:solidFill>
-                  <a:srgbClr val="FFCB6B"/>
-                </a:solidFill>
-                <a:latin typeface="Consolas" pitchFamily="34" charset="0"/>
-                <a:ea typeface="Consolas" pitchFamily="34" charset="-122"/>
-                <a:cs typeface="Consolas" pitchFamily="34" charset="-120"/>
-              </a:rPr>
-              <a:t>MapEntry</a:t>
-            </a:r>
-            <a:pPr indent="0" marL="0">
-              <a:lnSpc>
-                <a:spcPct val="105000"/>
-              </a:lnSpc>
-              <a:buNone/>
-            </a:pPr>
-            <a:r>
-              <a:rPr lang="en-US" sz="1400" dirty="0">
-                <a:solidFill>
-                  <a:srgbClr val="E6EDF3"/>
-                </a:solidFill>
-                <a:latin typeface="Consolas" pitchFamily="34" charset="0"/>
-                <a:ea typeface="Consolas" pitchFamily="34" charset="-122"/>
-                <a:cs typeface="Consolas" pitchFamily="34" charset="-120"/>
-              </a:rPr>
-              <a:t>&lt;</a:t>
-            </a:r>
-            <a:pPr indent="0" marL="0">
-              <a:lnSpc>
-                <a:spcPct val="105000"/>
-              </a:lnSpc>
-              <a:buNone/>
-            </a:pPr>
-            <a:r>
-              <a:rPr lang="en-US" sz="1400" dirty="0">
-                <a:solidFill>
-                  <a:srgbClr val="FFCB6B"/>
-                </a:solidFill>
-                <a:latin typeface="Consolas" pitchFamily="34" charset="0"/>
-                <a:ea typeface="Consolas" pitchFamily="34" charset="-122"/>
-                <a:cs typeface="Consolas" pitchFamily="34" charset="-120"/>
-              </a:rPr>
-              <a:t>String</a:t>
-            </a:r>
-            <a:pPr indent="0" marL="0">
-              <a:lnSpc>
-                <a:spcPct val="105000"/>
-              </a:lnSpc>
-              <a:buNone/>
-            </a:pPr>
-            <a:r>
-              <a:rPr lang="en-US" sz="1400" dirty="0">
-                <a:solidFill>
-                  <a:srgbClr val="E6EDF3"/>
-                </a:solidFill>
-                <a:latin typeface="Consolas" pitchFamily="34" charset="0"/>
-                <a:ea typeface="Consolas" pitchFamily="34" charset="-122"/>
-                <a:cs typeface="Consolas" pitchFamily="34" charset="-120"/>
-              </a:rPr>
-              <a:t>, </a:t>
-            </a:r>
-            <a:pPr indent="0" marL="0">
-              <a:lnSpc>
-                <a:spcPct val="105000"/>
-              </a:lnSpc>
-              <a:buNone/>
-            </a:pPr>
-            <a:r>
-              <a:rPr lang="en-US" sz="1400" dirty="0">
-                <a:solidFill>
-                  <a:srgbClr val="FFCB6B"/>
-                </a:solidFill>
-                <a:latin typeface="Consolas" pitchFamily="34" charset="0"/>
-                <a:ea typeface="Consolas" pitchFamily="34" charset="-122"/>
-                <a:cs typeface="Consolas" pitchFamily="34" charset="-120"/>
-              </a:rPr>
-              <a:t>List</a:t>
-            </a:r>
-            <a:pPr indent="0" marL="0">
-              <a:lnSpc>
-                <a:spcPct val="105000"/>
-              </a:lnSpc>
-              <a:buNone/>
-            </a:pPr>
-            <a:r>
-              <a:rPr lang="en-US" sz="1400" dirty="0">
-                <a:solidFill>
-                  <a:srgbClr val="E6EDF3"/>
-                </a:solidFill>
-                <a:latin typeface="Consolas" pitchFamily="34" charset="0"/>
-                <a:ea typeface="Consolas" pitchFamily="34" charset="-122"/>
-                <a:cs typeface="Consolas" pitchFamily="34" charset="-120"/>
-              </a:rPr>
-              <a:t>&lt;</a:t>
-            </a:r>
-            <a:pPr indent="0" marL="0">
-              <a:lnSpc>
-                <a:spcPct val="105000"/>
-              </a:lnSpc>
-              <a:buNone/>
-            </a:pPr>
-            <a:r>
-              <a:rPr lang="en-US" sz="1400" dirty="0">
-                <a:solidFill>
-                  <a:srgbClr val="FFCB6B"/>
-                </a:solidFill>
-                <a:latin typeface="Consolas" pitchFamily="34" charset="0"/>
-                <a:ea typeface="Consolas" pitchFamily="34" charset="-122"/>
-                <a:cs typeface="Consolas" pitchFamily="34" charset="-120"/>
-              </a:rPr>
-              <a:t>int</a:t>
-            </a:r>
-            <a:pPr indent="0" marL="0">
-              <a:lnSpc>
-                <a:spcPct val="105000"/>
-              </a:lnSpc>
-              <a:buNone/>
-            </a:pPr>
-            <a:r>
-              <a:rPr lang="en-US" sz="1400" dirty="0">
-                <a:solidFill>
-                  <a:srgbClr val="E6EDF3"/>
-                </a:solidFill>
-                <a:latin typeface="Consolas" pitchFamily="34" charset="0"/>
-                <a:ea typeface="Consolas" pitchFamily="34" charset="-122"/>
-                <a:cs typeface="Consolas" pitchFamily="34" charset="-120"/>
-              </a:rPr>
-              <a:t>&gt;&gt; data </a:t>
-            </a:r>
-            <a:pPr indent="0" marL="0">
-              <a:lnSpc>
-                <a:spcPct val="105000"/>
-              </a:lnSpc>
-              <a:buNone/>
-            </a:pPr>
-            <a:r>
-              <a:rPr lang="en-US" sz="1400" dirty="0">
-                <a:solidFill>
-                  <a:srgbClr val="C792EA"/>
-                </a:solidFill>
-                <a:latin typeface="Consolas" pitchFamily="34" charset="0"/>
-                <a:ea typeface="Consolas" pitchFamily="34" charset="-122"/>
-                <a:cs typeface="Consolas" pitchFamily="34" charset="-120"/>
-              </a:rPr>
-              <a:t>in</a:t>
-            </a:r>
-            <a:pPr indent="0" marL="0">
-              <a:lnSpc>
-                <a:spcPct val="105000"/>
-              </a:lnSpc>
-              <a:buNone/>
-            </a:pPr>
-            <a:r>
-              <a:rPr lang="en-US" sz="1400" dirty="0">
-                <a:solidFill>
-                  <a:srgbClr val="E6EDF3"/>
-                </a:solidFill>
-                <a:latin typeface="Consolas" pitchFamily="34" charset="0"/>
-                <a:ea typeface="Consolas" pitchFamily="34" charset="-122"/>
-                <a:cs typeface="Consolas" pitchFamily="34" charset="-120"/>
-              </a:rPr>
-              <a:t> kelas.entries) {</a:t>
-            </a:r>
-            <a:endParaRPr lang="en-US" sz="1400" dirty="0"/>
-          </a:p>
-          <a:p>
-            <a:pPr indent="0" marL="0">
-              <a:lnSpc>
-                <a:spcPct val="105000"/>
-              </a:lnSpc>
-              <a:buNone/>
-            </a:pPr>
-            <a:r>
-              <a:rPr lang="en-US" sz="1400" dirty="0">
-                <a:solidFill>
-                  <a:srgbClr val="E6EDF3"/>
-                </a:solidFill>
-                <a:latin typeface="Consolas" pitchFamily="34" charset="0"/>
-                <a:ea typeface="Consolas" pitchFamily="34" charset="-122"/>
-                <a:cs typeface="Consolas" pitchFamily="34" charset="-120"/>
-              </a:rPr>
-              <a:t>  </a:t>
-            </a:r>
-            <a:pPr indent="0" marL="0">
-              <a:lnSpc>
-                <a:spcPct val="105000"/>
-              </a:lnSpc>
-              <a:buNone/>
-            </a:pPr>
-            <a:r>
-              <a:rPr lang="en-US" sz="1400" dirty="0">
-                <a:solidFill>
-                  <a:srgbClr val="FFCB6B"/>
-                </a:solidFill>
-                <a:latin typeface="Consolas" pitchFamily="34" charset="0"/>
-                <a:ea typeface="Consolas" pitchFamily="34" charset="-122"/>
-                <a:cs typeface="Consolas" pitchFamily="34" charset="-120"/>
-              </a:rPr>
-              <a:t>List</a:t>
-            </a:r>
-            <a:pPr indent="0" marL="0">
-              <a:lnSpc>
-                <a:spcPct val="105000"/>
-              </a:lnSpc>
-              <a:buNone/>
-            </a:pPr>
-            <a:r>
-              <a:rPr lang="en-US" sz="1400" dirty="0">
-                <a:solidFill>
-                  <a:srgbClr val="E6EDF3"/>
-                </a:solidFill>
-                <a:latin typeface="Consolas" pitchFamily="34" charset="0"/>
-                <a:ea typeface="Consolas" pitchFamily="34" charset="-122"/>
-                <a:cs typeface="Consolas" pitchFamily="34" charset="-120"/>
-              </a:rPr>
-              <a:t>&lt;</a:t>
-            </a:r>
-            <a:pPr indent="0" marL="0">
-              <a:lnSpc>
-                <a:spcPct val="105000"/>
-              </a:lnSpc>
-              <a:buNone/>
-            </a:pPr>
-            <a:r>
-              <a:rPr lang="en-US" sz="1400" dirty="0">
-                <a:solidFill>
-                  <a:srgbClr val="FFCB6B"/>
-                </a:solidFill>
-                <a:latin typeface="Consolas" pitchFamily="34" charset="0"/>
-                <a:ea typeface="Consolas" pitchFamily="34" charset="-122"/>
-                <a:cs typeface="Consolas" pitchFamily="34" charset="-120"/>
-              </a:rPr>
-              <a:t>int</a:t>
-            </a:r>
-            <a:pPr indent="0" marL="0">
-              <a:lnSpc>
-                <a:spcPct val="105000"/>
-              </a:lnSpc>
-              <a:buNone/>
-            </a:pPr>
-            <a:r>
-              <a:rPr lang="en-US" sz="1400" dirty="0">
-                <a:solidFill>
-                  <a:srgbClr val="E6EDF3"/>
-                </a:solidFill>
-                <a:latin typeface="Consolas" pitchFamily="34" charset="0"/>
-                <a:ea typeface="Consolas" pitchFamily="34" charset="-122"/>
-                <a:cs typeface="Consolas" pitchFamily="34" charset="-120"/>
-              </a:rPr>
-              <a:t>&gt; n = data.value;</a:t>
-            </a:r>
-            <a:endParaRPr lang="en-US" sz="1400" dirty="0"/>
-          </a:p>
-          <a:p>
-            <a:pPr indent="0" marL="0">
-              <a:lnSpc>
-                <a:spcPct val="105000"/>
-              </a:lnSpc>
-              <a:buNone/>
-            </a:pPr>
-            <a:r>
-              <a:rPr lang="en-US" sz="1400" dirty="0">
-                <a:solidFill>
-                  <a:srgbClr val="E6EDF3"/>
-                </a:solidFill>
-                <a:latin typeface="Consolas" pitchFamily="34" charset="0"/>
-                <a:ea typeface="Consolas" pitchFamily="34" charset="-122"/>
-                <a:cs typeface="Consolas" pitchFamily="34" charset="-120"/>
-              </a:rPr>
-              <a:t>  </a:t>
-            </a:r>
-            <a:pPr indent="0" marL="0">
-              <a:lnSpc>
-                <a:spcPct val="105000"/>
-              </a:lnSpc>
-              <a:buNone/>
-            </a:pPr>
-            <a:r>
-              <a:rPr lang="en-US" sz="1400" dirty="0">
-                <a:solidFill>
-                  <a:srgbClr val="FFCB6B"/>
-                </a:solidFill>
-                <a:latin typeface="Consolas" pitchFamily="34" charset="0"/>
-                <a:ea typeface="Consolas" pitchFamily="34" charset="-122"/>
-                <a:cs typeface="Consolas" pitchFamily="34" charset="-120"/>
-              </a:rPr>
-              <a:t>double</a:t>
-            </a:r>
-            <a:pPr indent="0" marL="0">
-              <a:lnSpc>
-                <a:spcPct val="105000"/>
-              </a:lnSpc>
-              <a:buNone/>
-            </a:pPr>
-            <a:r>
-              <a:rPr lang="en-US" sz="1400" dirty="0">
-                <a:solidFill>
-                  <a:srgbClr val="E6EDF3"/>
-                </a:solidFill>
-                <a:latin typeface="Consolas" pitchFamily="34" charset="0"/>
-                <a:ea typeface="Consolas" pitchFamily="34" charset="-122"/>
-                <a:cs typeface="Consolas" pitchFamily="34" charset="-120"/>
-              </a:rPr>
-              <a:t> akhir = hitungNilaiAkhir(</a:t>
-            </a:r>
-            <a:endParaRPr lang="en-US" sz="1400" dirty="0"/>
-          </a:p>
-          <a:p>
-            <a:pPr indent="0" marL="0">
-              <a:lnSpc>
-                <a:spcPct val="105000"/>
-              </a:lnSpc>
-              <a:buNone/>
-            </a:pPr>
-            <a:r>
-              <a:rPr lang="en-US" sz="1400" dirty="0">
-                <a:solidFill>
-                  <a:srgbClr val="E6EDF3"/>
-                </a:solidFill>
-                <a:latin typeface="Consolas" pitchFamily="34" charset="0"/>
-                <a:ea typeface="Consolas" pitchFamily="34" charset="-122"/>
-                <a:cs typeface="Consolas" pitchFamily="34" charset="-120"/>
-              </a:rPr>
-              <a:t>      tugas: n[</a:t>
-            </a:r>
-            <a:pPr indent="0" marL="0">
-              <a:lnSpc>
-                <a:spcPct val="105000"/>
-              </a:lnSpc>
-              <a:buNone/>
-            </a:pPr>
-            <a:r>
-              <a:rPr lang="en-US" sz="1400" dirty="0">
-                <a:solidFill>
-                  <a:srgbClr val="F78C6C"/>
-                </a:solidFill>
-                <a:latin typeface="Consolas" pitchFamily="34" charset="0"/>
-                <a:ea typeface="Consolas" pitchFamily="34" charset="-122"/>
-                <a:cs typeface="Consolas" pitchFamily="34" charset="-120"/>
-              </a:rPr>
-              <a:t>0</a:t>
-            </a:r>
-            <a:pPr indent="0" marL="0">
-              <a:lnSpc>
-                <a:spcPct val="105000"/>
-              </a:lnSpc>
-              <a:buNone/>
-            </a:pPr>
-            <a:r>
-              <a:rPr lang="en-US" sz="1400" dirty="0">
-                <a:solidFill>
-                  <a:srgbClr val="E6EDF3"/>
-                </a:solidFill>
-                <a:latin typeface="Consolas" pitchFamily="34" charset="0"/>
-                <a:ea typeface="Consolas" pitchFamily="34" charset="-122"/>
-                <a:cs typeface="Consolas" pitchFamily="34" charset="-120"/>
-              </a:rPr>
-              <a:t>], uts: n[</a:t>
-            </a:r>
-            <a:pPr indent="0" marL="0">
-              <a:lnSpc>
-                <a:spcPct val="105000"/>
-              </a:lnSpc>
-              <a:buNone/>
-            </a:pPr>
-            <a:r>
-              <a:rPr lang="en-US" sz="1400" dirty="0">
-                <a:solidFill>
-                  <a:srgbClr val="F78C6C"/>
-                </a:solidFill>
-                <a:latin typeface="Consolas" pitchFamily="34" charset="0"/>
-                <a:ea typeface="Consolas" pitchFamily="34" charset="-122"/>
-                <a:cs typeface="Consolas" pitchFamily="34" charset="-120"/>
-              </a:rPr>
-              <a:t>1</a:t>
-            </a:r>
-            <a:pPr indent="0" marL="0">
-              <a:lnSpc>
-                <a:spcPct val="105000"/>
-              </a:lnSpc>
-              <a:buNone/>
-            </a:pPr>
-            <a:r>
-              <a:rPr lang="en-US" sz="1400" dirty="0">
-                <a:solidFill>
-                  <a:srgbClr val="E6EDF3"/>
-                </a:solidFill>
-                <a:latin typeface="Consolas" pitchFamily="34" charset="0"/>
-                <a:ea typeface="Consolas" pitchFamily="34" charset="-122"/>
-                <a:cs typeface="Consolas" pitchFamily="34" charset="-120"/>
-              </a:rPr>
-              <a:t>], uas: n[</a:t>
-            </a:r>
-            <a:pPr indent="0" marL="0">
-              <a:lnSpc>
-                <a:spcPct val="105000"/>
-              </a:lnSpc>
-              <a:buNone/>
-            </a:pPr>
-            <a:r>
-              <a:rPr lang="en-US" sz="1400" dirty="0">
-                <a:solidFill>
-                  <a:srgbClr val="F78C6C"/>
-                </a:solidFill>
-                <a:latin typeface="Consolas" pitchFamily="34" charset="0"/>
-                <a:ea typeface="Consolas" pitchFamily="34" charset="-122"/>
-                <a:cs typeface="Consolas" pitchFamily="34" charset="-120"/>
-              </a:rPr>
-              <a:t>2</a:t>
-            </a:r>
-            <a:pPr indent="0" marL="0">
-              <a:lnSpc>
-                <a:spcPct val="105000"/>
-              </a:lnSpc>
-              <a:buNone/>
-            </a:pPr>
-            <a:r>
-              <a:rPr lang="en-US" sz="1400" dirty="0">
-                <a:solidFill>
-                  <a:srgbClr val="E6EDF3"/>
-                </a:solidFill>
-                <a:latin typeface="Consolas" pitchFamily="34" charset="0"/>
-                <a:ea typeface="Consolas" pitchFamily="34" charset="-122"/>
-                <a:cs typeface="Consolas" pitchFamily="34" charset="-120"/>
-              </a:rPr>
-              <a:t>]);</a:t>
-            </a:r>
-            <a:endParaRPr lang="en-US" sz="1400" dirty="0"/>
-          </a:p>
-          <a:p>
-            <a:pPr indent="0" marL="0">
-              <a:lnSpc>
-                <a:spcPct val="105000"/>
-              </a:lnSpc>
-              <a:buNone/>
-            </a:pPr>
-            <a:r>
-              <a:rPr lang="en-US" sz="1400" dirty="0">
-                <a:solidFill>
-                  <a:srgbClr val="E6EDF3"/>
-                </a:solidFill>
-                <a:latin typeface="Consolas" pitchFamily="34" charset="0"/>
-                <a:ea typeface="Consolas" pitchFamily="34" charset="-122"/>
-                <a:cs typeface="Consolas" pitchFamily="34" charset="-120"/>
-              </a:rPr>
-              <a:t>  </a:t>
-            </a:r>
-            <a:pPr indent="0" marL="0">
-              <a:lnSpc>
-                <a:spcPct val="105000"/>
-              </a:lnSpc>
-              <a:buNone/>
-            </a:pPr>
-            <a:r>
-              <a:rPr lang="en-US" sz="1400" dirty="0">
-                <a:solidFill>
-                  <a:srgbClr val="FFCB6B"/>
-                </a:solidFill>
-                <a:latin typeface="Consolas" pitchFamily="34" charset="0"/>
-                <a:ea typeface="Consolas" pitchFamily="34" charset="-122"/>
-                <a:cs typeface="Consolas" pitchFamily="34" charset="-120"/>
-              </a:rPr>
-              <a:t>String</a:t>
-            </a:r>
-            <a:pPr indent="0" marL="0">
-              <a:lnSpc>
-                <a:spcPct val="105000"/>
-              </a:lnSpc>
-              <a:buNone/>
-            </a:pPr>
-            <a:r>
-              <a:rPr lang="en-US" sz="1400" dirty="0">
-                <a:solidFill>
-                  <a:srgbClr val="E6EDF3"/>
-                </a:solidFill>
-                <a:latin typeface="Consolas" pitchFamily="34" charset="0"/>
-                <a:ea typeface="Consolas" pitchFamily="34" charset="-122"/>
-                <a:cs typeface="Consolas" pitchFamily="34" charset="-120"/>
-              </a:rPr>
-              <a:t> huruf = nilaiHuruf(akhir);</a:t>
-            </a:r>
-            <a:endParaRPr lang="en-US" sz="1400" dirty="0"/>
-          </a:p>
-          <a:p>
-            <a:pPr indent="0" marL="0">
-              <a:lnSpc>
-                <a:spcPct val="105000"/>
-              </a:lnSpc>
-              <a:buNone/>
-            </a:pPr>
-            <a:r>
-              <a:rPr lang="en-US" sz="1400" dirty="0">
-                <a:solidFill>
-                  <a:srgbClr val="E6EDF3"/>
-                </a:solidFill>
-                <a:latin typeface="Consolas" pitchFamily="34" charset="0"/>
-                <a:ea typeface="Consolas" pitchFamily="34" charset="-122"/>
-                <a:cs typeface="Consolas" pitchFamily="34" charset="-120"/>
-              </a:rPr>
-              <a:t>  </a:t>
-            </a:r>
-            <a:pPr indent="0" marL="0">
-              <a:lnSpc>
-                <a:spcPct val="105000"/>
-              </a:lnSpc>
-              <a:buNone/>
-            </a:pPr>
             <a:r>
               <a:rPr lang="en-US" sz="1400" i="1" dirty="0">
                 <a:solidFill>
@@ -25152,6 +23757,20 @@
               </a:rPr>
               <a:t>void</a:t>
             </a:r>
+            <a:r>
+              <a:rPr lang="en-US" sz="1700" dirty="0">
+                <a:solidFill>
+                  <a:srgbClr val="E6EDF3"/>
+                </a:solidFill>
+                <a:latin typeface="Consolas" pitchFamily="34" charset="0"/>
+                <a:ea typeface="Consolas" pitchFamily="34" charset="-122"/>
+                <a:cs typeface="Consolas" pitchFamily="34" charset="-120"/>
+              </a:rPr>
+              <a:t> main() {</a:t>
+            </a:r>
+            <a:endParaRPr lang="en-US" sz="1700" dirty="0"/>
+          </a:p>
+          <a:p>
             <a:pPr indent="0" marL="0">
               <a:lnSpc>
                 <a:spcPct val="105000"/>
@@ -25167,7 +23786,29 @@
                 <a:ea typeface="Consolas" pitchFamily="34" charset="-122"/>
                 <a:cs typeface="Consolas" pitchFamily="34" charset="-120"/>
               </a:rPr>
-              <a:t> main() {</a:t>
+              <a:t>  print(</a:t>
+            </a:r>
+            <a:r>
+              <a:rPr lang="en-US" sz="1700" dirty="0">
+                <a:solidFill>
+                  <a:srgbClr val="C3E88D"/>
+                </a:solidFill>
+                <a:latin typeface="Consolas" pitchFamily="34" charset="0"/>
+                <a:ea typeface="Consolas" pitchFamily="34" charset="-122"/>
+                <a:cs typeface="Consolas" pitchFamily="34" charset="-120"/>
+              </a:rPr>
+              <a:t>'Halo, Dart!'</a:t>
+            </a:r>
+            <a:r>
+              <a:rPr lang="en-US" sz="1700" dirty="0">
+                <a:solidFill>
+                  <a:srgbClr val="E6EDF3"/>
+                </a:solidFill>
+                <a:latin typeface="Consolas" pitchFamily="34" charset="0"/>
+                <a:ea typeface="Consolas" pitchFamily="34" charset="-122"/>
+                <a:cs typeface="Consolas" pitchFamily="34" charset="-120"/>
+              </a:rPr>
+              <a:t>);</a:t>
             </a:r>
             <a:endParaRPr lang="en-US" sz="1700" dirty="0"/>
           </a:p>
@@ -25189,29 +23830,17 @@
               </a:rPr>
               <a:t>  print(</a:t>
             </a:r>
-            <a:pPr indent="0" marL="0">
-              <a:lnSpc>
-                <a:spcPct val="105000"/>
-              </a:lnSpc>
-              <a:buNone/>
-            </a:pPr>
             <a:r>
               <a:rPr lang="en-US" sz="1700" dirty="0">
                 <a:solidFill>
-                  <a:srgbClr val="C3E88D"/>
-                </a:solidFill>
-                <a:latin typeface="Consolas" pitchFamily="34" charset="0"/>
-                <a:ea typeface="Consolas" pitchFamily="34" charset="-122"/>
-                <a:cs typeface="Consolas" pitchFamily="34" charset="-120"/>
-              </a:rPr>
-              <a:t>'Halo, Dart!'</a:t>
-            </a:r>
-            <a:pPr indent="0" marL="0">
-              <a:lnSpc>
-                <a:spcPct val="105000"/>
-              </a:lnSpc>
-              <a:buNone/>
-            </a:pPr>
+                  <a:srgbClr val="F78C6C"/>
+                </a:solidFill>
+                <a:latin typeface="Consolas" pitchFamily="34" charset="0"/>
+                <a:ea typeface="Consolas" pitchFamily="34" charset="-122"/>
+                <a:cs typeface="Consolas" pitchFamily="34" charset="-120"/>
+              </a:rPr>
+              <a:t>10</a:t>
+            </a:r>
             <a:r>
               <a:rPr lang="en-US" sz="1700" dirty="0">
                 <a:solidFill>
@@ -25221,102 +23850,30 @@
                 <a:ea typeface="Consolas" pitchFamily="34" charset="-122"/>
                 <a:cs typeface="Consolas" pitchFamily="34" charset="-120"/>
               </a:rPr>
-              <a:t>);</a:t>
-            </a:r>
-            <a:endParaRPr lang="en-US" sz="1700" dirty="0"/>
-          </a:p>
-          <a:p>
-            <a:pPr indent="0" marL="0">
-              <a:lnSpc>
-                <a:spcPct val="105000"/>
-              </a:lnSpc>
-              <a:buNone/>
-            </a:pPr>
+              <a:t> + </a:t>
+            </a:r>
             <a:r>
               <a:rPr lang="en-US" sz="1700" dirty="0">
                 <a:solidFill>
+                  <a:srgbClr val="F78C6C"/>
+                </a:solidFill>
+                <a:latin typeface="Consolas" pitchFamily="34" charset="0"/>
+                <a:ea typeface="Consolas" pitchFamily="34" charset="-122"/>
+                <a:cs typeface="Consolas" pitchFamily="34" charset="-120"/>
+              </a:rPr>
+              <a:t>5</a:t>
+            </a:r>
+            <a:r>
+              <a:rPr lang="en-US" sz="1700" dirty="0">
+                <a:solidFill>
                   <a:srgbClr val="E6EDF3"/>
                 </a:solidFill>
                 <a:latin typeface="Consolas" pitchFamily="34" charset="0"/>
                 <a:ea typeface="Consolas" pitchFamily="34" charset="-122"/>
                 <a:cs typeface="Consolas" pitchFamily="34" charset="-120"/>
               </a:rPr>
-              <a:t>  print(</a:t>
-            </a:r>
-            <a:pPr indent="0" marL="0">
-              <a:lnSpc>
-                <a:spcPct val="105000"/>
-              </a:lnSpc>
-              <a:buNone/>
-            </a:pPr>
-            <a:r>
-              <a:rPr lang="en-US" sz="1700" dirty="0">
-                <a:solidFill>
-                  <a:srgbClr val="F78C6C"/>
-                </a:solidFill>
-                <a:latin typeface="Consolas" pitchFamily="34" charset="0"/>
-                <a:ea typeface="Consolas" pitchFamily="34" charset="-122"/>
-                <a:cs typeface="Consolas" pitchFamily="34" charset="-120"/>
-              </a:rPr>
-              <a:t>10</a:t>
-            </a:r>
-            <a:pPr indent="0" marL="0">
-              <a:lnSpc>
-                <a:spcPct val="105000"/>
-              </a:lnSpc>
-              <a:buNone/>
-            </a:pPr>
-            <a:r>
-              <a:rPr lang="en-US" sz="1700" dirty="0">
-                <a:solidFill>
-                  <a:srgbClr val="E6EDF3"/>
-                </a:solidFill>
-                <a:latin typeface="Consolas" pitchFamily="34" charset="0"/>
-                <a:ea typeface="Consolas" pitchFamily="34" charset="-122"/>
-                <a:cs typeface="Consolas" pitchFamily="34" charset="-120"/>
-              </a:rPr>
-              <a:t> + </a:t>
-            </a:r>
-            <a:pPr indent="0" marL="0">
-              <a:lnSpc>
-                <a:spcPct val="105000"/>
-              </a:lnSpc>
-              <a:buNone/>
-            </a:pPr>
-            <a:r>
-              <a:rPr lang="en-US" sz="1700" dirty="0">
-                <a:solidFill>
-                  <a:srgbClr val="F78C6C"/>
-                </a:solidFill>
-                <a:latin typeface="Consolas" pitchFamily="34" charset="0"/>
-                <a:ea typeface="Consolas" pitchFamily="34" charset="-122"/>
-                <a:cs typeface="Consolas" pitchFamily="34" charset="-120"/>
-              </a:rPr>
-              <a:t>5</a:t>
-            </a:r>
-            <a:pPr indent="0" marL="0">
-              <a:lnSpc>
-                <a:spcPct val="105000"/>
-              </a:lnSpc>
-              <a:buNone/>
-            </a:pPr>
-            <a:r>
-              <a:rPr lang="en-US" sz="1700" dirty="0">
-                <a:solidFill>
-                  <a:srgbClr val="E6EDF3"/>
-                </a:solidFill>
-                <a:latin typeface="Consolas" pitchFamily="34" charset="0"/>
-                <a:ea typeface="Consolas" pitchFamily="34" charset="-122"/>
-                <a:cs typeface="Consolas" pitchFamily="34" charset="-120"/>
-              </a:rPr>
               <a:t>); </a:t>
             </a:r>
-            <a:pPr indent="0" marL="0">
-              <a:lnSpc>
-                <a:spcPct val="105000"/>
-              </a:lnSpc>
-              <a:buNone/>
-            </a:pPr>
             <a:r>
               <a:rPr lang="en-US" sz="1700" i="1" dirty="0">
                 <a:solidFill>
@@ -25854,6 +24411,53 @@
               </a:rPr>
               <a:t>String</a:t>
             </a:r>
+            <a:r>
+              <a:rPr lang="en-US" sz="1500" dirty="0">
+                <a:solidFill>
+                  <a:srgbClr val="E6EDF3"/>
+                </a:solidFill>
+                <a:latin typeface="Consolas" pitchFamily="34" charset="0"/>
+                <a:ea typeface="Consolas" pitchFamily="34" charset="-122"/>
+                <a:cs typeface="Consolas" pitchFamily="34" charset="-120"/>
+              </a:rPr>
+              <a:t> nama = </a:t>
+            </a:r>
+            <a:r>
+              <a:rPr lang="en-US" sz="1500" dirty="0">
+                <a:solidFill>
+                  <a:srgbClr val="C3E88D"/>
+                </a:solidFill>
+                <a:latin typeface="Consolas" pitchFamily="34" charset="0"/>
+                <a:ea typeface="Consolas" pitchFamily="34" charset="-122"/>
+                <a:cs typeface="Consolas" pitchFamily="34" charset="-120"/>
+              </a:rPr>
+              <a:t>'Siti Aminah'</a:t>
+            </a:r>
+            <a:r>
+              <a:rPr lang="en-US" sz="1500" dirty="0">
+                <a:solidFill>
+                  <a:srgbClr val="E6EDF3"/>
+                </a:solidFill>
+                <a:latin typeface="Consolas" pitchFamily="34" charset="0"/>
+                <a:ea typeface="Consolas" pitchFamily="34" charset="-122"/>
+                <a:cs typeface="Consolas" pitchFamily="34" charset="-120"/>
+              </a:rPr>
+              <a:t>; </a:t>
+            </a:r>
+            <a:r>
+              <a:rPr lang="en-US" sz="1500" i="1" dirty="0">
+                <a:solidFill>
+                  <a:srgbClr val="8FA3BC"/>
+                </a:solidFill>
+                <a:latin typeface="Consolas" pitchFamily="34" charset="0"/>
+                <a:ea typeface="Consolas" pitchFamily="34" charset="-122"/>
+                <a:cs typeface="Consolas" pitchFamily="34" charset="-120"/>
+              </a:rPr>
+              <a:t>// teks</a:t>
+            </a:r>
+            <a:endParaRPr lang="en-US" sz="1500" dirty="0"/>
+          </a:p>
+          <a:p>
             <a:pPr indent="0" marL="0">
               <a:lnSpc>
                 <a:spcPct val="105000"/>
@@ -25863,14 +24467,61 @@
             <a:r>
               <a:rPr lang="en-US" sz="1500" dirty="0">
                 <a:solidFill>
+                  <a:srgbClr val="FFCB6B"/>
+                </a:solidFill>
+                <a:latin typeface="Consolas" pitchFamily="34" charset="0"/>
+                <a:ea typeface="Consolas" pitchFamily="34" charset="-122"/>
+                <a:cs typeface="Consolas" pitchFamily="34" charset="-120"/>
+              </a:rPr>
+              <a:t>int</a:t>
+            </a:r>
+            <a:r>
+              <a:rPr lang="en-US" sz="1500" dirty="0">
+                <a:solidFill>
                   <a:srgbClr val="E6EDF3"/>
                 </a:solidFill>
                 <a:latin typeface="Consolas" pitchFamily="34" charset="0"/>
                 <a:ea typeface="Consolas" pitchFamily="34" charset="-122"/>
                 <a:cs typeface="Consolas" pitchFamily="34" charset="-120"/>
               </a:rPr>
-              <a:t> nama = </a:t>
-            </a:r>
+              <a:t> umur = </a:t>
+            </a:r>
+            <a:r>
+              <a:rPr lang="en-US" sz="1500" dirty="0">
+                <a:solidFill>
+                  <a:srgbClr val="F78C6C"/>
+                </a:solidFill>
+                <a:latin typeface="Consolas" pitchFamily="34" charset="0"/>
+                <a:ea typeface="Consolas" pitchFamily="34" charset="-122"/>
+                <a:cs typeface="Consolas" pitchFamily="34" charset="-120"/>
+              </a:rPr>
+              <a:t>19</a:t>
+            </a:r>
+            <a:r>
+              <a:rPr lang="en-US" sz="1500" dirty="0">
+                <a:solidFill>
+                  <a:srgbClr val="E6EDF3"/>
+                </a:solidFill>
+                <a:latin typeface="Consolas" pitchFamily="34" charset="0"/>
+                <a:ea typeface="Consolas" pitchFamily="34" charset="-122"/>
+                <a:cs typeface="Consolas" pitchFamily="34" charset="-120"/>
+              </a:rPr>
+              <a:t>;               </a:t>
+            </a:r>
+            <a:r>
+              <a:rPr lang="en-US" sz="1500" i="1" dirty="0">
+                <a:solidFill>
+                  <a:srgbClr val="8FA3BC"/>
+                </a:solidFill>
+                <a:latin typeface="Consolas" pitchFamily="34" charset="0"/>
+                <a:ea typeface="Consolas" pitchFamily="34" charset="-122"/>
+                <a:cs typeface="Consolas" pitchFamily="34" charset="-120"/>
+              </a:rPr>
+              <a:t>// bilangan bulat</a:t>
+            </a:r>
+            <a:endParaRPr lang="en-US" sz="1500" dirty="0"/>
+          </a:p>
+          <a:p>
             <a:pPr indent="0" marL="0">
               <a:lnSpc>
                 <a:spcPct val="105000"/>
@@ -25880,14 +24531,61 @@
             <a:r>
               <a:rPr lang="en-US" sz="1500" dirty="0">
                 <a:solidFill>
-                  <a:srgbClr val="C3E88D"/>
-                </a:solidFill>
-                <a:latin typeface="Consolas" pitchFamily="34" charset="0"/>
-                <a:ea typeface="Consolas" pitchFamily="34" charset="-122"/>
-                <a:cs typeface="Consolas" pitchFamily="34" charset="-120"/>
-              </a:rPr>
-              <a:t>'Siti Aminah'</a:t>
-            </a:r>
+                  <a:srgbClr val="FFCB6B"/>
+                </a:solidFill>
+                <a:latin typeface="Consolas" pitchFamily="34" charset="0"/>
+                <a:ea typeface="Consolas" pitchFamily="34" charset="-122"/>
+                <a:cs typeface="Consolas" pitchFamily="34" charset="-120"/>
+              </a:rPr>
+              <a:t>double</a:t>
+            </a:r>
+            <a:r>
+              <a:rPr lang="en-US" sz="1500" dirty="0">
+                <a:solidFill>
+                  <a:srgbClr val="E6EDF3"/>
+                </a:solidFill>
+                <a:latin typeface="Consolas" pitchFamily="34" charset="0"/>
+                <a:ea typeface="Consolas" pitchFamily="34" charset="-122"/>
+                <a:cs typeface="Consolas" pitchFamily="34" charset="-120"/>
+              </a:rPr>
+              <a:t> ipk = </a:t>
+            </a:r>
+            <a:r>
+              <a:rPr lang="en-US" sz="1500" dirty="0">
+                <a:solidFill>
+                  <a:srgbClr val="F78C6C"/>
+                </a:solidFill>
+                <a:latin typeface="Consolas" pitchFamily="34" charset="0"/>
+                <a:ea typeface="Consolas" pitchFamily="34" charset="-122"/>
+                <a:cs typeface="Consolas" pitchFamily="34" charset="-120"/>
+              </a:rPr>
+              <a:t>3.75</a:t>
+            </a:r>
+            <a:r>
+              <a:rPr lang="en-US" sz="1500" dirty="0">
+                <a:solidFill>
+                  <a:srgbClr val="E6EDF3"/>
+                </a:solidFill>
+                <a:latin typeface="Consolas" pitchFamily="34" charset="0"/>
+                <a:ea typeface="Consolas" pitchFamily="34" charset="-122"/>
+                <a:cs typeface="Consolas" pitchFamily="34" charset="-120"/>
+              </a:rPr>
+              <a:t>;           </a:t>
+            </a:r>
+            <a:r>
+              <a:rPr lang="en-US" sz="1500" i="1" dirty="0">
+                <a:solidFill>
+                  <a:srgbClr val="8FA3BC"/>
+                </a:solidFill>
+                <a:latin typeface="Consolas" pitchFamily="34" charset="0"/>
+                <a:ea typeface="Consolas" pitchFamily="34" charset="-122"/>
+                <a:cs typeface="Consolas" pitchFamily="34" charset="-120"/>
+              </a:rPr>
+              <a:t>// desimal (titik!)</a:t>
+            </a:r>
+            <a:endParaRPr lang="en-US" sz="1500" dirty="0"/>
+          </a:p>
+          <a:p>
             <a:pPr indent="0" marL="0">
               <a:lnSpc>
                 <a:spcPct val="105000"/>
@@ -25897,14 +24595,61 @@
             <a:r>
               <a:rPr lang="en-US" sz="1500" dirty="0">
                 <a:solidFill>
+                  <a:srgbClr val="FFCB6B"/>
+                </a:solidFill>
+                <a:latin typeface="Consolas" pitchFamily="34" charset="0"/>
+                <a:ea typeface="Consolas" pitchFamily="34" charset="-122"/>
+                <a:cs typeface="Consolas" pitchFamily="34" charset="-120"/>
+              </a:rPr>
+              <a:t>bool</a:t>
+            </a:r>
+            <a:r>
+              <a:rPr lang="en-US" sz="1500" dirty="0">
+                <a:solidFill>
                   <a:srgbClr val="E6EDF3"/>
                 </a:solidFill>
                 <a:latin typeface="Consolas" pitchFamily="34" charset="0"/>
                 <a:ea typeface="Consolas" pitchFamily="34" charset="-122"/>
                 <a:cs typeface="Consolas" pitchFamily="34" charset="-120"/>
               </a:rPr>
-              <a:t>; </a:t>
-            </a:r>
+              <a:t> sudahLulus = </a:t>
+            </a:r>
+            <a:r>
+              <a:rPr lang="en-US" sz="1500" dirty="0">
+                <a:solidFill>
+                  <a:srgbClr val="C792EA"/>
+                </a:solidFill>
+                <a:latin typeface="Consolas" pitchFamily="34" charset="0"/>
+                <a:ea typeface="Consolas" pitchFamily="34" charset="-122"/>
+                <a:cs typeface="Consolas" pitchFamily="34" charset="-120"/>
+              </a:rPr>
+              <a:t>false</a:t>
+            </a:r>
+            <a:r>
+              <a:rPr lang="en-US" sz="1500" dirty="0">
+                <a:solidFill>
+                  <a:srgbClr val="E6EDF3"/>
+                </a:solidFill>
+                <a:latin typeface="Consolas" pitchFamily="34" charset="0"/>
+                <a:ea typeface="Consolas" pitchFamily="34" charset="-122"/>
+                <a:cs typeface="Consolas" pitchFamily="34" charset="-120"/>
+              </a:rPr>
+              <a:t>;     </a:t>
+            </a:r>
+            <a:r>
+              <a:rPr lang="en-US" sz="1500" i="1" dirty="0">
+                <a:solidFill>
+                  <a:srgbClr val="8FA3BC"/>
+                </a:solidFill>
+                <a:latin typeface="Consolas" pitchFamily="34" charset="0"/>
+                <a:ea typeface="Consolas" pitchFamily="34" charset="-122"/>
+                <a:cs typeface="Consolas" pitchFamily="34" charset="-120"/>
+              </a:rPr>
+              <a:t>// true / false</a:t>
+            </a:r>
+            <a:endParaRPr lang="en-US" sz="1500" dirty="0"/>
+          </a:p>
+          <a:p>
             <a:pPr indent="0" marL="0">
               <a:lnSpc>
                 <a:spcPct val="105000"/>
@@ -25912,15 +24657,15 @@
               <a:buNone/>
             </a:pPr>
             <a:r>
-              <a:rPr lang="en-US" sz="1500" i="1" dirty="0">
-                <a:solidFill>
-                  <a:srgbClr val="8FA3BC"/>
-                </a:solidFill>
-                <a:latin typeface="Consolas" pitchFamily="34" charset="0"/>
-                <a:ea typeface="Consolas" pitchFamily="34" charset="-122"/>
-                <a:cs typeface="Consolas" pitchFamily="34" charset="-120"/>
-              </a:rPr>
-              <a:t>// teks</a:t>
+              <a:rPr lang="en-US" sz="1500" dirty="0">
+                <a:solidFill>
+                  <a:srgbClr val="E6EDF3"/>
+                </a:solidFill>
+                <a:latin typeface="Consolas" pitchFamily="34" charset="0"/>
+                <a:ea typeface="Consolas" pitchFamily="34" charset="-122"/>
+                <a:cs typeface="Consolas" pitchFamily="34" charset="-120"/>
+              </a:rPr>
+              <a:t> </a:t>
             </a:r>
             <a:endParaRPr lang="en-US" sz="1500" dirty="0"/>
           </a:p>
@@ -25934,14 +24679,61 @@
             <a:r>
               <a:rPr lang="en-US" sz="1500" dirty="0">
                 <a:solidFill>
-                  <a:srgbClr val="FFCB6B"/>
-                </a:solidFill>
-                <a:latin typeface="Consolas" pitchFamily="34" charset="0"/>
-                <a:ea typeface="Consolas" pitchFamily="34" charset="-122"/>
-                <a:cs typeface="Consolas" pitchFamily="34" charset="-120"/>
-              </a:rPr>
-              <a:t>int</a:t>
-            </a:r>
+                  <a:srgbClr val="C792EA"/>
+                </a:solidFill>
+                <a:latin typeface="Consolas" pitchFamily="34" charset="0"/>
+                <a:ea typeface="Consolas" pitchFamily="34" charset="-122"/>
+                <a:cs typeface="Consolas" pitchFamily="34" charset="-120"/>
+              </a:rPr>
+              <a:t>var</a:t>
+            </a:r>
+            <a:r>
+              <a:rPr lang="en-US" sz="1500" dirty="0">
+                <a:solidFill>
+                  <a:srgbClr val="E6EDF3"/>
+                </a:solidFill>
+                <a:latin typeface="Consolas" pitchFamily="34" charset="0"/>
+                <a:ea typeface="Consolas" pitchFamily="34" charset="-122"/>
+                <a:cs typeface="Consolas" pitchFamily="34" charset="-120"/>
+              </a:rPr>
+              <a:t> kota = </a:t>
+            </a:r>
+            <a:r>
+              <a:rPr lang="en-US" sz="1500" dirty="0">
+                <a:solidFill>
+                  <a:srgbClr val="C3E88D"/>
+                </a:solidFill>
+                <a:latin typeface="Consolas" pitchFamily="34" charset="0"/>
+                <a:ea typeface="Consolas" pitchFamily="34" charset="-122"/>
+                <a:cs typeface="Consolas" pitchFamily="34" charset="-120"/>
+              </a:rPr>
+              <a:t>'Samarinda'</a:t>
+            </a:r>
+            <a:r>
+              <a:rPr lang="en-US" sz="1500" dirty="0">
+                <a:solidFill>
+                  <a:srgbClr val="E6EDF3"/>
+                </a:solidFill>
+                <a:latin typeface="Consolas" pitchFamily="34" charset="0"/>
+                <a:ea typeface="Consolas" pitchFamily="34" charset="-122"/>
+                <a:cs typeface="Consolas" pitchFamily="34" charset="-120"/>
+              </a:rPr>
+              <a:t>;      </a:t>
+            </a:r>
+            <a:r>
+              <a:rPr lang="en-US" sz="1500" i="1" dirty="0">
+                <a:solidFill>
+                  <a:srgbClr val="8FA3BC"/>
+                </a:solidFill>
+                <a:latin typeface="Consolas" pitchFamily="34" charset="0"/>
+                <a:ea typeface="Consolas" pitchFamily="34" charset="-122"/>
+                <a:cs typeface="Consolas" pitchFamily="34" charset="-120"/>
+              </a:rPr>
+              <a:t>// ditebak: String</a:t>
+            </a:r>
+            <a:endParaRPr lang="en-US" sz="1500" dirty="0"/>
+          </a:p>
+          <a:p>
             <a:pPr indent="0" marL="0">
               <a:lnSpc>
                 <a:spcPct val="105000"/>
@@ -25957,8 +24749,44 @@
                 <a:ea typeface="Consolas" pitchFamily="34" charset="-122"/>
                 <a:cs typeface="Consolas" pitchFamily="34" charset="-120"/>
               </a:rPr>
-              <a:t> umur = </a:t>
-            </a:r>
+              <a:t>umur = </a:t>
+            </a:r>
+            <a:r>
+              <a:rPr lang="en-US" sz="1500" dirty="0">
+                <a:solidFill>
+                  <a:srgbClr val="F78C6C"/>
+                </a:solidFill>
+                <a:latin typeface="Consolas" pitchFamily="34" charset="0"/>
+                <a:ea typeface="Consolas" pitchFamily="34" charset="-122"/>
+                <a:cs typeface="Consolas" pitchFamily="34" charset="-120"/>
+              </a:rPr>
+              <a:t>20</a:t>
+            </a:r>
+            <a:r>
+              <a:rPr lang="en-US" sz="1500" dirty="0">
+                <a:solidFill>
+                  <a:srgbClr val="E6EDF3"/>
+                </a:solidFill>
+                <a:latin typeface="Consolas" pitchFamily="34" charset="0"/>
+                <a:ea typeface="Consolas" pitchFamily="34" charset="-122"/>
+                <a:cs typeface="Consolas" pitchFamily="34" charset="-120"/>
+              </a:rPr>
+              <a:t>;                   </a:t>
+            </a:r>
+            <a:r>
+              <a:rPr lang="en-US" sz="1500" i="1" dirty="0">
+                <a:solidFill>
+                  <a:srgbClr val="8FA3BC"/>
+                </a:solidFill>
+                <a:latin typeface="Consolas" pitchFamily="34" charset="0"/>
+                <a:ea typeface="Consolas" pitchFamily="34" charset="-122"/>
+                <a:cs typeface="Consolas" pitchFamily="34" charset="-120"/>
+              </a:rPr>
+              <a:t>// boleh: tetap int</a:t>
+            </a:r>
+            <a:endParaRPr lang="en-US" sz="1500" dirty="0"/>
+          </a:p>
+          <a:p>
             <a:pPr indent="0" marL="0">
               <a:lnSpc>
                 <a:spcPct val="105000"/>
@@ -25966,16 +24794,19 @@
               <a:buNone/>
             </a:pPr>
             <a:r>
-              <a:rPr lang="en-US" sz="1500" dirty="0">
-                <a:solidFill>
-                  <a:srgbClr val="F78C6C"/>
-                </a:solidFill>
-                <a:latin typeface="Consolas" pitchFamily="34" charset="0"/>
-                <a:ea typeface="Consolas" pitchFamily="34" charset="-122"/>
-                <a:cs typeface="Consolas" pitchFamily="34" charset="-120"/>
-              </a:rPr>
-              <a:t>19</a:t>
-            </a:r>
+              <a:rPr lang="en-US" sz="1500" i="1" dirty="0">
+                <a:solidFill>
+                  <a:srgbClr val="8FA3BC"/>
+                </a:solidFill>
+                <a:latin typeface="Consolas" pitchFamily="34" charset="0"/>
+                <a:ea typeface="Consolas" pitchFamily="34" charset="-122"/>
+                <a:cs typeface="Consolas" pitchFamily="34" charset="-120"/>
+              </a:rPr>
+              <a:t>// umur = 'dua puluh';       // ERROR: beda tipe</a:t>
+            </a:r>
+            <a:endParaRPr lang="en-US" sz="1500" dirty="0"/>
+          </a:p>
+          <a:p>
             <a:pPr indent="0" marL="0">
               <a:lnSpc>
                 <a:spcPct val="105000"/>
@@ -25991,8 +24822,11 @@
                 <a:ea typeface="Consolas" pitchFamily="34" charset="-122"/>
                 <a:cs typeface="Consolas" pitchFamily="34" charset="-120"/>
               </a:rPr>
-              <a:t>;               </a:t>
-            </a:r>
+              <a:t> </a:t>
+            </a:r>
+            <a:endParaRPr lang="en-US" sz="1500" dirty="0"/>
+          </a:p>
+          <a:p>
             <a:pPr indent="0" marL="0">
               <a:lnSpc>
                 <a:spcPct val="105000"/>
@@ -26000,6 +24834,72 @@
               <a:buNone/>
             </a:pPr>
             <a:r>
+              <a:rPr lang="en-US" sz="1500" dirty="0">
+                <a:solidFill>
+                  <a:srgbClr val="FFCB6B"/>
+                </a:solidFill>
+                <a:latin typeface="Consolas" pitchFamily="34" charset="0"/>
+                <a:ea typeface="Consolas" pitchFamily="34" charset="-122"/>
+                <a:cs typeface="Consolas" pitchFamily="34" charset="-120"/>
+              </a:rPr>
+              <a:t>int</a:t>
+            </a:r>
+            <a:r>
+              <a:rPr lang="en-US" sz="1500" dirty="0">
+                <a:solidFill>
+                  <a:srgbClr val="E6EDF3"/>
+                </a:solidFill>
+                <a:latin typeface="Consolas" pitchFamily="34" charset="0"/>
+                <a:ea typeface="Consolas" pitchFamily="34" charset="-122"/>
+                <a:cs typeface="Consolas" pitchFamily="34" charset="-120"/>
+              </a:rPr>
+              <a:t> tahun = </a:t>
+            </a:r>
+            <a:r>
+              <a:rPr lang="en-US" sz="1500" dirty="0">
+                <a:solidFill>
+                  <a:srgbClr val="FFCB6B"/>
+                </a:solidFill>
+                <a:latin typeface="Consolas" pitchFamily="34" charset="0"/>
+                <a:ea typeface="Consolas" pitchFamily="34" charset="-122"/>
+                <a:cs typeface="Consolas" pitchFamily="34" charset="-120"/>
+              </a:rPr>
+              <a:t>int</a:t>
+            </a:r>
+            <a:r>
+              <a:rPr lang="en-US" sz="1500" dirty="0">
+                <a:solidFill>
+                  <a:srgbClr val="E6EDF3"/>
+                </a:solidFill>
+                <a:latin typeface="Consolas" pitchFamily="34" charset="0"/>
+                <a:ea typeface="Consolas" pitchFamily="34" charset="-122"/>
+                <a:cs typeface="Consolas" pitchFamily="34" charset="-120"/>
+              </a:rPr>
+              <a:t>.parse(</a:t>
+            </a:r>
+            <a:r>
+              <a:rPr lang="en-US" sz="1500" dirty="0">
+                <a:solidFill>
+                  <a:srgbClr val="C3E88D"/>
+                </a:solidFill>
+                <a:latin typeface="Consolas" pitchFamily="34" charset="0"/>
+                <a:ea typeface="Consolas" pitchFamily="34" charset="-122"/>
+                <a:cs typeface="Consolas" pitchFamily="34" charset="-120"/>
+              </a:rPr>
+              <a:t>'2026'</a:t>
+            </a:r>
+            <a:r>
+              <a:rPr lang="en-US" sz="1500" dirty="0">
+                <a:solidFill>
+                  <a:srgbClr val="E6EDF3"/>
+                </a:solidFill>
+                <a:latin typeface="Consolas" pitchFamily="34" charset="0"/>
+                <a:ea typeface="Consolas" pitchFamily="34" charset="-122"/>
+                <a:cs typeface="Consolas" pitchFamily="34" charset="-120"/>
+              </a:rPr>
+              <a:t>);  </a:t>
+            </a:r>
+            <a:r>
               <a:rPr lang="en-US" sz="1500" i="1" dirty="0">
                 <a:solidFill>
                   <a:srgbClr val="8FA3BC"/>
@@ -26008,7 +24908,7 @@
                 <a:ea typeface="Consolas" pitchFamily="34" charset="-122"/>
                 <a:cs typeface="Consolas" pitchFamily="34" charset="-120"/>
               </a:rPr>
-              <a:t>// bilangan bulat</a:t>
+              <a:t>// teks -&gt; int</a:t>
             </a:r>
             <a:endParaRPr lang="en-US" sz="1500" dirty="0"/>
           </a:p>
@@ -26022,571 +24922,36 @@
             <a:r>
               <a:rPr lang="en-US" sz="1500" dirty="0">
                 <a:solidFill>
-                  <a:srgbClr val="FFCB6B"/>
-                </a:solidFill>
-                <a:latin typeface="Consolas" pitchFamily="34" charset="0"/>
-                <a:ea typeface="Consolas" pitchFamily="34" charset="-122"/>
-                <a:cs typeface="Consolas" pitchFamily="34" charset="-120"/>
-              </a:rPr>
-              <a:t>double</a:t>
-            </a:r>
-            <a:pPr indent="0" marL="0">
-              <a:lnSpc>
-                <a:spcPct val="105000"/>
-              </a:lnSpc>
-              <a:buNone/>
-            </a:pPr>
+                  <a:srgbClr val="E6EDF3"/>
+                </a:solidFill>
+                <a:latin typeface="Consolas" pitchFamily="34" charset="0"/>
+                <a:ea typeface="Consolas" pitchFamily="34" charset="-122"/>
+                <a:cs typeface="Consolas" pitchFamily="34" charset="-120"/>
+              </a:rPr>
+              <a:t>print(ipk.toStringAsFixed(</a:t>
+            </a:r>
             <a:r>
               <a:rPr lang="en-US" sz="1500" dirty="0">
                 <a:solidFill>
+                  <a:srgbClr val="F78C6C"/>
+                </a:solidFill>
+                <a:latin typeface="Consolas" pitchFamily="34" charset="0"/>
+                <a:ea typeface="Consolas" pitchFamily="34" charset="-122"/>
+                <a:cs typeface="Consolas" pitchFamily="34" charset="-120"/>
+              </a:rPr>
+              <a:t>1</a:t>
+            </a:r>
+            <a:r>
+              <a:rPr lang="en-US" sz="1500" dirty="0">
+                <a:solidFill>
                   <a:srgbClr val="E6EDF3"/>
                 </a:solidFill>
                 <a:latin typeface="Consolas" pitchFamily="34" charset="0"/>
                 <a:ea typeface="Consolas" pitchFamily="34" charset="-122"/>
                 <a:cs typeface="Consolas" pitchFamily="34" charset="-120"/>
               </a:rPr>
-              <a:t> ipk = </a:t>
-            </a:r>
-            <a:pPr indent="0" marL="0">
-              <a:lnSpc>
-                <a:spcPct val="105000"/>
-              </a:lnSpc>
-              <a:buNone/>
-            </a:pPr>
-            <a:r>
-              <a:rPr lang="en-US" sz="1500" dirty="0">
-                <a:solidFill>
-                  <a:srgbClr val="F78C6C"/>
-                </a:solidFill>
-                <a:latin typeface="Consolas" pitchFamily="34" charset="0"/>
-                <a:ea typeface="Consolas" pitchFamily="34" charset="-122"/>
-                <a:cs typeface="Consolas" pitchFamily="34" charset="-120"/>
-              </a:rPr>
-              <a:t>3.75</a:t>
-            </a:r>
-            <a:pPr indent="0" marL="0">
-              <a:lnSpc>
-                <a:spcPct val="105000"/>
-              </a:lnSpc>
-              <a:buNone/>
-            </a:pPr>
-            <a:r>
-              <a:rPr lang="en-US" sz="1500" dirty="0">
-                <a:solidFill>
-                  <a:srgbClr val="E6EDF3"/>
-                </a:solidFill>
-                <a:latin typeface="Consolas" pitchFamily="34" charset="0"/>
-                <a:ea typeface="Consolas" pitchFamily="34" charset="-122"/>
-                <a:cs typeface="Consolas" pitchFamily="34" charset="-120"/>
-              </a:rPr>
-              <a:t>;           </a:t>
-            </a:r>
-            <a:pPr indent="0" marL="0">
-              <a:lnSpc>
-                <a:spcPct val="105000"/>
-              </a:lnSpc>
-              <a:buNone/>
-            </a:pPr>
-            <a:r>
-              <a:rPr lang="en-US" sz="1500" i="1" dirty="0">
-                <a:solidFill>
-                  <a:srgbClr val="8FA3BC"/>
-                </a:solidFill>
-                <a:latin typeface="Consolas" pitchFamily="34" charset="0"/>
-                <a:ea typeface="Consolas" pitchFamily="34" charset="-122"/>
-                <a:cs typeface="Consolas" pitchFamily="34" charset="-120"/>
-              </a:rPr>
-              <a:t>// desimal (titik!)</a:t>
-            </a:r>
-            <a:endParaRPr lang="en-US" sz="1500" dirty="0"/>
-          </a:p>
-          <a:p>
-            <a:pPr indent="0" marL="0">
-              <a:lnSpc>
-                <a:spcPct val="105000"/>
-              </a:lnSpc>
-              <a:buNone/>
-            </a:pPr>
-            <a:r>
-              <a:rPr lang="en-US" sz="1500" dirty="0">
-                <a:solidFill>
-                  <a:srgbClr val="FFCB6B"/>
-                </a:solidFill>
-                <a:latin typeface="Consolas" pitchFamily="34" charset="0"/>
-                <a:ea typeface="Consolas" pitchFamily="34" charset="-122"/>
-                <a:cs typeface="Consolas" pitchFamily="34" charset="-120"/>
-              </a:rPr>
-              <a:t>bool</a:t>
-            </a:r>
-            <a:pPr indent="0" marL="0">
-              <a:lnSpc>
-                <a:spcPct val="105000"/>
-              </a:lnSpc>
-              <a:buNone/>
-            </a:pPr>
-            <a:r>
-              <a:rPr lang="en-US" sz="1500" dirty="0">
-                <a:solidFill>
-                  <a:srgbClr val="E6EDF3"/>
-                </a:solidFill>
-                <a:latin typeface="Consolas" pitchFamily="34" charset="0"/>
-                <a:ea typeface="Consolas" pitchFamily="34" charset="-122"/>
-                <a:cs typeface="Consolas" pitchFamily="34" charset="-120"/>
-              </a:rPr>
-              <a:t> sudahLulus = </a:t>
-            </a:r>
-            <a:pPr indent="0" marL="0">
-              <a:lnSpc>
-                <a:spcPct val="105000"/>
-              </a:lnSpc>
-              <a:buNone/>
-            </a:pPr>
-            <a:r>
-              <a:rPr lang="en-US" sz="1500" dirty="0">
-                <a:solidFill>
-                  <a:srgbClr val="C792EA"/>
-                </a:solidFill>
-                <a:latin typeface="Consolas" pitchFamily="34" charset="0"/>
-                <a:ea typeface="Consolas" pitchFamily="34" charset="-122"/>
-                <a:cs typeface="Consolas" pitchFamily="34" charset="-120"/>
-              </a:rPr>
-              <a:t>false</a:t>
-            </a:r>
-            <a:pPr indent="0" marL="0">
-              <a:lnSpc>
-                <a:spcPct val="105000"/>
-              </a:lnSpc>
-              <a:buNone/>
-            </a:pPr>
-            <a:r>
-              <a:rPr lang="en-US" sz="1500" dirty="0">
-                <a:solidFill>
-                  <a:srgbClr val="E6EDF3"/>
-                </a:solidFill>
-                <a:latin typeface="Consolas" pitchFamily="34" charset="0"/>
-                <a:ea typeface="Consolas" pitchFamily="34" charset="-122"/>
-                <a:cs typeface="Consolas" pitchFamily="34" charset="-120"/>
-              </a:rPr>
-              <a:t>;     </a:t>
-            </a:r>
-            <a:pPr indent="0" marL="0">
-              <a:lnSpc>
-                <a:spcPct val="105000"/>
-              </a:lnSpc>
-              <a:buNone/>
-            </a:pPr>
-            <a:r>
-              <a:rPr lang="en-US" sz="1500" i="1" dirty="0">
-                <a:solidFill>
-                  <a:srgbClr val="8FA3BC"/>
-                </a:solidFill>
-                <a:latin typeface="Consolas" pitchFamily="34" charset="0"/>
-                <a:ea typeface="Consolas" pitchFamily="34" charset="-122"/>
-                <a:cs typeface="Consolas" pitchFamily="34" charset="-120"/>
-              </a:rPr>
-              <a:t>// true / false</a:t>
-            </a:r>
-            <a:endParaRPr lang="en-US" sz="1500" dirty="0"/>
-          </a:p>
-          <a:p>
-            <a:pPr indent="0" marL="0">
-              <a:lnSpc>
-                <a:spcPct val="105000"/>
-              </a:lnSpc>
-              <a:buNone/>
-            </a:pPr>
-            <a:r>
-              <a:rPr lang="en-US" sz="1500" dirty="0">
-                <a:solidFill>
-                  <a:srgbClr val="E6EDF3"/>
-                </a:solidFill>
-                <a:latin typeface="Consolas" pitchFamily="34" charset="0"/>
-                <a:ea typeface="Consolas" pitchFamily="34" charset="-122"/>
-                <a:cs typeface="Consolas" pitchFamily="34" charset="-120"/>
-              </a:rPr>
-              <a:t> </a:t>
-            </a:r>
-            <a:endParaRPr lang="en-US" sz="1500" dirty="0"/>
-          </a:p>
-          <a:p>
-            <a:pPr indent="0" marL="0">
-              <a:lnSpc>
-                <a:spcPct val="105000"/>
-              </a:lnSpc>
-              <a:buNone/>
-            </a:pPr>
-            <a:r>
-              <a:rPr lang="en-US" sz="1500" dirty="0">
-                <a:solidFill>
-                  <a:srgbClr val="C792EA"/>
-                </a:solidFill>
-                <a:latin typeface="Consolas" pitchFamily="34" charset="0"/>
-                <a:ea typeface="Consolas" pitchFamily="34" charset="-122"/>
-                <a:cs typeface="Consolas" pitchFamily="34" charset="-120"/>
-              </a:rPr>
-              <a:t>var</a:t>
-            </a:r>
-            <a:pPr indent="0" marL="0">
-              <a:lnSpc>
-                <a:spcPct val="105000"/>
-              </a:lnSpc>
-              <a:buNone/>
-            </a:pPr>
-            <a:r>
-              <a:rPr lang="en-US" sz="1500" dirty="0">
-                <a:solidFill>
-                  <a:srgbClr val="E6EDF3"/>
-                </a:solidFill>
-                <a:latin typeface="Consolas" pitchFamily="34" charset="0"/>
-                <a:ea typeface="Consolas" pitchFamily="34" charset="-122"/>
-                <a:cs typeface="Consolas" pitchFamily="34" charset="-120"/>
-              </a:rPr>
-              <a:t> kota = </a:t>
-            </a:r>
-            <a:pPr indent="0" marL="0">
-              <a:lnSpc>
-                <a:spcPct val="105000"/>
-              </a:lnSpc>
-              <a:buNone/>
-            </a:pPr>
-            <a:r>
-              <a:rPr lang="en-US" sz="1500" dirty="0">
-                <a:solidFill>
-                  <a:srgbClr val="C3E88D"/>
-                </a:solidFill>
-                <a:latin typeface="Consolas" pitchFamily="34" charset="0"/>
-                <a:ea typeface="Consolas" pitchFamily="34" charset="-122"/>
-                <a:cs typeface="Consolas" pitchFamily="34" charset="-120"/>
-              </a:rPr>
-              <a:t>'Samarinda'</a:t>
-            </a:r>
-            <a:pPr indent="0" marL="0">
-              <a:lnSpc>
-                <a:spcPct val="105000"/>
-              </a:lnSpc>
-              <a:buNone/>
-            </a:pPr>
-            <a:r>
-              <a:rPr lang="en-US" sz="1500" dirty="0">
-                <a:solidFill>
-                  <a:srgbClr val="E6EDF3"/>
-                </a:solidFill>
-                <a:latin typeface="Consolas" pitchFamily="34" charset="0"/>
-                <a:ea typeface="Consolas" pitchFamily="34" charset="-122"/>
-                <a:cs typeface="Consolas" pitchFamily="34" charset="-120"/>
-              </a:rPr>
-              <a:t>;      </a:t>
-            </a:r>
-            <a:pPr indent="0" marL="0">
-              <a:lnSpc>
-                <a:spcPct val="105000"/>
-              </a:lnSpc>
-              <a:buNone/>
-            </a:pPr>
-            <a:r>
-              <a:rPr lang="en-US" sz="1500" i="1" dirty="0">
-                <a:solidFill>
-                  <a:srgbClr val="8FA3BC"/>
-                </a:solidFill>
-                <a:latin typeface="Consolas" pitchFamily="34" charset="0"/>
-                <a:ea typeface="Consolas" pitchFamily="34" charset="-122"/>
-                <a:cs typeface="Consolas" pitchFamily="34" charset="-120"/>
-              </a:rPr>
-              <a:t>// ditebak: String</a:t>
-            </a:r>
-            <a:endParaRPr lang="en-US" sz="1500" dirty="0"/>
-          </a:p>
-          <a:p>
-            <a:pPr indent="0" marL="0">
-              <a:lnSpc>
-                <a:spcPct val="105000"/>
-              </a:lnSpc>
-              <a:buNone/>
-            </a:pPr>
-            <a:r>
-              <a:rPr lang="en-US" sz="1500" dirty="0">
-                <a:solidFill>
-                  <a:srgbClr val="E6EDF3"/>
-                </a:solidFill>
-                <a:latin typeface="Consolas" pitchFamily="34" charset="0"/>
-                <a:ea typeface="Consolas" pitchFamily="34" charset="-122"/>
-                <a:cs typeface="Consolas" pitchFamily="34" charset="-120"/>
-              </a:rPr>
-              <a:t>umur = </a:t>
-            </a:r>
-            <a:pPr indent="0" marL="0">
-              <a:lnSpc>
-                <a:spcPct val="105000"/>
-              </a:lnSpc>
-              <a:buNone/>
-            </a:pPr>
-            <a:r>
-              <a:rPr lang="en-US" sz="1500" dirty="0">
-                <a:solidFill>
-                  <a:srgbClr val="F78C6C"/>
-                </a:solidFill>
-                <a:latin typeface="Consolas" pitchFamily="34" charset="0"/>
-                <a:ea typeface="Consolas" pitchFamily="34" charset="-122"/>
-                <a:cs typeface="Consolas" pitchFamily="34" charset="-120"/>
-              </a:rPr>
-              <a:t>20</a:t>
-            </a:r>
-            <a:pPr indent="0" marL="0">
-              <a:lnSpc>
-                <a:spcPct val="105000"/>
-              </a:lnSpc>
-              <a:buNone/>
-            </a:pPr>
-            <a:r>
-              <a:rPr lang="en-US" sz="1500" dirty="0">
-                <a:solidFill>
-                  <a:srgbClr val="E6EDF3"/>
-                </a:solidFill>
-                <a:latin typeface="Consolas" pitchFamily="34" charset="0"/>
-                <a:ea typeface="Consolas" pitchFamily="34" charset="-122"/>
-                <a:cs typeface="Consolas" pitchFamily="34" charset="-120"/>
-              </a:rPr>
-              <a:t>;                   </a:t>
-            </a:r>
-            <a:pPr indent="0" marL="0">
-              <a:lnSpc>
-                <a:spcPct val="105000"/>
-              </a:lnSpc>
-              <a:buNone/>
-            </a:pPr>
-            <a:r>
-              <a:rPr lang="en-US" sz="1500" i="1" dirty="0">
-                <a:solidFill>
-                  <a:srgbClr val="8FA3BC"/>
-                </a:solidFill>
-                <a:latin typeface="Consolas" pitchFamily="34" charset="0"/>
-                <a:ea typeface="Consolas" pitchFamily="34" charset="-122"/>
-                <a:cs typeface="Consolas" pitchFamily="34" charset="-120"/>
-              </a:rPr>
-              <a:t>// boleh: tetap int</a:t>
-            </a:r>
-            <a:endParaRPr lang="en-US" sz="1500" dirty="0"/>
-          </a:p>
-          <a:p>
-            <a:pPr indent="0" marL="0">
-              <a:lnSpc>
-                <a:spcPct val="105000"/>
-              </a:lnSpc>
-              <a:buNone/>
-            </a:pPr>
-            <a:r>
-              <a:rPr lang="en-US" sz="1500" i="1" dirty="0">
-                <a:solidFill>
-                  <a:srgbClr val="8FA3BC"/>
-                </a:solidFill>
-                <a:latin typeface="Consolas" pitchFamily="34" charset="0"/>
-                <a:ea typeface="Consolas" pitchFamily="34" charset="-122"/>
-                <a:cs typeface="Consolas" pitchFamily="34" charset="-120"/>
-              </a:rPr>
-              <a:t>// umur = 'dua puluh';       // ERROR: beda tipe</a:t>
-            </a:r>
-            <a:endParaRPr lang="en-US" sz="1500" dirty="0"/>
-          </a:p>
-          <a:p>
-            <a:pPr indent="0" marL="0">
-              <a:lnSpc>
-                <a:spcPct val="105000"/>
-              </a:lnSpc>
-              <a:buNone/>
-            </a:pPr>
-            <a:r>
-              <a:rPr lang="en-US" sz="1500" dirty="0">
-                <a:solidFill>
-                  <a:srgbClr val="E6EDF3"/>
-                </a:solidFill>
-                <a:latin typeface="Consolas" pitchFamily="34" charset="0"/>
-                <a:ea typeface="Consolas" pitchFamily="34" charset="-122"/>
-                <a:cs typeface="Consolas" pitchFamily="34" charset="-120"/>
-              </a:rPr>
-              <a:t> </a:t>
-            </a:r>
-            <a:endParaRPr lang="en-US" sz="1500" dirty="0"/>
-          </a:p>
-          <a:p>
-            <a:pPr indent="0" marL="0">
-              <a:lnSpc>
-                <a:spcPct val="105000"/>
-              </a:lnSpc>
-              <a:buNone/>
-            </a:pPr>
-            <a:r>
-              <a:rPr lang="en-US" sz="1500" dirty="0">
-                <a:solidFill>
-                  <a:srgbClr val="FFCB6B"/>
-                </a:solidFill>
-                <a:latin typeface="Consolas" pitchFamily="34" charset="0"/>
-                <a:ea typeface="Consolas" pitchFamily="34" charset="-122"/>
-                <a:cs typeface="Consolas" pitchFamily="34" charset="-120"/>
-              </a:rPr>
-              <a:t>int</a:t>
-            </a:r>
-            <a:pPr indent="0" marL="0">
-              <a:lnSpc>
-                <a:spcPct val="105000"/>
-              </a:lnSpc>
-              <a:buNone/>
-            </a:pPr>
-            <a:r>
-              <a:rPr lang="en-US" sz="1500" dirty="0">
-                <a:solidFill>
-                  <a:srgbClr val="E6EDF3"/>
-                </a:solidFill>
-                <a:latin typeface="Consolas" pitchFamily="34" charset="0"/>
-                <a:ea typeface="Consolas" pitchFamily="34" charset="-122"/>
-                <a:cs typeface="Consolas" pitchFamily="34" charset="-120"/>
-              </a:rPr>
-              <a:t> tahun = </a:t>
-            </a:r>
-            <a:pPr indent="0" marL="0">
-              <a:lnSpc>
-                <a:spcPct val="105000"/>
-              </a:lnSpc>
-              <a:buNone/>
-            </a:pPr>
-            <a:r>
-              <a:rPr lang="en-US" sz="1500" dirty="0">
-                <a:solidFill>
-                  <a:srgbClr val="FFCB6B"/>
-                </a:solidFill>
-                <a:latin typeface="Consolas" pitchFamily="34" charset="0"/>
-                <a:ea typeface="Consolas" pitchFamily="34" charset="-122"/>
-                <a:cs typeface="Consolas" pitchFamily="34" charset="-120"/>
-              </a:rPr>
-              <a:t>int</a:t>
-            </a:r>
-            <a:pPr indent="0" marL="0">
-              <a:lnSpc>
-                <a:spcPct val="105000"/>
-              </a:lnSpc>
-              <a:buNone/>
-            </a:pPr>
-            <a:r>
-              <a:rPr lang="en-US" sz="1500" dirty="0">
-                <a:solidFill>
-                  <a:srgbClr val="E6EDF3"/>
-                </a:solidFill>
-                <a:latin typeface="Consolas" pitchFamily="34" charset="0"/>
-                <a:ea typeface="Consolas" pitchFamily="34" charset="-122"/>
-                <a:cs typeface="Consolas" pitchFamily="34" charset="-120"/>
-              </a:rPr>
-              <a:t>.parse(</a:t>
-            </a:r>
-            <a:pPr indent="0" marL="0">
-              <a:lnSpc>
-                <a:spcPct val="105000"/>
-              </a:lnSpc>
-              <a:buNone/>
-            </a:pPr>
-            <a:r>
-              <a:rPr lang="en-US" sz="1500" dirty="0">
-                <a:solidFill>
-                  <a:srgbClr val="C3E88D"/>
-                </a:solidFill>
-                <a:latin typeface="Consolas" pitchFamily="34" charset="0"/>
-                <a:ea typeface="Consolas" pitchFamily="34" charset="-122"/>
-                <a:cs typeface="Consolas" pitchFamily="34" charset="-120"/>
-              </a:rPr>
-              <a:t>'2026'</a:t>
-            </a:r>
-            <a:pPr indent="0" marL="0">
-              <a:lnSpc>
-                <a:spcPct val="105000"/>
-              </a:lnSpc>
-              <a:buNone/>
-            </a:pPr>
-            <a:r>
-              <a:rPr lang="en-US" sz="1500" dirty="0">
-                <a:solidFill>
-                  <a:srgbClr val="E6EDF3"/>
-                </a:solidFill>
-                <a:latin typeface="Consolas" pitchFamily="34" charset="0"/>
-                <a:ea typeface="Consolas" pitchFamily="34" charset="-122"/>
-                <a:cs typeface="Consolas" pitchFamily="34" charset="-120"/>
-              </a:rPr>
-              <a:t>);  </a:t>
-            </a:r>
-            <a:pPr indent="0" marL="0">
-              <a:lnSpc>
-                <a:spcPct val="105000"/>
-              </a:lnSpc>
-              <a:buNone/>
-            </a:pPr>
-            <a:r>
-              <a:rPr lang="en-US" sz="1500" i="1" dirty="0">
-                <a:solidFill>
-                  <a:srgbClr val="8FA3BC"/>
-                </a:solidFill>
-                <a:latin typeface="Consolas" pitchFamily="34" charset="0"/>
-                <a:ea typeface="Consolas" pitchFamily="34" charset="-122"/>
-                <a:cs typeface="Consolas" pitchFamily="34" charset="-120"/>
-              </a:rPr>
-              <a:t>// teks -&gt; int</a:t>
-            </a:r>
-            <a:endParaRPr lang="en-US" sz="1500" dirty="0"/>
-          </a:p>
-          <a:p>
-            <a:pPr indent="0" marL="0">
-              <a:lnSpc>
-                <a:spcPct val="105000"/>
-              </a:lnSpc>
-              <a:buNone/>
-            </a:pPr>
-            <a:r>
-              <a:rPr lang="en-US" sz="1500" dirty="0">
-                <a:solidFill>
-                  <a:srgbClr val="E6EDF3"/>
-                </a:solidFill>
-                <a:latin typeface="Consolas" pitchFamily="34" charset="0"/>
-                <a:ea typeface="Consolas" pitchFamily="34" charset="-122"/>
-                <a:cs typeface="Consolas" pitchFamily="34" charset="-120"/>
-              </a:rPr>
-              <a:t>print(ipk.toStringAsFixed(</a:t>
-            </a:r>
-            <a:pPr indent="0" marL="0">
-              <a:lnSpc>
-                <a:spcPct val="105000"/>
-              </a:lnSpc>
-              <a:buNone/>
-            </a:pPr>
-            <a:r>
-              <a:rPr lang="en-US" sz="1500" dirty="0">
-                <a:solidFill>
-                  <a:srgbClr val="F78C6C"/>
-                </a:solidFill>
-                <a:latin typeface="Consolas" pitchFamily="34" charset="0"/>
-                <a:ea typeface="Consolas" pitchFamily="34" charset="-122"/>
-                <a:cs typeface="Consolas" pitchFamily="34" charset="-120"/>
-              </a:rPr>
-              <a:t>1</a:t>
-            </a:r>
-            <a:pPr indent="0" marL="0">
-              <a:lnSpc>
-                <a:spcPct val="105000"/>
-              </a:lnSpc>
-              <a:buNone/>
-            </a:pPr>
-            <a:r>
-              <a:rPr lang="en-US" sz="1500" dirty="0">
-                <a:solidFill>
-                  <a:srgbClr val="E6EDF3"/>
-                </a:solidFill>
-                <a:latin typeface="Consolas" pitchFamily="34" charset="0"/>
-                <a:ea typeface="Consolas" pitchFamily="34" charset="-122"/>
-                <a:cs typeface="Consolas" pitchFamily="34" charset="-120"/>
-              </a:rPr>
               <a:t>));  </a:t>
             </a:r>
-            <a:pPr indent="0" marL="0">
-              <a:lnSpc>
-                <a:spcPct val="105000"/>
-              </a:lnSpc>
-              <a:buNone/>
-            </a:pPr>
             <a:r>
               <a:rPr lang="en-US" sz="1500" i="1" dirty="0">
                 <a:solidFill>
@@ -28575,6 +26940,42 @@
               </a:rPr>
               <a:t>String</a:t>
             </a:r>
+            <a:r>
+              <a:rPr lang="en-US" sz="1500" dirty="0">
+                <a:solidFill>
+                  <a:srgbClr val="E6EDF3"/>
+                </a:solidFill>
+                <a:latin typeface="Consolas" pitchFamily="34" charset="0"/>
+                <a:ea typeface="Consolas" pitchFamily="34" charset="-122"/>
+                <a:cs typeface="Consolas" pitchFamily="34" charset="-120"/>
+              </a:rPr>
+              <a:t> namaDepan = </a:t>
+            </a:r>
+            <a:r>
+              <a:rPr lang="en-US" sz="1500" dirty="0">
+                <a:solidFill>
+                  <a:srgbClr val="C3E88D"/>
+                </a:solidFill>
+                <a:latin typeface="Consolas" pitchFamily="34" charset="0"/>
+                <a:ea typeface="Consolas" pitchFamily="34" charset="-122"/>
+                <a:cs typeface="Consolas" pitchFamily="34" charset="-120"/>
+              </a:rPr>
+              <a:t>'Budi'</a:t>
+            </a:r>
+            <a:r>
+              <a:rPr lang="en-US" sz="1500" dirty="0">
+                <a:solidFill>
+                  <a:srgbClr val="E6EDF3"/>
+                </a:solidFill>
+                <a:latin typeface="Consolas" pitchFamily="34" charset="0"/>
+                <a:ea typeface="Consolas" pitchFamily="34" charset="-122"/>
+                <a:cs typeface="Consolas" pitchFamily="34" charset="-120"/>
+              </a:rPr>
+              <a:t>;</a:t>
+            </a:r>
+            <a:endParaRPr lang="en-US" sz="1500" dirty="0"/>
+          </a:p>
+          <a:p>
             <a:pPr indent="0" marL="0">
               <a:lnSpc>
                 <a:spcPct val="105000"/>
@@ -28590,8 +26991,11 @@
                 <a:ea typeface="Consolas" pitchFamily="34" charset="-122"/>
                 <a:cs typeface="Consolas" pitchFamily="34" charset="-120"/>
               </a:rPr>
-              <a:t> namaDepan = </a:t>
-            </a:r>
+              <a:t> </a:t>
+            </a:r>
+            <a:endParaRPr lang="en-US" sz="1500" dirty="0"/>
+          </a:p>
+          <a:p>
             <a:pPr indent="0" marL="0">
               <a:lnSpc>
                 <a:spcPct val="105000"/>
@@ -28601,14 +27005,39 @@
             <a:r>
               <a:rPr lang="en-US" sz="1500" dirty="0">
                 <a:solidFill>
+                  <a:srgbClr val="E6EDF3"/>
+                </a:solidFill>
+                <a:latin typeface="Consolas" pitchFamily="34" charset="0"/>
+                <a:ea typeface="Consolas" pitchFamily="34" charset="-122"/>
+                <a:cs typeface="Consolas" pitchFamily="34" charset="-120"/>
+              </a:rPr>
+              <a:t>print(</a:t>
+            </a:r>
+            <a:r>
+              <a:rPr lang="en-US" sz="1500" dirty="0">
+                <a:solidFill>
                   <a:srgbClr val="C3E88D"/>
                 </a:solidFill>
                 <a:latin typeface="Consolas" pitchFamily="34" charset="0"/>
                 <a:ea typeface="Consolas" pitchFamily="34" charset="-122"/>
                 <a:cs typeface="Consolas" pitchFamily="34" charset="-120"/>
               </a:rPr>
-              <a:t>'Budi'</a:t>
-            </a:r>
+              <a:t>'Halo, $namaDepan!'</a:t>
+            </a:r>
+            <a:r>
+              <a:rPr lang="en-US" sz="1500" dirty="0">
+                <a:solidFill>
+                  <a:srgbClr val="E6EDF3"/>
+                </a:solidFill>
+                <a:latin typeface="Consolas" pitchFamily="34" charset="0"/>
+                <a:ea typeface="Consolas" pitchFamily="34" charset="-122"/>
+                <a:cs typeface="Consolas" pitchFamily="34" charset="-120"/>
+              </a:rPr>
+              <a:t>);</a:t>
+            </a:r>
+            <a:endParaRPr lang="en-US" sz="1500" dirty="0"/>
+          </a:p>
+          <a:p>
             <a:pPr indent="0" marL="0">
               <a:lnSpc>
                 <a:spcPct val="105000"/>
@@ -28616,15 +27045,15 @@
               <a:buNone/>
             </a:pPr>
             <a:r>
-              <a:rPr lang="en-US" sz="1500" dirty="0">
-                <a:solidFill>
-                  <a:srgbClr val="E6EDF3"/>
-                </a:solidFill>
-                <a:latin typeface="Consolas" pitchFamily="34" charset="0"/>
-                <a:ea typeface="Consolas" pitchFamily="34" charset="-122"/>
-                <a:cs typeface="Consolas" pitchFamily="34" charset="-120"/>
-              </a:rPr>
-              <a:t>;</a:t>
+              <a:rPr lang="en-US" sz="1500" i="1" dirty="0">
+                <a:solidFill>
+                  <a:srgbClr val="8FA3BC"/>
+                </a:solidFill>
+                <a:latin typeface="Consolas" pitchFamily="34" charset="0"/>
+                <a:ea typeface="Consolas" pitchFamily="34" charset="-122"/>
+                <a:cs typeface="Consolas" pitchFamily="34" charset="-120"/>
+              </a:rPr>
+              <a:t>// Halo, Budi!</a:t>
             </a:r>
             <a:endParaRPr lang="en-US" sz="1500" dirty="0"/>
           </a:p>
@@ -28644,7 +27073,29 @@
                 <a:ea typeface="Consolas" pitchFamily="34" charset="-122"/>
                 <a:cs typeface="Consolas" pitchFamily="34" charset="-120"/>
               </a:rPr>
-              <a:t> </a:t>
+              <a:t>print(</a:t>
+            </a:r>
+            <a:r>
+              <a:rPr lang="en-US" sz="1500" dirty="0">
+                <a:solidFill>
+                  <a:srgbClr val="C3E88D"/>
+                </a:solidFill>
+                <a:latin typeface="Consolas" pitchFamily="34" charset="0"/>
+                <a:ea typeface="Consolas" pitchFamily="34" charset="-122"/>
+                <a:cs typeface="Consolas" pitchFamily="34" charset="-120"/>
+              </a:rPr>
+              <a:t>'Panjang: ${namaDepan.length} huruf'</a:t>
+            </a:r>
+            <a:r>
+              <a:rPr lang="en-US" sz="1500" dirty="0">
+                <a:solidFill>
+                  <a:srgbClr val="E6EDF3"/>
+                </a:solidFill>
+                <a:latin typeface="Consolas" pitchFamily="34" charset="0"/>
+                <a:ea typeface="Consolas" pitchFamily="34" charset="-122"/>
+                <a:cs typeface="Consolas" pitchFamily="34" charset="-120"/>
+              </a:rPr>
+              <a:t>);</a:t>
             </a:r>
             <a:endParaRPr lang="en-US" sz="1500" dirty="0"/>
           </a:p>
@@ -28656,16 +27107,19 @@
               <a:buNone/>
             </a:pPr>
             <a:r>
-              <a:rPr lang="en-US" sz="1500" dirty="0">
-                <a:solidFill>
-                  <a:srgbClr val="E6EDF3"/>
-                </a:solidFill>
-                <a:latin typeface="Consolas" pitchFamily="34" charset="0"/>
-                <a:ea typeface="Consolas" pitchFamily="34" charset="-122"/>
-                <a:cs typeface="Consolas" pitchFamily="34" charset="-120"/>
-              </a:rPr>
-              <a:t>print(</a:t>
-            </a:r>
+              <a:rPr lang="en-US" sz="1500" i="1" dirty="0">
+                <a:solidFill>
+                  <a:srgbClr val="8FA3BC"/>
+                </a:solidFill>
+                <a:latin typeface="Consolas" pitchFamily="34" charset="0"/>
+                <a:ea typeface="Consolas" pitchFamily="34" charset="-122"/>
+                <a:cs typeface="Consolas" pitchFamily="34" charset="-120"/>
+              </a:rPr>
+              <a:t>// Panjang: 4 huruf</a:t>
+            </a:r>
+            <a:endParaRPr lang="en-US" sz="1500" dirty="0"/>
+          </a:p>
+          <a:p>
             <a:pPr indent="0" marL="0">
               <a:lnSpc>
                 <a:spcPct val="105000"/>
@@ -28675,14 +27129,39 @@
             <a:r>
               <a:rPr lang="en-US" sz="1500" dirty="0">
                 <a:solidFill>
+                  <a:srgbClr val="E6EDF3"/>
+                </a:solidFill>
+                <a:latin typeface="Consolas" pitchFamily="34" charset="0"/>
+                <a:ea typeface="Consolas" pitchFamily="34" charset="-122"/>
+                <a:cs typeface="Consolas" pitchFamily="34" charset="-120"/>
+              </a:rPr>
+              <a:t>print(</a:t>
+            </a:r>
+            <a:r>
+              <a:rPr lang="en-US" sz="1500" dirty="0">
+                <a:solidFill>
                   <a:srgbClr val="C3E88D"/>
                 </a:solidFill>
                 <a:latin typeface="Consolas" pitchFamily="34" charset="0"/>
                 <a:ea typeface="Consolas" pitchFamily="34" charset="-122"/>
                 <a:cs typeface="Consolas" pitchFamily="34" charset="-120"/>
               </a:rPr>
-              <a:t>'Halo, $namaDepan!'</a:t>
-            </a:r>
+              <a:t>'5 x 4 = ${5 * 4}'</a:t>
+            </a:r>
+            <a:r>
+              <a:rPr lang="en-US" sz="1500" dirty="0">
+                <a:solidFill>
+                  <a:srgbClr val="E6EDF3"/>
+                </a:solidFill>
+                <a:latin typeface="Consolas" pitchFamily="34" charset="0"/>
+                <a:ea typeface="Consolas" pitchFamily="34" charset="-122"/>
+                <a:cs typeface="Consolas" pitchFamily="34" charset="-120"/>
+              </a:rPr>
+              <a:t>);</a:t>
+            </a:r>
+            <a:endParaRPr lang="en-US" sz="1500" dirty="0"/>
+          </a:p>
+          <a:p>
             <a:pPr indent="0" marL="0">
               <a:lnSpc>
                 <a:spcPct val="105000"/>
@@ -28690,15 +27169,15 @@
               <a:buNone/>
             </a:pPr>
             <a:r>
-              <a:rPr lang="en-US" sz="1500" dirty="0">
-                <a:solidFill>
-                  <a:srgbClr val="E6EDF3"/>
-                </a:solidFill>
-                <a:latin typeface="Consolas" pitchFamily="34" charset="0"/>
-                <a:ea typeface="Consolas" pitchFamily="34" charset="-122"/>
-                <a:cs typeface="Consolas" pitchFamily="34" charset="-120"/>
-              </a:rPr>
-              <a:t>);</a:t>
+              <a:rPr lang="en-US" sz="1500" i="1" dirty="0">
+                <a:solidFill>
+                  <a:srgbClr val="8FA3BC"/>
+                </a:solidFill>
+                <a:latin typeface="Consolas" pitchFamily="34" charset="0"/>
+                <a:ea typeface="Consolas" pitchFamily="34" charset="-122"/>
+                <a:cs typeface="Consolas" pitchFamily="34" charset="-120"/>
+              </a:rPr>
+              <a:t>// 5 x 4 = 20</a:t>
             </a:r>
             <a:endParaRPr lang="en-US" sz="1500" dirty="0"/>
           </a:p>
@@ -28710,15 +27189,15 @@
               <a:buNone/>
             </a:pPr>
             <a:r>
-              <a:rPr lang="en-US" sz="1500" i="1" dirty="0">
-                <a:solidFill>
-                  <a:srgbClr val="8FA3BC"/>
-                </a:solidFill>
-                <a:latin typeface="Consolas" pitchFamily="34" charset="0"/>
-                <a:ea typeface="Consolas" pitchFamily="34" charset="-122"/>
-                <a:cs typeface="Consolas" pitchFamily="34" charset="-120"/>
-              </a:rPr>
-              <a:t>// Halo, Budi!</a:t>
+              <a:rPr lang="en-US" sz="1500" dirty="0">
+                <a:solidFill>
+                  <a:srgbClr val="E6EDF3"/>
+                </a:solidFill>
+                <a:latin typeface="Consolas" pitchFamily="34" charset="0"/>
+                <a:ea typeface="Consolas" pitchFamily="34" charset="-122"/>
+                <a:cs typeface="Consolas" pitchFamily="34" charset="-120"/>
+              </a:rPr>
+              <a:t> </a:t>
             </a:r>
             <a:endParaRPr lang="en-US" sz="1500" dirty="0"/>
           </a:p>
@@ -28740,6 +27219,42 @@
               </a:rPr>
               <a:t>print(</a:t>
             </a:r>
+            <a:r>
+              <a:rPr lang="en-US" sz="1500" dirty="0">
+                <a:solidFill>
+                  <a:srgbClr val="C3E88D"/>
+                </a:solidFill>
+                <a:latin typeface="Consolas" pitchFamily="34" charset="0"/>
+                <a:ea typeface="Consolas" pitchFamily="34" charset="-122"/>
+                <a:cs typeface="Consolas" pitchFamily="34" charset="-120"/>
+              </a:rPr>
+              <a:t>'  Hai  '</a:t>
+            </a:r>
+            <a:r>
+              <a:rPr lang="en-US" sz="1500" dirty="0">
+                <a:solidFill>
+                  <a:srgbClr val="E6EDF3"/>
+                </a:solidFill>
+                <a:latin typeface="Consolas" pitchFamily="34" charset="0"/>
+                <a:ea typeface="Consolas" pitchFamily="34" charset="-122"/>
+                <a:cs typeface="Consolas" pitchFamily="34" charset="-120"/>
+              </a:rPr>
+              <a:t>.trim());           </a:t>
+            </a:r>
+            <a:r>
+              <a:rPr lang="en-US" sz="1500" i="1" dirty="0">
+                <a:solidFill>
+                  <a:srgbClr val="8FA3BC"/>
+                </a:solidFill>
+                <a:latin typeface="Consolas" pitchFamily="34" charset="0"/>
+                <a:ea typeface="Consolas" pitchFamily="34" charset="-122"/>
+                <a:cs typeface="Consolas" pitchFamily="34" charset="-120"/>
+              </a:rPr>
+              <a:t>// Hai</a:t>
+            </a:r>
+            <a:endParaRPr lang="en-US" sz="1500" dirty="0"/>
+          </a:p>
+          <a:p>
             <a:pPr indent="0" marL="0">
               <a:lnSpc>
                 <a:spcPct val="105000"/>
@@ -28749,14 +27264,94 @@
             <a:r>
               <a:rPr lang="en-US" sz="1500" dirty="0">
                 <a:solidFill>
+                  <a:srgbClr val="E6EDF3"/>
+                </a:solidFill>
+                <a:latin typeface="Consolas" pitchFamily="34" charset="0"/>
+                <a:ea typeface="Consolas" pitchFamily="34" charset="-122"/>
+                <a:cs typeface="Consolas" pitchFamily="34" charset="-120"/>
+              </a:rPr>
+              <a:t>print(</a:t>
+            </a:r>
+            <a:r>
+              <a:rPr lang="en-US" sz="1500" dirty="0">
+                <a:solidFill>
                   <a:srgbClr val="C3E88D"/>
                 </a:solidFill>
                 <a:latin typeface="Consolas" pitchFamily="34" charset="0"/>
                 <a:ea typeface="Consolas" pitchFamily="34" charset="-122"/>
                 <a:cs typeface="Consolas" pitchFamily="34" charset="-120"/>
               </a:rPr>
-              <a:t>'Panjang: ${namaDepan.length} huruf'</a:t>
-            </a:r>
+              <a:t>'Flutter'</a:t>
+            </a:r>
+            <a:r>
+              <a:rPr lang="en-US" sz="1500" dirty="0">
+                <a:solidFill>
+                  <a:srgbClr val="E6EDF3"/>
+                </a:solidFill>
+                <a:latin typeface="Consolas" pitchFamily="34" charset="0"/>
+                <a:ea typeface="Consolas" pitchFamily="34" charset="-122"/>
+                <a:cs typeface="Consolas" pitchFamily="34" charset="-120"/>
+              </a:rPr>
+              <a:t>.substring(</a:t>
+            </a:r>
+            <a:r>
+              <a:rPr lang="en-US" sz="1500" dirty="0">
+                <a:solidFill>
+                  <a:srgbClr val="F78C6C"/>
+                </a:solidFill>
+                <a:latin typeface="Consolas" pitchFamily="34" charset="0"/>
+                <a:ea typeface="Consolas" pitchFamily="34" charset="-122"/>
+                <a:cs typeface="Consolas" pitchFamily="34" charset="-120"/>
+              </a:rPr>
+              <a:t>0</a:t>
+            </a:r>
+            <a:r>
+              <a:rPr lang="en-US" sz="1500" dirty="0">
+                <a:solidFill>
+                  <a:srgbClr val="E6EDF3"/>
+                </a:solidFill>
+                <a:latin typeface="Consolas" pitchFamily="34" charset="0"/>
+                <a:ea typeface="Consolas" pitchFamily="34" charset="-122"/>
+                <a:cs typeface="Consolas" pitchFamily="34" charset="-120"/>
+              </a:rPr>
+              <a:t>, </a:t>
+            </a:r>
+            <a:r>
+              <a:rPr lang="en-US" sz="1500" dirty="0">
+                <a:solidFill>
+                  <a:srgbClr val="F78C6C"/>
+                </a:solidFill>
+                <a:latin typeface="Consolas" pitchFamily="34" charset="0"/>
+                <a:ea typeface="Consolas" pitchFamily="34" charset="-122"/>
+                <a:cs typeface="Consolas" pitchFamily="34" charset="-120"/>
+              </a:rPr>
+              <a:t>3</a:t>
+            </a:r>
+            <a:r>
+              <a:rPr lang="en-US" sz="1500" dirty="0">
+                <a:solidFill>
+                  <a:srgbClr val="E6EDF3"/>
+                </a:solidFill>
+                <a:latin typeface="Consolas" pitchFamily="34" charset="0"/>
+                <a:ea typeface="Consolas" pitchFamily="34" charset="-122"/>
+                <a:cs typeface="Consolas" pitchFamily="34" charset="-120"/>
+              </a:rPr>
+              <a:t>));  </a:t>
+            </a:r>
+            <a:r>
+              <a:rPr lang="en-US" sz="1500" i="1" dirty="0">
+                <a:solidFill>
+                  <a:srgbClr val="8FA3BC"/>
+                </a:solidFill>
+                <a:latin typeface="Consolas" pitchFamily="34" charset="0"/>
+                <a:ea typeface="Consolas" pitchFamily="34" charset="-122"/>
+                <a:cs typeface="Consolas" pitchFamily="34" charset="-120"/>
+              </a:rPr>
+              <a:t>// Flu</a:t>
+            </a:r>
+            <a:endParaRPr lang="en-US" sz="1500" dirty="0"/>
+          </a:p>
+          <a:p>
             <a:pPr indent="0" marL="0">
               <a:lnSpc>
                 <a:spcPct val="105000"/>
@@ -28772,54 +27367,30 @@
                 <a:ea typeface="Consolas" pitchFamily="34" charset="-122"/>
                 <a:cs typeface="Consolas" pitchFamily="34" charset="-120"/>
               </a:rPr>
-              <a:t>);</a:t>
-            </a:r>
-            <a:endParaRPr lang="en-US" sz="1500" dirty="0"/>
-          </a:p>
-          <a:p>
-            <a:pPr indent="0" marL="0">
-              <a:lnSpc>
-                <a:spcPct val="105000"/>
-              </a:lnSpc>
-              <a:buNone/>
-            </a:pPr>
-            <a:r>
-              <a:rPr lang="en-US" sz="1500" i="1" dirty="0">
-                <a:solidFill>
-                  <a:srgbClr val="8FA3BC"/>
-                </a:solidFill>
-                <a:latin typeface="Consolas" pitchFamily="34" charset="0"/>
-                <a:ea typeface="Consolas" pitchFamily="34" charset="-122"/>
-                <a:cs typeface="Consolas" pitchFamily="34" charset="-120"/>
-              </a:rPr>
-              <a:t>// Panjang: 4 huruf</a:t>
-            </a:r>
-            <a:endParaRPr lang="en-US" sz="1500" dirty="0"/>
-          </a:p>
-          <a:p>
-            <a:pPr indent="0" marL="0">
-              <a:lnSpc>
-                <a:spcPct val="105000"/>
-              </a:lnSpc>
-              <a:buNone/>
-            </a:pPr>
+              <a:t>print(</a:t>
+            </a:r>
             <a:r>
               <a:rPr lang="en-US" sz="1500" dirty="0">
                 <a:solidFill>
+                  <a:srgbClr val="C3E88D"/>
+                </a:solidFill>
+                <a:latin typeface="Consolas" pitchFamily="34" charset="0"/>
+                <a:ea typeface="Consolas" pitchFamily="34" charset="-122"/>
+                <a:cs typeface="Consolas" pitchFamily="34" charset="-120"/>
+              </a:rPr>
+              <a:t>'a,b'</a:t>
+            </a:r>
+            <a:r>
+              <a:rPr lang="en-US" sz="1500" dirty="0">
+                <a:solidFill>
                   <a:srgbClr val="E6EDF3"/>
                 </a:solidFill>
                 <a:latin typeface="Consolas" pitchFamily="34" charset="0"/>
                 <a:ea typeface="Consolas" pitchFamily="34" charset="-122"/>
                 <a:cs typeface="Consolas" pitchFamily="34" charset="-120"/>
               </a:rPr>
-              <a:t>print(</a:t>
-            </a:r>
-            <a:pPr indent="0" marL="0">
-              <a:lnSpc>
-                <a:spcPct val="105000"/>
-              </a:lnSpc>
-              <a:buNone/>
-            </a:pPr>
+              <a:t>.split(</a:t>
+            </a:r>
             <a:r>
               <a:rPr lang="en-US" sz="1500" dirty="0">
                 <a:solidFill>
@@ -28829,14 +27400,8 @@
                 <a:ea typeface="Consolas" pitchFamily="34" charset="-122"/>
                 <a:cs typeface="Consolas" pitchFamily="34" charset="-120"/>
               </a:rPr>
-              <a:t>'5 x 4 = ${5 * 4}'</a:t>
-            </a:r>
-            <a:pPr indent="0" marL="0">
-              <a:lnSpc>
-                <a:spcPct val="105000"/>
-              </a:lnSpc>
-              <a:buNone/>
-            </a:pPr>
+              <a:t>','</a:t>
+            </a:r>
             <a:r>
               <a:rPr lang="en-US" sz="1500" dirty="0">
                 <a:solidFill>
@@ -28846,352 +27411,8 @@
                 <a:ea typeface="Consolas" pitchFamily="34" charset="-122"/>
                 <a:cs typeface="Consolas" pitchFamily="34" charset="-120"/>
               </a:rPr>
-              <a:t>);</a:t>
-            </a:r>
-            <a:endParaRPr lang="en-US" sz="1500" dirty="0"/>
-          </a:p>
-          <a:p>
-            <a:pPr indent="0" marL="0">
-              <a:lnSpc>
-                <a:spcPct val="105000"/>
-              </a:lnSpc>
-              <a:buNone/>
-            </a:pPr>
-            <a:r>
-              <a:rPr lang="en-US" sz="1500" i="1" dirty="0">
-                <a:solidFill>
-                  <a:srgbClr val="8FA3BC"/>
-                </a:solidFill>
-                <a:latin typeface="Consolas" pitchFamily="34" charset="0"/>
-                <a:ea typeface="Consolas" pitchFamily="34" charset="-122"/>
-                <a:cs typeface="Consolas" pitchFamily="34" charset="-120"/>
-              </a:rPr>
-              <a:t>// 5 x 4 = 20</a:t>
-            </a:r>
-            <a:endParaRPr lang="en-US" sz="1500" dirty="0"/>
-          </a:p>
-          <a:p>
-            <a:pPr indent="0" marL="0">
-              <a:lnSpc>
-                <a:spcPct val="105000"/>
-              </a:lnSpc>
-              <a:buNone/>
-            </a:pPr>
-            <a:r>
-              <a:rPr lang="en-US" sz="1500" dirty="0">
-                <a:solidFill>
-                  <a:srgbClr val="E6EDF3"/>
-                </a:solidFill>
-                <a:latin typeface="Consolas" pitchFamily="34" charset="0"/>
-                <a:ea typeface="Consolas" pitchFamily="34" charset="-122"/>
-                <a:cs typeface="Consolas" pitchFamily="34" charset="-120"/>
-              </a:rPr>
-              <a:t> </a:t>
-            </a:r>
-            <a:endParaRPr lang="en-US" sz="1500" dirty="0"/>
-          </a:p>
-          <a:p>
-            <a:pPr indent="0" marL="0">
-              <a:lnSpc>
-                <a:spcPct val="105000"/>
-              </a:lnSpc>
-              <a:buNone/>
-            </a:pPr>
-            <a:r>
-              <a:rPr lang="en-US" sz="1500" dirty="0">
-                <a:solidFill>
-                  <a:srgbClr val="E6EDF3"/>
-                </a:solidFill>
-                <a:latin typeface="Consolas" pitchFamily="34" charset="0"/>
-                <a:ea typeface="Consolas" pitchFamily="34" charset="-122"/>
-                <a:cs typeface="Consolas" pitchFamily="34" charset="-120"/>
-              </a:rPr>
-              <a:t>print(</a:t>
-            </a:r>
-            <a:pPr indent="0" marL="0">
-              <a:lnSpc>
-                <a:spcPct val="105000"/>
-              </a:lnSpc>
-              <a:buNone/>
-            </a:pPr>
-            <a:r>
-              <a:rPr lang="en-US" sz="1500" dirty="0">
-                <a:solidFill>
-                  <a:srgbClr val="C3E88D"/>
-                </a:solidFill>
-                <a:latin typeface="Consolas" pitchFamily="34" charset="0"/>
-                <a:ea typeface="Consolas" pitchFamily="34" charset="-122"/>
-                <a:cs typeface="Consolas" pitchFamily="34" charset="-120"/>
-              </a:rPr>
-              <a:t>'  Hai  '</a:t>
-            </a:r>
-            <a:pPr indent="0" marL="0">
-              <a:lnSpc>
-                <a:spcPct val="105000"/>
-              </a:lnSpc>
-              <a:buNone/>
-            </a:pPr>
-            <a:r>
-              <a:rPr lang="en-US" sz="1500" dirty="0">
-                <a:solidFill>
-                  <a:srgbClr val="E6EDF3"/>
-                </a:solidFill>
-                <a:latin typeface="Consolas" pitchFamily="34" charset="0"/>
-                <a:ea typeface="Consolas" pitchFamily="34" charset="-122"/>
-                <a:cs typeface="Consolas" pitchFamily="34" charset="-120"/>
-              </a:rPr>
-              <a:t>.trim());           </a:t>
-            </a:r>
-            <a:pPr indent="0" marL="0">
-              <a:lnSpc>
-                <a:spcPct val="105000"/>
-              </a:lnSpc>
-              <a:buNone/>
-            </a:pPr>
-            <a:r>
-              <a:rPr lang="en-US" sz="1500" i="1" dirty="0">
-                <a:solidFill>
-                  <a:srgbClr val="8FA3BC"/>
-                </a:solidFill>
-                <a:latin typeface="Consolas" pitchFamily="34" charset="0"/>
-                <a:ea typeface="Consolas" pitchFamily="34" charset="-122"/>
-                <a:cs typeface="Consolas" pitchFamily="34" charset="-120"/>
-              </a:rPr>
-              <a:t>// Hai</a:t>
-            </a:r>
-            <a:endParaRPr lang="en-US" sz="1500" dirty="0"/>
-          </a:p>
-          <a:p>
-            <a:pPr indent="0" marL="0">
-              <a:lnSpc>
-                <a:spcPct val="105000"/>
-              </a:lnSpc>
-              <a:buNone/>
-            </a:pPr>
-            <a:r>
-              <a:rPr lang="en-US" sz="1500" dirty="0">
-                <a:solidFill>
-                  <a:srgbClr val="E6EDF3"/>
-                </a:solidFill>
-                <a:latin typeface="Consolas" pitchFamily="34" charset="0"/>
-                <a:ea typeface="Consolas" pitchFamily="34" charset="-122"/>
-                <a:cs typeface="Consolas" pitchFamily="34" charset="-120"/>
-              </a:rPr>
-              <a:t>print(</a:t>
-            </a:r>
-            <a:pPr indent="0" marL="0">
-              <a:lnSpc>
-                <a:spcPct val="105000"/>
-              </a:lnSpc>
-              <a:buNone/>
-            </a:pPr>
-            <a:r>
-              <a:rPr lang="en-US" sz="1500" dirty="0">
-                <a:solidFill>
-                  <a:srgbClr val="C3E88D"/>
-                </a:solidFill>
-                <a:latin typeface="Consolas" pitchFamily="34" charset="0"/>
-                <a:ea typeface="Consolas" pitchFamily="34" charset="-122"/>
-                <a:cs typeface="Consolas" pitchFamily="34" charset="-120"/>
-              </a:rPr>
-              <a:t>'Flutter'</a:t>
-            </a:r>
-            <a:pPr indent="0" marL="0">
-              <a:lnSpc>
-                <a:spcPct val="105000"/>
-              </a:lnSpc>
-              <a:buNone/>
-            </a:pPr>
-            <a:r>
-              <a:rPr lang="en-US" sz="1500" dirty="0">
-                <a:solidFill>
-                  <a:srgbClr val="E6EDF3"/>
-                </a:solidFill>
-                <a:latin typeface="Consolas" pitchFamily="34" charset="0"/>
-                <a:ea typeface="Consolas" pitchFamily="34" charset="-122"/>
-                <a:cs typeface="Consolas" pitchFamily="34" charset="-120"/>
-              </a:rPr>
-              <a:t>.substring(</a:t>
-            </a:r>
-            <a:pPr indent="0" marL="0">
-              <a:lnSpc>
-                <a:spcPct val="105000"/>
-              </a:lnSpc>
-              <a:buNone/>
-            </a:pPr>
-            <a:r>
-              <a:rPr lang="en-US" sz="1500" dirty="0">
-                <a:solidFill>
-                  <a:srgbClr val="F78C6C"/>
-                </a:solidFill>
-                <a:latin typeface="Consolas" pitchFamily="34" charset="0"/>
-                <a:ea typeface="Consolas" pitchFamily="34" charset="-122"/>
-                <a:cs typeface="Consolas" pitchFamily="34" charset="-120"/>
-              </a:rPr>
-              <a:t>0</a:t>
-            </a:r>
-            <a:pPr indent="0" marL="0">
-              <a:lnSpc>
-                <a:spcPct val="105000"/>
-              </a:lnSpc>
-              <a:buNone/>
-            </a:pPr>
-            <a:r>
-              <a:rPr lang="en-US" sz="1500" dirty="0">
-                <a:solidFill>
-                  <a:srgbClr val="E6EDF3"/>
-                </a:solidFill>
-                <a:latin typeface="Consolas" pitchFamily="34" charset="0"/>
-                <a:ea typeface="Consolas" pitchFamily="34" charset="-122"/>
-                <a:cs typeface="Consolas" pitchFamily="34" charset="-120"/>
-              </a:rPr>
-              <a:t>, </a:t>
-            </a:r>
-            <a:pPr indent="0" marL="0">
-              <a:lnSpc>
-                <a:spcPct val="105000"/>
-              </a:lnSpc>
-              <a:buNone/>
-            </a:pPr>
-            <a:r>
-              <a:rPr lang="en-US" sz="1500" dirty="0">
-                <a:solidFill>
-                  <a:srgbClr val="F78C6C"/>
-                </a:solidFill>
-                <a:latin typeface="Consolas" pitchFamily="34" charset="0"/>
-                <a:ea typeface="Consolas" pitchFamily="34" charset="-122"/>
-                <a:cs typeface="Consolas" pitchFamily="34" charset="-120"/>
-              </a:rPr>
-              <a:t>3</a:t>
-            </a:r>
-            <a:pPr indent="0" marL="0">
-              <a:lnSpc>
-                <a:spcPct val="105000"/>
-              </a:lnSpc>
-              <a:buNone/>
-            </a:pPr>
-            <a:r>
-              <a:rPr lang="en-US" sz="1500" dirty="0">
-                <a:solidFill>
-                  <a:srgbClr val="E6EDF3"/>
-                </a:solidFill>
-                <a:latin typeface="Consolas" pitchFamily="34" charset="0"/>
-                <a:ea typeface="Consolas" pitchFamily="34" charset="-122"/>
-                <a:cs typeface="Consolas" pitchFamily="34" charset="-120"/>
-              </a:rPr>
-              <a:t>));  </a:t>
-            </a:r>
-            <a:pPr indent="0" marL="0">
-              <a:lnSpc>
-                <a:spcPct val="105000"/>
-              </a:lnSpc>
-              <a:buNone/>
-            </a:pPr>
-            <a:r>
-              <a:rPr lang="en-US" sz="1500" i="1" dirty="0">
-                <a:solidFill>
-                  <a:srgbClr val="8FA3BC"/>
-                </a:solidFill>
-                <a:latin typeface="Consolas" pitchFamily="34" charset="0"/>
-                <a:ea typeface="Consolas" pitchFamily="34" charset="-122"/>
-                <a:cs typeface="Consolas" pitchFamily="34" charset="-120"/>
-              </a:rPr>
-              <a:t>// Flu</a:t>
-            </a:r>
-            <a:endParaRPr lang="en-US" sz="1500" dirty="0"/>
-          </a:p>
-          <a:p>
-            <a:pPr indent="0" marL="0">
-              <a:lnSpc>
-                <a:spcPct val="105000"/>
-              </a:lnSpc>
-              <a:buNone/>
-            </a:pPr>
-            <a:r>
-              <a:rPr lang="en-US" sz="1500" dirty="0">
-                <a:solidFill>
-                  <a:srgbClr val="E6EDF3"/>
-                </a:solidFill>
-                <a:latin typeface="Consolas" pitchFamily="34" charset="0"/>
-                <a:ea typeface="Consolas" pitchFamily="34" charset="-122"/>
-                <a:cs typeface="Consolas" pitchFamily="34" charset="-120"/>
-              </a:rPr>
-              <a:t>print(</a:t>
-            </a:r>
-            <a:pPr indent="0" marL="0">
-              <a:lnSpc>
-                <a:spcPct val="105000"/>
-              </a:lnSpc>
-              <a:buNone/>
-            </a:pPr>
-            <a:r>
-              <a:rPr lang="en-US" sz="1500" dirty="0">
-                <a:solidFill>
-                  <a:srgbClr val="C3E88D"/>
-                </a:solidFill>
-                <a:latin typeface="Consolas" pitchFamily="34" charset="0"/>
-                <a:ea typeface="Consolas" pitchFamily="34" charset="-122"/>
-                <a:cs typeface="Consolas" pitchFamily="34" charset="-120"/>
-              </a:rPr>
-              <a:t>'a,b'</a:t>
-            </a:r>
-            <a:pPr indent="0" marL="0">
-              <a:lnSpc>
-                <a:spcPct val="105000"/>
-              </a:lnSpc>
-              <a:buNone/>
-            </a:pPr>
-            <a:r>
-              <a:rPr lang="en-US" sz="1500" dirty="0">
-                <a:solidFill>
-                  <a:srgbClr val="E6EDF3"/>
-                </a:solidFill>
-                <a:latin typeface="Consolas" pitchFamily="34" charset="0"/>
-                <a:ea typeface="Consolas" pitchFamily="34" charset="-122"/>
-                <a:cs typeface="Consolas" pitchFamily="34" charset="-120"/>
-              </a:rPr>
-              <a:t>.split(</a:t>
-            </a:r>
-            <a:pPr indent="0" marL="0">
-              <a:lnSpc>
-                <a:spcPct val="105000"/>
-              </a:lnSpc>
-              <a:buNone/>
-            </a:pPr>
-            <a:r>
-              <a:rPr lang="en-US" sz="1500" dirty="0">
-                <a:solidFill>
-                  <a:srgbClr val="C3E88D"/>
-                </a:solidFill>
-                <a:latin typeface="Consolas" pitchFamily="34" charset="0"/>
-                <a:ea typeface="Consolas" pitchFamily="34" charset="-122"/>
-                <a:cs typeface="Consolas" pitchFamily="34" charset="-120"/>
-              </a:rPr>
-              <a:t>','</a:t>
-            </a:r>
-            <a:pPr indent="0" marL="0">
-              <a:lnSpc>
-                <a:spcPct val="105000"/>
-              </a:lnSpc>
-              <a:buNone/>
-            </a:pPr>
-            <a:r>
-              <a:rPr lang="en-US" sz="1500" dirty="0">
-                <a:solidFill>
-                  <a:srgbClr val="E6EDF3"/>
-                </a:solidFill>
-                <a:latin typeface="Consolas" pitchFamily="34" charset="0"/>
-                <a:ea typeface="Consolas" pitchFamily="34" charset="-122"/>
-                <a:cs typeface="Consolas" pitchFamily="34" charset="-120"/>
-              </a:rPr>
               <a:t>));           </a:t>
             </a:r>
-            <a:pPr indent="0" marL="0">
-              <a:lnSpc>
-                <a:spcPct val="105000"/>
-              </a:lnSpc>
-              <a:buNone/>
-            </a:pPr>
             <a:r>
               <a:rPr lang="en-US" sz="1500" i="1" dirty="0">
                 <a:solidFill>
